--- a/plugins/gradient-cio/assets/examples/gradient-portfolio-construction-marketable-alternatives.pptx
+++ b/plugins/gradient-cio/assets/examples/gradient-portfolio-construction-marketable-alternatives.pptx
@@ -1322,6 +1322,59 @@
               </a:solidFill>
             </c:spPr>
           </c:dPt>
+          <c:dLbls>
+            <c:dLbl>
+              <c:idx val="0"/>
+              <c:tx>
+                <c:rich>
+                  <a:bodyPr/>
+                  <a:lstStyle/>
+                  <a:p>
+                    <a:r>
+                      <a:rPr lang="en-US" sz="800"/>
+                      <a:t>6.1%</a:t>
+                    </a:r>
+                  </a:p>
+                </c:rich>
+              </c:tx>
+              <c:dLblPos val="outEnd"/>
+              <c:showLegendKey val="0"/>
+              <c:showVal val="0"/>
+              <c:showCatName val="0"/>
+              <c:showSerName val="0"/>
+              <c:showPercent val="0"/>
+              <c:showBubbleSize val="0"/>
+            </c:dLbl>
+            <c:dLbl>
+              <c:idx val="1"/>
+              <c:tx>
+                <c:rich>
+                  <a:bodyPr/>
+                  <a:lstStyle/>
+                  <a:p>
+                    <a:r>
+                      <a:rPr lang="en-US" sz="800"/>
+                      <a:t>8.9%</a:t>
+                    </a:r>
+                  </a:p>
+                </c:rich>
+              </c:tx>
+              <c:dLblPos val="outEnd"/>
+              <c:showLegendKey val="0"/>
+              <c:showVal val="0"/>
+              <c:showCatName val="0"/>
+              <c:showSerName val="0"/>
+              <c:showPercent val="0"/>
+              <c:showBubbleSize val="0"/>
+            </c:dLbl>
+            <c:dLblPos val="outEnd"/>
+            <c:showLegendKey val="0"/>
+            <c:showVal val="0"/>
+            <c:showCatName val="0"/>
+            <c:showSerName val="0"/>
+            <c:showPercent val="0"/>
+            <c:showBubbleSize val="0"/>
+          </c:dLbls>
           <c:cat>
             <c:strRef>
               <c:f>Sheet1!$A$2:$A$3</c:f>
@@ -1475,7 +1528,7 @@
               <c:strCache>
                 <c:ptCount val="1"/>
                 <c:pt idx="0">
-                  <c:v>Portfolio (TEST)</c:v>
+                  <c:v>Portfolio</c:v>
                 </c:pt>
               </c:strCache>
             </c:strRef>
@@ -1518,7 +1571,7 @@
               <c:strCache>
                 <c:ptCount val="1"/>
                 <c:pt idx="0">
-                  <c:v>Portfolio (TEST)</c:v>
+                  <c:v>Portfolio</c:v>
                 </c:pt>
               </c:strCache>
             </c:strRef>
@@ -1636,6 +1689,37 @@
               </a:solidFill>
             </c:spPr>
           </c:dPt>
+          <c:dLbls>
+            <c:dLbl>
+              <c:idx val="0"/>
+              <c:tx>
+                <c:rich>
+                  <a:bodyPr/>
+                  <a:lstStyle/>
+                  <a:p>
+                    <a:r>
+                      <a:rPr lang="en-US" sz="800"/>
+                      <a:t>+5.9%</a:t>
+                    </a:r>
+                  </a:p>
+                </c:rich>
+              </c:tx>
+              <c:dLblPos val="outEnd"/>
+              <c:showLegendKey val="0"/>
+              <c:showVal val="0"/>
+              <c:showCatName val="0"/>
+              <c:showSerName val="0"/>
+              <c:showPercent val="0"/>
+              <c:showBubbleSize val="0"/>
+            </c:dLbl>
+            <c:dLblPos val="outEnd"/>
+            <c:showLegendKey val="0"/>
+            <c:showVal val="0"/>
+            <c:showCatName val="0"/>
+            <c:showSerName val="0"/>
+            <c:showPercent val="0"/>
+            <c:showBubbleSize val="0"/>
+          </c:dLbls>
           <c:cat>
             <c:strRef>
               <c:f>Sheet1!$A$2:$A$2</c:f>
@@ -4569,7 +4653,7 @@
         </p:nvSpPr>
         <p:spPr>
           <a:xfrm>
-            <a:off x="685800" y="1828800"/>
+            <a:off x="685800" y="1664208"/>
             <a:ext cx="9966960" cy="274320"/>
           </a:xfrm>
           <a:prstGeom prst="rect">
@@ -4587,7 +4671,7 @@
               <a:spcAft>
                 <a:spcPts val="0"/>
               </a:spcAft>
-              <a:defRPr sz="900" b="1">
+              <a:defRPr sz="850" b="1">
                 <a:solidFill>
                   <a:srgbClr val="C6F432"/>
                 </a:solidFill>
@@ -4611,7 +4695,7 @@
         </p:nvSpPr>
         <p:spPr>
           <a:xfrm>
-            <a:off x="685800" y="2176272"/>
+            <a:off x="685800" y="2011680"/>
             <a:ext cx="9966960" cy="1234440"/>
           </a:xfrm>
           <a:prstGeom prst="rect">
@@ -4629,7 +4713,7 @@
               <a:spcAft>
                 <a:spcPts val="0"/>
               </a:spcAft>
-              <a:defRPr sz="3400" b="1">
+              <a:defRPr sz="3300" b="1">
                 <a:solidFill>
                   <a:srgbClr val="FFFFFF"/>
                 </a:solidFill>
@@ -4640,7 +4724,7 @@
               <a:rPr>
                 <a:latin typeface="Inter"/>
               </a:rPr>
-              <a:t>Northstar Hedge Fund Portfolio (TEST)</a:t>
+              <a:t>Northstar Hedge Fund Portfolio</a:t>
             </a:r>
           </a:p>
         </p:txBody>
@@ -4653,8 +4737,8 @@
         </p:nvSpPr>
         <p:spPr>
           <a:xfrm>
-            <a:off x="685800" y="3456432"/>
-            <a:ext cx="9692640" cy="640080"/>
+            <a:off x="685800" y="3273552"/>
+            <a:ext cx="9692640" cy="594360"/>
           </a:xfrm>
           <a:prstGeom prst="rect">
             <a:avLst/>
@@ -4671,7 +4755,7 @@
               <a:spcAft>
                 <a:spcPts val="0"/>
               </a:spcAft>
-              <a:defRPr sz="1500" b="0">
+              <a:defRPr sz="1400" b="0">
                 <a:solidFill>
                   <a:srgbClr val="9AA5B1"/>
                 </a:solidFill>
@@ -4682,7 +4766,7 @@
               <a:rPr>
                 <a:latin typeface="Inter"/>
               </a:rPr>
-              <a:t>Decision pack · prepared for the Investment Committee (TEST)</a:t>
+              <a:t>Portfolio construction review · prepared for the Investment Committee</a:t>
             </a:r>
           </a:p>
         </p:txBody>
@@ -4695,8 +4779,8 @@
         </p:nvSpPr>
         <p:spPr>
           <a:xfrm>
-            <a:off x="685800" y="4251960"/>
-            <a:ext cx="1005840" cy="54864"/>
+            <a:off x="685800" y="4005072"/>
+            <a:ext cx="822960" cy="45720"/>
           </a:xfrm>
           <a:prstGeom prst="rect">
             <a:avLst/>
@@ -4744,8 +4828,8 @@
         </p:nvSpPr>
         <p:spPr>
           <a:xfrm>
-            <a:off x="685800" y="4572000"/>
-            <a:ext cx="3063240" cy="182880"/>
+            <a:off x="685800" y="4315968"/>
+            <a:ext cx="4709160" cy="182880"/>
           </a:xfrm>
           <a:prstGeom prst="rect">
             <a:avLst/>
@@ -4786,8 +4870,8 @@
         </p:nvSpPr>
         <p:spPr>
           <a:xfrm>
-            <a:off x="685800" y="4773168"/>
-            <a:ext cx="3063240" cy="320040"/>
+            <a:off x="685800" y="4507992"/>
+            <a:ext cx="4709160" cy="310896"/>
           </a:xfrm>
           <a:prstGeom prst="rect">
             <a:avLst/>
@@ -4828,8 +4912,8 @@
         </p:nvSpPr>
         <p:spPr>
           <a:xfrm>
-            <a:off x="4160520" y="4572000"/>
-            <a:ext cx="3063240" cy="182880"/>
+            <a:off x="5852160" y="4315968"/>
+            <a:ext cx="4709160" cy="182880"/>
           </a:xfrm>
           <a:prstGeom prst="rect">
             <a:avLst/>
@@ -4857,7 +4941,7 @@
               <a:rPr>
                 <a:latin typeface="Inter"/>
               </a:rPr>
-              <a:t>BASE CURRENCY</a:t>
+              <a:t>TOTAL NAV</a:t>
             </a:r>
           </a:p>
         </p:txBody>
@@ -4870,8 +4954,8 @@
         </p:nvSpPr>
         <p:spPr>
           <a:xfrm>
-            <a:off x="4160520" y="4773168"/>
-            <a:ext cx="3063240" cy="320040"/>
+            <a:off x="5852160" y="4507992"/>
+            <a:ext cx="4709160" cy="310896"/>
           </a:xfrm>
           <a:prstGeom prst="rect">
             <a:avLst/>
@@ -4899,7 +4983,7 @@
               <a:rPr>
                 <a:latin typeface="Inter"/>
               </a:rPr>
-              <a:t>USD</a:t>
+              <a:t>$1,000.0M</a:t>
             </a:r>
           </a:p>
         </p:txBody>
@@ -4912,8 +4996,8 @@
         </p:nvSpPr>
         <p:spPr>
           <a:xfrm>
-            <a:off x="7635240" y="4572000"/>
-            <a:ext cx="3063240" cy="182880"/>
+            <a:off x="685800" y="4937759"/>
+            <a:ext cx="4709160" cy="182880"/>
           </a:xfrm>
           <a:prstGeom prst="rect">
             <a:avLst/>
@@ -4941,7 +5025,7 @@
               <a:rPr>
                 <a:latin typeface="Inter"/>
               </a:rPr>
-              <a:t>TOTAL NAV</a:t>
+              <a:t>PORTFOLIO WEIGHT</a:t>
             </a:r>
           </a:p>
         </p:txBody>
@@ -4954,8 +5038,8 @@
         </p:nvSpPr>
         <p:spPr>
           <a:xfrm>
-            <a:off x="7635240" y="4773168"/>
-            <a:ext cx="3063240" cy="320040"/>
+            <a:off x="685800" y="5129783"/>
+            <a:ext cx="4709160" cy="310896"/>
           </a:xfrm>
           <a:prstGeom prst="rect">
             <a:avLst/>
@@ -4983,7 +5067,7 @@
               <a:rPr>
                 <a:latin typeface="Inter"/>
               </a:rPr>
-              <a:t>$1,000.0M</a:t>
+              <a:t>12.0%</a:t>
             </a:r>
           </a:p>
         </p:txBody>
@@ -4996,8 +5080,8 @@
         </p:nvSpPr>
         <p:spPr>
           <a:xfrm>
-            <a:off x="685800" y="5230368"/>
-            <a:ext cx="3063240" cy="182880"/>
+            <a:off x="5852160" y="4937759"/>
+            <a:ext cx="4709160" cy="182880"/>
           </a:xfrm>
           <a:prstGeom prst="rect">
             <a:avLst/>
@@ -5025,7 +5109,7 @@
               <a:rPr>
                 <a:latin typeface="Inter"/>
               </a:rPr>
-              <a:t>MARKETABLE-ALTERNATIVES WEIGHT</a:t>
+              <a:t>POLICY BENCHMARK</a:t>
             </a:r>
           </a:p>
         </p:txBody>
@@ -5038,8 +5122,8 @@
         </p:nvSpPr>
         <p:spPr>
           <a:xfrm>
-            <a:off x="685800" y="5431536"/>
-            <a:ext cx="3063240" cy="320040"/>
+            <a:off x="5852160" y="5129783"/>
+            <a:ext cx="4709160" cy="310896"/>
           </a:xfrm>
           <a:prstGeom prst="rect">
             <a:avLst/>
@@ -5067,189 +5151,21 @@
               <a:rPr>
                 <a:latin typeface="Inter"/>
               </a:rPr>
-              <a:t>12.0%</a:t>
+              <a:t>Northstar Absolute Return Index</a:t>
             </a:r>
           </a:p>
         </p:txBody>
       </p:sp>
       <p:sp>
         <p:nvSpPr>
-          <p:cNvPr id="17" name="TextBox 16"/>
-          <p:cNvSpPr txBox="1"/>
-          <p:nvPr/>
-        </p:nvSpPr>
-        <p:spPr>
-          <a:xfrm>
-            <a:off x="4160520" y="5230368"/>
-            <a:ext cx="3063240" cy="182880"/>
-          </a:xfrm>
-          <a:prstGeom prst="rect">
-            <a:avLst/>
-          </a:prstGeom>
-          <a:noFill/>
-        </p:spPr>
-        <p:txBody>
-          <a:bodyPr wrap="none" lIns="9144" rIns="9144" tIns="9144" bIns="9144" anchor="t">
-            <a:spAutoFit/>
-          </a:bodyPr>
-          <a:lstStyle/>
-          <a:p>
-            <a:pPr algn="l">
-              <a:spcAft>
-                <a:spcPts val="0"/>
-              </a:spcAft>
-              <a:defRPr sz="700" b="1">
-                <a:solidFill>
-                  <a:srgbClr val="8A94A1"/>
-                </a:solidFill>
-                <a:latin typeface="Inter"/>
-              </a:defRPr>
-            </a:pPr>
-            <a:r>
-              <a:rPr>
-                <a:latin typeface="Inter"/>
-              </a:rPr>
-              <a:t>POLICY BENCHMARK</a:t>
-            </a:r>
-          </a:p>
-        </p:txBody>
-      </p:sp>
-      <p:sp>
-        <p:nvSpPr>
-          <p:cNvPr id="18" name="TextBox 17"/>
-          <p:cNvSpPr txBox="1"/>
-          <p:nvPr/>
-        </p:nvSpPr>
-        <p:spPr>
-          <a:xfrm>
-            <a:off x="4160520" y="5431536"/>
-            <a:ext cx="3063240" cy="320040"/>
-          </a:xfrm>
-          <a:prstGeom prst="rect">
-            <a:avLst/>
-          </a:prstGeom>
-          <a:noFill/>
-        </p:spPr>
-        <p:txBody>
-          <a:bodyPr wrap="none" lIns="9144" rIns="9144" tIns="9144" bIns="9144" anchor="t">
-            <a:spAutoFit/>
-          </a:bodyPr>
-          <a:lstStyle/>
-          <a:p>
-            <a:pPr algn="l">
-              <a:spcAft>
-                <a:spcPts val="0"/>
-              </a:spcAft>
-              <a:defRPr sz="1000" b="1">
-                <a:solidFill>
-                  <a:srgbClr val="FFFFFF"/>
-                </a:solidFill>
-                <a:latin typeface="Inter"/>
-              </a:defRPr>
-            </a:pPr>
-            <a:r>
-              <a:rPr>
-                <a:latin typeface="Inter"/>
-              </a:rPr>
-              <a:t>Example Absolute Return Index (TEST)</a:t>
-            </a:r>
-          </a:p>
-        </p:txBody>
-      </p:sp>
-      <p:sp>
-        <p:nvSpPr>
-          <p:cNvPr id="19" name="TextBox 18"/>
-          <p:cNvSpPr txBox="1"/>
-          <p:nvPr/>
-        </p:nvSpPr>
-        <p:spPr>
-          <a:xfrm>
-            <a:off x="7635240" y="5230368"/>
-            <a:ext cx="3063240" cy="182880"/>
-          </a:xfrm>
-          <a:prstGeom prst="rect">
-            <a:avLst/>
-          </a:prstGeom>
-          <a:noFill/>
-        </p:spPr>
-        <p:txBody>
-          <a:bodyPr wrap="none" lIns="9144" rIns="9144" tIns="9144" bIns="9144" anchor="t">
-            <a:spAutoFit/>
-          </a:bodyPr>
-          <a:lstStyle/>
-          <a:p>
-            <a:pPr algn="l">
-              <a:spcAft>
-                <a:spcPts val="0"/>
-              </a:spcAft>
-              <a:defRPr sz="700" b="1">
-                <a:solidFill>
-                  <a:srgbClr val="8A94A1"/>
-                </a:solidFill>
-                <a:latin typeface="Inter"/>
-              </a:defRPr>
-            </a:pPr>
-            <a:r>
-              <a:rPr>
-                <a:latin typeface="Inter"/>
-              </a:rPr>
-              <a:t>DATA SCOPE</a:t>
-            </a:r>
-          </a:p>
-        </p:txBody>
-      </p:sp>
-      <p:sp>
-        <p:nvSpPr>
-          <p:cNvPr id="20" name="TextBox 19"/>
-          <p:cNvSpPr txBox="1"/>
-          <p:nvPr/>
-        </p:nvSpPr>
-        <p:spPr>
-          <a:xfrm>
-            <a:off x="7635240" y="5431536"/>
-            <a:ext cx="3063240" cy="320040"/>
-          </a:xfrm>
-          <a:prstGeom prst="rect">
-            <a:avLst/>
-          </a:prstGeom>
-          <a:noFill/>
-        </p:spPr>
-        <p:txBody>
-          <a:bodyPr wrap="none" lIns="9144" rIns="9144" tIns="9144" bIns="9144" anchor="t">
-            <a:spAutoFit/>
-          </a:bodyPr>
-          <a:lstStyle/>
-          <a:p>
-            <a:pPr algn="l">
-              <a:spcAft>
-                <a:spcPts val="0"/>
-              </a:spcAft>
-              <a:defRPr sz="1000" b="1">
-                <a:solidFill>
-                  <a:srgbClr val="FFFFFF"/>
-                </a:solidFill>
-                <a:latin typeface="Inter"/>
-              </a:defRPr>
-            </a:pPr>
-            <a:r>
-              <a:rPr>
-                <a:latin typeface="Inter"/>
-              </a:rPr>
-              <a:t>Fictional TEST data</a:t>
-            </a:r>
-          </a:p>
-        </p:txBody>
-      </p:sp>
-      <p:sp>
-        <p:nvSpPr>
-          <p:cNvPr id="21" name="Rectangle 20"/>
+          <p:cNvPr id="17" name="Rectangle 16"/>
           <p:cNvSpPr/>
           <p:nvPr/>
         </p:nvSpPr>
         <p:spPr>
           <a:xfrm>
-            <a:off x="685800" y="5833872"/>
-            <a:ext cx="3063240" cy="384048"/>
+            <a:off x="685800" y="5687568"/>
+            <a:ext cx="3337560" cy="530352"/>
           </a:xfrm>
           <a:prstGeom prst="rect">
             <a:avLst/>
@@ -5291,14 +5207,14 @@
       </p:sp>
       <p:sp>
         <p:nvSpPr>
-          <p:cNvPr id="22" name="TextBox 21"/>
+          <p:cNvPr id="18" name="TextBox 17"/>
           <p:cNvSpPr txBox="1"/>
           <p:nvPr/>
         </p:nvSpPr>
         <p:spPr>
           <a:xfrm>
-            <a:off x="822960" y="5934456"/>
-            <a:ext cx="2788920" cy="164592"/>
+            <a:off x="822960" y="5760720"/>
+            <a:ext cx="3063240" cy="128016"/>
           </a:xfrm>
           <a:prstGeom prst="rect">
             <a:avLst/>
@@ -5315,7 +5231,7 @@
               <a:spcAft>
                 <a:spcPts val="0"/>
               </a:spcAft>
-              <a:defRPr sz="800" b="1">
+              <a:defRPr sz="620" b="1">
                 <a:solidFill>
                   <a:srgbClr val="0D1117"/>
                 </a:solidFill>
@@ -5326,6 +5242,48 @@
               <a:rPr>
                 <a:latin typeface="Inter"/>
               </a:rPr>
+              <a:t>OVERALL VIEW</a:t>
+            </a:r>
+          </a:p>
+        </p:txBody>
+      </p:sp>
+      <p:sp>
+        <p:nvSpPr>
+          <p:cNvPr id="19" name="TextBox 18"/>
+          <p:cNvSpPr txBox="1"/>
+          <p:nvPr/>
+        </p:nvSpPr>
+        <p:spPr>
+          <a:xfrm>
+            <a:off x="822960" y="5916168"/>
+            <a:ext cx="3063240" cy="182880"/>
+          </a:xfrm>
+          <a:prstGeom prst="rect">
+            <a:avLst/>
+          </a:prstGeom>
+          <a:noFill/>
+        </p:spPr>
+        <p:txBody>
+          <a:bodyPr wrap="none" lIns="9144" rIns="9144" tIns="9144" bIns="9144" anchor="t">
+            <a:spAutoFit/>
+          </a:bodyPr>
+          <a:lstStyle/>
+          <a:p>
+            <a:pPr algn="l">
+              <a:spcAft>
+                <a:spcPts val="0"/>
+              </a:spcAft>
+              <a:defRPr sz="900" b="1">
+                <a:solidFill>
+                  <a:srgbClr val="0D1117"/>
+                </a:solidFill>
+                <a:latin typeface="Inter"/>
+              </a:defRPr>
+            </a:pPr>
+            <a:r>
+              <a:rPr>
+                <a:latin typeface="Inter"/>
+              </a:rPr>
               <a:t>Liquidity terms require confirmation</a:t>
             </a:r>
           </a:p>
@@ -5333,13 +5291,13 @@
       </p:sp>
       <p:sp>
         <p:nvSpPr>
-          <p:cNvPr id="23" name="TextBox 22"/>
+          <p:cNvPr id="20" name="TextBox 19"/>
           <p:cNvSpPr txBox="1"/>
           <p:nvPr/>
         </p:nvSpPr>
         <p:spPr>
           <a:xfrm>
-            <a:off x="3977639" y="5824728"/>
+            <a:off x="4297680" y="5733288"/>
             <a:ext cx="3108960" cy="164592"/>
           </a:xfrm>
           <a:prstGeom prst="rect">
@@ -5368,20 +5326,20 @@
               <a:rPr>
                 <a:latin typeface="Inter"/>
               </a:rPr>
-              <a:t>EVIDENCE COMPLETENESS</a:t>
+              <a:t>SCOPE REVIEWED</a:t>
             </a:r>
           </a:p>
         </p:txBody>
       </p:sp>
       <p:sp>
         <p:nvSpPr>
-          <p:cNvPr id="24" name="TextBox 23"/>
+          <p:cNvPr id="21" name="TextBox 20"/>
           <p:cNvSpPr txBox="1"/>
           <p:nvPr/>
         </p:nvSpPr>
         <p:spPr>
           <a:xfrm>
-            <a:off x="3977639" y="5998464"/>
+            <a:off x="4297680" y="5934456"/>
             <a:ext cx="3108960" cy="201168"/>
           </a:xfrm>
           <a:prstGeom prst="rect">
@@ -5417,14 +5375,14 @@
       </p:sp>
       <p:sp>
         <p:nvSpPr>
-          <p:cNvPr id="25" name="TextBox 24"/>
+          <p:cNvPr id="22" name="TextBox 21"/>
           <p:cNvSpPr txBox="1"/>
           <p:nvPr/>
         </p:nvSpPr>
         <p:spPr>
           <a:xfrm>
-            <a:off x="685800" y="6473952"/>
-            <a:ext cx="8046720" cy="182880"/>
+            <a:off x="685800" y="6400800"/>
+            <a:ext cx="8046720" cy="146304"/>
           </a:xfrm>
           <a:prstGeom prst="rect">
             <a:avLst/>
@@ -5452,14 +5410,56 @@
               <a:rPr>
                 <a:latin typeface="Inter"/>
               </a:rPr>
-              <a:t>TEST DATA — fictional portfolio for rendering tests only</a:t>
+              <a:t>Confidential — Investment Committee</a:t>
             </a:r>
           </a:p>
         </p:txBody>
       </p:sp>
       <p:sp>
         <p:nvSpPr>
-          <p:cNvPr id="26" name="TextBox 25"/>
+          <p:cNvPr id="23" name="TextBox 22"/>
+          <p:cNvSpPr txBox="1"/>
+          <p:nvPr/>
+        </p:nvSpPr>
+        <p:spPr>
+          <a:xfrm>
+            <a:off x="685800" y="6556248"/>
+            <a:ext cx="8046720" cy="128016"/>
+          </a:xfrm>
+          <a:prstGeom prst="rect">
+            <a:avLst/>
+          </a:prstGeom>
+          <a:noFill/>
+        </p:spPr>
+        <p:txBody>
+          <a:bodyPr wrap="none" lIns="9144" rIns="9144" tIns="9144" bIns="9144" anchor="t">
+            <a:spAutoFit/>
+          </a:bodyPr>
+          <a:lstStyle/>
+          <a:p>
+            <a:pPr algn="l">
+              <a:spcAft>
+                <a:spcPts val="0"/>
+              </a:spcAft>
+              <a:defRPr sz="650" b="0">
+                <a:solidFill>
+                  <a:srgbClr val="8A94A1"/>
+                </a:solidFill>
+                <a:latin typeface="Inter"/>
+              </a:defRPr>
+            </a:pPr>
+            <a:r>
+              <a:rPr>
+                <a:latin typeface="Inter"/>
+              </a:rPr>
+              <a:t>Illustrative sample · not client data</a:t>
+            </a:r>
+          </a:p>
+        </p:txBody>
+      </p:sp>
+      <p:sp>
+        <p:nvSpPr>
+          <p:cNvPr id="24" name="TextBox 23"/>
           <p:cNvSpPr txBox="1"/>
           <p:nvPr/>
         </p:nvSpPr>
@@ -5575,7 +5575,7 @@
         <p:spPr>
           <a:xfrm>
             <a:off x="640080" y="329184"/>
-            <a:ext cx="9875520" cy="182880"/>
+            <a:ext cx="5303520" cy="182880"/>
           </a:xfrm>
           <a:prstGeom prst="rect">
             <a:avLst/>
@@ -5616,6 +5616,48 @@
         </p:nvSpPr>
         <p:spPr>
           <a:xfrm>
+            <a:off x="5897880" y="310896"/>
+            <a:ext cx="4800600" cy="256032"/>
+          </a:xfrm>
+          <a:prstGeom prst="rect">
+            <a:avLst/>
+          </a:prstGeom>
+          <a:noFill/>
+        </p:spPr>
+        <p:txBody>
+          <a:bodyPr wrap="none" lIns="9144" rIns="9144" tIns="9144" bIns="9144" anchor="t">
+            <a:spAutoFit/>
+          </a:bodyPr>
+          <a:lstStyle/>
+          <a:p>
+            <a:pPr algn="r">
+              <a:spcAft>
+                <a:spcPts val="0"/>
+              </a:spcAft>
+              <a:defRPr sz="680" b="1">
+                <a:solidFill>
+                  <a:srgbClr val="4F6B00"/>
+                </a:solidFill>
+                <a:latin typeface="Inter"/>
+              </a:defRPr>
+            </a:pPr>
+            <a:r>
+              <a:rPr>
+                <a:latin typeface="Inter"/>
+              </a:rPr>
+              <a:t>Illustrative, Gradient Maintained — demo data, not the client's holdings or managers</a:t>
+            </a:r>
+          </a:p>
+        </p:txBody>
+      </p:sp>
+      <p:sp>
+        <p:nvSpPr>
+          <p:cNvPr id="5" name="TextBox 4"/>
+          <p:cNvSpPr txBox="1"/>
+          <p:nvPr/>
+        </p:nvSpPr>
+        <p:spPr>
+          <a:xfrm>
             <a:off x="640080" y="566928"/>
             <a:ext cx="10058400" cy="530352"/>
           </a:xfrm>
@@ -5652,7 +5694,7 @@
       </p:sp>
       <p:sp>
         <p:nvSpPr>
-          <p:cNvPr id="5" name="Rectangle 4"/>
+          <p:cNvPr id="6" name="Rectangle 5"/>
           <p:cNvSpPr/>
           <p:nvPr/>
         </p:nvSpPr>
@@ -5701,7 +5743,7 @@
       </p:sp>
       <p:sp>
         <p:nvSpPr>
-          <p:cNvPr id="6" name="Rectangle 5"/>
+          <p:cNvPr id="7" name="Rectangle 6"/>
           <p:cNvSpPr/>
           <p:nvPr/>
         </p:nvSpPr>
@@ -5750,7 +5792,7 @@
       </p:sp>
       <p:sp>
         <p:nvSpPr>
-          <p:cNvPr id="7" name="TextBox 6"/>
+          <p:cNvPr id="8" name="TextBox 7"/>
           <p:cNvSpPr txBox="1"/>
           <p:nvPr/>
         </p:nvSpPr>
@@ -5792,7 +5834,7 @@
       </p:sp>
       <p:sp>
         <p:nvSpPr>
-          <p:cNvPr id="8" name="TextBox 7"/>
+          <p:cNvPr id="9" name="TextBox 8"/>
           <p:cNvSpPr txBox="1"/>
           <p:nvPr/>
         </p:nvSpPr>
@@ -5834,7 +5876,7 @@
       </p:sp>
       <p:graphicFrame>
         <p:nvGraphicFramePr>
-          <p:cNvPr id="9" name="Chart 8"/>
+          <p:cNvPr id="10" name="Chart 9"/>
           <p:cNvGraphicFramePr>
             <a:graphicFrameLocks noGrp="1"/>
           </p:cNvGraphicFramePr>
@@ -5852,7 +5894,7 @@
       </p:graphicFrame>
       <p:sp>
         <p:nvSpPr>
-          <p:cNvPr id="10" name="Rectangle 9"/>
+          <p:cNvPr id="11" name="Rectangle 10"/>
           <p:cNvSpPr/>
           <p:nvPr/>
         </p:nvSpPr>
@@ -5901,7 +5943,7 @@
       </p:sp>
       <p:sp>
         <p:nvSpPr>
-          <p:cNvPr id="11" name="TextBox 10"/>
+          <p:cNvPr id="12" name="TextBox 11"/>
           <p:cNvSpPr txBox="1"/>
           <p:nvPr/>
         </p:nvSpPr>
@@ -5936,14 +5978,14 @@
               <a:rPr>
                 <a:latin typeface="Inter"/>
               </a:rPr>
-              <a:t>Sources: none cited</a:t>
+              <a:t>Sources: S1</a:t>
             </a:r>
           </a:p>
         </p:txBody>
       </p:sp>
       <p:sp>
         <p:nvSpPr>
-          <p:cNvPr id="12" name="TextBox 11"/>
+          <p:cNvPr id="13" name="TextBox 12"/>
           <p:cNvSpPr txBox="1"/>
           <p:nvPr/>
         </p:nvSpPr>
@@ -5978,14 +6020,14 @@
               <a:rPr>
                 <a:latin typeface="Inter"/>
               </a:rPr>
-              <a:t>TEST DATA — fictional portfolio for rendering tests only · Data as of 2026-06-30</a:t>
+              <a:t>Confidential — Investment Committee · Data as of 2026-06-30</a:t>
             </a:r>
           </a:p>
         </p:txBody>
       </p:sp>
       <p:sp>
         <p:nvSpPr>
-          <p:cNvPr id="13" name="TextBox 12"/>
+          <p:cNvPr id="14" name="TextBox 13"/>
           <p:cNvSpPr txBox="1"/>
           <p:nvPr/>
         </p:nvSpPr>
@@ -6101,7 +6143,7 @@
         <p:spPr>
           <a:xfrm>
             <a:off x="640080" y="329184"/>
-            <a:ext cx="9875520" cy="182880"/>
+            <a:ext cx="5303520" cy="182880"/>
           </a:xfrm>
           <a:prstGeom prst="rect">
             <a:avLst/>
@@ -6142,6 +6184,48 @@
         </p:nvSpPr>
         <p:spPr>
           <a:xfrm>
+            <a:off x="5897880" y="310896"/>
+            <a:ext cx="4800600" cy="256032"/>
+          </a:xfrm>
+          <a:prstGeom prst="rect">
+            <a:avLst/>
+          </a:prstGeom>
+          <a:noFill/>
+        </p:spPr>
+        <p:txBody>
+          <a:bodyPr wrap="none" lIns="9144" rIns="9144" tIns="9144" bIns="9144" anchor="t">
+            <a:spAutoFit/>
+          </a:bodyPr>
+          <a:lstStyle/>
+          <a:p>
+            <a:pPr algn="r">
+              <a:spcAft>
+                <a:spcPts val="0"/>
+              </a:spcAft>
+              <a:defRPr sz="680" b="1">
+                <a:solidFill>
+                  <a:srgbClr val="4F6B00"/>
+                </a:solidFill>
+                <a:latin typeface="Inter"/>
+              </a:defRPr>
+            </a:pPr>
+            <a:r>
+              <a:rPr>
+                <a:latin typeface="Inter"/>
+              </a:rPr>
+              <a:t>Illustrative, Gradient Maintained — demo data, not the client's holdings or managers</a:t>
+            </a:r>
+          </a:p>
+        </p:txBody>
+      </p:sp>
+      <p:sp>
+        <p:nvSpPr>
+          <p:cNvPr id="5" name="TextBox 4"/>
+          <p:cNvSpPr txBox="1"/>
+          <p:nvPr/>
+        </p:nvSpPr>
+        <p:spPr>
+          <a:xfrm>
             <a:off x="640080" y="566928"/>
             <a:ext cx="10058400" cy="530352"/>
           </a:xfrm>
@@ -6178,7 +6262,7 @@
       </p:sp>
       <p:sp>
         <p:nvSpPr>
-          <p:cNvPr id="5" name="Rectangle 4"/>
+          <p:cNvPr id="6" name="Rectangle 5"/>
           <p:cNvSpPr/>
           <p:nvPr/>
         </p:nvSpPr>
@@ -6227,7 +6311,7 @@
       </p:sp>
       <p:sp>
         <p:nvSpPr>
-          <p:cNvPr id="6" name="Rectangle 5"/>
+          <p:cNvPr id="7" name="Rectangle 6"/>
           <p:cNvSpPr/>
           <p:nvPr/>
         </p:nvSpPr>
@@ -6276,7 +6360,7 @@
       </p:sp>
       <p:sp>
         <p:nvSpPr>
-          <p:cNvPr id="7" name="TextBox 6"/>
+          <p:cNvPr id="8" name="TextBox 7"/>
           <p:cNvSpPr txBox="1"/>
           <p:nvPr/>
         </p:nvSpPr>
@@ -6318,7 +6402,7 @@
       </p:sp>
       <p:sp>
         <p:nvSpPr>
-          <p:cNvPr id="8" name="TextBox 7"/>
+          <p:cNvPr id="9" name="TextBox 8"/>
           <p:cNvSpPr txBox="1"/>
           <p:nvPr/>
         </p:nvSpPr>
@@ -6360,7 +6444,7 @@
       </p:sp>
       <p:graphicFrame>
         <p:nvGraphicFramePr>
-          <p:cNvPr id="9" name="Table 8"/>
+          <p:cNvPr id="10" name="Table 9"/>
           <p:cNvGraphicFramePr>
             <a:graphicFrameLocks noGrp="1"/>
           </p:cNvGraphicFramePr>
@@ -7210,7 +7294,7 @@
       </p:graphicFrame>
       <p:sp>
         <p:nvSpPr>
-          <p:cNvPr id="10" name="Rectangle 9"/>
+          <p:cNvPr id="11" name="Rectangle 10"/>
           <p:cNvSpPr/>
           <p:nvPr/>
         </p:nvSpPr>
@@ -7259,7 +7343,7 @@
       </p:sp>
       <p:sp>
         <p:nvSpPr>
-          <p:cNvPr id="11" name="Rectangle 10"/>
+          <p:cNvPr id="12" name="Rectangle 11"/>
           <p:cNvSpPr/>
           <p:nvPr/>
         </p:nvSpPr>
@@ -7308,7 +7392,7 @@
       </p:sp>
       <p:sp>
         <p:nvSpPr>
-          <p:cNvPr id="12" name="TextBox 11"/>
+          <p:cNvPr id="13" name="TextBox 12"/>
           <p:cNvSpPr txBox="1"/>
           <p:nvPr/>
         </p:nvSpPr>
@@ -7350,7 +7434,7 @@
       </p:sp>
       <p:sp>
         <p:nvSpPr>
-          <p:cNvPr id="13" name="TextBox 12"/>
+          <p:cNvPr id="14" name="TextBox 13"/>
           <p:cNvSpPr txBox="1"/>
           <p:nvPr/>
         </p:nvSpPr>
@@ -7392,7 +7476,7 @@
       </p:sp>
       <p:sp>
         <p:nvSpPr>
-          <p:cNvPr id="14" name="TextBox 13"/>
+          <p:cNvPr id="15" name="TextBox 14"/>
           <p:cNvSpPr txBox="1"/>
           <p:nvPr/>
         </p:nvSpPr>
@@ -7434,7 +7518,7 @@
       </p:sp>
       <p:sp>
         <p:nvSpPr>
-          <p:cNvPr id="15" name="Rectangle 14"/>
+          <p:cNvPr id="16" name="Rectangle 15"/>
           <p:cNvSpPr/>
           <p:nvPr/>
         </p:nvSpPr>
@@ -7483,7 +7567,7 @@
       </p:sp>
       <p:sp>
         <p:nvSpPr>
-          <p:cNvPr id="16" name="TextBox 15"/>
+          <p:cNvPr id="17" name="TextBox 16"/>
           <p:cNvSpPr txBox="1"/>
           <p:nvPr/>
         </p:nvSpPr>
@@ -7525,7 +7609,7 @@
       </p:sp>
       <p:sp>
         <p:nvSpPr>
-          <p:cNvPr id="17" name="TextBox 16"/>
+          <p:cNvPr id="18" name="TextBox 17"/>
           <p:cNvSpPr txBox="1"/>
           <p:nvPr/>
         </p:nvSpPr>
@@ -7560,14 +7644,14 @@
               <a:rPr>
                 <a:latin typeface="Inter"/>
               </a:rPr>
-              <a:t>TEST DATA — fictional portfolio for rendering tests only · Data as of 2026-06-30</a:t>
+              <a:t>Confidential — Investment Committee · Data as of 2026-06-30</a:t>
             </a:r>
           </a:p>
         </p:txBody>
       </p:sp>
       <p:sp>
         <p:nvSpPr>
-          <p:cNvPr id="18" name="TextBox 17"/>
+          <p:cNvPr id="19" name="TextBox 18"/>
           <p:cNvSpPr txBox="1"/>
           <p:nvPr/>
         </p:nvSpPr>
@@ -7682,6 +7766,48 @@
         </p:nvSpPr>
         <p:spPr>
           <a:xfrm>
+            <a:off x="5897880" y="310896"/>
+            <a:ext cx="4800600" cy="256032"/>
+          </a:xfrm>
+          <a:prstGeom prst="rect">
+            <a:avLst/>
+          </a:prstGeom>
+          <a:noFill/>
+        </p:spPr>
+        <p:txBody>
+          <a:bodyPr wrap="none" lIns="9144" rIns="9144" tIns="9144" bIns="9144" anchor="t">
+            <a:spAutoFit/>
+          </a:bodyPr>
+          <a:lstStyle/>
+          <a:p>
+            <a:pPr algn="r">
+              <a:spcAft>
+                <a:spcPts val="0"/>
+              </a:spcAft>
+              <a:defRPr sz="680" b="1">
+                <a:solidFill>
+                  <a:srgbClr val="4F6B00"/>
+                </a:solidFill>
+                <a:latin typeface="Inter"/>
+              </a:defRPr>
+            </a:pPr>
+            <a:r>
+              <a:rPr>
+                <a:latin typeface="Inter"/>
+              </a:rPr>
+              <a:t>Illustrative, Gradient Maintained — demo data, not the client's holdings or managers</a:t>
+            </a:r>
+          </a:p>
+        </p:txBody>
+      </p:sp>
+      <p:sp>
+        <p:nvSpPr>
+          <p:cNvPr id="4" name="TextBox 3"/>
+          <p:cNvSpPr txBox="1"/>
+          <p:nvPr/>
+        </p:nvSpPr>
+        <p:spPr>
+          <a:xfrm>
             <a:off x="640080" y="566928"/>
             <a:ext cx="10058400" cy="530352"/>
           </a:xfrm>
@@ -7718,7 +7844,7 @@
       </p:sp>
       <p:sp>
         <p:nvSpPr>
-          <p:cNvPr id="4" name="Rectangle 3"/>
+          <p:cNvPr id="5" name="Rectangle 4"/>
           <p:cNvSpPr/>
           <p:nvPr/>
         </p:nvSpPr>
@@ -7767,7 +7893,7 @@
       </p:sp>
       <p:sp>
         <p:nvSpPr>
-          <p:cNvPr id="5" name="Rectangle 4"/>
+          <p:cNvPr id="6" name="Rectangle 5"/>
           <p:cNvSpPr/>
           <p:nvPr/>
         </p:nvSpPr>
@@ -7816,7 +7942,7 @@
       </p:sp>
       <p:sp>
         <p:nvSpPr>
-          <p:cNvPr id="6" name="TextBox 5"/>
+          <p:cNvPr id="7" name="TextBox 6"/>
           <p:cNvSpPr txBox="1"/>
           <p:nvPr/>
         </p:nvSpPr>
@@ -7858,7 +7984,7 @@
       </p:sp>
       <p:sp>
         <p:nvSpPr>
-          <p:cNvPr id="7" name="TextBox 6"/>
+          <p:cNvPr id="8" name="TextBox 7"/>
           <p:cNvSpPr txBox="1"/>
           <p:nvPr/>
         </p:nvSpPr>
@@ -7900,7 +8026,7 @@
       </p:sp>
       <p:graphicFrame>
         <p:nvGraphicFramePr>
-          <p:cNvPr id="8" name="Chart 7"/>
+          <p:cNvPr id="9" name="Chart 8"/>
           <p:cNvGraphicFramePr>
             <a:graphicFrameLocks noGrp="1"/>
           </p:cNvGraphicFramePr>
@@ -7918,7 +8044,7 @@
       </p:graphicFrame>
       <p:sp>
         <p:nvSpPr>
-          <p:cNvPr id="9" name="Rectangle 8"/>
+          <p:cNvPr id="10" name="Rectangle 9"/>
           <p:cNvSpPr/>
           <p:nvPr/>
         </p:nvSpPr>
@@ -7967,7 +8093,7 @@
       </p:sp>
       <p:sp>
         <p:nvSpPr>
-          <p:cNvPr id="10" name="TextBox 9"/>
+          <p:cNvPr id="11" name="TextBox 10"/>
           <p:cNvSpPr txBox="1"/>
           <p:nvPr/>
         </p:nvSpPr>
@@ -8009,7 +8135,7 @@
       </p:sp>
       <p:sp>
         <p:nvSpPr>
-          <p:cNvPr id="11" name="TextBox 10"/>
+          <p:cNvPr id="12" name="TextBox 11"/>
           <p:cNvSpPr txBox="1"/>
           <p:nvPr/>
         </p:nvSpPr>
@@ -8044,14 +8170,14 @@
               <a:rPr>
                 <a:latin typeface="Inter"/>
               </a:rPr>
-              <a:t>TEST DATA — fictional portfolio for rendering tests only · Data as of 2026-06-30</a:t>
+              <a:t>Confidential — Investment Committee · Data as of 2026-06-30</a:t>
             </a:r>
           </a:p>
         </p:txBody>
       </p:sp>
       <p:sp>
         <p:nvSpPr>
-          <p:cNvPr id="12" name="TextBox 11"/>
+          <p:cNvPr id="13" name="TextBox 12"/>
           <p:cNvSpPr txBox="1"/>
           <p:nvPr/>
         </p:nvSpPr>
@@ -8166,6 +8292,48 @@
         </p:nvSpPr>
         <p:spPr>
           <a:xfrm>
+            <a:off x="5897880" y="310896"/>
+            <a:ext cx="4800600" cy="256032"/>
+          </a:xfrm>
+          <a:prstGeom prst="rect">
+            <a:avLst/>
+          </a:prstGeom>
+          <a:noFill/>
+        </p:spPr>
+        <p:txBody>
+          <a:bodyPr wrap="none" lIns="9144" rIns="9144" tIns="9144" bIns="9144" anchor="t">
+            <a:spAutoFit/>
+          </a:bodyPr>
+          <a:lstStyle/>
+          <a:p>
+            <a:pPr algn="r">
+              <a:spcAft>
+                <a:spcPts val="0"/>
+              </a:spcAft>
+              <a:defRPr sz="680" b="1">
+                <a:solidFill>
+                  <a:srgbClr val="4F6B00"/>
+                </a:solidFill>
+                <a:latin typeface="Inter"/>
+              </a:defRPr>
+            </a:pPr>
+            <a:r>
+              <a:rPr>
+                <a:latin typeface="Inter"/>
+              </a:rPr>
+              <a:t>Illustrative, Gradient Maintained — demo data, not the client's holdings or managers</a:t>
+            </a:r>
+          </a:p>
+        </p:txBody>
+      </p:sp>
+      <p:sp>
+        <p:nvSpPr>
+          <p:cNvPr id="4" name="TextBox 3"/>
+          <p:cNvSpPr txBox="1"/>
+          <p:nvPr/>
+        </p:nvSpPr>
+        <p:spPr>
+          <a:xfrm>
             <a:off x="640080" y="566928"/>
             <a:ext cx="10058400" cy="530352"/>
           </a:xfrm>
@@ -8202,7 +8370,7 @@
       </p:sp>
       <p:sp>
         <p:nvSpPr>
-          <p:cNvPr id="4" name="Rectangle 3"/>
+          <p:cNvPr id="5" name="Rectangle 4"/>
           <p:cNvSpPr/>
           <p:nvPr/>
         </p:nvSpPr>
@@ -8251,7 +8419,7 @@
       </p:sp>
       <p:sp>
         <p:nvSpPr>
-          <p:cNvPr id="5" name="Rectangle 4"/>
+          <p:cNvPr id="6" name="Rectangle 5"/>
           <p:cNvSpPr/>
           <p:nvPr/>
         </p:nvSpPr>
@@ -8300,7 +8468,7 @@
       </p:sp>
       <p:sp>
         <p:nvSpPr>
-          <p:cNvPr id="6" name="TextBox 5"/>
+          <p:cNvPr id="7" name="TextBox 6"/>
           <p:cNvSpPr txBox="1"/>
           <p:nvPr/>
         </p:nvSpPr>
@@ -8342,7 +8510,7 @@
       </p:sp>
       <p:sp>
         <p:nvSpPr>
-          <p:cNvPr id="7" name="TextBox 6"/>
+          <p:cNvPr id="8" name="TextBox 7"/>
           <p:cNvSpPr txBox="1"/>
           <p:nvPr/>
         </p:nvSpPr>
@@ -8384,7 +8552,7 @@
       </p:sp>
       <p:graphicFrame>
         <p:nvGraphicFramePr>
-          <p:cNvPr id="8" name="Table 7"/>
+          <p:cNvPr id="9" name="Table 8"/>
           <p:cNvGraphicFramePr>
             <a:graphicFrameLocks noGrp="1"/>
           </p:cNvGraphicFramePr>
@@ -8824,7 +8992,7 @@
       </p:graphicFrame>
       <p:sp>
         <p:nvSpPr>
-          <p:cNvPr id="9" name="TextBox 8"/>
+          <p:cNvPr id="10" name="TextBox 9"/>
           <p:cNvSpPr txBox="1"/>
           <p:nvPr/>
         </p:nvSpPr>
@@ -8866,7 +9034,7 @@
       </p:sp>
       <p:graphicFrame>
         <p:nvGraphicFramePr>
-          <p:cNvPr id="10" name="Table 9"/>
+          <p:cNvPr id="11" name="Table 10"/>
           <p:cNvGraphicFramePr>
             <a:graphicFrameLocks noGrp="1"/>
           </p:cNvGraphicFramePr>
@@ -9308,7 +9476,7 @@
       </p:graphicFrame>
       <p:sp>
         <p:nvSpPr>
-          <p:cNvPr id="11" name="TextBox 10"/>
+          <p:cNvPr id="12" name="TextBox 11"/>
           <p:cNvSpPr txBox="1"/>
           <p:nvPr/>
         </p:nvSpPr>
@@ -9350,7 +9518,7 @@
       </p:sp>
       <p:sp>
         <p:nvSpPr>
-          <p:cNvPr id="12" name="Rectangle 11"/>
+          <p:cNvPr id="13" name="Rectangle 12"/>
           <p:cNvSpPr/>
           <p:nvPr/>
         </p:nvSpPr>
@@ -9399,7 +9567,7 @@
       </p:sp>
       <p:sp>
         <p:nvSpPr>
-          <p:cNvPr id="13" name="TextBox 12"/>
+          <p:cNvPr id="14" name="TextBox 13"/>
           <p:cNvSpPr txBox="1"/>
           <p:nvPr/>
         </p:nvSpPr>
@@ -9441,7 +9609,7 @@
       </p:sp>
       <p:sp>
         <p:nvSpPr>
-          <p:cNvPr id="14" name="TextBox 13"/>
+          <p:cNvPr id="15" name="TextBox 14"/>
           <p:cNvSpPr txBox="1"/>
           <p:nvPr/>
         </p:nvSpPr>
@@ -9476,14 +9644,14 @@
               <a:rPr>
                 <a:latin typeface="Inter"/>
               </a:rPr>
-              <a:t>TEST DATA — fictional portfolio for rendering tests only · Data as of 2026-06-30</a:t>
+              <a:t>Confidential — Investment Committee · Data as of 2026-06-30</a:t>
             </a:r>
           </a:p>
         </p:txBody>
       </p:sp>
       <p:sp>
         <p:nvSpPr>
-          <p:cNvPr id="15" name="TextBox 14"/>
+          <p:cNvPr id="16" name="TextBox 15"/>
           <p:cNvSpPr txBox="1"/>
           <p:nvPr/>
         </p:nvSpPr>
@@ -9598,6 +9766,48 @@
         </p:nvSpPr>
         <p:spPr>
           <a:xfrm>
+            <a:off x="5897880" y="310896"/>
+            <a:ext cx="4800600" cy="256032"/>
+          </a:xfrm>
+          <a:prstGeom prst="rect">
+            <a:avLst/>
+          </a:prstGeom>
+          <a:noFill/>
+        </p:spPr>
+        <p:txBody>
+          <a:bodyPr wrap="none" lIns="9144" rIns="9144" tIns="9144" bIns="9144" anchor="t">
+            <a:spAutoFit/>
+          </a:bodyPr>
+          <a:lstStyle/>
+          <a:p>
+            <a:pPr algn="r">
+              <a:spcAft>
+                <a:spcPts val="0"/>
+              </a:spcAft>
+              <a:defRPr sz="680" b="1">
+                <a:solidFill>
+                  <a:srgbClr val="4F6B00"/>
+                </a:solidFill>
+                <a:latin typeface="Inter"/>
+              </a:defRPr>
+            </a:pPr>
+            <a:r>
+              <a:rPr>
+                <a:latin typeface="Inter"/>
+              </a:rPr>
+              <a:t>Illustrative, Gradient Maintained — demo data, not the client's holdings or managers</a:t>
+            </a:r>
+          </a:p>
+        </p:txBody>
+      </p:sp>
+      <p:sp>
+        <p:nvSpPr>
+          <p:cNvPr id="4" name="TextBox 3"/>
+          <p:cNvSpPr txBox="1"/>
+          <p:nvPr/>
+        </p:nvSpPr>
+        <p:spPr>
+          <a:xfrm>
             <a:off x="640080" y="566928"/>
             <a:ext cx="10058400" cy="530352"/>
           </a:xfrm>
@@ -9634,7 +9844,7 @@
       </p:sp>
       <p:sp>
         <p:nvSpPr>
-          <p:cNvPr id="4" name="Rectangle 3"/>
+          <p:cNvPr id="5" name="Rectangle 4"/>
           <p:cNvSpPr/>
           <p:nvPr/>
         </p:nvSpPr>
@@ -9683,7 +9893,7 @@
       </p:sp>
       <p:sp>
         <p:nvSpPr>
-          <p:cNvPr id="5" name="Rectangle 4"/>
+          <p:cNvPr id="6" name="Rectangle 5"/>
           <p:cNvSpPr/>
           <p:nvPr/>
         </p:nvSpPr>
@@ -9732,7 +9942,7 @@
       </p:sp>
       <p:sp>
         <p:nvSpPr>
-          <p:cNvPr id="6" name="TextBox 5"/>
+          <p:cNvPr id="7" name="TextBox 6"/>
           <p:cNvSpPr txBox="1"/>
           <p:nvPr/>
         </p:nvSpPr>
@@ -9774,7 +9984,7 @@
       </p:sp>
       <p:graphicFrame>
         <p:nvGraphicFramePr>
-          <p:cNvPr id="7" name="Table 6"/>
+          <p:cNvPr id="8" name="Table 7"/>
           <p:cNvGraphicFramePr>
             <a:graphicFrameLocks noGrp="1"/>
           </p:cNvGraphicFramePr>
@@ -10024,7 +10234,7 @@
       </p:graphicFrame>
       <p:sp>
         <p:nvSpPr>
-          <p:cNvPr id="8" name="Rectangle 7"/>
+          <p:cNvPr id="9" name="Rectangle 8"/>
           <p:cNvSpPr/>
           <p:nvPr/>
         </p:nvSpPr>
@@ -10073,7 +10283,7 @@
       </p:sp>
       <p:sp>
         <p:nvSpPr>
-          <p:cNvPr id="9" name="TextBox 8"/>
+          <p:cNvPr id="10" name="TextBox 9"/>
           <p:cNvSpPr txBox="1"/>
           <p:nvPr/>
         </p:nvSpPr>
@@ -10115,7 +10325,7 @@
       </p:sp>
       <p:sp>
         <p:nvSpPr>
-          <p:cNvPr id="10" name="TextBox 9"/>
+          <p:cNvPr id="11" name="TextBox 10"/>
           <p:cNvSpPr txBox="1"/>
           <p:nvPr/>
         </p:nvSpPr>
@@ -10150,14 +10360,14 @@
               <a:rPr>
                 <a:latin typeface="Inter"/>
               </a:rPr>
-              <a:t>TEST DATA — fictional portfolio for rendering tests only · Data as of 2026-06-30</a:t>
+              <a:t>Confidential — Investment Committee · Data as of 2026-06-30</a:t>
             </a:r>
           </a:p>
         </p:txBody>
       </p:sp>
       <p:sp>
         <p:nvSpPr>
-          <p:cNvPr id="11" name="TextBox 10"/>
+          <p:cNvPr id="12" name="TextBox 11"/>
           <p:cNvSpPr txBox="1"/>
           <p:nvPr/>
         </p:nvSpPr>
@@ -10273,7 +10483,7 @@
         <p:spPr>
           <a:xfrm>
             <a:off x="640080" y="329184"/>
-            <a:ext cx="9875520" cy="182880"/>
+            <a:ext cx="5303520" cy="182880"/>
           </a:xfrm>
           <a:prstGeom prst="rect">
             <a:avLst/>
@@ -10314,6 +10524,48 @@
         </p:nvSpPr>
         <p:spPr>
           <a:xfrm>
+            <a:off x="5897880" y="310896"/>
+            <a:ext cx="4800600" cy="256032"/>
+          </a:xfrm>
+          <a:prstGeom prst="rect">
+            <a:avLst/>
+          </a:prstGeom>
+          <a:noFill/>
+        </p:spPr>
+        <p:txBody>
+          <a:bodyPr wrap="none" lIns="9144" rIns="9144" tIns="9144" bIns="9144" anchor="t">
+            <a:spAutoFit/>
+          </a:bodyPr>
+          <a:lstStyle/>
+          <a:p>
+            <a:pPr algn="r">
+              <a:spcAft>
+                <a:spcPts val="0"/>
+              </a:spcAft>
+              <a:defRPr sz="680" b="1">
+                <a:solidFill>
+                  <a:srgbClr val="4F6B00"/>
+                </a:solidFill>
+                <a:latin typeface="Inter"/>
+              </a:defRPr>
+            </a:pPr>
+            <a:r>
+              <a:rPr>
+                <a:latin typeface="Inter"/>
+              </a:rPr>
+              <a:t>Illustrative, Gradient Maintained — demo data, not the client's holdings or managers</a:t>
+            </a:r>
+          </a:p>
+        </p:txBody>
+      </p:sp>
+      <p:sp>
+        <p:nvSpPr>
+          <p:cNvPr id="5" name="TextBox 4"/>
+          <p:cNvSpPr txBox="1"/>
+          <p:nvPr/>
+        </p:nvSpPr>
+        <p:spPr>
+          <a:xfrm>
             <a:off x="640080" y="566928"/>
             <a:ext cx="10058400" cy="530352"/>
           </a:xfrm>
@@ -10350,7 +10602,7 @@
       </p:sp>
       <p:sp>
         <p:nvSpPr>
-          <p:cNvPr id="5" name="Rectangle 4"/>
+          <p:cNvPr id="6" name="Rectangle 5"/>
           <p:cNvSpPr/>
           <p:nvPr/>
         </p:nvSpPr>
@@ -10399,7 +10651,7 @@
       </p:sp>
       <p:sp>
         <p:nvSpPr>
-          <p:cNvPr id="6" name="Rectangle 5"/>
+          <p:cNvPr id="7" name="Rectangle 6"/>
           <p:cNvSpPr/>
           <p:nvPr/>
         </p:nvSpPr>
@@ -10448,7 +10700,7 @@
       </p:sp>
       <p:sp>
         <p:nvSpPr>
-          <p:cNvPr id="7" name="TextBox 6"/>
+          <p:cNvPr id="8" name="TextBox 7"/>
           <p:cNvSpPr txBox="1"/>
           <p:nvPr/>
         </p:nvSpPr>
@@ -10490,7 +10742,7 @@
       </p:sp>
       <p:sp>
         <p:nvSpPr>
-          <p:cNvPr id="8" name="TextBox 7"/>
+          <p:cNvPr id="9" name="TextBox 8"/>
           <p:cNvSpPr txBox="1"/>
           <p:nvPr/>
         </p:nvSpPr>
@@ -10532,7 +10784,7 @@
       </p:sp>
       <p:graphicFrame>
         <p:nvGraphicFramePr>
-          <p:cNvPr id="9" name="Table 8"/>
+          <p:cNvPr id="10" name="Table 9"/>
           <p:cNvGraphicFramePr>
             <a:graphicFrameLocks noGrp="1"/>
           </p:cNvGraphicFramePr>
@@ -11240,7 +11492,7 @@
       </p:graphicFrame>
       <p:sp>
         <p:nvSpPr>
-          <p:cNvPr id="10" name="Rectangle 9"/>
+          <p:cNvPr id="11" name="Rectangle 10"/>
           <p:cNvSpPr/>
           <p:nvPr/>
         </p:nvSpPr>
@@ -11289,7 +11541,7 @@
       </p:sp>
       <p:sp>
         <p:nvSpPr>
-          <p:cNvPr id="11" name="TextBox 10"/>
+          <p:cNvPr id="12" name="TextBox 11"/>
           <p:cNvSpPr txBox="1"/>
           <p:nvPr/>
         </p:nvSpPr>
@@ -11331,7 +11583,7 @@
       </p:sp>
       <p:sp>
         <p:nvSpPr>
-          <p:cNvPr id="12" name="TextBox 11"/>
+          <p:cNvPr id="13" name="TextBox 12"/>
           <p:cNvSpPr txBox="1"/>
           <p:nvPr/>
         </p:nvSpPr>
@@ -11366,14 +11618,14 @@
               <a:rPr>
                 <a:latin typeface="Inter"/>
               </a:rPr>
-              <a:t>TEST DATA — fictional portfolio for rendering tests only · Data as of 2026-06-30</a:t>
+              <a:t>Confidential — Investment Committee · Data as of 2026-06-30</a:t>
             </a:r>
           </a:p>
         </p:txBody>
       </p:sp>
       <p:sp>
         <p:nvSpPr>
-          <p:cNvPr id="13" name="TextBox 12"/>
+          <p:cNvPr id="14" name="TextBox 13"/>
           <p:cNvSpPr txBox="1"/>
           <p:nvPr/>
         </p:nvSpPr>
@@ -11489,7 +11741,7 @@
         <p:spPr>
           <a:xfrm>
             <a:off x="640080" y="329184"/>
-            <a:ext cx="9875520" cy="182880"/>
+            <a:ext cx="5303520" cy="182880"/>
           </a:xfrm>
           <a:prstGeom prst="rect">
             <a:avLst/>
@@ -11530,6 +11782,48 @@
         </p:nvSpPr>
         <p:spPr>
           <a:xfrm>
+            <a:off x="5897880" y="310896"/>
+            <a:ext cx="4800600" cy="256032"/>
+          </a:xfrm>
+          <a:prstGeom prst="rect">
+            <a:avLst/>
+          </a:prstGeom>
+          <a:noFill/>
+        </p:spPr>
+        <p:txBody>
+          <a:bodyPr wrap="none" lIns="9144" rIns="9144" tIns="9144" bIns="9144" anchor="t">
+            <a:spAutoFit/>
+          </a:bodyPr>
+          <a:lstStyle/>
+          <a:p>
+            <a:pPr algn="r">
+              <a:spcAft>
+                <a:spcPts val="0"/>
+              </a:spcAft>
+              <a:defRPr sz="680" b="1">
+                <a:solidFill>
+                  <a:srgbClr val="4F6B00"/>
+                </a:solidFill>
+                <a:latin typeface="Inter"/>
+              </a:defRPr>
+            </a:pPr>
+            <a:r>
+              <a:rPr>
+                <a:latin typeface="Inter"/>
+              </a:rPr>
+              <a:t>Illustrative, Gradient Maintained — demo data, not the client's holdings or managers</a:t>
+            </a:r>
+          </a:p>
+        </p:txBody>
+      </p:sp>
+      <p:sp>
+        <p:nvSpPr>
+          <p:cNvPr id="5" name="TextBox 4"/>
+          <p:cNvSpPr txBox="1"/>
+          <p:nvPr/>
+        </p:nvSpPr>
+        <p:spPr>
+          <a:xfrm>
             <a:off x="640080" y="566928"/>
             <a:ext cx="10058400" cy="530352"/>
           </a:xfrm>
@@ -11566,7 +11860,7 @@
       </p:sp>
       <p:sp>
         <p:nvSpPr>
-          <p:cNvPr id="5" name="Rectangle 4"/>
+          <p:cNvPr id="6" name="Rectangle 5"/>
           <p:cNvSpPr/>
           <p:nvPr/>
         </p:nvSpPr>
@@ -11615,7 +11909,7 @@
       </p:sp>
       <p:sp>
         <p:nvSpPr>
-          <p:cNvPr id="6" name="Rectangle 5"/>
+          <p:cNvPr id="7" name="Rectangle 6"/>
           <p:cNvSpPr/>
           <p:nvPr/>
         </p:nvSpPr>
@@ -11664,7 +11958,7 @@
       </p:sp>
       <p:sp>
         <p:nvSpPr>
-          <p:cNvPr id="7" name="TextBox 6"/>
+          <p:cNvPr id="8" name="TextBox 7"/>
           <p:cNvSpPr txBox="1"/>
           <p:nvPr/>
         </p:nvSpPr>
@@ -11706,7 +12000,7 @@
       </p:sp>
       <p:sp>
         <p:nvSpPr>
-          <p:cNvPr id="8" name="TextBox 7"/>
+          <p:cNvPr id="9" name="TextBox 8"/>
           <p:cNvSpPr txBox="1"/>
           <p:nvPr/>
         </p:nvSpPr>
@@ -11741,14 +12035,14 @@
               <a:rPr>
                 <a:latin typeface="Inter"/>
               </a:rPr>
-              <a:t>MODEL-IMPLIED FACTOR EXPOSURES (TEST)</a:t>
+              <a:t>MODEL-IMPLIED FACTOR EXPOSURES</a:t>
             </a:r>
           </a:p>
         </p:txBody>
       </p:sp>
       <p:graphicFrame>
         <p:nvGraphicFramePr>
-          <p:cNvPr id="9" name="Chart 8"/>
+          <p:cNvPr id="10" name="Chart 9"/>
           <p:cNvGraphicFramePr>
             <a:graphicFrameLocks noGrp="1"/>
           </p:cNvGraphicFramePr>
@@ -11766,7 +12060,7 @@
       </p:graphicFrame>
       <p:sp>
         <p:nvSpPr>
-          <p:cNvPr id="10" name="Rectangle 9"/>
+          <p:cNvPr id="11" name="Rectangle 10"/>
           <p:cNvSpPr/>
           <p:nvPr/>
         </p:nvSpPr>
@@ -11815,7 +12109,7 @@
       </p:sp>
       <p:sp>
         <p:nvSpPr>
-          <p:cNvPr id="11" name="TextBox 10"/>
+          <p:cNvPr id="12" name="TextBox 11"/>
           <p:cNvSpPr txBox="1"/>
           <p:nvPr/>
         </p:nvSpPr>
@@ -11850,14 +12144,14 @@
               <a:rPr>
                 <a:latin typeface="Inter"/>
               </a:rPr>
-              <a:t>Sources: none cited</a:t>
+              <a:t>Sources: S1</a:t>
             </a:r>
           </a:p>
         </p:txBody>
       </p:sp>
       <p:sp>
         <p:nvSpPr>
-          <p:cNvPr id="12" name="TextBox 11"/>
+          <p:cNvPr id="13" name="TextBox 12"/>
           <p:cNvSpPr txBox="1"/>
           <p:nvPr/>
         </p:nvSpPr>
@@ -11892,14 +12186,14 @@
               <a:rPr>
                 <a:latin typeface="Inter"/>
               </a:rPr>
-              <a:t>TEST DATA — fictional portfolio for rendering tests only · Data as of 2026-06-30</a:t>
+              <a:t>Confidential — Investment Committee · Data as of 2026-06-30</a:t>
             </a:r>
           </a:p>
         </p:txBody>
       </p:sp>
       <p:sp>
         <p:nvSpPr>
-          <p:cNvPr id="13" name="TextBox 12"/>
+          <p:cNvPr id="14" name="TextBox 13"/>
           <p:cNvSpPr txBox="1"/>
           <p:nvPr/>
         </p:nvSpPr>
@@ -12015,7 +12309,7 @@
         <p:spPr>
           <a:xfrm>
             <a:off x="640080" y="329184"/>
-            <a:ext cx="9875520" cy="182880"/>
+            <a:ext cx="5303520" cy="182880"/>
           </a:xfrm>
           <a:prstGeom prst="rect">
             <a:avLst/>
@@ -12056,6 +12350,48 @@
         </p:nvSpPr>
         <p:spPr>
           <a:xfrm>
+            <a:off x="5897880" y="310896"/>
+            <a:ext cx="4800600" cy="256032"/>
+          </a:xfrm>
+          <a:prstGeom prst="rect">
+            <a:avLst/>
+          </a:prstGeom>
+          <a:noFill/>
+        </p:spPr>
+        <p:txBody>
+          <a:bodyPr wrap="none" lIns="9144" rIns="9144" tIns="9144" bIns="9144" anchor="t">
+            <a:spAutoFit/>
+          </a:bodyPr>
+          <a:lstStyle/>
+          <a:p>
+            <a:pPr algn="r">
+              <a:spcAft>
+                <a:spcPts val="0"/>
+              </a:spcAft>
+              <a:defRPr sz="680" b="1">
+                <a:solidFill>
+                  <a:srgbClr val="4F6B00"/>
+                </a:solidFill>
+                <a:latin typeface="Inter"/>
+              </a:defRPr>
+            </a:pPr>
+            <a:r>
+              <a:rPr>
+                <a:latin typeface="Inter"/>
+              </a:rPr>
+              <a:t>Illustrative, Gradient Maintained — demo data, not the client's holdings or managers</a:t>
+            </a:r>
+          </a:p>
+        </p:txBody>
+      </p:sp>
+      <p:sp>
+        <p:nvSpPr>
+          <p:cNvPr id="5" name="TextBox 4"/>
+          <p:cNvSpPr txBox="1"/>
+          <p:nvPr/>
+        </p:nvSpPr>
+        <p:spPr>
+          <a:xfrm>
             <a:off x="640080" y="566928"/>
             <a:ext cx="10058400" cy="530352"/>
           </a:xfrm>
@@ -12092,7 +12428,7 @@
       </p:sp>
       <p:sp>
         <p:nvSpPr>
-          <p:cNvPr id="5" name="Rectangle 4"/>
+          <p:cNvPr id="6" name="Rectangle 5"/>
           <p:cNvSpPr/>
           <p:nvPr/>
         </p:nvSpPr>
@@ -12141,7 +12477,7 @@
       </p:sp>
       <p:sp>
         <p:nvSpPr>
-          <p:cNvPr id="6" name="Rectangle 5"/>
+          <p:cNvPr id="7" name="Rectangle 6"/>
           <p:cNvSpPr/>
           <p:nvPr/>
         </p:nvSpPr>
@@ -12190,7 +12526,7 @@
       </p:sp>
       <p:sp>
         <p:nvSpPr>
-          <p:cNvPr id="7" name="TextBox 6"/>
+          <p:cNvPr id="8" name="TextBox 7"/>
           <p:cNvSpPr txBox="1"/>
           <p:nvPr/>
         </p:nvSpPr>
@@ -12232,7 +12568,7 @@
       </p:sp>
       <p:sp>
         <p:nvSpPr>
-          <p:cNvPr id="8" name="TextBox 7"/>
+          <p:cNvPr id="9" name="TextBox 8"/>
           <p:cNvSpPr txBox="1"/>
           <p:nvPr/>
         </p:nvSpPr>
@@ -12274,7 +12610,7 @@
       </p:sp>
       <p:graphicFrame>
         <p:nvGraphicFramePr>
-          <p:cNvPr id="9" name="Table 8"/>
+          <p:cNvPr id="10" name="Table 9"/>
           <p:cNvGraphicFramePr>
             <a:graphicFrameLocks noGrp="1"/>
           </p:cNvGraphicFramePr>
@@ -12807,7 +13143,7 @@
                         <a:rPr>
                           <a:latin typeface="Inter"/>
                         </a:rPr>
-                        <a:t>● Not assessed</a:t>
+                        <a:t>● not assessed</a:t>
                       </a:r>
                     </a:p>
                   </a:txBody>
@@ -12851,7 +13187,7 @@
       </p:graphicFrame>
       <p:sp>
         <p:nvSpPr>
-          <p:cNvPr id="10" name="Rectangle 9"/>
+          <p:cNvPr id="11" name="Rectangle 10"/>
           <p:cNvSpPr/>
           <p:nvPr/>
         </p:nvSpPr>
@@ -12900,7 +13236,7 @@
       </p:sp>
       <p:sp>
         <p:nvSpPr>
-          <p:cNvPr id="11" name="Rectangle 10"/>
+          <p:cNvPr id="12" name="Rectangle 11"/>
           <p:cNvSpPr/>
           <p:nvPr/>
         </p:nvSpPr>
@@ -12949,7 +13285,7 @@
       </p:sp>
       <p:sp>
         <p:nvSpPr>
-          <p:cNvPr id="12" name="TextBox 11"/>
+          <p:cNvPr id="13" name="TextBox 12"/>
           <p:cNvSpPr txBox="1"/>
           <p:nvPr/>
         </p:nvSpPr>
@@ -12991,7 +13327,7 @@
       </p:sp>
       <p:sp>
         <p:nvSpPr>
-          <p:cNvPr id="13" name="TextBox 12"/>
+          <p:cNvPr id="14" name="TextBox 13"/>
           <p:cNvSpPr txBox="1"/>
           <p:nvPr/>
         </p:nvSpPr>
@@ -13033,7 +13369,7 @@
       </p:sp>
       <p:sp>
         <p:nvSpPr>
-          <p:cNvPr id="14" name="Rectangle 13"/>
+          <p:cNvPr id="15" name="Rectangle 14"/>
           <p:cNvSpPr/>
           <p:nvPr/>
         </p:nvSpPr>
@@ -13082,7 +13418,7 @@
       </p:sp>
       <p:sp>
         <p:nvSpPr>
-          <p:cNvPr id="15" name="Rectangle 14"/>
+          <p:cNvPr id="16" name="Rectangle 15"/>
           <p:cNvSpPr/>
           <p:nvPr/>
         </p:nvSpPr>
@@ -13131,7 +13467,7 @@
       </p:sp>
       <p:sp>
         <p:nvSpPr>
-          <p:cNvPr id="16" name="TextBox 15"/>
+          <p:cNvPr id="17" name="TextBox 16"/>
           <p:cNvSpPr txBox="1"/>
           <p:nvPr/>
         </p:nvSpPr>
@@ -13173,7 +13509,7 @@
       </p:sp>
       <p:sp>
         <p:nvSpPr>
-          <p:cNvPr id="17" name="TextBox 16"/>
+          <p:cNvPr id="18" name="TextBox 17"/>
           <p:cNvSpPr txBox="1"/>
           <p:nvPr/>
         </p:nvSpPr>
@@ -13215,7 +13551,7 @@
       </p:sp>
       <p:sp>
         <p:nvSpPr>
-          <p:cNvPr id="18" name="Rectangle 17"/>
+          <p:cNvPr id="19" name="Rectangle 18"/>
           <p:cNvSpPr/>
           <p:nvPr/>
         </p:nvSpPr>
@@ -13264,7 +13600,7 @@
       </p:sp>
       <p:sp>
         <p:nvSpPr>
-          <p:cNvPr id="19" name="TextBox 18"/>
+          <p:cNvPr id="20" name="TextBox 19"/>
           <p:cNvSpPr txBox="1"/>
           <p:nvPr/>
         </p:nvSpPr>
@@ -13306,7 +13642,7 @@
       </p:sp>
       <p:sp>
         <p:nvSpPr>
-          <p:cNvPr id="20" name="TextBox 19"/>
+          <p:cNvPr id="21" name="TextBox 20"/>
           <p:cNvSpPr txBox="1"/>
           <p:nvPr/>
         </p:nvSpPr>
@@ -13341,14 +13677,14 @@
               <a:rPr>
                 <a:latin typeface="Inter"/>
               </a:rPr>
-              <a:t>TEST DATA — fictional portfolio for rendering tests only · Data as of 2026-06-30</a:t>
+              <a:t>Confidential — Investment Committee · Data as of 2026-06-30</a:t>
             </a:r>
           </a:p>
         </p:txBody>
       </p:sp>
       <p:sp>
         <p:nvSpPr>
-          <p:cNvPr id="21" name="TextBox 20"/>
+          <p:cNvPr id="22" name="TextBox 21"/>
           <p:cNvSpPr txBox="1"/>
           <p:nvPr/>
         </p:nvSpPr>
@@ -13464,7 +13800,7 @@
         <p:spPr>
           <a:xfrm>
             <a:off x="640080" y="329184"/>
-            <a:ext cx="9875520" cy="182880"/>
+            <a:ext cx="5303520" cy="182880"/>
           </a:xfrm>
           <a:prstGeom prst="rect">
             <a:avLst/>
@@ -13505,6 +13841,48 @@
         </p:nvSpPr>
         <p:spPr>
           <a:xfrm>
+            <a:off x="5897880" y="310896"/>
+            <a:ext cx="4800600" cy="256032"/>
+          </a:xfrm>
+          <a:prstGeom prst="rect">
+            <a:avLst/>
+          </a:prstGeom>
+          <a:noFill/>
+        </p:spPr>
+        <p:txBody>
+          <a:bodyPr wrap="none" lIns="9144" rIns="9144" tIns="9144" bIns="9144" anchor="t">
+            <a:spAutoFit/>
+          </a:bodyPr>
+          <a:lstStyle/>
+          <a:p>
+            <a:pPr algn="r">
+              <a:spcAft>
+                <a:spcPts val="0"/>
+              </a:spcAft>
+              <a:defRPr sz="680" b="1">
+                <a:solidFill>
+                  <a:srgbClr val="4F6B00"/>
+                </a:solidFill>
+                <a:latin typeface="Inter"/>
+              </a:defRPr>
+            </a:pPr>
+            <a:r>
+              <a:rPr>
+                <a:latin typeface="Inter"/>
+              </a:rPr>
+              <a:t>Illustrative, Gradient Maintained — demo data, not the client's holdings or managers</a:t>
+            </a:r>
+          </a:p>
+        </p:txBody>
+      </p:sp>
+      <p:sp>
+        <p:nvSpPr>
+          <p:cNvPr id="5" name="TextBox 4"/>
+          <p:cNvSpPr txBox="1"/>
+          <p:nvPr/>
+        </p:nvSpPr>
+        <p:spPr>
+          <a:xfrm>
             <a:off x="640080" y="566928"/>
             <a:ext cx="10058400" cy="530352"/>
           </a:xfrm>
@@ -13541,7 +13919,7 @@
       </p:sp>
       <p:sp>
         <p:nvSpPr>
-          <p:cNvPr id="5" name="Rectangle 4"/>
+          <p:cNvPr id="6" name="Rectangle 5"/>
           <p:cNvSpPr/>
           <p:nvPr/>
         </p:nvSpPr>
@@ -13590,7 +13968,7 @@
       </p:sp>
       <p:sp>
         <p:nvSpPr>
-          <p:cNvPr id="6" name="Rectangle 5"/>
+          <p:cNvPr id="7" name="Rectangle 6"/>
           <p:cNvSpPr/>
           <p:nvPr/>
         </p:nvSpPr>
@@ -13639,7 +14017,7 @@
       </p:sp>
       <p:sp>
         <p:nvSpPr>
-          <p:cNvPr id="7" name="TextBox 6"/>
+          <p:cNvPr id="8" name="TextBox 7"/>
           <p:cNvSpPr txBox="1"/>
           <p:nvPr/>
         </p:nvSpPr>
@@ -13681,7 +14059,7 @@
       </p:sp>
       <p:sp>
         <p:nvSpPr>
-          <p:cNvPr id="8" name="TextBox 7"/>
+          <p:cNvPr id="9" name="TextBox 8"/>
           <p:cNvSpPr txBox="1"/>
           <p:nvPr/>
         </p:nvSpPr>
@@ -13723,7 +14101,7 @@
       </p:sp>
       <p:graphicFrame>
         <p:nvGraphicFramePr>
-          <p:cNvPr id="9" name="Chart 8"/>
+          <p:cNvPr id="10" name="Chart 9"/>
           <p:cNvGraphicFramePr>
             <a:graphicFrameLocks noGrp="1"/>
           </p:cNvGraphicFramePr>
@@ -13741,7 +14119,7 @@
       </p:graphicFrame>
       <p:sp>
         <p:nvSpPr>
-          <p:cNvPr id="10" name="Rectangle 9"/>
+          <p:cNvPr id="11" name="Rectangle 10"/>
           <p:cNvSpPr/>
           <p:nvPr/>
         </p:nvSpPr>
@@ -13790,7 +14168,7 @@
       </p:sp>
       <p:sp>
         <p:nvSpPr>
-          <p:cNvPr id="11" name="TextBox 10"/>
+          <p:cNvPr id="12" name="TextBox 11"/>
           <p:cNvSpPr txBox="1"/>
           <p:nvPr/>
         </p:nvSpPr>
@@ -13832,7 +14210,7 @@
       </p:sp>
       <p:sp>
         <p:nvSpPr>
-          <p:cNvPr id="12" name="TextBox 11"/>
+          <p:cNvPr id="13" name="TextBox 12"/>
           <p:cNvSpPr txBox="1"/>
           <p:nvPr/>
         </p:nvSpPr>
@@ -13867,14 +14245,14 @@
               <a:rPr>
                 <a:latin typeface="Inter"/>
               </a:rPr>
-              <a:t>TEST DATA — fictional portfolio for rendering tests only · Data as of 2026-06-30</a:t>
+              <a:t>Confidential — Investment Committee · Data as of 2026-06-30</a:t>
             </a:r>
           </a:p>
         </p:txBody>
       </p:sp>
       <p:sp>
         <p:nvSpPr>
-          <p:cNvPr id="13" name="TextBox 12"/>
+          <p:cNvPr id="14" name="TextBox 13"/>
           <p:cNvSpPr txBox="1"/>
           <p:nvPr/>
         </p:nvSpPr>
@@ -13990,7 +14368,7 @@
         <p:spPr>
           <a:xfrm>
             <a:off x="640080" y="329184"/>
-            <a:ext cx="9875520" cy="182880"/>
+            <a:ext cx="5303520" cy="182880"/>
           </a:xfrm>
           <a:prstGeom prst="rect">
             <a:avLst/>
@@ -14031,6 +14409,48 @@
         </p:nvSpPr>
         <p:spPr>
           <a:xfrm>
+            <a:off x="5897880" y="310896"/>
+            <a:ext cx="4800600" cy="256032"/>
+          </a:xfrm>
+          <a:prstGeom prst="rect">
+            <a:avLst/>
+          </a:prstGeom>
+          <a:noFill/>
+        </p:spPr>
+        <p:txBody>
+          <a:bodyPr wrap="none" lIns="9144" rIns="9144" tIns="9144" bIns="9144" anchor="t">
+            <a:spAutoFit/>
+          </a:bodyPr>
+          <a:lstStyle/>
+          <a:p>
+            <a:pPr algn="r">
+              <a:spcAft>
+                <a:spcPts val="0"/>
+              </a:spcAft>
+              <a:defRPr sz="680" b="1">
+                <a:solidFill>
+                  <a:srgbClr val="4F6B00"/>
+                </a:solidFill>
+                <a:latin typeface="Inter"/>
+              </a:defRPr>
+            </a:pPr>
+            <a:r>
+              <a:rPr>
+                <a:latin typeface="Inter"/>
+              </a:rPr>
+              <a:t>Illustrative, Gradient Maintained — demo data, not the client's holdings or managers</a:t>
+            </a:r>
+          </a:p>
+        </p:txBody>
+      </p:sp>
+      <p:sp>
+        <p:nvSpPr>
+          <p:cNvPr id="5" name="TextBox 4"/>
+          <p:cNvSpPr txBox="1"/>
+          <p:nvPr/>
+        </p:nvSpPr>
+        <p:spPr>
+          <a:xfrm>
             <a:off x="640080" y="566928"/>
             <a:ext cx="10058400" cy="530352"/>
           </a:xfrm>
@@ -14067,7 +14487,7 @@
       </p:sp>
       <p:sp>
         <p:nvSpPr>
-          <p:cNvPr id="5" name="Rectangle 4"/>
+          <p:cNvPr id="6" name="Rectangle 5"/>
           <p:cNvSpPr/>
           <p:nvPr/>
         </p:nvSpPr>
@@ -14116,7 +14536,7 @@
       </p:sp>
       <p:sp>
         <p:nvSpPr>
-          <p:cNvPr id="6" name="Rectangle 5"/>
+          <p:cNvPr id="7" name="Rectangle 6"/>
           <p:cNvSpPr/>
           <p:nvPr/>
         </p:nvSpPr>
@@ -14165,7 +14585,7 @@
       </p:sp>
       <p:sp>
         <p:nvSpPr>
-          <p:cNvPr id="7" name="TextBox 6"/>
+          <p:cNvPr id="8" name="TextBox 7"/>
           <p:cNvSpPr txBox="1"/>
           <p:nvPr/>
         </p:nvSpPr>
@@ -14207,7 +14627,7 @@
       </p:sp>
       <p:graphicFrame>
         <p:nvGraphicFramePr>
-          <p:cNvPr id="8" name="Table 7"/>
+          <p:cNvPr id="9" name="Table 8"/>
           <p:cNvGraphicFramePr>
             <a:graphicFrameLocks noGrp="1"/>
           </p:cNvGraphicFramePr>
@@ -14272,7 +14692,7 @@
                         <a:rPr>
                           <a:latin typeface="Inter"/>
                         </a:rPr>
-                        <a:t>2026 Strategic CMA (TEST) [S6]</a:t>
+                        <a:t>2026 Strategic CMA [S6]</a:t>
                       </a:r>
                     </a:p>
                   </a:txBody>
@@ -14513,7 +14933,7 @@
       </p:graphicFrame>
       <p:sp>
         <p:nvSpPr>
-          <p:cNvPr id="9" name="Rectangle 8"/>
+          <p:cNvPr id="10" name="Rectangle 9"/>
           <p:cNvSpPr/>
           <p:nvPr/>
         </p:nvSpPr>
@@ -14562,7 +14982,7 @@
       </p:sp>
       <p:sp>
         <p:nvSpPr>
-          <p:cNvPr id="10" name="TextBox 9"/>
+          <p:cNvPr id="11" name="TextBox 10"/>
           <p:cNvSpPr txBox="1"/>
           <p:nvPr/>
         </p:nvSpPr>
@@ -14604,7 +15024,7 @@
       </p:sp>
       <p:sp>
         <p:nvSpPr>
-          <p:cNvPr id="11" name="TextBox 10"/>
+          <p:cNvPr id="12" name="TextBox 11"/>
           <p:cNvSpPr txBox="1"/>
           <p:nvPr/>
         </p:nvSpPr>
@@ -14639,14 +15059,14 @@
               <a:rPr>
                 <a:latin typeface="Inter"/>
               </a:rPr>
-              <a:t>TEST DATA — fictional portfolio for rendering tests only · Data as of 2026-06-30</a:t>
+              <a:t>Confidential — Investment Committee · Data as of 2026-06-30</a:t>
             </a:r>
           </a:p>
         </p:txBody>
       </p:sp>
       <p:sp>
         <p:nvSpPr>
-          <p:cNvPr id="12" name="TextBox 11"/>
+          <p:cNvPr id="13" name="TextBox 12"/>
           <p:cNvSpPr txBox="1"/>
           <p:nvPr/>
         </p:nvSpPr>
@@ -14761,6 +15181,48 @@
         </p:nvSpPr>
         <p:spPr>
           <a:xfrm>
+            <a:off x="5897880" y="310896"/>
+            <a:ext cx="4800600" cy="256032"/>
+          </a:xfrm>
+          <a:prstGeom prst="rect">
+            <a:avLst/>
+          </a:prstGeom>
+          <a:noFill/>
+        </p:spPr>
+        <p:txBody>
+          <a:bodyPr wrap="none" lIns="9144" rIns="9144" tIns="9144" bIns="9144" anchor="t">
+            <a:spAutoFit/>
+          </a:bodyPr>
+          <a:lstStyle/>
+          <a:p>
+            <a:pPr algn="r">
+              <a:spcAft>
+                <a:spcPts val="0"/>
+              </a:spcAft>
+              <a:defRPr sz="680" b="1">
+                <a:solidFill>
+                  <a:srgbClr val="4F6B00"/>
+                </a:solidFill>
+                <a:latin typeface="Inter"/>
+              </a:defRPr>
+            </a:pPr>
+            <a:r>
+              <a:rPr>
+                <a:latin typeface="Inter"/>
+              </a:rPr>
+              <a:t>Illustrative, Gradient Maintained — demo data, not the client's holdings or managers</a:t>
+            </a:r>
+          </a:p>
+        </p:txBody>
+      </p:sp>
+      <p:sp>
+        <p:nvSpPr>
+          <p:cNvPr id="4" name="TextBox 3"/>
+          <p:cNvSpPr txBox="1"/>
+          <p:nvPr/>
+        </p:nvSpPr>
+        <p:spPr>
+          <a:xfrm>
             <a:off x="640080" y="566928"/>
             <a:ext cx="10058400" cy="530352"/>
           </a:xfrm>
@@ -14797,7 +15259,7 @@
       </p:sp>
       <p:sp>
         <p:nvSpPr>
-          <p:cNvPr id="4" name="Rectangle 3"/>
+          <p:cNvPr id="5" name="Rectangle 4"/>
           <p:cNvSpPr/>
           <p:nvPr/>
         </p:nvSpPr>
@@ -14846,7 +15308,7 @@
       </p:sp>
       <p:sp>
         <p:nvSpPr>
-          <p:cNvPr id="5" name="Rectangle 4"/>
+          <p:cNvPr id="6" name="Rectangle 5"/>
           <p:cNvSpPr/>
           <p:nvPr/>
         </p:nvSpPr>
@@ -14895,7 +15357,7 @@
       </p:sp>
       <p:sp>
         <p:nvSpPr>
-          <p:cNvPr id="6" name="TextBox 5"/>
+          <p:cNvPr id="7" name="TextBox 6"/>
           <p:cNvSpPr txBox="1"/>
           <p:nvPr/>
         </p:nvSpPr>
@@ -14937,7 +15399,7 @@
       </p:sp>
       <p:sp>
         <p:nvSpPr>
-          <p:cNvPr id="7" name="Rectangle 6"/>
+          <p:cNvPr id="8" name="Rectangle 7"/>
           <p:cNvSpPr/>
           <p:nvPr/>
         </p:nvSpPr>
@@ -14986,7 +15448,7 @@
       </p:sp>
       <p:sp>
         <p:nvSpPr>
-          <p:cNvPr id="8" name="Rectangle 7"/>
+          <p:cNvPr id="9" name="Rectangle 8"/>
           <p:cNvSpPr/>
           <p:nvPr/>
         </p:nvSpPr>
@@ -15035,7 +15497,7 @@
       </p:sp>
       <p:sp>
         <p:nvSpPr>
-          <p:cNvPr id="9" name="TextBox 8"/>
+          <p:cNvPr id="10" name="TextBox 9"/>
           <p:cNvSpPr txBox="1"/>
           <p:nvPr/>
         </p:nvSpPr>
@@ -15077,7 +15539,7 @@
       </p:sp>
       <p:sp>
         <p:nvSpPr>
-          <p:cNvPr id="10" name="TextBox 9"/>
+          <p:cNvPr id="11" name="TextBox 10"/>
           <p:cNvSpPr txBox="1"/>
           <p:nvPr/>
         </p:nvSpPr>
@@ -15119,7 +15581,7 @@
       </p:sp>
       <p:sp>
         <p:nvSpPr>
-          <p:cNvPr id="11" name="Rectangle 10"/>
+          <p:cNvPr id="12" name="Rectangle 11"/>
           <p:cNvSpPr/>
           <p:nvPr/>
         </p:nvSpPr>
@@ -15168,7 +15630,7 @@
       </p:sp>
       <p:sp>
         <p:nvSpPr>
-          <p:cNvPr id="12" name="Rectangle 11"/>
+          <p:cNvPr id="13" name="Rectangle 12"/>
           <p:cNvSpPr/>
           <p:nvPr/>
         </p:nvSpPr>
@@ -15217,7 +15679,7 @@
       </p:sp>
       <p:sp>
         <p:nvSpPr>
-          <p:cNvPr id="13" name="TextBox 12"/>
+          <p:cNvPr id="14" name="TextBox 13"/>
           <p:cNvSpPr txBox="1"/>
           <p:nvPr/>
         </p:nvSpPr>
@@ -15259,7 +15721,7 @@
       </p:sp>
       <p:sp>
         <p:nvSpPr>
-          <p:cNvPr id="14" name="TextBox 13"/>
+          <p:cNvPr id="15" name="TextBox 14"/>
           <p:cNvSpPr txBox="1"/>
           <p:nvPr/>
         </p:nvSpPr>
@@ -15301,7 +15763,7 @@
       </p:sp>
       <p:sp>
         <p:nvSpPr>
-          <p:cNvPr id="15" name="TextBox 14"/>
+          <p:cNvPr id="16" name="TextBox 15"/>
           <p:cNvSpPr txBox="1"/>
           <p:nvPr/>
         </p:nvSpPr>
@@ -15343,7 +15805,7 @@
       </p:sp>
       <p:sp>
         <p:nvSpPr>
-          <p:cNvPr id="16" name="Rectangle 15"/>
+          <p:cNvPr id="17" name="Rectangle 16"/>
           <p:cNvSpPr/>
           <p:nvPr/>
         </p:nvSpPr>
@@ -15392,7 +15854,7 @@
       </p:sp>
       <p:sp>
         <p:nvSpPr>
-          <p:cNvPr id="17" name="Rectangle 16"/>
+          <p:cNvPr id="18" name="Rectangle 17"/>
           <p:cNvSpPr/>
           <p:nvPr/>
         </p:nvSpPr>
@@ -15441,7 +15903,7 @@
       </p:sp>
       <p:sp>
         <p:nvSpPr>
-          <p:cNvPr id="18" name="TextBox 17"/>
+          <p:cNvPr id="19" name="TextBox 18"/>
           <p:cNvSpPr txBox="1"/>
           <p:nvPr/>
         </p:nvSpPr>
@@ -15483,7 +15945,7 @@
       </p:sp>
       <p:sp>
         <p:nvSpPr>
-          <p:cNvPr id="19" name="TextBox 18"/>
+          <p:cNvPr id="20" name="TextBox 19"/>
           <p:cNvSpPr txBox="1"/>
           <p:nvPr/>
         </p:nvSpPr>
@@ -15525,7 +15987,7 @@
       </p:sp>
       <p:sp>
         <p:nvSpPr>
-          <p:cNvPr id="20" name="TextBox 19"/>
+          <p:cNvPr id="21" name="TextBox 20"/>
           <p:cNvSpPr txBox="1"/>
           <p:nvPr/>
         </p:nvSpPr>
@@ -15567,7 +16029,7 @@
       </p:sp>
       <p:sp>
         <p:nvSpPr>
-          <p:cNvPr id="21" name="Rectangle 20"/>
+          <p:cNvPr id="22" name="Rectangle 21"/>
           <p:cNvSpPr/>
           <p:nvPr/>
         </p:nvSpPr>
@@ -15616,7 +16078,7 @@
       </p:sp>
       <p:sp>
         <p:nvSpPr>
-          <p:cNvPr id="22" name="Rectangle 21"/>
+          <p:cNvPr id="23" name="Rectangle 22"/>
           <p:cNvSpPr/>
           <p:nvPr/>
         </p:nvSpPr>
@@ -15665,7 +16127,7 @@
       </p:sp>
       <p:sp>
         <p:nvSpPr>
-          <p:cNvPr id="23" name="TextBox 22"/>
+          <p:cNvPr id="24" name="TextBox 23"/>
           <p:cNvSpPr txBox="1"/>
           <p:nvPr/>
         </p:nvSpPr>
@@ -15707,7 +16169,7 @@
       </p:sp>
       <p:sp>
         <p:nvSpPr>
-          <p:cNvPr id="24" name="TextBox 23"/>
+          <p:cNvPr id="25" name="TextBox 24"/>
           <p:cNvSpPr txBox="1"/>
           <p:nvPr/>
         </p:nvSpPr>
@@ -15749,7 +16211,7 @@
       </p:sp>
       <p:sp>
         <p:nvSpPr>
-          <p:cNvPr id="25" name="TextBox 24"/>
+          <p:cNvPr id="26" name="TextBox 25"/>
           <p:cNvSpPr txBox="1"/>
           <p:nvPr/>
         </p:nvSpPr>
@@ -15791,7 +16253,7 @@
       </p:sp>
       <p:sp>
         <p:nvSpPr>
-          <p:cNvPr id="26" name="Rectangle 25"/>
+          <p:cNvPr id="27" name="Rectangle 26"/>
           <p:cNvSpPr/>
           <p:nvPr/>
         </p:nvSpPr>
@@ -15840,7 +16302,7 @@
       </p:sp>
       <p:sp>
         <p:nvSpPr>
-          <p:cNvPr id="27" name="Rectangle 26"/>
+          <p:cNvPr id="28" name="Rectangle 27"/>
           <p:cNvSpPr/>
           <p:nvPr/>
         </p:nvSpPr>
@@ -15889,7 +16351,7 @@
       </p:sp>
       <p:sp>
         <p:nvSpPr>
-          <p:cNvPr id="28" name="TextBox 27"/>
+          <p:cNvPr id="29" name="TextBox 28"/>
           <p:cNvSpPr txBox="1"/>
           <p:nvPr/>
         </p:nvSpPr>
@@ -15931,7 +16393,7 @@
       </p:sp>
       <p:sp>
         <p:nvSpPr>
-          <p:cNvPr id="29" name="TextBox 28"/>
+          <p:cNvPr id="30" name="TextBox 29"/>
           <p:cNvSpPr txBox="1"/>
           <p:nvPr/>
         </p:nvSpPr>
@@ -15973,7 +16435,7 @@
       </p:sp>
       <p:sp>
         <p:nvSpPr>
-          <p:cNvPr id="30" name="TextBox 29"/>
+          <p:cNvPr id="31" name="TextBox 30"/>
           <p:cNvSpPr txBox="1"/>
           <p:nvPr/>
         </p:nvSpPr>
@@ -16015,7 +16477,7 @@
       </p:sp>
       <p:sp>
         <p:nvSpPr>
-          <p:cNvPr id="31" name="Rectangle 30"/>
+          <p:cNvPr id="32" name="Rectangle 31"/>
           <p:cNvSpPr/>
           <p:nvPr/>
         </p:nvSpPr>
@@ -16064,7 +16526,7 @@
       </p:sp>
       <p:sp>
         <p:nvSpPr>
-          <p:cNvPr id="32" name="TextBox 31"/>
+          <p:cNvPr id="33" name="TextBox 32"/>
           <p:cNvSpPr txBox="1"/>
           <p:nvPr/>
         </p:nvSpPr>
@@ -16106,7 +16568,7 @@
       </p:sp>
       <p:sp>
         <p:nvSpPr>
-          <p:cNvPr id="33" name="TextBox 32"/>
+          <p:cNvPr id="34" name="TextBox 33"/>
           <p:cNvSpPr txBox="1"/>
           <p:nvPr/>
         </p:nvSpPr>
@@ -16141,14 +16603,14 @@
               <a:rPr>
                 <a:latin typeface="Inter"/>
               </a:rPr>
-              <a:t>TEST DATA — fictional portfolio for rendering tests only · Data as of 2026-06-30</a:t>
+              <a:t>Confidential — Investment Committee · Data as of 2026-06-30</a:t>
             </a:r>
           </a:p>
         </p:txBody>
       </p:sp>
       <p:sp>
         <p:nvSpPr>
-          <p:cNvPr id="34" name="TextBox 33"/>
+          <p:cNvPr id="35" name="TextBox 34"/>
           <p:cNvSpPr txBox="1"/>
           <p:nvPr/>
         </p:nvSpPr>
@@ -16264,7 +16726,7 @@
         <p:spPr>
           <a:xfrm>
             <a:off x="640080" y="329184"/>
-            <a:ext cx="9875520" cy="182880"/>
+            <a:ext cx="5303520" cy="182880"/>
           </a:xfrm>
           <a:prstGeom prst="rect">
             <a:avLst/>
@@ -16305,6 +16767,48 @@
         </p:nvSpPr>
         <p:spPr>
           <a:xfrm>
+            <a:off x="5897880" y="310896"/>
+            <a:ext cx="4800600" cy="256032"/>
+          </a:xfrm>
+          <a:prstGeom prst="rect">
+            <a:avLst/>
+          </a:prstGeom>
+          <a:noFill/>
+        </p:spPr>
+        <p:txBody>
+          <a:bodyPr wrap="none" lIns="9144" rIns="9144" tIns="9144" bIns="9144" anchor="t">
+            <a:spAutoFit/>
+          </a:bodyPr>
+          <a:lstStyle/>
+          <a:p>
+            <a:pPr algn="r">
+              <a:spcAft>
+                <a:spcPts val="0"/>
+              </a:spcAft>
+              <a:defRPr sz="680" b="1">
+                <a:solidFill>
+                  <a:srgbClr val="4F6B00"/>
+                </a:solidFill>
+                <a:latin typeface="Inter"/>
+              </a:defRPr>
+            </a:pPr>
+            <a:r>
+              <a:rPr>
+                <a:latin typeface="Inter"/>
+              </a:rPr>
+              <a:t>Illustrative, Gradient Maintained — demo data, not the client's holdings or managers</a:t>
+            </a:r>
+          </a:p>
+        </p:txBody>
+      </p:sp>
+      <p:sp>
+        <p:nvSpPr>
+          <p:cNvPr id="5" name="TextBox 4"/>
+          <p:cNvSpPr txBox="1"/>
+          <p:nvPr/>
+        </p:nvSpPr>
+        <p:spPr>
+          <a:xfrm>
             <a:off x="640080" y="566928"/>
             <a:ext cx="10058400" cy="530352"/>
           </a:xfrm>
@@ -16341,7 +16845,7 @@
       </p:sp>
       <p:sp>
         <p:nvSpPr>
-          <p:cNvPr id="5" name="Rectangle 4"/>
+          <p:cNvPr id="6" name="Rectangle 5"/>
           <p:cNvSpPr/>
           <p:nvPr/>
         </p:nvSpPr>
@@ -16390,7 +16894,7 @@
       </p:sp>
       <p:sp>
         <p:nvSpPr>
-          <p:cNvPr id="6" name="Rectangle 5"/>
+          <p:cNvPr id="7" name="Rectangle 6"/>
           <p:cNvSpPr/>
           <p:nvPr/>
         </p:nvSpPr>
@@ -16439,7 +16943,7 @@
       </p:sp>
       <p:sp>
         <p:nvSpPr>
-          <p:cNvPr id="7" name="TextBox 6"/>
+          <p:cNvPr id="8" name="TextBox 7"/>
           <p:cNvSpPr txBox="1"/>
           <p:nvPr/>
         </p:nvSpPr>
@@ -16481,7 +16985,7 @@
       </p:sp>
       <p:sp>
         <p:nvSpPr>
-          <p:cNvPr id="8" name="TextBox 7"/>
+          <p:cNvPr id="9" name="TextBox 8"/>
           <p:cNvSpPr txBox="1"/>
           <p:nvPr/>
         </p:nvSpPr>
@@ -16516,14 +17020,14 @@
               <a:rPr>
                 <a:latin typeface="Inter"/>
               </a:rPr>
-              <a:t>MARKETABLE-ALTERNATIVES FORWARD ASSUMPTIONS (TEST)</a:t>
+              <a:t>MARKETABLE-ALTERNATIVES FORWARD ASSUMPTIONS</a:t>
             </a:r>
           </a:p>
         </p:txBody>
       </p:sp>
       <p:graphicFrame>
         <p:nvGraphicFramePr>
-          <p:cNvPr id="9" name="Table 8"/>
+          <p:cNvPr id="10" name="Table 9"/>
           <p:cNvGraphicFramePr>
             <a:graphicFrameLocks noGrp="1"/>
           </p:cNvGraphicFramePr>
@@ -16799,7 +17303,7 @@
       </p:graphicFrame>
       <p:sp>
         <p:nvSpPr>
-          <p:cNvPr id="10" name="Rectangle 9"/>
+          <p:cNvPr id="11" name="Rectangle 10"/>
           <p:cNvSpPr/>
           <p:nvPr/>
         </p:nvSpPr>
@@ -16848,7 +17352,7 @@
       </p:sp>
       <p:sp>
         <p:nvSpPr>
-          <p:cNvPr id="11" name="TextBox 10"/>
+          <p:cNvPr id="12" name="TextBox 11"/>
           <p:cNvSpPr txBox="1"/>
           <p:nvPr/>
         </p:nvSpPr>
@@ -16883,14 +17387,14 @@
               <a:rPr>
                 <a:latin typeface="Inter"/>
               </a:rPr>
-              <a:t>Sources: none cited</a:t>
+              <a:t>Sources: S1</a:t>
             </a:r>
           </a:p>
         </p:txBody>
       </p:sp>
       <p:sp>
         <p:nvSpPr>
-          <p:cNvPr id="12" name="TextBox 11"/>
+          <p:cNvPr id="13" name="TextBox 12"/>
           <p:cNvSpPr txBox="1"/>
           <p:nvPr/>
         </p:nvSpPr>
@@ -16925,14 +17429,14 @@
               <a:rPr>
                 <a:latin typeface="Inter"/>
               </a:rPr>
-              <a:t>TEST DATA — fictional portfolio for rendering tests only · Data as of 2026-06-30</a:t>
+              <a:t>Confidential — Investment Committee · Data as of 2026-06-30</a:t>
             </a:r>
           </a:p>
         </p:txBody>
       </p:sp>
       <p:sp>
         <p:nvSpPr>
-          <p:cNvPr id="13" name="TextBox 12"/>
+          <p:cNvPr id="14" name="TextBox 13"/>
           <p:cNvSpPr txBox="1"/>
           <p:nvPr/>
         </p:nvSpPr>
@@ -17048,7 +17552,7 @@
         <p:spPr>
           <a:xfrm>
             <a:off x="640080" y="329184"/>
-            <a:ext cx="9875520" cy="182880"/>
+            <a:ext cx="5303520" cy="182880"/>
           </a:xfrm>
           <a:prstGeom prst="rect">
             <a:avLst/>
@@ -17089,6 +17593,48 @@
         </p:nvSpPr>
         <p:spPr>
           <a:xfrm>
+            <a:off x="5897880" y="310896"/>
+            <a:ext cx="4800600" cy="256032"/>
+          </a:xfrm>
+          <a:prstGeom prst="rect">
+            <a:avLst/>
+          </a:prstGeom>
+          <a:noFill/>
+        </p:spPr>
+        <p:txBody>
+          <a:bodyPr wrap="none" lIns="9144" rIns="9144" tIns="9144" bIns="9144" anchor="t">
+            <a:spAutoFit/>
+          </a:bodyPr>
+          <a:lstStyle/>
+          <a:p>
+            <a:pPr algn="r">
+              <a:spcAft>
+                <a:spcPts val="0"/>
+              </a:spcAft>
+              <a:defRPr sz="680" b="1">
+                <a:solidFill>
+                  <a:srgbClr val="4F6B00"/>
+                </a:solidFill>
+                <a:latin typeface="Inter"/>
+              </a:defRPr>
+            </a:pPr>
+            <a:r>
+              <a:rPr>
+                <a:latin typeface="Inter"/>
+              </a:rPr>
+              <a:t>Illustrative, Gradient Maintained — demo data, not the client's holdings or managers</a:t>
+            </a:r>
+          </a:p>
+        </p:txBody>
+      </p:sp>
+      <p:sp>
+        <p:nvSpPr>
+          <p:cNvPr id="5" name="TextBox 4"/>
+          <p:cNvSpPr txBox="1"/>
+          <p:nvPr/>
+        </p:nvSpPr>
+        <p:spPr>
+          <a:xfrm>
             <a:off x="640080" y="566928"/>
             <a:ext cx="10058400" cy="530352"/>
           </a:xfrm>
@@ -17125,7 +17671,7 @@
       </p:sp>
       <p:sp>
         <p:nvSpPr>
-          <p:cNvPr id="5" name="Rectangle 4"/>
+          <p:cNvPr id="6" name="Rectangle 5"/>
           <p:cNvSpPr/>
           <p:nvPr/>
         </p:nvSpPr>
@@ -17174,7 +17720,7 @@
       </p:sp>
       <p:sp>
         <p:nvSpPr>
-          <p:cNvPr id="6" name="Rectangle 5"/>
+          <p:cNvPr id="7" name="Rectangle 6"/>
           <p:cNvSpPr/>
           <p:nvPr/>
         </p:nvSpPr>
@@ -17223,7 +17769,7 @@
       </p:sp>
       <p:sp>
         <p:nvSpPr>
-          <p:cNvPr id="7" name="TextBox 6"/>
+          <p:cNvPr id="8" name="TextBox 7"/>
           <p:cNvSpPr txBox="1"/>
           <p:nvPr/>
         </p:nvSpPr>
@@ -17265,7 +17811,7 @@
       </p:sp>
       <p:sp>
         <p:nvSpPr>
-          <p:cNvPr id="8" name="Rectangle 7"/>
+          <p:cNvPr id="9" name="Rectangle 8"/>
           <p:cNvSpPr/>
           <p:nvPr/>
         </p:nvSpPr>
@@ -17314,7 +17860,7 @@
       </p:sp>
       <p:sp>
         <p:nvSpPr>
-          <p:cNvPr id="9" name="Rectangle 8"/>
+          <p:cNvPr id="10" name="Rectangle 9"/>
           <p:cNvSpPr/>
           <p:nvPr/>
         </p:nvSpPr>
@@ -17363,7 +17909,7 @@
       </p:sp>
       <p:sp>
         <p:nvSpPr>
-          <p:cNvPr id="10" name="TextBox 9"/>
+          <p:cNvPr id="11" name="TextBox 10"/>
           <p:cNvSpPr txBox="1"/>
           <p:nvPr/>
         </p:nvSpPr>
@@ -17405,7 +17951,7 @@
       </p:sp>
       <p:sp>
         <p:nvSpPr>
-          <p:cNvPr id="11" name="TextBox 10"/>
+          <p:cNvPr id="12" name="TextBox 11"/>
           <p:cNvSpPr txBox="1"/>
           <p:nvPr/>
         </p:nvSpPr>
@@ -17447,7 +17993,7 @@
       </p:sp>
       <p:sp>
         <p:nvSpPr>
-          <p:cNvPr id="12" name="TextBox 11"/>
+          <p:cNvPr id="13" name="TextBox 12"/>
           <p:cNvSpPr txBox="1"/>
           <p:nvPr/>
         </p:nvSpPr>
@@ -17489,7 +18035,7 @@
       </p:sp>
       <p:sp>
         <p:nvSpPr>
-          <p:cNvPr id="13" name="Rectangle 12"/>
+          <p:cNvPr id="14" name="Rectangle 13"/>
           <p:cNvSpPr/>
           <p:nvPr/>
         </p:nvSpPr>
@@ -17538,7 +18084,7 @@
       </p:sp>
       <p:sp>
         <p:nvSpPr>
-          <p:cNvPr id="14" name="TextBox 13"/>
+          <p:cNvPr id="15" name="TextBox 14"/>
           <p:cNvSpPr txBox="1"/>
           <p:nvPr/>
         </p:nvSpPr>
@@ -17580,7 +18126,7 @@
       </p:sp>
       <p:sp>
         <p:nvSpPr>
-          <p:cNvPr id="15" name="TextBox 14"/>
+          <p:cNvPr id="16" name="TextBox 15"/>
           <p:cNvSpPr txBox="1"/>
           <p:nvPr/>
         </p:nvSpPr>
@@ -17615,14 +18161,14 @@
               <a:rPr>
                 <a:latin typeface="Inter"/>
               </a:rPr>
-              <a:t>TEST DATA — fictional portfolio for rendering tests only · Data as of 2026-06-30</a:t>
+              <a:t>Confidential — Investment Committee · Data as of 2026-06-30</a:t>
             </a:r>
           </a:p>
         </p:txBody>
       </p:sp>
       <p:sp>
         <p:nvSpPr>
-          <p:cNvPr id="16" name="TextBox 15"/>
+          <p:cNvPr id="17" name="TextBox 16"/>
           <p:cNvSpPr txBox="1"/>
           <p:nvPr/>
         </p:nvSpPr>
@@ -17737,6 +18283,48 @@
         </p:nvSpPr>
         <p:spPr>
           <a:xfrm>
+            <a:off x="5897880" y="310896"/>
+            <a:ext cx="4800600" cy="256032"/>
+          </a:xfrm>
+          <a:prstGeom prst="rect">
+            <a:avLst/>
+          </a:prstGeom>
+          <a:noFill/>
+        </p:spPr>
+        <p:txBody>
+          <a:bodyPr wrap="none" lIns="9144" rIns="9144" tIns="9144" bIns="9144" anchor="t">
+            <a:spAutoFit/>
+          </a:bodyPr>
+          <a:lstStyle/>
+          <a:p>
+            <a:pPr algn="r">
+              <a:spcAft>
+                <a:spcPts val="0"/>
+              </a:spcAft>
+              <a:defRPr sz="680" b="1">
+                <a:solidFill>
+                  <a:srgbClr val="4F6B00"/>
+                </a:solidFill>
+                <a:latin typeface="Inter"/>
+              </a:defRPr>
+            </a:pPr>
+            <a:r>
+              <a:rPr>
+                <a:latin typeface="Inter"/>
+              </a:rPr>
+              <a:t>Illustrative, Gradient Maintained — demo data, not the client's holdings or managers</a:t>
+            </a:r>
+          </a:p>
+        </p:txBody>
+      </p:sp>
+      <p:sp>
+        <p:nvSpPr>
+          <p:cNvPr id="4" name="TextBox 3"/>
+          <p:cNvSpPr txBox="1"/>
+          <p:nvPr/>
+        </p:nvSpPr>
+        <p:spPr>
+          <a:xfrm>
             <a:off x="640080" y="566928"/>
             <a:ext cx="10058400" cy="530352"/>
           </a:xfrm>
@@ -17773,7 +18361,7 @@
       </p:sp>
       <p:sp>
         <p:nvSpPr>
-          <p:cNvPr id="4" name="Rectangle 3"/>
+          <p:cNvPr id="5" name="Rectangle 4"/>
           <p:cNvSpPr/>
           <p:nvPr/>
         </p:nvSpPr>
@@ -17822,7 +18410,7 @@
       </p:sp>
       <p:sp>
         <p:nvSpPr>
-          <p:cNvPr id="5" name="Rectangle 4"/>
+          <p:cNvPr id="6" name="Rectangle 5"/>
           <p:cNvSpPr/>
           <p:nvPr/>
         </p:nvSpPr>
@@ -17871,7 +18459,7 @@
       </p:sp>
       <p:sp>
         <p:nvSpPr>
-          <p:cNvPr id="6" name="TextBox 5"/>
+          <p:cNvPr id="7" name="TextBox 6"/>
           <p:cNvSpPr txBox="1"/>
           <p:nvPr/>
         </p:nvSpPr>
@@ -17913,7 +18501,7 @@
       </p:sp>
       <p:sp>
         <p:nvSpPr>
-          <p:cNvPr id="7" name="TextBox 6"/>
+          <p:cNvPr id="8" name="TextBox 7"/>
           <p:cNvSpPr txBox="1"/>
           <p:nvPr/>
         </p:nvSpPr>
@@ -17948,14 +18536,14 @@
               <a:rPr>
                 <a:latin typeface="Inter"/>
               </a:rPr>
-              <a:t>LIQUIDITY COMPOSITION (TEST)</a:t>
+              <a:t>LIQUIDITY COMPOSITION</a:t>
             </a:r>
           </a:p>
         </p:txBody>
       </p:sp>
       <p:graphicFrame>
         <p:nvGraphicFramePr>
-          <p:cNvPr id="8" name="Chart 7"/>
+          <p:cNvPr id="9" name="Chart 8"/>
           <p:cNvGraphicFramePr>
             <a:graphicFrameLocks noGrp="1"/>
           </p:cNvGraphicFramePr>
@@ -17973,7 +18561,7 @@
       </p:graphicFrame>
       <p:sp>
         <p:nvSpPr>
-          <p:cNvPr id="9" name="Rectangle 8"/>
+          <p:cNvPr id="10" name="Rectangle 9"/>
           <p:cNvSpPr/>
           <p:nvPr/>
         </p:nvSpPr>
@@ -18022,7 +18610,7 @@
       </p:sp>
       <p:sp>
         <p:nvSpPr>
-          <p:cNvPr id="10" name="TextBox 9"/>
+          <p:cNvPr id="11" name="TextBox 10"/>
           <p:cNvSpPr txBox="1"/>
           <p:nvPr/>
         </p:nvSpPr>
@@ -18057,14 +18645,14 @@
               <a:rPr>
                 <a:latin typeface="Inter"/>
               </a:rPr>
-              <a:t>Sources: none cited</a:t>
+              <a:t>Sources: S1</a:t>
             </a:r>
           </a:p>
         </p:txBody>
       </p:sp>
       <p:sp>
         <p:nvSpPr>
-          <p:cNvPr id="11" name="TextBox 10"/>
+          <p:cNvPr id="12" name="TextBox 11"/>
           <p:cNvSpPr txBox="1"/>
           <p:nvPr/>
         </p:nvSpPr>
@@ -18099,14 +18687,14 @@
               <a:rPr>
                 <a:latin typeface="Inter"/>
               </a:rPr>
-              <a:t>TEST DATA — fictional portfolio for rendering tests only · Data as of 2026-06-30</a:t>
+              <a:t>Confidential — Investment Committee · Data as of 2026-06-30</a:t>
             </a:r>
           </a:p>
         </p:txBody>
       </p:sp>
       <p:sp>
         <p:nvSpPr>
-          <p:cNvPr id="12" name="TextBox 11"/>
+          <p:cNvPr id="13" name="TextBox 12"/>
           <p:cNvSpPr txBox="1"/>
           <p:nvPr/>
         </p:nvSpPr>
@@ -18221,6 +18809,48 @@
         </p:nvSpPr>
         <p:spPr>
           <a:xfrm>
+            <a:off x="5897880" y="310896"/>
+            <a:ext cx="4800600" cy="256032"/>
+          </a:xfrm>
+          <a:prstGeom prst="rect">
+            <a:avLst/>
+          </a:prstGeom>
+          <a:noFill/>
+        </p:spPr>
+        <p:txBody>
+          <a:bodyPr wrap="none" lIns="9144" rIns="9144" tIns="9144" bIns="9144" anchor="t">
+            <a:spAutoFit/>
+          </a:bodyPr>
+          <a:lstStyle/>
+          <a:p>
+            <a:pPr algn="r">
+              <a:spcAft>
+                <a:spcPts val="0"/>
+              </a:spcAft>
+              <a:defRPr sz="680" b="1">
+                <a:solidFill>
+                  <a:srgbClr val="4F6B00"/>
+                </a:solidFill>
+                <a:latin typeface="Inter"/>
+              </a:defRPr>
+            </a:pPr>
+            <a:r>
+              <a:rPr>
+                <a:latin typeface="Inter"/>
+              </a:rPr>
+              <a:t>Illustrative, Gradient Maintained — demo data, not the client's holdings or managers</a:t>
+            </a:r>
+          </a:p>
+        </p:txBody>
+      </p:sp>
+      <p:sp>
+        <p:nvSpPr>
+          <p:cNvPr id="4" name="TextBox 3"/>
+          <p:cNvSpPr txBox="1"/>
+          <p:nvPr/>
+        </p:nvSpPr>
+        <p:spPr>
+          <a:xfrm>
             <a:off x="640080" y="566928"/>
             <a:ext cx="10058400" cy="530352"/>
           </a:xfrm>
@@ -18257,7 +18887,7 @@
       </p:sp>
       <p:sp>
         <p:nvSpPr>
-          <p:cNvPr id="4" name="Rectangle 3"/>
+          <p:cNvPr id="5" name="Rectangle 4"/>
           <p:cNvSpPr/>
           <p:nvPr/>
         </p:nvSpPr>
@@ -18306,7 +18936,7 @@
       </p:sp>
       <p:sp>
         <p:nvSpPr>
-          <p:cNvPr id="5" name="Rectangle 4"/>
+          <p:cNvPr id="6" name="Rectangle 5"/>
           <p:cNvSpPr/>
           <p:nvPr/>
         </p:nvSpPr>
@@ -18355,7 +18985,7 @@
       </p:sp>
       <p:sp>
         <p:nvSpPr>
-          <p:cNvPr id="6" name="TextBox 5"/>
+          <p:cNvPr id="7" name="TextBox 6"/>
           <p:cNvSpPr txBox="1"/>
           <p:nvPr/>
         </p:nvSpPr>
@@ -18397,7 +19027,7 @@
       </p:sp>
       <p:sp>
         <p:nvSpPr>
-          <p:cNvPr id="7" name="TextBox 6"/>
+          <p:cNvPr id="8" name="TextBox 7"/>
           <p:cNvSpPr txBox="1"/>
           <p:nvPr/>
         </p:nvSpPr>
@@ -18439,7 +19069,7 @@
       </p:sp>
       <p:graphicFrame>
         <p:nvGraphicFramePr>
-          <p:cNvPr id="8" name="Table 7"/>
+          <p:cNvPr id="9" name="Table 8"/>
           <p:cNvGraphicFramePr>
             <a:graphicFrameLocks noGrp="1"/>
           </p:cNvGraphicFramePr>
@@ -18879,7 +19509,7 @@
       </p:graphicFrame>
       <p:sp>
         <p:nvSpPr>
-          <p:cNvPr id="9" name="TextBox 8"/>
+          <p:cNvPr id="10" name="TextBox 9"/>
           <p:cNvSpPr txBox="1"/>
           <p:nvPr/>
         </p:nvSpPr>
@@ -18921,7 +19551,7 @@
       </p:sp>
       <p:graphicFrame>
         <p:nvGraphicFramePr>
-          <p:cNvPr id="10" name="Table 9"/>
+          <p:cNvPr id="11" name="Table 10"/>
           <p:cNvGraphicFramePr>
             <a:graphicFrameLocks noGrp="1"/>
           </p:cNvGraphicFramePr>
@@ -19099,7 +19729,7 @@
                         <a:rPr>
                           <a:latin typeface="Inter"/>
                         </a:rPr>
-                        <a:t>Example Alpha Partners (TEST)</a:t>
+                        <a:t>Example Alpha Partners</a:t>
                       </a:r>
                     </a:p>
                   </a:txBody>
@@ -19236,7 +19866,7 @@
                         <a:rPr>
                           <a:latin typeface="Inter"/>
                         </a:rPr>
-                        <a:t>Example Macro Fund (TEST)</a:t>
+                        <a:t>Example Macro Fund</a:t>
                       </a:r>
                     </a:p>
                   </a:txBody>
@@ -19373,7 +20003,7 @@
                         <a:rPr>
                           <a:latin typeface="Inter"/>
                         </a:rPr>
-                        <a:t>Example Relative Value Fund (TEST)</a:t>
+                        <a:t>Example Relative Value Fund</a:t>
                       </a:r>
                     </a:p>
                   </a:txBody>
@@ -19510,7 +20140,7 @@
                         <a:rPr>
                           <a:latin typeface="Inter"/>
                         </a:rPr>
-                        <a:t>Example Multi-Strategy Fund (TEST)</a:t>
+                        <a:t>Example Multi-Strategy Fund</a:t>
                       </a:r>
                     </a:p>
                   </a:txBody>
@@ -19635,7 +20265,7 @@
       </p:graphicFrame>
       <p:sp>
         <p:nvSpPr>
-          <p:cNvPr id="11" name="TextBox 10"/>
+          <p:cNvPr id="12" name="TextBox 11"/>
           <p:cNvSpPr txBox="1"/>
           <p:nvPr/>
         </p:nvSpPr>
@@ -19677,7 +20307,7 @@
       </p:sp>
       <p:sp>
         <p:nvSpPr>
-          <p:cNvPr id="12" name="Rectangle 11"/>
+          <p:cNvPr id="13" name="Rectangle 12"/>
           <p:cNvSpPr/>
           <p:nvPr/>
         </p:nvSpPr>
@@ -19726,7 +20356,7 @@
       </p:sp>
       <p:sp>
         <p:nvSpPr>
-          <p:cNvPr id="13" name="TextBox 12"/>
+          <p:cNvPr id="14" name="TextBox 13"/>
           <p:cNvSpPr txBox="1"/>
           <p:nvPr/>
         </p:nvSpPr>
@@ -19761,14 +20391,14 @@
               <a:rPr>
                 <a:latin typeface="Inter"/>
               </a:rPr>
-              <a:t>Sources: S8</a:t>
+              <a:t>Sources: S1 · S8</a:t>
             </a:r>
           </a:p>
         </p:txBody>
       </p:sp>
       <p:sp>
         <p:nvSpPr>
-          <p:cNvPr id="14" name="TextBox 13"/>
+          <p:cNvPr id="15" name="TextBox 14"/>
           <p:cNvSpPr txBox="1"/>
           <p:nvPr/>
         </p:nvSpPr>
@@ -19803,14 +20433,14 @@
               <a:rPr>
                 <a:latin typeface="Inter"/>
               </a:rPr>
-              <a:t>TEST DATA — fictional portfolio for rendering tests only · Data as of 2026-06-30</a:t>
+              <a:t>Confidential — Investment Committee · Data as of 2026-06-30</a:t>
             </a:r>
           </a:p>
         </p:txBody>
       </p:sp>
       <p:sp>
         <p:nvSpPr>
-          <p:cNvPr id="15" name="TextBox 14"/>
+          <p:cNvPr id="16" name="TextBox 15"/>
           <p:cNvSpPr txBox="1"/>
           <p:nvPr/>
         </p:nvSpPr>
@@ -19925,6 +20555,48 @@
         </p:nvSpPr>
         <p:spPr>
           <a:xfrm>
+            <a:off x="5897880" y="310896"/>
+            <a:ext cx="4800600" cy="256032"/>
+          </a:xfrm>
+          <a:prstGeom prst="rect">
+            <a:avLst/>
+          </a:prstGeom>
+          <a:noFill/>
+        </p:spPr>
+        <p:txBody>
+          <a:bodyPr wrap="none" lIns="9144" rIns="9144" tIns="9144" bIns="9144" anchor="t">
+            <a:spAutoFit/>
+          </a:bodyPr>
+          <a:lstStyle/>
+          <a:p>
+            <a:pPr algn="r">
+              <a:spcAft>
+                <a:spcPts val="0"/>
+              </a:spcAft>
+              <a:defRPr sz="680" b="1">
+                <a:solidFill>
+                  <a:srgbClr val="4F6B00"/>
+                </a:solidFill>
+                <a:latin typeface="Inter"/>
+              </a:defRPr>
+            </a:pPr>
+            <a:r>
+              <a:rPr>
+                <a:latin typeface="Inter"/>
+              </a:rPr>
+              <a:t>Illustrative, Gradient Maintained — demo data, not the client's holdings or managers</a:t>
+            </a:r>
+          </a:p>
+        </p:txBody>
+      </p:sp>
+      <p:sp>
+        <p:nvSpPr>
+          <p:cNvPr id="4" name="TextBox 3"/>
+          <p:cNvSpPr txBox="1"/>
+          <p:nvPr/>
+        </p:nvSpPr>
+        <p:spPr>
+          <a:xfrm>
             <a:off x="640080" y="566928"/>
             <a:ext cx="10058400" cy="530352"/>
           </a:xfrm>
@@ -19961,7 +20633,7 @@
       </p:sp>
       <p:sp>
         <p:nvSpPr>
-          <p:cNvPr id="4" name="Rectangle 3"/>
+          <p:cNvPr id="5" name="Rectangle 4"/>
           <p:cNvSpPr/>
           <p:nvPr/>
         </p:nvSpPr>
@@ -20010,7 +20682,7 @@
       </p:sp>
       <p:sp>
         <p:nvSpPr>
-          <p:cNvPr id="5" name="Rectangle 4"/>
+          <p:cNvPr id="6" name="Rectangle 5"/>
           <p:cNvSpPr/>
           <p:nvPr/>
         </p:nvSpPr>
@@ -20059,7 +20731,7 @@
       </p:sp>
       <p:sp>
         <p:nvSpPr>
-          <p:cNvPr id="6" name="TextBox 5"/>
+          <p:cNvPr id="7" name="TextBox 6"/>
           <p:cNvSpPr txBox="1"/>
           <p:nvPr/>
         </p:nvSpPr>
@@ -20101,7 +20773,7 @@
       </p:sp>
       <p:sp>
         <p:nvSpPr>
-          <p:cNvPr id="7" name="TextBox 6"/>
+          <p:cNvPr id="8" name="TextBox 7"/>
           <p:cNvSpPr txBox="1"/>
           <p:nvPr/>
         </p:nvSpPr>
@@ -20143,7 +20815,7 @@
       </p:sp>
       <p:graphicFrame>
         <p:nvGraphicFramePr>
-          <p:cNvPr id="8" name="Table 7"/>
+          <p:cNvPr id="9" name="Table 8"/>
           <p:cNvGraphicFramePr>
             <a:graphicFrameLocks noGrp="1"/>
           </p:cNvGraphicFramePr>
@@ -20349,7 +21021,7 @@
                         <a:rPr>
                           <a:latin typeface="Inter"/>
                         </a:rPr>
-                        <a:t>Example Alpha Partners (TEST)</a:t>
+                        <a:t>Example Alpha Partners</a:t>
                       </a:r>
                     </a:p>
                   </a:txBody>
@@ -20513,7 +21185,7 @@
                         <a:rPr>
                           <a:latin typeface="Inter"/>
                         </a:rPr>
-                        <a:t>Example Macro Fund (TEST)</a:t>
+                        <a:t>Example Macro Fund</a:t>
                       </a:r>
                     </a:p>
                   </a:txBody>
@@ -20677,7 +21349,7 @@
                         <a:rPr>
                           <a:latin typeface="Inter"/>
                         </a:rPr>
-                        <a:t>Proposed Relative Value Manager (TEST)</a:t>
+                        <a:t>Proposed Relative Value Manager</a:t>
                       </a:r>
                     </a:p>
                   </a:txBody>
@@ -20829,7 +21501,7 @@
       </p:graphicFrame>
       <p:sp>
         <p:nvSpPr>
-          <p:cNvPr id="9" name="Rectangle 8"/>
+          <p:cNvPr id="10" name="Rectangle 9"/>
           <p:cNvSpPr/>
           <p:nvPr/>
         </p:nvSpPr>
@@ -20878,7 +21550,7 @@
       </p:sp>
       <p:sp>
         <p:nvSpPr>
-          <p:cNvPr id="10" name="Rectangle 9"/>
+          <p:cNvPr id="11" name="Rectangle 10"/>
           <p:cNvSpPr/>
           <p:nvPr/>
         </p:nvSpPr>
@@ -20927,7 +21599,7 @@
       </p:sp>
       <p:sp>
         <p:nvSpPr>
-          <p:cNvPr id="11" name="TextBox 10"/>
+          <p:cNvPr id="12" name="TextBox 11"/>
           <p:cNvSpPr txBox="1"/>
           <p:nvPr/>
         </p:nvSpPr>
@@ -20969,7 +21641,7 @@
       </p:sp>
       <p:sp>
         <p:nvSpPr>
-          <p:cNvPr id="12" name="TextBox 11"/>
+          <p:cNvPr id="13" name="TextBox 12"/>
           <p:cNvSpPr txBox="1"/>
           <p:nvPr/>
         </p:nvSpPr>
@@ -21011,7 +21683,7 @@
       </p:sp>
       <p:sp>
         <p:nvSpPr>
-          <p:cNvPr id="13" name="Rectangle 12"/>
+          <p:cNvPr id="14" name="Rectangle 13"/>
           <p:cNvSpPr/>
           <p:nvPr/>
         </p:nvSpPr>
@@ -21060,7 +21732,7 @@
       </p:sp>
       <p:sp>
         <p:nvSpPr>
-          <p:cNvPr id="14" name="TextBox 13"/>
+          <p:cNvPr id="15" name="TextBox 14"/>
           <p:cNvSpPr txBox="1"/>
           <p:nvPr/>
         </p:nvSpPr>
@@ -21102,7 +21774,7 @@
       </p:sp>
       <p:sp>
         <p:nvSpPr>
-          <p:cNvPr id="15" name="TextBox 14"/>
+          <p:cNvPr id="16" name="TextBox 15"/>
           <p:cNvSpPr txBox="1"/>
           <p:nvPr/>
         </p:nvSpPr>
@@ -21137,14 +21809,14 @@
               <a:rPr>
                 <a:latin typeface="Inter"/>
               </a:rPr>
-              <a:t>TEST DATA — fictional portfolio for rendering tests only · Data as of 2026-06-30</a:t>
+              <a:t>Confidential — Investment Committee · Data as of 2026-06-30</a:t>
             </a:r>
           </a:p>
         </p:txBody>
       </p:sp>
       <p:sp>
         <p:nvSpPr>
-          <p:cNvPr id="16" name="TextBox 15"/>
+          <p:cNvPr id="17" name="TextBox 16"/>
           <p:cNvSpPr txBox="1"/>
           <p:nvPr/>
         </p:nvSpPr>
@@ -21259,6 +21931,48 @@
         </p:nvSpPr>
         <p:spPr>
           <a:xfrm>
+            <a:off x="5897880" y="310896"/>
+            <a:ext cx="4800600" cy="256032"/>
+          </a:xfrm>
+          <a:prstGeom prst="rect">
+            <a:avLst/>
+          </a:prstGeom>
+          <a:noFill/>
+        </p:spPr>
+        <p:txBody>
+          <a:bodyPr wrap="none" lIns="9144" rIns="9144" tIns="9144" bIns="9144" anchor="t">
+            <a:spAutoFit/>
+          </a:bodyPr>
+          <a:lstStyle/>
+          <a:p>
+            <a:pPr algn="r">
+              <a:spcAft>
+                <a:spcPts val="0"/>
+              </a:spcAft>
+              <a:defRPr sz="680" b="1">
+                <a:solidFill>
+                  <a:srgbClr val="4F6B00"/>
+                </a:solidFill>
+                <a:latin typeface="Inter"/>
+              </a:defRPr>
+            </a:pPr>
+            <a:r>
+              <a:rPr>
+                <a:latin typeface="Inter"/>
+              </a:rPr>
+              <a:t>Illustrative, Gradient Maintained — demo data, not the client's holdings or managers</a:t>
+            </a:r>
+          </a:p>
+        </p:txBody>
+      </p:sp>
+      <p:sp>
+        <p:nvSpPr>
+          <p:cNvPr id="4" name="TextBox 3"/>
+          <p:cNvSpPr txBox="1"/>
+          <p:nvPr/>
+        </p:nvSpPr>
+        <p:spPr>
+          <a:xfrm>
             <a:off x="640080" y="566928"/>
             <a:ext cx="10058400" cy="530352"/>
           </a:xfrm>
@@ -21295,7 +22009,7 @@
       </p:sp>
       <p:sp>
         <p:nvSpPr>
-          <p:cNvPr id="4" name="Rectangle 3"/>
+          <p:cNvPr id="5" name="Rectangle 4"/>
           <p:cNvSpPr/>
           <p:nvPr/>
         </p:nvSpPr>
@@ -21344,7 +22058,7 @@
       </p:sp>
       <p:sp>
         <p:nvSpPr>
-          <p:cNvPr id="5" name="Rectangle 4"/>
+          <p:cNvPr id="6" name="Rectangle 5"/>
           <p:cNvSpPr/>
           <p:nvPr/>
         </p:nvSpPr>
@@ -21393,7 +22107,7 @@
       </p:sp>
       <p:sp>
         <p:nvSpPr>
-          <p:cNvPr id="6" name="TextBox 5"/>
+          <p:cNvPr id="7" name="TextBox 6"/>
           <p:cNvSpPr txBox="1"/>
           <p:nvPr/>
         </p:nvSpPr>
@@ -21435,7 +22149,7 @@
       </p:sp>
       <p:sp>
         <p:nvSpPr>
-          <p:cNvPr id="7" name="TextBox 6"/>
+          <p:cNvPr id="8" name="TextBox 7"/>
           <p:cNvSpPr txBox="1"/>
           <p:nvPr/>
         </p:nvSpPr>
@@ -21477,7 +22191,7 @@
       </p:sp>
       <p:graphicFrame>
         <p:nvGraphicFramePr>
-          <p:cNvPr id="8" name="Chart 7"/>
+          <p:cNvPr id="9" name="Chart 8"/>
           <p:cNvGraphicFramePr>
             <a:graphicFrameLocks noGrp="1"/>
           </p:cNvGraphicFramePr>
@@ -21495,7 +22209,7 @@
       </p:graphicFrame>
       <p:sp>
         <p:nvSpPr>
-          <p:cNvPr id="9" name="Rectangle 8"/>
+          <p:cNvPr id="10" name="Rectangle 9"/>
           <p:cNvSpPr/>
           <p:nvPr/>
         </p:nvSpPr>
@@ -21544,7 +22258,7 @@
       </p:sp>
       <p:sp>
         <p:nvSpPr>
-          <p:cNvPr id="10" name="TextBox 9"/>
+          <p:cNvPr id="11" name="TextBox 10"/>
           <p:cNvSpPr txBox="1"/>
           <p:nvPr/>
         </p:nvSpPr>
@@ -21586,7 +22300,7 @@
       </p:sp>
       <p:sp>
         <p:nvSpPr>
-          <p:cNvPr id="11" name="TextBox 10"/>
+          <p:cNvPr id="12" name="TextBox 11"/>
           <p:cNvSpPr txBox="1"/>
           <p:nvPr/>
         </p:nvSpPr>
@@ -21621,14 +22335,14 @@
               <a:rPr>
                 <a:latin typeface="Inter"/>
               </a:rPr>
-              <a:t>TEST DATA — fictional portfolio for rendering tests only · Data as of 2026-06-30</a:t>
+              <a:t>Confidential — Investment Committee · Data as of 2026-06-30</a:t>
             </a:r>
           </a:p>
         </p:txBody>
       </p:sp>
       <p:sp>
         <p:nvSpPr>
-          <p:cNvPr id="12" name="TextBox 11"/>
+          <p:cNvPr id="13" name="TextBox 12"/>
           <p:cNvSpPr txBox="1"/>
           <p:nvPr/>
         </p:nvSpPr>
@@ -21743,6 +22457,48 @@
         </p:nvSpPr>
         <p:spPr>
           <a:xfrm>
+            <a:off x="5897880" y="310896"/>
+            <a:ext cx="4800600" cy="256032"/>
+          </a:xfrm>
+          <a:prstGeom prst="rect">
+            <a:avLst/>
+          </a:prstGeom>
+          <a:noFill/>
+        </p:spPr>
+        <p:txBody>
+          <a:bodyPr wrap="none" lIns="9144" rIns="9144" tIns="9144" bIns="9144" anchor="t">
+            <a:spAutoFit/>
+          </a:bodyPr>
+          <a:lstStyle/>
+          <a:p>
+            <a:pPr algn="r">
+              <a:spcAft>
+                <a:spcPts val="0"/>
+              </a:spcAft>
+              <a:defRPr sz="680" b="1">
+                <a:solidFill>
+                  <a:srgbClr val="4F6B00"/>
+                </a:solidFill>
+                <a:latin typeface="Inter"/>
+              </a:defRPr>
+            </a:pPr>
+            <a:r>
+              <a:rPr>
+                <a:latin typeface="Inter"/>
+              </a:rPr>
+              <a:t>Illustrative, Gradient Maintained — demo data, not the client's holdings or managers</a:t>
+            </a:r>
+          </a:p>
+        </p:txBody>
+      </p:sp>
+      <p:sp>
+        <p:nvSpPr>
+          <p:cNvPr id="4" name="TextBox 3"/>
+          <p:cNvSpPr txBox="1"/>
+          <p:nvPr/>
+        </p:nvSpPr>
+        <p:spPr>
+          <a:xfrm>
             <a:off x="640080" y="566928"/>
             <a:ext cx="10058400" cy="530352"/>
           </a:xfrm>
@@ -21779,7 +22535,7 @@
       </p:sp>
       <p:sp>
         <p:nvSpPr>
-          <p:cNvPr id="4" name="Rectangle 3"/>
+          <p:cNvPr id="5" name="Rectangle 4"/>
           <p:cNvSpPr/>
           <p:nvPr/>
         </p:nvSpPr>
@@ -21828,7 +22584,7 @@
       </p:sp>
       <p:sp>
         <p:nvSpPr>
-          <p:cNvPr id="5" name="Rectangle 4"/>
+          <p:cNvPr id="6" name="Rectangle 5"/>
           <p:cNvSpPr/>
           <p:nvPr/>
         </p:nvSpPr>
@@ -21877,7 +22633,7 @@
       </p:sp>
       <p:sp>
         <p:nvSpPr>
-          <p:cNvPr id="6" name="TextBox 5"/>
+          <p:cNvPr id="7" name="TextBox 6"/>
           <p:cNvSpPr txBox="1"/>
           <p:nvPr/>
         </p:nvSpPr>
@@ -21919,7 +22675,7 @@
       </p:sp>
       <p:sp>
         <p:nvSpPr>
-          <p:cNvPr id="7" name="TextBox 6"/>
+          <p:cNvPr id="8" name="TextBox 7"/>
           <p:cNvSpPr txBox="1"/>
           <p:nvPr/>
         </p:nvSpPr>
@@ -21961,7 +22717,7 @@
       </p:sp>
       <p:graphicFrame>
         <p:nvGraphicFramePr>
-          <p:cNvPr id="8" name="Table 7"/>
+          <p:cNvPr id="9" name="Table 8"/>
           <p:cNvGraphicFramePr>
             <a:graphicFrameLocks noGrp="1"/>
           </p:cNvGraphicFramePr>
@@ -22401,7 +23157,7 @@
       </p:graphicFrame>
       <p:sp>
         <p:nvSpPr>
-          <p:cNvPr id="9" name="Rectangle 8"/>
+          <p:cNvPr id="10" name="Rectangle 9"/>
           <p:cNvSpPr/>
           <p:nvPr/>
         </p:nvSpPr>
@@ -22450,7 +23206,7 @@
       </p:sp>
       <p:sp>
         <p:nvSpPr>
-          <p:cNvPr id="10" name="Rectangle 9"/>
+          <p:cNvPr id="11" name="Rectangle 10"/>
           <p:cNvSpPr/>
           <p:nvPr/>
         </p:nvSpPr>
@@ -22499,7 +23255,7 @@
       </p:sp>
       <p:sp>
         <p:nvSpPr>
-          <p:cNvPr id="11" name="TextBox 10"/>
+          <p:cNvPr id="12" name="TextBox 11"/>
           <p:cNvSpPr txBox="1"/>
           <p:nvPr/>
         </p:nvSpPr>
@@ -22541,7 +23297,7 @@
       </p:sp>
       <p:sp>
         <p:nvSpPr>
-          <p:cNvPr id="12" name="TextBox 11"/>
+          <p:cNvPr id="13" name="TextBox 12"/>
           <p:cNvSpPr txBox="1"/>
           <p:nvPr/>
         </p:nvSpPr>
@@ -22583,7 +23339,7 @@
       </p:sp>
       <p:sp>
         <p:nvSpPr>
-          <p:cNvPr id="13" name="Rectangle 12"/>
+          <p:cNvPr id="14" name="Rectangle 13"/>
           <p:cNvSpPr/>
           <p:nvPr/>
         </p:nvSpPr>
@@ -22632,7 +23388,7 @@
       </p:sp>
       <p:sp>
         <p:nvSpPr>
-          <p:cNvPr id="14" name="TextBox 13"/>
+          <p:cNvPr id="15" name="TextBox 14"/>
           <p:cNvSpPr txBox="1"/>
           <p:nvPr/>
         </p:nvSpPr>
@@ -22674,7 +23430,7 @@
       </p:sp>
       <p:sp>
         <p:nvSpPr>
-          <p:cNvPr id="15" name="TextBox 14"/>
+          <p:cNvPr id="16" name="TextBox 15"/>
           <p:cNvSpPr txBox="1"/>
           <p:nvPr/>
         </p:nvSpPr>
@@ -22709,14 +23465,14 @@
               <a:rPr>
                 <a:latin typeface="Inter"/>
               </a:rPr>
-              <a:t>TEST DATA — fictional portfolio for rendering tests only · Data as of 2026-06-30</a:t>
+              <a:t>Confidential — Investment Committee · Data as of 2026-06-30</a:t>
             </a:r>
           </a:p>
         </p:txBody>
       </p:sp>
       <p:sp>
         <p:nvSpPr>
-          <p:cNvPr id="16" name="TextBox 15"/>
+          <p:cNvPr id="17" name="TextBox 16"/>
           <p:cNvSpPr txBox="1"/>
           <p:nvPr/>
         </p:nvSpPr>
@@ -22831,6 +23587,48 @@
         </p:nvSpPr>
         <p:spPr>
           <a:xfrm>
+            <a:off x="5897880" y="310896"/>
+            <a:ext cx="4800600" cy="256032"/>
+          </a:xfrm>
+          <a:prstGeom prst="rect">
+            <a:avLst/>
+          </a:prstGeom>
+          <a:noFill/>
+        </p:spPr>
+        <p:txBody>
+          <a:bodyPr wrap="none" lIns="9144" rIns="9144" tIns="9144" bIns="9144" anchor="t">
+            <a:spAutoFit/>
+          </a:bodyPr>
+          <a:lstStyle/>
+          <a:p>
+            <a:pPr algn="r">
+              <a:spcAft>
+                <a:spcPts val="0"/>
+              </a:spcAft>
+              <a:defRPr sz="680" b="1">
+                <a:solidFill>
+                  <a:srgbClr val="4F6B00"/>
+                </a:solidFill>
+                <a:latin typeface="Inter"/>
+              </a:defRPr>
+            </a:pPr>
+            <a:r>
+              <a:rPr>
+                <a:latin typeface="Inter"/>
+              </a:rPr>
+              <a:t>Illustrative, Gradient Maintained — demo data, not the client's holdings or managers</a:t>
+            </a:r>
+          </a:p>
+        </p:txBody>
+      </p:sp>
+      <p:sp>
+        <p:nvSpPr>
+          <p:cNvPr id="4" name="TextBox 3"/>
+          <p:cNvSpPr txBox="1"/>
+          <p:nvPr/>
+        </p:nvSpPr>
+        <p:spPr>
+          <a:xfrm>
             <a:off x="640080" y="566928"/>
             <a:ext cx="10058400" cy="530352"/>
           </a:xfrm>
@@ -22867,7 +23665,7 @@
       </p:sp>
       <p:sp>
         <p:nvSpPr>
-          <p:cNvPr id="4" name="Rectangle 3"/>
+          <p:cNvPr id="5" name="Rectangle 4"/>
           <p:cNvSpPr/>
           <p:nvPr/>
         </p:nvSpPr>
@@ -22916,7 +23714,7 @@
       </p:sp>
       <p:sp>
         <p:nvSpPr>
-          <p:cNvPr id="5" name="Rectangle 4"/>
+          <p:cNvPr id="6" name="Rectangle 5"/>
           <p:cNvSpPr/>
           <p:nvPr/>
         </p:nvSpPr>
@@ -22965,7 +23763,7 @@
       </p:sp>
       <p:sp>
         <p:nvSpPr>
-          <p:cNvPr id="6" name="TextBox 5"/>
+          <p:cNvPr id="7" name="TextBox 6"/>
           <p:cNvSpPr txBox="1"/>
           <p:nvPr/>
         </p:nvSpPr>
@@ -23007,7 +23805,7 @@
       </p:sp>
       <p:sp>
         <p:nvSpPr>
-          <p:cNvPr id="7" name="TextBox 6"/>
+          <p:cNvPr id="8" name="TextBox 7"/>
           <p:cNvSpPr txBox="1"/>
           <p:nvPr/>
         </p:nvSpPr>
@@ -23049,7 +23847,7 @@
       </p:sp>
       <p:graphicFrame>
         <p:nvGraphicFramePr>
-          <p:cNvPr id="8" name="Table 7"/>
+          <p:cNvPr id="9" name="Table 8"/>
           <p:cNvGraphicFramePr>
             <a:graphicFrameLocks noGrp="1"/>
           </p:cNvGraphicFramePr>
@@ -23735,7 +24533,7 @@
       </p:graphicFrame>
       <p:sp>
         <p:nvSpPr>
-          <p:cNvPr id="9" name="TextBox 8"/>
+          <p:cNvPr id="10" name="TextBox 9"/>
           <p:cNvSpPr txBox="1"/>
           <p:nvPr/>
         </p:nvSpPr>
@@ -23777,7 +24575,7 @@
       </p:sp>
       <p:graphicFrame>
         <p:nvGraphicFramePr>
-          <p:cNvPr id="10" name="Table 9"/>
+          <p:cNvPr id="11" name="Table 10"/>
           <p:cNvGraphicFramePr>
             <a:graphicFrameLocks noGrp="1"/>
           </p:cNvGraphicFramePr>
@@ -24135,7 +24933,7 @@
       </p:graphicFrame>
       <p:sp>
         <p:nvSpPr>
-          <p:cNvPr id="11" name="Rectangle 10"/>
+          <p:cNvPr id="12" name="Rectangle 11"/>
           <p:cNvSpPr/>
           <p:nvPr/>
         </p:nvSpPr>
@@ -24184,7 +24982,7 @@
       </p:sp>
       <p:sp>
         <p:nvSpPr>
-          <p:cNvPr id="12" name="TextBox 11"/>
+          <p:cNvPr id="13" name="TextBox 12"/>
           <p:cNvSpPr txBox="1"/>
           <p:nvPr/>
         </p:nvSpPr>
@@ -24226,7 +25024,7 @@
       </p:sp>
       <p:sp>
         <p:nvSpPr>
-          <p:cNvPr id="13" name="TextBox 12"/>
+          <p:cNvPr id="14" name="TextBox 13"/>
           <p:cNvSpPr txBox="1"/>
           <p:nvPr/>
         </p:nvSpPr>
@@ -24261,14 +25059,14 @@
               <a:rPr>
                 <a:latin typeface="Inter"/>
               </a:rPr>
-              <a:t>TEST DATA — fictional portfolio for rendering tests only · Data as of 2026-06-30</a:t>
+              <a:t>Confidential — Investment Committee · Data as of 2026-06-30</a:t>
             </a:r>
           </a:p>
         </p:txBody>
       </p:sp>
       <p:sp>
         <p:nvSpPr>
-          <p:cNvPr id="14" name="TextBox 13"/>
+          <p:cNvPr id="15" name="TextBox 14"/>
           <p:cNvSpPr txBox="1"/>
           <p:nvPr/>
         </p:nvSpPr>
@@ -24383,6 +25181,48 @@
         </p:nvSpPr>
         <p:spPr>
           <a:xfrm>
+            <a:off x="5897880" y="310896"/>
+            <a:ext cx="4800600" cy="256032"/>
+          </a:xfrm>
+          <a:prstGeom prst="rect">
+            <a:avLst/>
+          </a:prstGeom>
+          <a:noFill/>
+        </p:spPr>
+        <p:txBody>
+          <a:bodyPr wrap="none" lIns="9144" rIns="9144" tIns="9144" bIns="9144" anchor="t">
+            <a:spAutoFit/>
+          </a:bodyPr>
+          <a:lstStyle/>
+          <a:p>
+            <a:pPr algn="r">
+              <a:spcAft>
+                <a:spcPts val="0"/>
+              </a:spcAft>
+              <a:defRPr sz="680" b="1">
+                <a:solidFill>
+                  <a:srgbClr val="4F6B00"/>
+                </a:solidFill>
+                <a:latin typeface="Inter"/>
+              </a:defRPr>
+            </a:pPr>
+            <a:r>
+              <a:rPr>
+                <a:latin typeface="Inter"/>
+              </a:rPr>
+              <a:t>Illustrative, Gradient Maintained — demo data, not the client's holdings or managers</a:t>
+            </a:r>
+          </a:p>
+        </p:txBody>
+      </p:sp>
+      <p:sp>
+        <p:nvSpPr>
+          <p:cNvPr id="4" name="TextBox 3"/>
+          <p:cNvSpPr txBox="1"/>
+          <p:nvPr/>
+        </p:nvSpPr>
+        <p:spPr>
+          <a:xfrm>
             <a:off x="640080" y="566928"/>
             <a:ext cx="10058400" cy="530352"/>
           </a:xfrm>
@@ -24419,7 +25259,7 @@
       </p:sp>
       <p:sp>
         <p:nvSpPr>
-          <p:cNvPr id="4" name="Rectangle 3"/>
+          <p:cNvPr id="5" name="Rectangle 4"/>
           <p:cNvSpPr/>
           <p:nvPr/>
         </p:nvSpPr>
@@ -24468,7 +25308,7 @@
       </p:sp>
       <p:sp>
         <p:nvSpPr>
-          <p:cNvPr id="5" name="Rectangle 4"/>
+          <p:cNvPr id="6" name="Rectangle 5"/>
           <p:cNvSpPr/>
           <p:nvPr/>
         </p:nvSpPr>
@@ -24517,7 +25357,7 @@
       </p:sp>
       <p:sp>
         <p:nvSpPr>
-          <p:cNvPr id="6" name="TextBox 5"/>
+          <p:cNvPr id="7" name="TextBox 6"/>
           <p:cNvSpPr txBox="1"/>
           <p:nvPr/>
         </p:nvSpPr>
@@ -24559,7 +25399,7 @@
       </p:sp>
       <p:sp>
         <p:nvSpPr>
-          <p:cNvPr id="7" name="TextBox 6"/>
+          <p:cNvPr id="8" name="TextBox 7"/>
           <p:cNvSpPr txBox="1"/>
           <p:nvPr/>
         </p:nvSpPr>
@@ -24601,7 +25441,7 @@
       </p:sp>
       <p:graphicFrame>
         <p:nvGraphicFramePr>
-          <p:cNvPr id="8" name="Table 7"/>
+          <p:cNvPr id="9" name="Table 8"/>
           <p:cNvGraphicFramePr>
             <a:graphicFrameLocks noGrp="1"/>
           </p:cNvGraphicFramePr>
@@ -25178,7 +26018,7 @@
       </p:graphicFrame>
       <p:sp>
         <p:nvSpPr>
-          <p:cNvPr id="9" name="TextBox 8"/>
+          <p:cNvPr id="10" name="TextBox 9"/>
           <p:cNvSpPr txBox="1"/>
           <p:nvPr/>
         </p:nvSpPr>
@@ -25220,7 +26060,7 @@
       </p:sp>
       <p:graphicFrame>
         <p:nvGraphicFramePr>
-          <p:cNvPr id="10" name="Table 9"/>
+          <p:cNvPr id="11" name="Table 10"/>
           <p:cNvGraphicFramePr>
             <a:graphicFrameLocks noGrp="1"/>
           </p:cNvGraphicFramePr>
@@ -25797,7 +26637,7 @@
       </p:graphicFrame>
       <p:sp>
         <p:nvSpPr>
-          <p:cNvPr id="11" name="Rectangle 10"/>
+          <p:cNvPr id="12" name="Rectangle 11"/>
           <p:cNvSpPr/>
           <p:nvPr/>
         </p:nvSpPr>
@@ -25846,7 +26686,7 @@
       </p:sp>
       <p:sp>
         <p:nvSpPr>
-          <p:cNvPr id="12" name="TextBox 11"/>
+          <p:cNvPr id="13" name="TextBox 12"/>
           <p:cNvSpPr txBox="1"/>
           <p:nvPr/>
         </p:nvSpPr>
@@ -25888,7 +26728,7 @@
       </p:sp>
       <p:sp>
         <p:nvSpPr>
-          <p:cNvPr id="13" name="TextBox 12"/>
+          <p:cNvPr id="14" name="TextBox 13"/>
           <p:cNvSpPr txBox="1"/>
           <p:nvPr/>
         </p:nvSpPr>
@@ -25923,14 +26763,14 @@
               <a:rPr>
                 <a:latin typeface="Inter"/>
               </a:rPr>
-              <a:t>TEST DATA — fictional portfolio for rendering tests only · Data as of 2026-06-30</a:t>
+              <a:t>Confidential — Investment Committee · Data as of 2026-06-30</a:t>
             </a:r>
           </a:p>
         </p:txBody>
       </p:sp>
       <p:sp>
         <p:nvSpPr>
-          <p:cNvPr id="14" name="TextBox 13"/>
+          <p:cNvPr id="15" name="TextBox 14"/>
           <p:cNvSpPr txBox="1"/>
           <p:nvPr/>
         </p:nvSpPr>
@@ -26045,6 +26885,48 @@
         </p:nvSpPr>
         <p:spPr>
           <a:xfrm>
+            <a:off x="5897880" y="310896"/>
+            <a:ext cx="4800600" cy="256032"/>
+          </a:xfrm>
+          <a:prstGeom prst="rect">
+            <a:avLst/>
+          </a:prstGeom>
+          <a:noFill/>
+        </p:spPr>
+        <p:txBody>
+          <a:bodyPr wrap="none" lIns="9144" rIns="9144" tIns="9144" bIns="9144" anchor="t">
+            <a:spAutoFit/>
+          </a:bodyPr>
+          <a:lstStyle/>
+          <a:p>
+            <a:pPr algn="r">
+              <a:spcAft>
+                <a:spcPts val="0"/>
+              </a:spcAft>
+              <a:defRPr sz="680" b="1">
+                <a:solidFill>
+                  <a:srgbClr val="4F6B00"/>
+                </a:solidFill>
+                <a:latin typeface="Inter"/>
+              </a:defRPr>
+            </a:pPr>
+            <a:r>
+              <a:rPr>
+                <a:latin typeface="Inter"/>
+              </a:rPr>
+              <a:t>Illustrative, Gradient Maintained — demo data, not the client's holdings or managers</a:t>
+            </a:r>
+          </a:p>
+        </p:txBody>
+      </p:sp>
+      <p:sp>
+        <p:nvSpPr>
+          <p:cNvPr id="4" name="TextBox 3"/>
+          <p:cNvSpPr txBox="1"/>
+          <p:nvPr/>
+        </p:nvSpPr>
+        <p:spPr>
+          <a:xfrm>
             <a:off x="640080" y="566928"/>
             <a:ext cx="10058400" cy="530352"/>
           </a:xfrm>
@@ -26081,7 +26963,7 @@
       </p:sp>
       <p:sp>
         <p:nvSpPr>
-          <p:cNvPr id="4" name="Rectangle 3"/>
+          <p:cNvPr id="5" name="Rectangle 4"/>
           <p:cNvSpPr/>
           <p:nvPr/>
         </p:nvSpPr>
@@ -26130,7 +27012,7 @@
       </p:sp>
       <p:sp>
         <p:nvSpPr>
-          <p:cNvPr id="5" name="Rectangle 4"/>
+          <p:cNvPr id="6" name="Rectangle 5"/>
           <p:cNvSpPr/>
           <p:nvPr/>
         </p:nvSpPr>
@@ -26179,7 +27061,7 @@
       </p:sp>
       <p:sp>
         <p:nvSpPr>
-          <p:cNvPr id="6" name="TextBox 5"/>
+          <p:cNvPr id="7" name="TextBox 6"/>
           <p:cNvSpPr txBox="1"/>
           <p:nvPr/>
         </p:nvSpPr>
@@ -26221,7 +27103,7 @@
       </p:sp>
       <p:graphicFrame>
         <p:nvGraphicFramePr>
-          <p:cNvPr id="7" name="Table 6"/>
+          <p:cNvPr id="8" name="Table 7"/>
           <p:cNvGraphicFramePr>
             <a:graphicFrameLocks noGrp="1"/>
           </p:cNvGraphicFramePr>
@@ -26242,7 +27124,7 @@
                 <a:gridCol w="4448556"/>
                 <a:gridCol w="4448556"/>
               </a:tblGrid>
-              <a:tr h="611505">
+              <a:tr h="543560">
                 <a:tc>
                   <a:txBody>
                     <a:bodyPr/>
@@ -26325,7 +27207,7 @@
                   </a:tcPr>
                 </a:tc>
               </a:tr>
-              <a:tr h="611505">
+              <a:tr h="543560">
                 <a:tc>
                   <a:txBody>
                     <a:bodyPr/>
@@ -26397,7 +27279,7 @@
                         <a:rPr>
                           <a:latin typeface="Inter"/>
                         </a:rPr>
-                        <a:t>Fictional TEST data [S2]</a:t>
+                        <a:t>Illustrative sample data [S2]</a:t>
                       </a:r>
                     </a:p>
                   </a:txBody>
@@ -26408,7 +27290,7 @@
                   </a:tcPr>
                 </a:tc>
               </a:tr>
-              <a:tr h="611505">
+              <a:tr h="543560">
                 <a:tc>
                   <a:txBody>
                     <a:bodyPr/>
@@ -26491,7 +27373,7 @@
                   </a:tcPr>
                 </a:tc>
               </a:tr>
-              <a:tr h="611505">
+              <a:tr h="543560">
                 <a:tc>
                   <a:txBody>
                     <a:bodyPr/>
@@ -26574,7 +27456,7 @@
                   </a:tcPr>
                 </a:tc>
               </a:tr>
-              <a:tr h="611505">
+              <a:tr h="543560">
                 <a:tc>
                   <a:txBody>
                     <a:bodyPr/>
@@ -26657,7 +27539,7 @@
                   </a:tcPr>
                 </a:tc>
               </a:tr>
-              <a:tr h="611505">
+              <a:tr h="543560">
                 <a:tc>
                   <a:txBody>
                     <a:bodyPr/>
@@ -26740,7 +27622,7 @@
                   </a:tcPr>
                 </a:tc>
               </a:tr>
-              <a:tr h="611505">
+              <a:tr h="543560">
                 <a:tc>
                   <a:txBody>
                     <a:bodyPr/>
@@ -26823,7 +27705,7 @@
                   </a:tcPr>
                 </a:tc>
               </a:tr>
-              <a:tr h="611505">
+              <a:tr h="543560">
                 <a:tc>
                   <a:txBody>
                     <a:bodyPr/>
@@ -26902,6 +27784,89 @@
                   <a:tcPr marL="54864" marR="54864" marT="27432" marB="27432" anchor="ctr">
                     <a:solidFill>
                       <a:srgbClr val="FFFFFF"/>
+                    </a:solidFill>
+                  </a:tcPr>
+                </a:tc>
+              </a:tr>
+              <a:tr h="543560">
+                <a:tc>
+                  <a:txBody>
+                    <a:bodyPr/>
+                    <a:lstStyle/>
+                    <a:p>
+                      <a:pPr>
+                        <a:defRPr sz="800" b="1">
+                          <a:solidFill>
+                            <a:srgbClr val="0D1117"/>
+                          </a:solidFill>
+                          <a:latin typeface="Inter"/>
+                        </a:defRPr>
+                      </a:pPr>
+                      <a:r>
+                        <a:rPr>
+                          <a:latin typeface="Inter"/>
+                        </a:rPr>
+                        <a:t>Peer allocation intelligence</a:t>
+                      </a:r>
+                    </a:p>
+                  </a:txBody>
+                  <a:tcPr marL="54864" marR="54864" marT="27432" marB="27432" anchor="ctr">
+                    <a:solidFill>
+                      <a:srgbClr val="F5F7F9"/>
+                    </a:solidFill>
+                  </a:tcPr>
+                </a:tc>
+                <a:tc>
+                  <a:txBody>
+                    <a:bodyPr/>
+                    <a:lstStyle/>
+                    <a:p>
+                      <a:pPr>
+                        <a:defRPr sz="800" b="1">
+                          <a:solidFill>
+                            <a:srgbClr val="9AA5B1"/>
+                          </a:solidFill>
+                          <a:latin typeface="Inter"/>
+                        </a:defRPr>
+                      </a:pPr>
+                      <a:r>
+                        <a:rPr>
+                          <a:latin typeface="Inter"/>
+                        </a:rPr>
+                        <a:t>● not licensed</a:t>
+                      </a:r>
+                    </a:p>
+                  </a:txBody>
+                  <a:tcPr marL="54864" marR="54864" marT="27432" marB="27432" anchor="ctr">
+                    <a:solidFill>
+                      <a:srgbClr val="F5F7F9"/>
+                    </a:solidFill>
+                  </a:tcPr>
+                </a:tc>
+                <a:tc>
+                  <a:txBody>
+                    <a:bodyPr/>
+                    <a:lstStyle/>
+                    <a:p>
+                      <a:pPr>
+                        <a:defRPr sz="800" b="0">
+                          <a:solidFill>
+                            <a:srgbClr val="0D1117"/>
+                          </a:solidFill>
+                          <a:latin typeface="Inter"/>
+                        </a:defRPr>
+                      </a:pPr>
+                      <a:r>
+                        <a:rPr>
+                          <a:latin typeface="Inter"/>
+                        </a:rPr>
+                        <a:t>Not licensed ? Peer allocation context was skipped because peerIntelligence is not available for this organization. This construction report uses portfolio evidence only. [S1]</a:t>
+                      </a:r>
+                    </a:p>
+                  </a:txBody>
+                  <a:tcPr marL="54864" marR="54864" marT="27432" marB="27432" anchor="ctr">
+                    <a:solidFill>
+                      <a:srgbClr val="F5F7F9"/>
                     </a:solidFill>
                   </a:tcPr>
                 </a:tc>
@@ -26912,7 +27877,7 @@
       </p:graphicFrame>
       <p:sp>
         <p:nvSpPr>
-          <p:cNvPr id="8" name="Rectangle 7"/>
+          <p:cNvPr id="9" name="Rectangle 8"/>
           <p:cNvSpPr/>
           <p:nvPr/>
         </p:nvSpPr>
@@ -26961,7 +27926,7 @@
       </p:sp>
       <p:sp>
         <p:nvSpPr>
-          <p:cNvPr id="9" name="TextBox 8"/>
+          <p:cNvPr id="10" name="TextBox 9"/>
           <p:cNvSpPr txBox="1"/>
           <p:nvPr/>
         </p:nvSpPr>
@@ -26996,14 +27961,14 @@
               <a:rPr>
                 <a:latin typeface="Inter"/>
               </a:rPr>
-              <a:t>Sources: S2 · S3 · S4 · S5 · S6 · S7 · S8</a:t>
+              <a:t>Sources: S1 · S2 · S3 · S4 · S5 · S6 · S7 · S8</a:t>
             </a:r>
           </a:p>
         </p:txBody>
       </p:sp>
       <p:sp>
         <p:nvSpPr>
-          <p:cNvPr id="10" name="TextBox 9"/>
+          <p:cNvPr id="11" name="TextBox 10"/>
           <p:cNvSpPr txBox="1"/>
           <p:nvPr/>
         </p:nvSpPr>
@@ -27038,14 +28003,14 @@
               <a:rPr>
                 <a:latin typeface="Inter"/>
               </a:rPr>
-              <a:t>TEST DATA — fictional portfolio for rendering tests only · Data as of 2026-06-30</a:t>
+              <a:t>Confidential — Investment Committee · Data as of 2026-06-30</a:t>
             </a:r>
           </a:p>
         </p:txBody>
       </p:sp>
       <p:sp>
         <p:nvSpPr>
-          <p:cNvPr id="11" name="TextBox 10"/>
+          <p:cNvPr id="12" name="TextBox 11"/>
           <p:cNvSpPr txBox="1"/>
           <p:nvPr/>
         </p:nvSpPr>
@@ -27160,6 +28125,48 @@
         </p:nvSpPr>
         <p:spPr>
           <a:xfrm>
+            <a:off x="5897880" y="310896"/>
+            <a:ext cx="4800600" cy="256032"/>
+          </a:xfrm>
+          <a:prstGeom prst="rect">
+            <a:avLst/>
+          </a:prstGeom>
+          <a:noFill/>
+        </p:spPr>
+        <p:txBody>
+          <a:bodyPr wrap="none" lIns="9144" rIns="9144" tIns="9144" bIns="9144" anchor="t">
+            <a:spAutoFit/>
+          </a:bodyPr>
+          <a:lstStyle/>
+          <a:p>
+            <a:pPr algn="r">
+              <a:spcAft>
+                <a:spcPts val="0"/>
+              </a:spcAft>
+              <a:defRPr sz="680" b="1">
+                <a:solidFill>
+                  <a:srgbClr val="4F6B00"/>
+                </a:solidFill>
+                <a:latin typeface="Inter"/>
+              </a:defRPr>
+            </a:pPr>
+            <a:r>
+              <a:rPr>
+                <a:latin typeface="Inter"/>
+              </a:rPr>
+              <a:t>Illustrative, Gradient Maintained — demo data, not the client's holdings or managers</a:t>
+            </a:r>
+          </a:p>
+        </p:txBody>
+      </p:sp>
+      <p:sp>
+        <p:nvSpPr>
+          <p:cNvPr id="4" name="TextBox 3"/>
+          <p:cNvSpPr txBox="1"/>
+          <p:nvPr/>
+        </p:nvSpPr>
+        <p:spPr>
+          <a:xfrm>
             <a:off x="640080" y="566928"/>
             <a:ext cx="10058400" cy="530352"/>
           </a:xfrm>
@@ -27196,7 +28203,7 @@
       </p:sp>
       <p:sp>
         <p:nvSpPr>
-          <p:cNvPr id="4" name="Rectangle 3"/>
+          <p:cNvPr id="5" name="Rectangle 4"/>
           <p:cNvSpPr/>
           <p:nvPr/>
         </p:nvSpPr>
@@ -27245,7 +28252,7 @@
       </p:sp>
       <p:sp>
         <p:nvSpPr>
-          <p:cNvPr id="5" name="Rectangle 4"/>
+          <p:cNvPr id="6" name="Rectangle 5"/>
           <p:cNvSpPr/>
           <p:nvPr/>
         </p:nvSpPr>
@@ -27294,7 +28301,7 @@
       </p:sp>
       <p:sp>
         <p:nvSpPr>
-          <p:cNvPr id="6" name="TextBox 5"/>
+          <p:cNvPr id="7" name="TextBox 6"/>
           <p:cNvSpPr txBox="1"/>
           <p:nvPr/>
         </p:nvSpPr>
@@ -27336,14 +28343,14 @@
       </p:sp>
       <p:sp>
         <p:nvSpPr>
-          <p:cNvPr id="7" name="Rectangle 6"/>
+          <p:cNvPr id="8" name="Rectangle 7"/>
           <p:cNvSpPr/>
           <p:nvPr/>
         </p:nvSpPr>
         <p:spPr>
           <a:xfrm>
             <a:off x="640080" y="1325880"/>
-            <a:ext cx="10908792" cy="933410"/>
+            <a:ext cx="10908792" cy="939368"/>
           </a:xfrm>
           <a:prstGeom prst="rect">
             <a:avLst/>
@@ -27385,14 +28392,14 @@
       </p:sp>
       <p:sp>
         <p:nvSpPr>
-          <p:cNvPr id="8" name="Rectangle 7"/>
+          <p:cNvPr id="9" name="Rectangle 8"/>
           <p:cNvSpPr/>
           <p:nvPr/>
         </p:nvSpPr>
         <p:spPr>
           <a:xfrm>
             <a:off x="640080" y="1325880"/>
-            <a:ext cx="54864" cy="933410"/>
+            <a:ext cx="54864" cy="939368"/>
           </a:xfrm>
           <a:prstGeom prst="rect">
             <a:avLst/>
@@ -27434,7 +28441,7 @@
       </p:sp>
       <p:sp>
         <p:nvSpPr>
-          <p:cNvPr id="9" name="TextBox 8"/>
+          <p:cNvPr id="10" name="TextBox 9"/>
           <p:cNvSpPr txBox="1"/>
           <p:nvPr/>
         </p:nvSpPr>
@@ -27476,14 +28483,14 @@
       </p:sp>
       <p:sp>
         <p:nvSpPr>
-          <p:cNvPr id="10" name="TextBox 9"/>
+          <p:cNvPr id="11" name="TextBox 10"/>
           <p:cNvSpPr txBox="1"/>
           <p:nvPr/>
         </p:nvSpPr>
         <p:spPr>
           <a:xfrm>
             <a:off x="804671" y="1719072"/>
-            <a:ext cx="10616184" cy="448778"/>
+            <a:ext cx="10616184" cy="454736"/>
           </a:xfrm>
           <a:prstGeom prst="rect">
             <a:avLst/>
@@ -27518,13 +28525,13 @@
       </p:sp>
       <p:sp>
         <p:nvSpPr>
-          <p:cNvPr id="11" name="TextBox 10"/>
+          <p:cNvPr id="12" name="TextBox 11"/>
           <p:cNvSpPr txBox="1"/>
           <p:nvPr/>
         </p:nvSpPr>
         <p:spPr>
           <a:xfrm>
-            <a:off x="640080" y="2369018"/>
+            <a:off x="640080" y="2374976"/>
             <a:ext cx="10908792" cy="201168"/>
           </a:xfrm>
           <a:prstGeom prst="rect">
@@ -27560,15 +28567,15 @@
       </p:sp>
       <p:graphicFrame>
         <p:nvGraphicFramePr>
-          <p:cNvPr id="12" name="Table 11"/>
+          <p:cNvPr id="13" name="Table 12"/>
           <p:cNvGraphicFramePr>
             <a:graphicFrameLocks noGrp="1"/>
           </p:cNvGraphicFramePr>
           <p:nvPr/>
         </p:nvGraphicFramePr>
         <p:xfrm>
-          <a:off x="640080" y="2643338"/>
-          <a:ext cx="10908792" cy="1202494"/>
+          <a:off x="640080" y="2649296"/>
+          <a:ext cx="10908792" cy="1211921"/>
         </p:xfrm>
         <a:graphic>
           <a:graphicData uri="http://schemas.openxmlformats.org/drawingml/2006/table">
@@ -27582,7 +28589,7 @@
                 <a:gridCol w="2965704"/>
                 <a:gridCol w="2965704"/>
               </a:tblGrid>
-              <a:tr h="300623">
+              <a:tr h="302980">
                 <a:tc>
                   <a:txBody>
                     <a:bodyPr/>
@@ -27692,7 +28699,7 @@
                   </a:tcPr>
                 </a:tc>
               </a:tr>
-              <a:tr h="300623">
+              <a:tr h="302980">
                 <a:tc>
                   <a:txBody>
                     <a:bodyPr/>
@@ -27802,7 +28809,7 @@
                   </a:tcPr>
                 </a:tc>
               </a:tr>
-              <a:tr h="300623">
+              <a:tr h="302980">
                 <a:tc>
                   <a:txBody>
                     <a:bodyPr/>
@@ -27912,7 +28919,7 @@
                   </a:tcPr>
                 </a:tc>
               </a:tr>
-              <a:tr h="300625">
+              <a:tr h="302981">
                 <a:tc>
                   <a:txBody>
                     <a:bodyPr/>
@@ -28028,14 +29035,14 @@
       </p:graphicFrame>
       <p:sp>
         <p:nvSpPr>
-          <p:cNvPr id="13" name="Rectangle 12"/>
+          <p:cNvPr id="14" name="Rectangle 13"/>
           <p:cNvSpPr/>
           <p:nvPr/>
         </p:nvSpPr>
         <p:spPr>
           <a:xfrm>
-            <a:off x="640080" y="3955560"/>
-            <a:ext cx="10908792" cy="752516"/>
+            <a:off x="640080" y="3970946"/>
+            <a:ext cx="10908792" cy="757320"/>
           </a:xfrm>
           <a:prstGeom prst="rect">
             <a:avLst/>
@@ -28077,14 +29084,14 @@
       </p:sp>
       <p:sp>
         <p:nvSpPr>
-          <p:cNvPr id="14" name="Rectangle 13"/>
+          <p:cNvPr id="15" name="Rectangle 14"/>
           <p:cNvSpPr/>
           <p:nvPr/>
         </p:nvSpPr>
         <p:spPr>
           <a:xfrm>
-            <a:off x="640080" y="3955560"/>
-            <a:ext cx="54864" cy="752516"/>
+            <a:off x="640080" y="3970946"/>
+            <a:ext cx="54864" cy="757320"/>
           </a:xfrm>
           <a:prstGeom prst="rect">
             <a:avLst/>
@@ -28126,13 +29133,13 @@
       </p:sp>
       <p:sp>
         <p:nvSpPr>
-          <p:cNvPr id="15" name="TextBox 14"/>
+          <p:cNvPr id="16" name="TextBox 15"/>
           <p:cNvSpPr txBox="1"/>
           <p:nvPr/>
         </p:nvSpPr>
         <p:spPr>
           <a:xfrm>
-            <a:off x="804671" y="4065288"/>
+            <a:off x="804671" y="4080674"/>
             <a:ext cx="10616184" cy="228600"/>
           </a:xfrm>
           <a:prstGeom prst="rect">
@@ -28168,14 +29175,14 @@
       </p:sp>
       <p:sp>
         <p:nvSpPr>
-          <p:cNvPr id="16" name="TextBox 15"/>
+          <p:cNvPr id="17" name="TextBox 16"/>
           <p:cNvSpPr txBox="1"/>
           <p:nvPr/>
         </p:nvSpPr>
         <p:spPr>
           <a:xfrm>
-            <a:off x="804671" y="4348752"/>
-            <a:ext cx="10616184" cy="267884"/>
+            <a:off x="804671" y="4364138"/>
+            <a:ext cx="10616184" cy="272688"/>
           </a:xfrm>
           <a:prstGeom prst="rect">
             <a:avLst/>
@@ -28210,14 +29217,14 @@
       </p:sp>
       <p:sp>
         <p:nvSpPr>
-          <p:cNvPr id="17" name="Rectangle 16"/>
+          <p:cNvPr id="18" name="Rectangle 17"/>
           <p:cNvSpPr/>
           <p:nvPr/>
         </p:nvSpPr>
         <p:spPr>
           <a:xfrm>
-            <a:off x="640080" y="4817804"/>
-            <a:ext cx="10908792" cy="1400115"/>
+            <a:off x="640080" y="4837994"/>
+            <a:ext cx="10908792" cy="1379925"/>
           </a:xfrm>
           <a:prstGeom prst="rect">
             <a:avLst/>
@@ -28259,14 +29266,14 @@
       </p:sp>
       <p:sp>
         <p:nvSpPr>
-          <p:cNvPr id="18" name="Rectangle 17"/>
+          <p:cNvPr id="19" name="Rectangle 18"/>
           <p:cNvSpPr/>
           <p:nvPr/>
         </p:nvSpPr>
         <p:spPr>
           <a:xfrm>
-            <a:off x="640080" y="4817804"/>
-            <a:ext cx="54864" cy="1400115"/>
+            <a:off x="640080" y="4837994"/>
+            <a:ext cx="54864" cy="1379925"/>
           </a:xfrm>
           <a:prstGeom prst="rect">
             <a:avLst/>
@@ -28308,13 +29315,13 @@
       </p:sp>
       <p:sp>
         <p:nvSpPr>
-          <p:cNvPr id="19" name="TextBox 18"/>
+          <p:cNvPr id="20" name="TextBox 19"/>
           <p:cNvSpPr txBox="1"/>
           <p:nvPr/>
         </p:nvSpPr>
         <p:spPr>
           <a:xfrm>
-            <a:off x="804671" y="4927532"/>
+            <a:off x="804671" y="4947722"/>
             <a:ext cx="10616184" cy="228600"/>
           </a:xfrm>
           <a:prstGeom prst="rect">
@@ -28350,14 +29357,14 @@
       </p:sp>
       <p:sp>
         <p:nvSpPr>
-          <p:cNvPr id="20" name="TextBox 19"/>
+          <p:cNvPr id="21" name="TextBox 20"/>
           <p:cNvSpPr txBox="1"/>
           <p:nvPr/>
         </p:nvSpPr>
         <p:spPr>
           <a:xfrm>
-            <a:off x="804671" y="5210996"/>
-            <a:ext cx="10616184" cy="915483"/>
+            <a:off x="804671" y="5231186"/>
+            <a:ext cx="10616184" cy="895293"/>
           </a:xfrm>
           <a:prstGeom prst="rect">
             <a:avLst/>
@@ -28385,14 +29392,14 @@
               <a:rPr>
                 <a:latin typeface="Inter"/>
               </a:rPr>
-              <a:t>Observation: The fictional TEST report carries a liquidity-terms signal above the clear monitoring threshold [S1]. Why it matters: This signal focuses oversight on the report's most decision-relevant condition. Uncertainty: Evidence coverage may exclude newer or more detailed observations. What would change the view: A governed refresh showing a different signal or breached threshold.</a:t>
+              <a:t>Observation: The sample report carries a liquidity-terms signal above the clear monitoring threshold [S1]. Why it matters: This signal focuses oversight on the report's most decision-relevant condition. Uncertainty: Evidence coverage may exclude newer or more detailed observations. What would change the view: A governed refresh showing a different signal or breached threshold.</a:t>
             </a:r>
           </a:p>
         </p:txBody>
       </p:sp>
       <p:sp>
         <p:nvSpPr>
-          <p:cNvPr id="21" name="Rectangle 20"/>
+          <p:cNvPr id="22" name="Rectangle 21"/>
           <p:cNvSpPr/>
           <p:nvPr/>
         </p:nvSpPr>
@@ -28441,7 +29448,7 @@
       </p:sp>
       <p:sp>
         <p:nvSpPr>
-          <p:cNvPr id="22" name="TextBox 21"/>
+          <p:cNvPr id="23" name="TextBox 22"/>
           <p:cNvSpPr txBox="1"/>
           <p:nvPr/>
         </p:nvSpPr>
@@ -28483,7 +29490,7 @@
       </p:sp>
       <p:sp>
         <p:nvSpPr>
-          <p:cNvPr id="23" name="TextBox 22"/>
+          <p:cNvPr id="24" name="TextBox 23"/>
           <p:cNvSpPr txBox="1"/>
           <p:nvPr/>
         </p:nvSpPr>
@@ -28518,14 +29525,14 @@
               <a:rPr>
                 <a:latin typeface="Inter"/>
               </a:rPr>
-              <a:t>TEST DATA — fictional portfolio for rendering tests only · Data as of 2026-06-30</a:t>
+              <a:t>Confidential — Investment Committee · Data as of 2026-06-30</a:t>
             </a:r>
           </a:p>
         </p:txBody>
       </p:sp>
       <p:sp>
         <p:nvSpPr>
-          <p:cNvPr id="24" name="TextBox 23"/>
+          <p:cNvPr id="25" name="TextBox 24"/>
           <p:cNvSpPr txBox="1"/>
           <p:nvPr/>
         </p:nvSpPr>
@@ -28640,6 +29647,48 @@
         </p:nvSpPr>
         <p:spPr>
           <a:xfrm>
+            <a:off x="5897880" y="310896"/>
+            <a:ext cx="4800600" cy="256032"/>
+          </a:xfrm>
+          <a:prstGeom prst="rect">
+            <a:avLst/>
+          </a:prstGeom>
+          <a:noFill/>
+        </p:spPr>
+        <p:txBody>
+          <a:bodyPr wrap="none" lIns="9144" rIns="9144" tIns="9144" bIns="9144" anchor="t">
+            <a:spAutoFit/>
+          </a:bodyPr>
+          <a:lstStyle/>
+          <a:p>
+            <a:pPr algn="r">
+              <a:spcAft>
+                <a:spcPts val="0"/>
+              </a:spcAft>
+              <a:defRPr sz="680" b="1">
+                <a:solidFill>
+                  <a:srgbClr val="4F6B00"/>
+                </a:solidFill>
+                <a:latin typeface="Inter"/>
+              </a:defRPr>
+            </a:pPr>
+            <a:r>
+              <a:rPr>
+                <a:latin typeface="Inter"/>
+              </a:rPr>
+              <a:t>Illustrative, Gradient Maintained — demo data, not the client's holdings or managers</a:t>
+            </a:r>
+          </a:p>
+        </p:txBody>
+      </p:sp>
+      <p:sp>
+        <p:nvSpPr>
+          <p:cNvPr id="4" name="TextBox 3"/>
+          <p:cNvSpPr txBox="1"/>
+          <p:nvPr/>
+        </p:nvSpPr>
+        <p:spPr>
+          <a:xfrm>
             <a:off x="640080" y="566928"/>
             <a:ext cx="10058400" cy="530352"/>
           </a:xfrm>
@@ -28669,14 +29718,14 @@
               <a:rPr>
                 <a:latin typeface="Inter"/>
               </a:rPr>
-              <a:t>Appendix A — Sources</a:t>
+              <a:t>Appendix — Sources and methods</a:t>
             </a:r>
           </a:p>
         </p:txBody>
       </p:sp>
       <p:sp>
         <p:nvSpPr>
-          <p:cNvPr id="4" name="Rectangle 3"/>
+          <p:cNvPr id="5" name="Rectangle 4"/>
           <p:cNvSpPr/>
           <p:nvPr/>
         </p:nvSpPr>
@@ -28725,7 +29774,7 @@
       </p:sp>
       <p:sp>
         <p:nvSpPr>
-          <p:cNvPr id="5" name="Rectangle 4"/>
+          <p:cNvPr id="6" name="Rectangle 5"/>
           <p:cNvSpPr/>
           <p:nvPr/>
         </p:nvSpPr>
@@ -28774,7 +29823,7 @@
       </p:sp>
       <p:sp>
         <p:nvSpPr>
-          <p:cNvPr id="6" name="TextBox 5"/>
+          <p:cNvPr id="7" name="TextBox 6"/>
           <p:cNvSpPr txBox="1"/>
           <p:nvPr/>
         </p:nvSpPr>
@@ -28816,7 +29865,7 @@
       </p:sp>
       <p:graphicFrame>
         <p:nvGraphicFramePr>
-          <p:cNvPr id="7" name="Table 6"/>
+          <p:cNvPr id="8" name="Table 7"/>
           <p:cNvGraphicFramePr>
             <a:graphicFrameLocks noGrp="1"/>
           </p:cNvGraphicFramePr>
@@ -28824,7 +29873,7 @@
         </p:nvGraphicFramePr>
         <p:xfrm>
           <a:off x="640080" y="1325880"/>
-          <a:ext cx="10908792" cy="4892040"/>
+          <a:ext cx="10908792" cy="4690872"/>
         </p:xfrm>
         <a:graphic>
           <a:graphicData uri="http://schemas.openxmlformats.org/drawingml/2006/table">
@@ -28834,15 +29883,16 @@
               </a:tblPr>
               <a:tblGrid>
                 <a:gridCol w="2011680"/>
-                <a:gridCol w="1271016"/>
-                <a:gridCol w="1271016"/>
-                <a:gridCol w="1271016"/>
-                <a:gridCol w="1271016"/>
-                <a:gridCol w="1271016"/>
-                <a:gridCol w="1271016"/>
-                <a:gridCol w="1271016"/>
+                <a:gridCol w="1112139"/>
+                <a:gridCol w="1112139"/>
+                <a:gridCol w="1112139"/>
+                <a:gridCol w="1112139"/>
+                <a:gridCol w="1112139"/>
+                <a:gridCol w="1112139"/>
+                <a:gridCol w="1112139"/>
+                <a:gridCol w="1112139"/>
               </a:tblGrid>
-              <a:tr h="543560">
+              <a:tr h="521208">
                 <a:tc>
                   <a:txBody>
                     <a:bodyPr/>
@@ -28914,6 +29964,33 @@
                         <a:rPr>
                           <a:latin typeface="Inter"/>
                         </a:rPr>
+                        <a:t>Basis</a:t>
+                      </a:r>
+                    </a:p>
+                  </a:txBody>
+                  <a:tcPr marL="54864" marR="54864" marT="27432" marB="27432" anchor="ctr">
+                    <a:solidFill>
+                      <a:srgbClr val="0D1117"/>
+                    </a:solidFill>
+                  </a:tcPr>
+                </a:tc>
+                <a:tc>
+                  <a:txBody>
+                    <a:bodyPr/>
+                    <a:lstStyle/>
+                    <a:p>
+                      <a:pPr>
+                        <a:defRPr sz="750" b="1">
+                          <a:solidFill>
+                            <a:srgbClr val="FFFFFF"/>
+                          </a:solidFill>
+                          <a:latin typeface="Inter"/>
+                        </a:defRPr>
+                      </a:pPr>
+                      <a:r>
+                        <a:rPr>
+                          <a:latin typeface="Inter"/>
+                        </a:rPr>
                         <a:t>Tool / view</a:t>
                       </a:r>
                     </a:p>
@@ -29060,7 +30137,7 @@
                   </a:tcPr>
                 </a:tc>
               </a:tr>
-              <a:tr h="543560">
+              <a:tr h="521208">
                 <a:tc>
                   <a:txBody>
                     <a:bodyPr/>
@@ -29132,6 +30209,33 @@
                         <a:rPr>
                           <a:latin typeface="Inter"/>
                         </a:rPr>
+                        <a:t>gradient_tool</a:t>
+                      </a:r>
+                    </a:p>
+                  </a:txBody>
+                  <a:tcPr marL="54864" marR="54864" marT="27432" marB="27432" anchor="ctr">
+                    <a:solidFill>
+                      <a:srgbClr val="FFFFFF"/>
+                    </a:solidFill>
+                  </a:tcPr>
+                </a:tc>
+                <a:tc>
+                  <a:txBody>
+                    <a:bodyPr/>
+                    <a:lstStyle/>
+                    <a:p>
+                      <a:pPr>
+                        <a:defRPr sz="650" b="0">
+                          <a:solidFill>
+                            <a:srgbClr val="0D1117"/>
+                          </a:solidFill>
+                          <a:latin typeface="Inter"/>
+                        </a:defRPr>
+                      </a:pPr>
+                      <a:r>
+                        <a:rPr>
+                          <a:latin typeface="Inter"/>
+                        </a:rPr>
                         <a:t>list_organizations; get_gradient_capabilities</a:t>
                       </a:r>
                     </a:p>
@@ -29213,7 +30317,7 @@
                         <a:rPr>
                           <a:latin typeface="Inter"/>
                         </a:rPr>
-                        <a:t>Fictional TEST data</a:t>
+                        <a:t>Illustrative sample data</a:t>
                       </a:r>
                     </a:p>
                   </a:txBody>
@@ -29267,7 +30371,7 @@
                         <a:rPr>
                           <a:latin typeface="Inter"/>
                         </a:rPr>
-                        <a:t>ma-s1</a:t>
+                        <a:t>sha256:aaaaaaaaaaaaaaaaaaaaaaaaaaaaaaaaaaaaaaaaaaaaaaaaaaaaaaaaaaaaaaaa</a:t>
                       </a:r>
                     </a:p>
                   </a:txBody>
@@ -29278,7 +30382,7 @@
                   </a:tcPr>
                 </a:tc>
               </a:tr>
-              <a:tr h="543560">
+              <a:tr h="521208">
                 <a:tc>
                   <a:txBody>
                     <a:bodyPr/>
@@ -29350,6 +30454,33 @@
                         <a:rPr>
                           <a:latin typeface="Inter"/>
                         </a:rPr>
+                        <a:t>gradient_tool</a:t>
+                      </a:r>
+                    </a:p>
+                  </a:txBody>
+                  <a:tcPr marL="54864" marR="54864" marT="27432" marB="27432" anchor="ctr">
+                    <a:solidFill>
+                      <a:srgbClr val="F5F7F9"/>
+                    </a:solidFill>
+                  </a:tcPr>
+                </a:tc>
+                <a:tc>
+                  <a:txBody>
+                    <a:bodyPr/>
+                    <a:lstStyle/>
+                    <a:p>
+                      <a:pPr>
+                        <a:defRPr sz="650" b="0">
+                          <a:solidFill>
+                            <a:srgbClr val="0D1117"/>
+                          </a:solidFill>
+                          <a:latin typeface="Inter"/>
+                        </a:defRPr>
+                      </a:pPr>
+                      <a:r>
+                        <a:rPr>
+                          <a:latin typeface="Inter"/>
+                        </a:rPr>
                         <a:t>list_portfolios; get_portfolio_structure</a:t>
                       </a:r>
                     </a:p>
@@ -29431,7 +30562,7 @@
                         <a:rPr>
                           <a:latin typeface="Inter"/>
                         </a:rPr>
-                        <a:t>Fictional TEST data</a:t>
+                        <a:t>Illustrative sample data</a:t>
                       </a:r>
                     </a:p>
                   </a:txBody>
@@ -29485,7 +30616,7 @@
                         <a:rPr>
                           <a:latin typeface="Inter"/>
                         </a:rPr>
-                        <a:t>ma-s2</a:t>
+                        <a:t>sha256:aaaaaaaaaaaaaaaaaaaaaaaaaaaaaaaaaaaaaaaaaaaaaaaaaaaaaaaaaaaaaaaa</a:t>
                       </a:r>
                     </a:p>
                   </a:txBody>
@@ -29496,7 +30627,7 @@
                   </a:tcPr>
                 </a:tc>
               </a:tr>
-              <a:tr h="543560">
+              <a:tr h="521208">
                 <a:tc>
                   <a:txBody>
                     <a:bodyPr/>
@@ -29568,6 +30699,33 @@
                         <a:rPr>
                           <a:latin typeface="Inter"/>
                         </a:rPr>
+                        <a:t>gradient_tool</a:t>
+                      </a:r>
+                    </a:p>
+                  </a:txBody>
+                  <a:tcPr marL="54864" marR="54864" marT="27432" marB="27432" anchor="ctr">
+                    <a:solidFill>
+                      <a:srgbClr val="FFFFFF"/>
+                    </a:solidFill>
+                  </a:tcPr>
+                </a:tc>
+                <a:tc>
+                  <a:txBody>
+                    <a:bodyPr/>
+                    <a:lstStyle/>
+                    <a:p>
+                      <a:pPr>
+                        <a:defRPr sz="650" b="0">
+                          <a:solidFill>
+                            <a:srgbClr val="0D1117"/>
+                          </a:solidFill>
+                          <a:latin typeface="Inter"/>
+                        </a:defRPr>
+                      </a:pPr>
+                      <a:r>
+                        <a:rPr>
+                          <a:latin typeface="Inter"/>
+                        </a:rPr>
                         <a:t>check_portfolio_policy</a:t>
                       </a:r>
                     </a:p>
@@ -29649,7 +30807,7 @@
                         <a:rPr>
                           <a:latin typeface="Inter"/>
                         </a:rPr>
-                        <a:t>Fictional TEST data</a:t>
+                        <a:t>Illustrative sample data</a:t>
                       </a:r>
                     </a:p>
                   </a:txBody>
@@ -29703,7 +30861,7 @@
                         <a:rPr>
                           <a:latin typeface="Inter"/>
                         </a:rPr>
-                        <a:t>ma-s3</a:t>
+                        <a:t>sha256:aaaaaaaaaaaaaaaaaaaaaaaaaaaaaaaaaaaaaaaaaaaaaaaaaaaaaaaaaaaaaaaa</a:t>
                       </a:r>
                     </a:p>
                   </a:txBody>
@@ -29714,7 +30872,7 @@
                   </a:tcPr>
                 </a:tc>
               </a:tr>
-              <a:tr h="543560">
+              <a:tr h="521208">
                 <a:tc>
                   <a:txBody>
                     <a:bodyPr/>
@@ -29786,6 +30944,33 @@
                         <a:rPr>
                           <a:latin typeface="Inter"/>
                         </a:rPr>
+                        <a:t>gradient_tool</a:t>
+                      </a:r>
+                    </a:p>
+                  </a:txBody>
+                  <a:tcPr marL="54864" marR="54864" marT="27432" marB="27432" anchor="ctr">
+                    <a:solidFill>
+                      <a:srgbClr val="F5F7F9"/>
+                    </a:solidFill>
+                  </a:tcPr>
+                </a:tc>
+                <a:tc>
+                  <a:txBody>
+                    <a:bodyPr/>
+                    <a:lstStyle/>
+                    <a:p>
+                      <a:pPr>
+                        <a:defRPr sz="650" b="0">
+                          <a:solidFill>
+                            <a:srgbClr val="0D1117"/>
+                          </a:solidFill>
+                          <a:latin typeface="Inter"/>
+                        </a:defRPr>
+                      </a:pPr>
+                      <a:r>
+                        <a:rPr>
+                          <a:latin typeface="Inter"/>
+                        </a:rPr>
                         <a:t>get_portfolio_exposure</a:t>
                       </a:r>
                     </a:p>
@@ -29867,7 +31052,7 @@
                         <a:rPr>
                           <a:latin typeface="Inter"/>
                         </a:rPr>
-                        <a:t>Fictional TEST data</a:t>
+                        <a:t>Illustrative sample data</a:t>
                       </a:r>
                     </a:p>
                   </a:txBody>
@@ -29921,7 +31106,7 @@
                         <a:rPr>
                           <a:latin typeface="Inter"/>
                         </a:rPr>
-                        <a:t>ma-s4</a:t>
+                        <a:t>sha256:aaaaaaaaaaaaaaaaaaaaaaaaaaaaaaaaaaaaaaaaaaaaaaaaaaaaaaaaaaaaaaaa</a:t>
                       </a:r>
                     </a:p>
                   </a:txBody>
@@ -29932,7 +31117,7 @@
                   </a:tcPr>
                 </a:tc>
               </a:tr>
-              <a:tr h="543560">
+              <a:tr h="521208">
                 <a:tc>
                   <a:txBody>
                     <a:bodyPr/>
@@ -30004,6 +31189,33 @@
                         <a:rPr>
                           <a:latin typeface="Inter"/>
                         </a:rPr>
+                        <a:t>gradient_tool</a:t>
+                      </a:r>
+                    </a:p>
+                  </a:txBody>
+                  <a:tcPr marL="54864" marR="54864" marT="27432" marB="27432" anchor="ctr">
+                    <a:solidFill>
+                      <a:srgbClr val="FFFFFF"/>
+                    </a:solidFill>
+                  </a:tcPr>
+                </a:tc>
+                <a:tc>
+                  <a:txBody>
+                    <a:bodyPr/>
+                    <a:lstStyle/>
+                    <a:p>
+                      <a:pPr>
+                        <a:defRPr sz="650" b="0">
+                          <a:solidFill>
+                            <a:srgbClr val="0D1117"/>
+                          </a:solidFill>
+                          <a:latin typeface="Inter"/>
+                        </a:defRPr>
+                      </a:pPr>
+                      <a:r>
+                        <a:rPr>
+                          <a:latin typeface="Inter"/>
+                        </a:rPr>
                         <a:t>get_portfolio_historical_returns; get_portfolio_attribution</a:t>
                       </a:r>
                     </a:p>
@@ -30085,7 +31297,7 @@
                         <a:rPr>
                           <a:latin typeface="Inter"/>
                         </a:rPr>
-                        <a:t>Fictional TEST data</a:t>
+                        <a:t>Illustrative sample data</a:t>
                       </a:r>
                     </a:p>
                   </a:txBody>
@@ -30139,7 +31351,7 @@
                         <a:rPr>
                           <a:latin typeface="Inter"/>
                         </a:rPr>
-                        <a:t>ma-s5</a:t>
+                        <a:t>sha256:aaaaaaaaaaaaaaaaaaaaaaaaaaaaaaaaaaaaaaaaaaaaaaaaaaaaaaaaaaaaaaaa</a:t>
                       </a:r>
                     </a:p>
                   </a:txBody>
@@ -30150,7 +31362,7 @@
                   </a:tcPr>
                 </a:tc>
               </a:tr>
-              <a:tr h="543560">
+              <a:tr h="521208">
                 <a:tc>
                   <a:txBody>
                     <a:bodyPr/>
@@ -30222,6 +31434,33 @@
                         <a:rPr>
                           <a:latin typeface="Inter"/>
                         </a:rPr>
+                        <a:t>gradient_tool</a:t>
+                      </a:r>
+                    </a:p>
+                  </a:txBody>
+                  <a:tcPr marL="54864" marR="54864" marT="27432" marB="27432" anchor="ctr">
+                    <a:solidFill>
+                      <a:srgbClr val="F5F7F9"/>
+                    </a:solidFill>
+                  </a:tcPr>
+                </a:tc>
+                <a:tc>
+                  <a:txBody>
+                    <a:bodyPr/>
+                    <a:lstStyle/>
+                    <a:p>
+                      <a:pPr>
+                        <a:defRPr sz="650" b="0">
+                          <a:solidFill>
+                            <a:srgbClr val="0D1117"/>
+                          </a:solidFill>
+                          <a:latin typeface="Inter"/>
+                        </a:defRPr>
+                      </a:pPr>
+                      <a:r>
+                        <a:rPr>
+                          <a:latin typeface="Inter"/>
+                        </a:rPr>
                         <a:t>get_capital_market_assumptions</a:t>
                       </a:r>
                     </a:p>
@@ -30303,7 +31542,7 @@
                         <a:rPr>
                           <a:latin typeface="Inter"/>
                         </a:rPr>
-                        <a:t>Fictional TEST data</a:t>
+                        <a:t>Illustrative sample data</a:t>
                       </a:r>
                     </a:p>
                   </a:txBody>
@@ -30357,7 +31596,7 @@
                         <a:rPr>
                           <a:latin typeface="Inter"/>
                         </a:rPr>
-                        <a:t>ma-s6</a:t>
+                        <a:t>sha256:aaaaaaaaaaaaaaaaaaaaaaaaaaaaaaaaaaaaaaaaaaaaaaaaaaaaaaaaaaaaaaaa</a:t>
                       </a:r>
                     </a:p>
                   </a:txBody>
@@ -30368,7 +31607,7 @@
                   </a:tcPr>
                 </a:tc>
               </a:tr>
-              <a:tr h="543560">
+              <a:tr h="521208">
                 <a:tc>
                   <a:txBody>
                     <a:bodyPr/>
@@ -30440,7 +31679,7 @@
                         <a:rPr>
                           <a:latin typeface="Inter"/>
                         </a:rPr>
-                        <a:t>Diligence tools; get_cross_domain_research</a:t>
+                        <a:t>gradient_tool</a:t>
                       </a:r>
                     </a:p>
                   </a:txBody>
@@ -30467,7 +31706,7 @@
                         <a:rPr>
                           <a:latin typeface="Inter"/>
                         </a:rPr>
-                        <a:t>fictional</a:t>
+                        <a:t>get_cross_domain_research</a:t>
                       </a:r>
                     </a:p>
                   </a:txBody>
@@ -30494,6 +31733,33 @@
                         <a:rPr>
                           <a:latin typeface="Inter"/>
                         </a:rPr>
+                        <a:t>illustrative</a:t>
+                      </a:r>
+                    </a:p>
+                  </a:txBody>
+                  <a:tcPr marL="54864" marR="54864" marT="27432" marB="27432" anchor="ctr">
+                    <a:solidFill>
+                      <a:srgbClr val="FFFFFF"/>
+                    </a:solidFill>
+                  </a:tcPr>
+                </a:tc>
+                <a:tc>
+                  <a:txBody>
+                    <a:bodyPr/>
+                    <a:lstStyle/>
+                    <a:p>
+                      <a:pPr>
+                        <a:defRPr sz="650" b="0">
+                          <a:solidFill>
+                            <a:srgbClr val="0D1117"/>
+                          </a:solidFill>
+                          <a:latin typeface="Inter"/>
+                        </a:defRPr>
+                      </a:pPr>
+                      <a:r>
+                        <a:rPr>
+                          <a:latin typeface="Inter"/>
+                        </a:rPr>
                         <a:t>2026-06-30</a:t>
                       </a:r>
                     </a:p>
@@ -30521,7 +31787,7 @@
                         <a:rPr>
                           <a:latin typeface="Inter"/>
                         </a:rPr>
-                        <a:t>Fictional TEST data</a:t>
+                        <a:t>Illustrative sample data</a:t>
                       </a:r>
                     </a:p>
                   </a:txBody>
@@ -30575,7 +31841,7 @@
                         <a:rPr>
                           <a:latin typeface="Inter"/>
                         </a:rPr>
-                        <a:t>ma-s7</a:t>
+                        <a:t>sha256:aaaaaaaaaaaaaaaaaaaaaaaaaaaaaaaaaaaaaaaaaaaaaaaaaaaaaaaaaaaaaaaa</a:t>
                       </a:r>
                     </a:p>
                   </a:txBody>
@@ -30586,7 +31852,7 @@
                   </a:tcPr>
                 </a:tc>
               </a:tr>
-              <a:tr h="543560">
+              <a:tr h="521208">
                 <a:tc>
                   <a:txBody>
                     <a:bodyPr/>
@@ -30658,7 +31924,7 @@
                         <a:rPr>
                           <a:latin typeface="Inter"/>
                         </a:rPr>
-                        <a:t>User document; coverage record</a:t>
+                        <a:t>gradient_tool</a:t>
                       </a:r>
                     </a:p>
                   </a:txBody>
@@ -30685,7 +31951,7 @@
                         <a:rPr>
                           <a:latin typeface="Inter"/>
                         </a:rPr>
-                        <a:t>fictional</a:t>
+                        <a:t>get_gradient_capabilities</a:t>
                       </a:r>
                     </a:p>
                   </a:txBody>
@@ -30712,6 +31978,33 @@
                         <a:rPr>
                           <a:latin typeface="Inter"/>
                         </a:rPr>
+                        <a:t>illustrative</a:t>
+                      </a:r>
+                    </a:p>
+                  </a:txBody>
+                  <a:tcPr marL="54864" marR="54864" marT="27432" marB="27432" anchor="ctr">
+                    <a:solidFill>
+                      <a:srgbClr val="F5F7F9"/>
+                    </a:solidFill>
+                  </a:tcPr>
+                </a:tc>
+                <a:tc>
+                  <a:txBody>
+                    <a:bodyPr/>
+                    <a:lstStyle/>
+                    <a:p>
+                      <a:pPr>
+                        <a:defRPr sz="650" b="0">
+                          <a:solidFill>
+                            <a:srgbClr val="0D1117"/>
+                          </a:solidFill>
+                          <a:latin typeface="Inter"/>
+                        </a:defRPr>
+                      </a:pPr>
+                      <a:r>
+                        <a:rPr>
+                          <a:latin typeface="Inter"/>
+                        </a:rPr>
                         <a:t>2026-06-30</a:t>
                       </a:r>
                     </a:p>
@@ -30739,7 +32032,7 @@
                         <a:rPr>
                           <a:latin typeface="Inter"/>
                         </a:rPr>
-                        <a:t>Fictional TEST data</a:t>
+                        <a:t>Illustrative sample data</a:t>
                       </a:r>
                     </a:p>
                   </a:txBody>
@@ -30793,7 +32086,7 @@
                         <a:rPr>
                           <a:latin typeface="Inter"/>
                         </a:rPr>
-                        <a:t>ma-s8</a:t>
+                        <a:t>sha256:aaaaaaaaaaaaaaaaaaaaaaaaaaaaaaaaaaaaaaaaaaaaaaaaaaaaaaaaaaaaaaaa</a:t>
                       </a:r>
                     </a:p>
                   </a:txBody>
@@ -30810,7 +32103,49 @@
       </p:graphicFrame>
       <p:sp>
         <p:nvSpPr>
-          <p:cNvPr id="8" name="Rectangle 7"/>
+          <p:cNvPr id="9" name="TextBox 8"/>
+          <p:cNvSpPr txBox="1"/>
+          <p:nvPr/>
+        </p:nvSpPr>
+        <p:spPr>
+          <a:xfrm>
+            <a:off x="640080" y="6035040"/>
+            <a:ext cx="10908792" cy="164592"/>
+          </a:xfrm>
+          <a:prstGeom prst="rect">
+            <a:avLst/>
+          </a:prstGeom>
+          <a:noFill/>
+        </p:spPr>
+        <p:txBody>
+          <a:bodyPr wrap="none" lIns="9144" rIns="9144" tIns="9144" bIns="9144" anchor="t">
+            <a:spAutoFit/>
+          </a:bodyPr>
+          <a:lstStyle/>
+          <a:p>
+            <a:pPr algn="l">
+              <a:spcAft>
+                <a:spcPts val="0"/>
+              </a:spcAft>
+              <a:defRPr sz="680" b="0">
+                <a:solidFill>
+                  <a:srgbClr val="8A94A1"/>
+                </a:solidFill>
+                <a:latin typeface="Inter"/>
+              </a:defRPr>
+            </a:pPr>
+            <a:r>
+              <a:rPr>
+                <a:latin typeface="Inter"/>
+              </a:rPr>
+              <a:t>Illustrative, Gradient Maintained — demo data, not the client's holdings or managers. All organizations, portfolios, managers and results in this public example are illustrative.</a:t>
+            </a:r>
+          </a:p>
+        </p:txBody>
+      </p:sp>
+      <p:sp>
+        <p:nvSpPr>
+          <p:cNvPr id="10" name="Rectangle 9"/>
           <p:cNvSpPr/>
           <p:nvPr/>
         </p:nvSpPr>
@@ -30859,7 +32194,7 @@
       </p:sp>
       <p:sp>
         <p:nvSpPr>
-          <p:cNvPr id="9" name="TextBox 8"/>
+          <p:cNvPr id="11" name="TextBox 10"/>
           <p:cNvSpPr txBox="1"/>
           <p:nvPr/>
         </p:nvSpPr>
@@ -30901,7 +32236,7 @@
       </p:sp>
       <p:sp>
         <p:nvSpPr>
-          <p:cNvPr id="10" name="TextBox 9"/>
+          <p:cNvPr id="12" name="TextBox 11"/>
           <p:cNvSpPr txBox="1"/>
           <p:nvPr/>
         </p:nvSpPr>
@@ -30936,14 +32271,14 @@
               <a:rPr>
                 <a:latin typeface="Inter"/>
               </a:rPr>
-              <a:t>TEST DATA — fictional portfolio for rendering tests only · Data as of 2026-06-30</a:t>
+              <a:t>Confidential — Investment Committee · Data as of 2026-06-30</a:t>
             </a:r>
           </a:p>
         </p:txBody>
       </p:sp>
       <p:sp>
         <p:nvSpPr>
-          <p:cNvPr id="11" name="TextBox 10"/>
+          <p:cNvPr id="13" name="TextBox 12"/>
           <p:cNvSpPr txBox="1"/>
           <p:nvPr/>
         </p:nvSpPr>
@@ -31058,6 +32393,48 @@
         </p:nvSpPr>
         <p:spPr>
           <a:xfrm>
+            <a:off x="5897880" y="310896"/>
+            <a:ext cx="4800600" cy="256032"/>
+          </a:xfrm>
+          <a:prstGeom prst="rect">
+            <a:avLst/>
+          </a:prstGeom>
+          <a:noFill/>
+        </p:spPr>
+        <p:txBody>
+          <a:bodyPr wrap="none" lIns="9144" rIns="9144" tIns="9144" bIns="9144" anchor="t">
+            <a:spAutoFit/>
+          </a:bodyPr>
+          <a:lstStyle/>
+          <a:p>
+            <a:pPr algn="r">
+              <a:spcAft>
+                <a:spcPts val="0"/>
+              </a:spcAft>
+              <a:defRPr sz="680" b="1">
+                <a:solidFill>
+                  <a:srgbClr val="4F6B00"/>
+                </a:solidFill>
+                <a:latin typeface="Inter"/>
+              </a:defRPr>
+            </a:pPr>
+            <a:r>
+              <a:rPr>
+                <a:latin typeface="Inter"/>
+              </a:rPr>
+              <a:t>Illustrative, Gradient Maintained — demo data, not the client's holdings or managers</a:t>
+            </a:r>
+          </a:p>
+        </p:txBody>
+      </p:sp>
+      <p:sp>
+        <p:nvSpPr>
+          <p:cNvPr id="4" name="TextBox 3"/>
+          <p:cNvSpPr txBox="1"/>
+          <p:nvPr/>
+        </p:nvSpPr>
+        <p:spPr>
+          <a:xfrm>
             <a:off x="640080" y="566928"/>
             <a:ext cx="10058400" cy="530352"/>
           </a:xfrm>
@@ -31087,14 +32464,14 @@
               <a:rPr>
                 <a:latin typeface="Inter"/>
               </a:rPr>
-              <a:t>Appendix B — Server Metric Methods and Disclosures</a:t>
+              <a:t>Appendix — Server Metric Methods and Disclosures</a:t>
             </a:r>
           </a:p>
         </p:txBody>
       </p:sp>
       <p:sp>
         <p:nvSpPr>
-          <p:cNvPr id="4" name="Rectangle 3"/>
+          <p:cNvPr id="5" name="Rectangle 4"/>
           <p:cNvSpPr/>
           <p:nvPr/>
         </p:nvSpPr>
@@ -31143,7 +32520,7 @@
       </p:sp>
       <p:sp>
         <p:nvSpPr>
-          <p:cNvPr id="5" name="Rectangle 4"/>
+          <p:cNvPr id="6" name="Rectangle 5"/>
           <p:cNvSpPr/>
           <p:nvPr/>
         </p:nvSpPr>
@@ -31192,7 +32569,7 @@
       </p:sp>
       <p:sp>
         <p:nvSpPr>
-          <p:cNvPr id="6" name="TextBox 5"/>
+          <p:cNvPr id="7" name="TextBox 6"/>
           <p:cNvSpPr txBox="1"/>
           <p:nvPr/>
         </p:nvSpPr>
@@ -31234,7 +32611,7 @@
       </p:sp>
       <p:sp>
         <p:nvSpPr>
-          <p:cNvPr id="7" name="TextBox 6"/>
+          <p:cNvPr id="8" name="TextBox 7"/>
           <p:cNvSpPr txBox="1"/>
           <p:nvPr/>
         </p:nvSpPr>
@@ -31276,7 +32653,7 @@
       </p:sp>
       <p:graphicFrame>
         <p:nvGraphicFramePr>
-          <p:cNvPr id="8" name="Table 7"/>
+          <p:cNvPr id="9" name="Table 8"/>
           <p:cNvGraphicFramePr>
             <a:graphicFrameLocks noGrp="1"/>
           </p:cNvGraphicFramePr>
@@ -31853,7 +33230,7 @@
       </p:graphicFrame>
       <p:sp>
         <p:nvSpPr>
-          <p:cNvPr id="9" name="TextBox 8"/>
+          <p:cNvPr id="10" name="TextBox 9"/>
           <p:cNvSpPr txBox="1"/>
           <p:nvPr/>
         </p:nvSpPr>
@@ -31971,7 +33348,7 @@
       </p:sp>
       <p:sp>
         <p:nvSpPr>
-          <p:cNvPr id="10" name="Rectangle 9"/>
+          <p:cNvPr id="11" name="Rectangle 10"/>
           <p:cNvSpPr/>
           <p:nvPr/>
         </p:nvSpPr>
@@ -32020,7 +33397,7 @@
       </p:sp>
       <p:sp>
         <p:nvSpPr>
-          <p:cNvPr id="11" name="TextBox 10"/>
+          <p:cNvPr id="12" name="TextBox 11"/>
           <p:cNvSpPr txBox="1"/>
           <p:nvPr/>
         </p:nvSpPr>
@@ -32062,7 +33439,7 @@
       </p:sp>
       <p:sp>
         <p:nvSpPr>
-          <p:cNvPr id="12" name="TextBox 11"/>
+          <p:cNvPr id="13" name="TextBox 12"/>
           <p:cNvSpPr txBox="1"/>
           <p:nvPr/>
         </p:nvSpPr>
@@ -32097,14 +33474,14 @@
               <a:rPr>
                 <a:latin typeface="Inter"/>
               </a:rPr>
-              <a:t>TEST DATA — fictional portfolio for rendering tests only · Data as of 2026-06-30</a:t>
+              <a:t>Confidential — Investment Committee · Data as of 2026-06-30</a:t>
             </a:r>
           </a:p>
         </p:txBody>
       </p:sp>
       <p:sp>
         <p:nvSpPr>
-          <p:cNvPr id="13" name="TextBox 12"/>
+          <p:cNvPr id="14" name="TextBox 13"/>
           <p:cNvSpPr txBox="1"/>
           <p:nvPr/>
         </p:nvSpPr>
@@ -32219,6 +33596,48 @@
         </p:nvSpPr>
         <p:spPr>
           <a:xfrm>
+            <a:off x="5897880" y="310896"/>
+            <a:ext cx="4800600" cy="256032"/>
+          </a:xfrm>
+          <a:prstGeom prst="rect">
+            <a:avLst/>
+          </a:prstGeom>
+          <a:noFill/>
+        </p:spPr>
+        <p:txBody>
+          <a:bodyPr wrap="none" lIns="9144" rIns="9144" tIns="9144" bIns="9144" anchor="t">
+            <a:spAutoFit/>
+          </a:bodyPr>
+          <a:lstStyle/>
+          <a:p>
+            <a:pPr algn="r">
+              <a:spcAft>
+                <a:spcPts val="0"/>
+              </a:spcAft>
+              <a:defRPr sz="680" b="1">
+                <a:solidFill>
+                  <a:srgbClr val="4F6B00"/>
+                </a:solidFill>
+                <a:latin typeface="Inter"/>
+              </a:defRPr>
+            </a:pPr>
+            <a:r>
+              <a:rPr>
+                <a:latin typeface="Inter"/>
+              </a:rPr>
+              <a:t>Illustrative, Gradient Maintained — demo data, not the client's holdings or managers</a:t>
+            </a:r>
+          </a:p>
+        </p:txBody>
+      </p:sp>
+      <p:sp>
+        <p:nvSpPr>
+          <p:cNvPr id="4" name="TextBox 3"/>
+          <p:cNvSpPr txBox="1"/>
+          <p:nvPr/>
+        </p:nvSpPr>
+        <p:spPr>
+          <a:xfrm>
             <a:off x="640080" y="566928"/>
             <a:ext cx="10058400" cy="530352"/>
           </a:xfrm>
@@ -32255,7 +33674,7 @@
       </p:sp>
       <p:sp>
         <p:nvSpPr>
-          <p:cNvPr id="4" name="Rectangle 3"/>
+          <p:cNvPr id="5" name="Rectangle 4"/>
           <p:cNvSpPr/>
           <p:nvPr/>
         </p:nvSpPr>
@@ -32304,7 +33723,7 @@
       </p:sp>
       <p:sp>
         <p:nvSpPr>
-          <p:cNvPr id="5" name="Rectangle 4"/>
+          <p:cNvPr id="6" name="Rectangle 5"/>
           <p:cNvSpPr/>
           <p:nvPr/>
         </p:nvSpPr>
@@ -32353,7 +33772,7 @@
       </p:sp>
       <p:sp>
         <p:nvSpPr>
-          <p:cNvPr id="6" name="TextBox 5"/>
+          <p:cNvPr id="7" name="TextBox 6"/>
           <p:cNvSpPr txBox="1"/>
           <p:nvPr/>
         </p:nvSpPr>
@@ -32395,14 +33814,14 @@
       </p:sp>
       <p:sp>
         <p:nvSpPr>
-          <p:cNvPr id="7" name="Rectangle 6"/>
+          <p:cNvPr id="8" name="Rectangle 7"/>
           <p:cNvSpPr/>
           <p:nvPr/>
         </p:nvSpPr>
         <p:spPr>
           <a:xfrm>
             <a:off x="640080" y="1325880"/>
-            <a:ext cx="10908792" cy="2383975"/>
+            <a:ext cx="10908792" cy="2415807"/>
           </a:xfrm>
           <a:prstGeom prst="rect">
             <a:avLst/>
@@ -32444,14 +33863,14 @@
       </p:sp>
       <p:sp>
         <p:nvSpPr>
-          <p:cNvPr id="8" name="Rectangle 7"/>
+          <p:cNvPr id="9" name="Rectangle 8"/>
           <p:cNvSpPr/>
           <p:nvPr/>
         </p:nvSpPr>
         <p:spPr>
           <a:xfrm>
             <a:off x="640080" y="1325880"/>
-            <a:ext cx="54864" cy="2383975"/>
+            <a:ext cx="54864" cy="2415807"/>
           </a:xfrm>
           <a:prstGeom prst="rect">
             <a:avLst/>
@@ -32493,7 +33912,7 @@
       </p:sp>
       <p:sp>
         <p:nvSpPr>
-          <p:cNvPr id="9" name="TextBox 8"/>
+          <p:cNvPr id="10" name="TextBox 9"/>
           <p:cNvSpPr txBox="1"/>
           <p:nvPr/>
         </p:nvSpPr>
@@ -32535,14 +33954,14 @@
       </p:sp>
       <p:sp>
         <p:nvSpPr>
-          <p:cNvPr id="10" name="TextBox 9"/>
+          <p:cNvPr id="11" name="TextBox 10"/>
           <p:cNvSpPr txBox="1"/>
           <p:nvPr/>
         </p:nvSpPr>
         <p:spPr>
           <a:xfrm>
             <a:off x="804671" y="1719072"/>
-            <a:ext cx="10616184" cy="1899343"/>
+            <a:ext cx="10616184" cy="1931175"/>
           </a:xfrm>
           <a:prstGeom prst="rect">
             <a:avLst/>
@@ -32570,21 +33989,21 @@
               <a:rPr>
                 <a:latin typeface="Inter"/>
               </a:rPr>
-              <a:t>Observation: Marketable-alternatives weight is 12.0% in the TEST evidence [S2]. Why it matters: This measure establishes the baseline for comparing later governed results. Uncertainty: The source basis may omit newer observations outside this fixture. What would change the view: A refreshed source report showing a change above 1%.</a:t>
+              <a:t>Observation: Marketable-alternatives weight is 12.0% in the review evidence [S2]. Why it matters: This measure establishes the baseline for comparing later governed results. Uncertainty: The source basis may omit newer observations outside the reviewed evidence. What would change the view: A refreshed source report showing a change above 1%.</a:t>
             </a:r>
           </a:p>
         </p:txBody>
       </p:sp>
       <p:sp>
         <p:nvSpPr>
-          <p:cNvPr id="11" name="Rectangle 10"/>
+          <p:cNvPr id="12" name="Rectangle 11"/>
           <p:cNvSpPr/>
           <p:nvPr/>
         </p:nvSpPr>
         <p:spPr>
           <a:xfrm>
-            <a:off x="640080" y="3819583"/>
-            <a:ext cx="10908792" cy="2398336"/>
+            <a:off x="640080" y="3851415"/>
+            <a:ext cx="10908792" cy="2366504"/>
           </a:xfrm>
           <a:prstGeom prst="rect">
             <a:avLst/>
@@ -32626,14 +34045,14 @@
       </p:sp>
       <p:sp>
         <p:nvSpPr>
-          <p:cNvPr id="12" name="Rectangle 11"/>
+          <p:cNvPr id="13" name="Rectangle 12"/>
           <p:cNvSpPr/>
           <p:nvPr/>
         </p:nvSpPr>
         <p:spPr>
           <a:xfrm>
-            <a:off x="640080" y="3819583"/>
-            <a:ext cx="54864" cy="2398336"/>
+            <a:off x="640080" y="3851415"/>
+            <a:ext cx="54864" cy="2366504"/>
           </a:xfrm>
           <a:prstGeom prst="rect">
             <a:avLst/>
@@ -32675,13 +34094,13 @@
       </p:sp>
       <p:sp>
         <p:nvSpPr>
-          <p:cNvPr id="13" name="TextBox 12"/>
+          <p:cNvPr id="14" name="TextBox 13"/>
           <p:cNvSpPr txBox="1"/>
           <p:nvPr/>
         </p:nvSpPr>
         <p:spPr>
           <a:xfrm>
-            <a:off x="804671" y="3929311"/>
+            <a:off x="804671" y="3961143"/>
             <a:ext cx="10616184" cy="228600"/>
           </a:xfrm>
           <a:prstGeom prst="rect">
@@ -32717,14 +34136,14 @@
       </p:sp>
       <p:sp>
         <p:nvSpPr>
-          <p:cNvPr id="14" name="TextBox 13"/>
+          <p:cNvPr id="15" name="TextBox 14"/>
           <p:cNvSpPr txBox="1"/>
           <p:nvPr/>
         </p:nvSpPr>
         <p:spPr>
           <a:xfrm>
-            <a:off x="804671" y="4212775"/>
-            <a:ext cx="10616184" cy="1913704"/>
+            <a:off x="804671" y="4244607"/>
+            <a:ext cx="10616184" cy="1881872"/>
           </a:xfrm>
           <a:prstGeom prst="rect">
             <a:avLst/>
@@ -32752,14 +34171,14 @@
               <a:rPr>
                 <a:latin typeface="Inter"/>
               </a:rPr>
-              <a:t>Observation: Liquid share is 8.0% in the TEST evidence [S3]. Why it matters: This result determines which item receives priority in the next monitoring cycle. Uncertainty: Supporting coverage may omit later filings or corroborating detail. What would change the view: A new filing or report that resolves the item or changes it by 1%.</a:t>
+              <a:t>Observation: Liquid share is 8.0% in the review evidence [S3]. Why it matters: This result determines which item receives priority in the next monitoring cycle. Uncertainty: Supporting coverage may omit later filings or corroborating detail. What would change the view: A new filing or report that resolves the item or changes it by 1%.</a:t>
             </a:r>
           </a:p>
         </p:txBody>
       </p:sp>
       <p:sp>
         <p:nvSpPr>
-          <p:cNvPr id="15" name="Rectangle 14"/>
+          <p:cNvPr id="16" name="Rectangle 15"/>
           <p:cNvSpPr/>
           <p:nvPr/>
         </p:nvSpPr>
@@ -32808,7 +34227,7 @@
       </p:sp>
       <p:sp>
         <p:nvSpPr>
-          <p:cNvPr id="16" name="TextBox 15"/>
+          <p:cNvPr id="17" name="TextBox 16"/>
           <p:cNvSpPr txBox="1"/>
           <p:nvPr/>
         </p:nvSpPr>
@@ -32850,7 +34269,7 @@
       </p:sp>
       <p:sp>
         <p:nvSpPr>
-          <p:cNvPr id="17" name="TextBox 16"/>
+          <p:cNvPr id="18" name="TextBox 17"/>
           <p:cNvSpPr txBox="1"/>
           <p:nvPr/>
         </p:nvSpPr>
@@ -32885,14 +34304,14 @@
               <a:rPr>
                 <a:latin typeface="Inter"/>
               </a:rPr>
-              <a:t>TEST DATA — fictional portfolio for rendering tests only · Data as of 2026-06-30</a:t>
+              <a:t>Confidential — Investment Committee · Data as of 2026-06-30</a:t>
             </a:r>
           </a:p>
         </p:txBody>
       </p:sp>
       <p:sp>
         <p:nvSpPr>
-          <p:cNvPr id="18" name="TextBox 17"/>
+          <p:cNvPr id="19" name="TextBox 18"/>
           <p:cNvSpPr txBox="1"/>
           <p:nvPr/>
         </p:nvSpPr>
@@ -33007,6 +34426,48 @@
         </p:nvSpPr>
         <p:spPr>
           <a:xfrm>
+            <a:off x="5897880" y="310896"/>
+            <a:ext cx="4800600" cy="256032"/>
+          </a:xfrm>
+          <a:prstGeom prst="rect">
+            <a:avLst/>
+          </a:prstGeom>
+          <a:noFill/>
+        </p:spPr>
+        <p:txBody>
+          <a:bodyPr wrap="none" lIns="9144" rIns="9144" tIns="9144" bIns="9144" anchor="t">
+            <a:spAutoFit/>
+          </a:bodyPr>
+          <a:lstStyle/>
+          <a:p>
+            <a:pPr algn="r">
+              <a:spcAft>
+                <a:spcPts val="0"/>
+              </a:spcAft>
+              <a:defRPr sz="680" b="1">
+                <a:solidFill>
+                  <a:srgbClr val="4F6B00"/>
+                </a:solidFill>
+                <a:latin typeface="Inter"/>
+              </a:defRPr>
+            </a:pPr>
+            <a:r>
+              <a:rPr>
+                <a:latin typeface="Inter"/>
+              </a:rPr>
+              <a:t>Illustrative, Gradient Maintained — demo data, not the client's holdings or managers</a:t>
+            </a:r>
+          </a:p>
+        </p:txBody>
+      </p:sp>
+      <p:sp>
+        <p:nvSpPr>
+          <p:cNvPr id="4" name="TextBox 3"/>
+          <p:cNvSpPr txBox="1"/>
+          <p:nvPr/>
+        </p:nvSpPr>
+        <p:spPr>
+          <a:xfrm>
             <a:off x="640080" y="566928"/>
             <a:ext cx="10058400" cy="530352"/>
           </a:xfrm>
@@ -33043,7 +34504,7 @@
       </p:sp>
       <p:sp>
         <p:nvSpPr>
-          <p:cNvPr id="4" name="Rectangle 3"/>
+          <p:cNvPr id="5" name="Rectangle 4"/>
           <p:cNvSpPr/>
           <p:nvPr/>
         </p:nvSpPr>
@@ -33092,7 +34553,7 @@
       </p:sp>
       <p:sp>
         <p:nvSpPr>
-          <p:cNvPr id="5" name="Rectangle 4"/>
+          <p:cNvPr id="6" name="Rectangle 5"/>
           <p:cNvSpPr/>
           <p:nvPr/>
         </p:nvSpPr>
@@ -33141,7 +34602,7 @@
       </p:sp>
       <p:sp>
         <p:nvSpPr>
-          <p:cNvPr id="6" name="TextBox 5"/>
+          <p:cNvPr id="7" name="TextBox 6"/>
           <p:cNvSpPr txBox="1"/>
           <p:nvPr/>
         </p:nvSpPr>
@@ -33183,7 +34644,7 @@
       </p:sp>
       <p:graphicFrame>
         <p:nvGraphicFramePr>
-          <p:cNvPr id="7" name="Table 6"/>
+          <p:cNvPr id="8" name="Table 7"/>
           <p:cNvGraphicFramePr>
             <a:graphicFrameLocks noGrp="1"/>
           </p:cNvGraphicFramePr>
@@ -33248,7 +34709,7 @@
                         <a:rPr>
                           <a:latin typeface="Inter"/>
                         </a:rPr>
-                        <a:t>Northstar Total Fund (TEST) [S2]</a:t>
+                        <a:t>Northstar Total Fund [S2]</a:t>
                       </a:r>
                     </a:p>
                   </a:txBody>
@@ -33360,7 +34821,7 @@
                         <a:rPr>
                           <a:latin typeface="Inter"/>
                         </a:rPr>
-                        <a:t>Example Absolute Return Index (TEST) [S5]</a:t>
+                        <a:t>Northstar Absolute Return Index [S5]</a:t>
                       </a:r>
                     </a:p>
                   </a:txBody>
@@ -33528,7 +34989,7 @@
                         <a:rPr>
                           <a:latin typeface="Inter"/>
                         </a:rPr>
-                        <a:t>Fictional TEST data [S1] [S1]</a:t>
+                        <a:t>Illustrative sample data [S1] [S1]</a:t>
                       </a:r>
                     </a:p>
                   </a:txBody>
@@ -33545,7 +35006,7 @@
       </p:graphicFrame>
       <p:sp>
         <p:nvSpPr>
-          <p:cNvPr id="8" name="TextBox 7"/>
+          <p:cNvPr id="9" name="TextBox 8"/>
           <p:cNvSpPr txBox="1"/>
           <p:nvPr/>
         </p:nvSpPr>
@@ -33587,7 +35048,7 @@
       </p:sp>
       <p:graphicFrame>
         <p:nvGraphicFramePr>
-          <p:cNvPr id="9" name="Table 8"/>
+          <p:cNvPr id="10" name="Table 9"/>
           <p:cNvGraphicFramePr>
             <a:graphicFrameLocks noGrp="1"/>
           </p:cNvGraphicFramePr>
@@ -34164,7 +35625,7 @@
       </p:graphicFrame>
       <p:sp>
         <p:nvSpPr>
-          <p:cNvPr id="10" name="Rectangle 9"/>
+          <p:cNvPr id="11" name="Rectangle 10"/>
           <p:cNvSpPr/>
           <p:nvPr/>
         </p:nvSpPr>
@@ -34213,7 +35674,7 @@
       </p:sp>
       <p:sp>
         <p:nvSpPr>
-          <p:cNvPr id="11" name="TextBox 10"/>
+          <p:cNvPr id="12" name="TextBox 11"/>
           <p:cNvSpPr txBox="1"/>
           <p:nvPr/>
         </p:nvSpPr>
@@ -34255,7 +35716,7 @@
       </p:sp>
       <p:sp>
         <p:nvSpPr>
-          <p:cNvPr id="12" name="TextBox 11"/>
+          <p:cNvPr id="13" name="TextBox 12"/>
           <p:cNvSpPr txBox="1"/>
           <p:nvPr/>
         </p:nvSpPr>
@@ -34290,14 +35751,14 @@
               <a:rPr>
                 <a:latin typeface="Inter"/>
               </a:rPr>
-              <a:t>TEST DATA — fictional portfolio for rendering tests only · Data as of 2026-06-30</a:t>
+              <a:t>Confidential — Investment Committee · Data as of 2026-06-30</a:t>
             </a:r>
           </a:p>
         </p:txBody>
       </p:sp>
       <p:sp>
         <p:nvSpPr>
-          <p:cNvPr id="13" name="TextBox 12"/>
+          <p:cNvPr id="14" name="TextBox 13"/>
           <p:cNvSpPr txBox="1"/>
           <p:nvPr/>
         </p:nvSpPr>
@@ -34412,6 +35873,48 @@
         </p:nvSpPr>
         <p:spPr>
           <a:xfrm>
+            <a:off x="5897880" y="310896"/>
+            <a:ext cx="4800600" cy="256032"/>
+          </a:xfrm>
+          <a:prstGeom prst="rect">
+            <a:avLst/>
+          </a:prstGeom>
+          <a:noFill/>
+        </p:spPr>
+        <p:txBody>
+          <a:bodyPr wrap="none" lIns="9144" rIns="9144" tIns="9144" bIns="9144" anchor="t">
+            <a:spAutoFit/>
+          </a:bodyPr>
+          <a:lstStyle/>
+          <a:p>
+            <a:pPr algn="r">
+              <a:spcAft>
+                <a:spcPts val="0"/>
+              </a:spcAft>
+              <a:defRPr sz="680" b="1">
+                <a:solidFill>
+                  <a:srgbClr val="4F6B00"/>
+                </a:solidFill>
+                <a:latin typeface="Inter"/>
+              </a:defRPr>
+            </a:pPr>
+            <a:r>
+              <a:rPr>
+                <a:latin typeface="Inter"/>
+              </a:rPr>
+              <a:t>Illustrative, Gradient Maintained — demo data, not the client's holdings or managers</a:t>
+            </a:r>
+          </a:p>
+        </p:txBody>
+      </p:sp>
+      <p:sp>
+        <p:nvSpPr>
+          <p:cNvPr id="4" name="TextBox 3"/>
+          <p:cNvSpPr txBox="1"/>
+          <p:nvPr/>
+        </p:nvSpPr>
+        <p:spPr>
+          <a:xfrm>
             <a:off x="640080" y="566928"/>
             <a:ext cx="10058400" cy="530352"/>
           </a:xfrm>
@@ -34448,7 +35951,7 @@
       </p:sp>
       <p:sp>
         <p:nvSpPr>
-          <p:cNvPr id="4" name="Rectangle 3"/>
+          <p:cNvPr id="5" name="Rectangle 4"/>
           <p:cNvSpPr/>
           <p:nvPr/>
         </p:nvSpPr>
@@ -34497,7 +36000,7 @@
       </p:sp>
       <p:sp>
         <p:nvSpPr>
-          <p:cNvPr id="5" name="Rectangle 4"/>
+          <p:cNvPr id="6" name="Rectangle 5"/>
           <p:cNvSpPr/>
           <p:nvPr/>
         </p:nvSpPr>
@@ -34546,7 +36049,7 @@
       </p:sp>
       <p:sp>
         <p:nvSpPr>
-          <p:cNvPr id="6" name="TextBox 5"/>
+          <p:cNvPr id="7" name="TextBox 6"/>
           <p:cNvSpPr txBox="1"/>
           <p:nvPr/>
         </p:nvSpPr>
@@ -34588,7 +36091,7 @@
       </p:sp>
       <p:sp>
         <p:nvSpPr>
-          <p:cNvPr id="7" name="TextBox 6"/>
+          <p:cNvPr id="8" name="TextBox 7"/>
           <p:cNvSpPr txBox="1"/>
           <p:nvPr/>
         </p:nvSpPr>
@@ -34623,14 +36126,14 @@
               <a:rPr>
                 <a:latin typeface="Inter"/>
               </a:rPr>
-              <a:t>HEDGE-FUND STRATEGY ALLOCATION (TEST)</a:t>
+              <a:t>HEDGE-FUND STRATEGY ALLOCATION</a:t>
             </a:r>
           </a:p>
         </p:txBody>
       </p:sp>
       <p:graphicFrame>
         <p:nvGraphicFramePr>
-          <p:cNvPr id="8" name="Chart 7"/>
+          <p:cNvPr id="9" name="Chart 8"/>
           <p:cNvGraphicFramePr>
             <a:graphicFrameLocks noGrp="1"/>
           </p:cNvGraphicFramePr>
@@ -34648,7 +36151,7 @@
       </p:graphicFrame>
       <p:sp>
         <p:nvSpPr>
-          <p:cNvPr id="9" name="Rectangle 8"/>
+          <p:cNvPr id="10" name="Rectangle 9"/>
           <p:cNvSpPr/>
           <p:nvPr/>
         </p:nvSpPr>
@@ -34697,7 +36200,7 @@
       </p:sp>
       <p:sp>
         <p:nvSpPr>
-          <p:cNvPr id="10" name="TextBox 9"/>
+          <p:cNvPr id="11" name="TextBox 10"/>
           <p:cNvSpPr txBox="1"/>
           <p:nvPr/>
         </p:nvSpPr>
@@ -34732,14 +36235,14 @@
               <a:rPr>
                 <a:latin typeface="Inter"/>
               </a:rPr>
-              <a:t>Sources: none cited</a:t>
+              <a:t>Sources: S1</a:t>
             </a:r>
           </a:p>
         </p:txBody>
       </p:sp>
       <p:sp>
         <p:nvSpPr>
-          <p:cNvPr id="11" name="TextBox 10"/>
+          <p:cNvPr id="12" name="TextBox 11"/>
           <p:cNvSpPr txBox="1"/>
           <p:nvPr/>
         </p:nvSpPr>
@@ -34774,14 +36277,14 @@
               <a:rPr>
                 <a:latin typeface="Inter"/>
               </a:rPr>
-              <a:t>TEST DATA — fictional portfolio for rendering tests only · Data as of 2026-06-30</a:t>
+              <a:t>Confidential — Investment Committee · Data as of 2026-06-30</a:t>
             </a:r>
           </a:p>
         </p:txBody>
       </p:sp>
       <p:sp>
         <p:nvSpPr>
-          <p:cNvPr id="12" name="TextBox 11"/>
+          <p:cNvPr id="13" name="TextBox 12"/>
           <p:cNvSpPr txBox="1"/>
           <p:nvPr/>
         </p:nvSpPr>
@@ -34896,6 +36399,48 @@
         </p:nvSpPr>
         <p:spPr>
           <a:xfrm>
+            <a:off x="5897880" y="310896"/>
+            <a:ext cx="4800600" cy="256032"/>
+          </a:xfrm>
+          <a:prstGeom prst="rect">
+            <a:avLst/>
+          </a:prstGeom>
+          <a:noFill/>
+        </p:spPr>
+        <p:txBody>
+          <a:bodyPr wrap="none" lIns="9144" rIns="9144" tIns="9144" bIns="9144" anchor="t">
+            <a:spAutoFit/>
+          </a:bodyPr>
+          <a:lstStyle/>
+          <a:p>
+            <a:pPr algn="r">
+              <a:spcAft>
+                <a:spcPts val="0"/>
+              </a:spcAft>
+              <a:defRPr sz="680" b="1">
+                <a:solidFill>
+                  <a:srgbClr val="4F6B00"/>
+                </a:solidFill>
+                <a:latin typeface="Inter"/>
+              </a:defRPr>
+            </a:pPr>
+            <a:r>
+              <a:rPr>
+                <a:latin typeface="Inter"/>
+              </a:rPr>
+              <a:t>Illustrative, Gradient Maintained — demo data, not the client's holdings or managers</a:t>
+            </a:r>
+          </a:p>
+        </p:txBody>
+      </p:sp>
+      <p:sp>
+        <p:nvSpPr>
+          <p:cNvPr id="4" name="TextBox 3"/>
+          <p:cNvSpPr txBox="1"/>
+          <p:nvPr/>
+        </p:nvSpPr>
+        <p:spPr>
+          <a:xfrm>
             <a:off x="640080" y="566928"/>
             <a:ext cx="10058400" cy="530352"/>
           </a:xfrm>
@@ -34932,7 +36477,7 @@
       </p:sp>
       <p:sp>
         <p:nvSpPr>
-          <p:cNvPr id="4" name="Rectangle 3"/>
+          <p:cNvPr id="5" name="Rectangle 4"/>
           <p:cNvSpPr/>
           <p:nvPr/>
         </p:nvSpPr>
@@ -34981,7 +36526,7 @@
       </p:sp>
       <p:sp>
         <p:nvSpPr>
-          <p:cNvPr id="5" name="Rectangle 4"/>
+          <p:cNvPr id="6" name="Rectangle 5"/>
           <p:cNvSpPr/>
           <p:nvPr/>
         </p:nvSpPr>
@@ -35030,7 +36575,7 @@
       </p:sp>
       <p:sp>
         <p:nvSpPr>
-          <p:cNvPr id="6" name="TextBox 5"/>
+          <p:cNvPr id="7" name="TextBox 6"/>
           <p:cNvSpPr txBox="1"/>
           <p:nvPr/>
         </p:nvSpPr>
@@ -35072,7 +36617,7 @@
       </p:sp>
       <p:sp>
         <p:nvSpPr>
-          <p:cNvPr id="7" name="TextBox 6"/>
+          <p:cNvPr id="8" name="TextBox 7"/>
           <p:cNvSpPr txBox="1"/>
           <p:nvPr/>
         </p:nvSpPr>
@@ -35114,7 +36659,7 @@
       </p:sp>
       <p:graphicFrame>
         <p:nvGraphicFramePr>
-          <p:cNvPr id="8" name="Table 7"/>
+          <p:cNvPr id="9" name="Table 8"/>
           <p:cNvGraphicFramePr>
             <a:graphicFrameLocks noGrp="1"/>
           </p:cNvGraphicFramePr>
@@ -35320,7 +36865,7 @@
                         <a:rPr>
                           <a:latin typeface="Inter"/>
                         </a:rPr>
-                        <a:t>Example Alpha Partners (TEST)</a:t>
+                        <a:t>Example Alpha Partners</a:t>
                       </a:r>
                     </a:p>
                   </a:txBody>
@@ -35484,7 +37029,7 @@
                         <a:rPr>
                           <a:latin typeface="Inter"/>
                         </a:rPr>
-                        <a:t>Example Macro Fund (TEST)</a:t>
+                        <a:t>Example Macro Fund</a:t>
                       </a:r>
                     </a:p>
                   </a:txBody>
@@ -35648,7 +37193,7 @@
                         <a:rPr>
                           <a:latin typeface="Inter"/>
                         </a:rPr>
-                        <a:t>Example Relative Value Fund (TEST)</a:t>
+                        <a:t>Example Relative Value Fund</a:t>
                       </a:r>
                     </a:p>
                   </a:txBody>
@@ -35812,7 +37357,7 @@
                         <a:rPr>
                           <a:latin typeface="Inter"/>
                         </a:rPr>
-                        <a:t>Example Multi-Strategy Fund (TEST)</a:t>
+                        <a:t>Example Multi-Strategy Fund</a:t>
                       </a:r>
                     </a:p>
                   </a:txBody>
@@ -35964,7 +37509,7 @@
       </p:graphicFrame>
       <p:sp>
         <p:nvSpPr>
-          <p:cNvPr id="9" name="TextBox 8"/>
+          <p:cNvPr id="10" name="TextBox 9"/>
           <p:cNvSpPr txBox="1"/>
           <p:nvPr/>
         </p:nvSpPr>
@@ -36006,7 +37551,7 @@
       </p:sp>
       <p:sp>
         <p:nvSpPr>
-          <p:cNvPr id="10" name="Rectangle 9"/>
+          <p:cNvPr id="11" name="Rectangle 10"/>
           <p:cNvSpPr/>
           <p:nvPr/>
         </p:nvSpPr>
@@ -36055,7 +37600,7 @@
       </p:sp>
       <p:sp>
         <p:nvSpPr>
-          <p:cNvPr id="11" name="TextBox 10"/>
+          <p:cNvPr id="12" name="TextBox 11"/>
           <p:cNvSpPr txBox="1"/>
           <p:nvPr/>
         </p:nvSpPr>
@@ -36097,7 +37642,7 @@
       </p:sp>
       <p:sp>
         <p:nvSpPr>
-          <p:cNvPr id="12" name="TextBox 11"/>
+          <p:cNvPr id="13" name="TextBox 12"/>
           <p:cNvSpPr txBox="1"/>
           <p:nvPr/>
         </p:nvSpPr>
@@ -36132,14 +37677,14 @@
               <a:rPr>
                 <a:latin typeface="Inter"/>
               </a:rPr>
-              <a:t>TEST DATA — fictional portfolio for rendering tests only · Data as of 2026-06-30</a:t>
+              <a:t>Confidential — Investment Committee · Data as of 2026-06-30</a:t>
             </a:r>
           </a:p>
         </p:txBody>
       </p:sp>
       <p:sp>
         <p:nvSpPr>
-          <p:cNvPr id="13" name="TextBox 12"/>
+          <p:cNvPr id="14" name="TextBox 13"/>
           <p:cNvSpPr txBox="1"/>
           <p:nvPr/>
         </p:nvSpPr>
@@ -36255,7 +37800,7 @@
         <p:spPr>
           <a:xfrm>
             <a:off x="640080" y="329184"/>
-            <a:ext cx="9875520" cy="182880"/>
+            <a:ext cx="5303520" cy="182880"/>
           </a:xfrm>
           <a:prstGeom prst="rect">
             <a:avLst/>
@@ -36296,6 +37841,48 @@
         </p:nvSpPr>
         <p:spPr>
           <a:xfrm>
+            <a:off x="5897880" y="310896"/>
+            <a:ext cx="4800600" cy="256032"/>
+          </a:xfrm>
+          <a:prstGeom prst="rect">
+            <a:avLst/>
+          </a:prstGeom>
+          <a:noFill/>
+        </p:spPr>
+        <p:txBody>
+          <a:bodyPr wrap="none" lIns="9144" rIns="9144" tIns="9144" bIns="9144" anchor="t">
+            <a:spAutoFit/>
+          </a:bodyPr>
+          <a:lstStyle/>
+          <a:p>
+            <a:pPr algn="r">
+              <a:spcAft>
+                <a:spcPts val="0"/>
+              </a:spcAft>
+              <a:defRPr sz="680" b="1">
+                <a:solidFill>
+                  <a:srgbClr val="4F6B00"/>
+                </a:solidFill>
+                <a:latin typeface="Inter"/>
+              </a:defRPr>
+            </a:pPr>
+            <a:r>
+              <a:rPr>
+                <a:latin typeface="Inter"/>
+              </a:rPr>
+              <a:t>Illustrative, Gradient Maintained — demo data, not the client's holdings or managers</a:t>
+            </a:r>
+          </a:p>
+        </p:txBody>
+      </p:sp>
+      <p:sp>
+        <p:nvSpPr>
+          <p:cNvPr id="5" name="TextBox 4"/>
+          <p:cNvSpPr txBox="1"/>
+          <p:nvPr/>
+        </p:nvSpPr>
+        <p:spPr>
+          <a:xfrm>
             <a:off x="640080" y="566928"/>
             <a:ext cx="10058400" cy="530352"/>
           </a:xfrm>
@@ -36332,7 +37919,7 @@
       </p:sp>
       <p:sp>
         <p:nvSpPr>
-          <p:cNvPr id="5" name="Rectangle 4"/>
+          <p:cNvPr id="6" name="Rectangle 5"/>
           <p:cNvSpPr/>
           <p:nvPr/>
         </p:nvSpPr>
@@ -36381,7 +37968,7 @@
       </p:sp>
       <p:sp>
         <p:nvSpPr>
-          <p:cNvPr id="6" name="Rectangle 5"/>
+          <p:cNvPr id="7" name="Rectangle 6"/>
           <p:cNvSpPr/>
           <p:nvPr/>
         </p:nvSpPr>
@@ -36430,7 +38017,7 @@
       </p:sp>
       <p:sp>
         <p:nvSpPr>
-          <p:cNvPr id="7" name="TextBox 6"/>
+          <p:cNvPr id="8" name="TextBox 7"/>
           <p:cNvSpPr txBox="1"/>
           <p:nvPr/>
         </p:nvSpPr>
@@ -36472,7 +38059,7 @@
       </p:sp>
       <p:sp>
         <p:nvSpPr>
-          <p:cNvPr id="8" name="TextBox 7"/>
+          <p:cNvPr id="9" name="TextBox 8"/>
           <p:cNvSpPr txBox="1"/>
           <p:nvPr/>
         </p:nvSpPr>
@@ -36514,7 +38101,7 @@
       </p:sp>
       <p:sp>
         <p:nvSpPr>
-          <p:cNvPr id="9" name="TextBox 8"/>
+          <p:cNvPr id="10" name="TextBox 9"/>
           <p:cNvSpPr txBox="1"/>
           <p:nvPr/>
         </p:nvSpPr>
@@ -36556,7 +38143,7 @@
       </p:sp>
       <p:sp>
         <p:nvSpPr>
-          <p:cNvPr id="10" name="Rectangle 9"/>
+          <p:cNvPr id="11" name="Rectangle 10"/>
           <p:cNvSpPr/>
           <p:nvPr/>
         </p:nvSpPr>
@@ -36605,7 +38192,7 @@
       </p:sp>
       <p:sp>
         <p:nvSpPr>
-          <p:cNvPr id="11" name="Oval 10"/>
+          <p:cNvPr id="12" name="Oval 11"/>
           <p:cNvSpPr/>
           <p:nvPr/>
         </p:nvSpPr>
@@ -36654,7 +38241,7 @@
       </p:sp>
       <p:sp>
         <p:nvSpPr>
-          <p:cNvPr id="12" name="Rectangle 11"/>
+          <p:cNvPr id="13" name="Rectangle 12"/>
           <p:cNvSpPr/>
           <p:nvPr/>
         </p:nvSpPr>
@@ -36703,7 +38290,7 @@
       </p:sp>
       <p:sp>
         <p:nvSpPr>
-          <p:cNvPr id="13" name="TextBox 12"/>
+          <p:cNvPr id="14" name="TextBox 13"/>
           <p:cNvSpPr txBox="1"/>
           <p:nvPr/>
         </p:nvSpPr>
@@ -36745,7 +38332,7 @@
       </p:sp>
       <p:sp>
         <p:nvSpPr>
-          <p:cNvPr id="14" name="Rectangle 13"/>
+          <p:cNvPr id="15" name="Rectangle 14"/>
           <p:cNvSpPr/>
           <p:nvPr/>
         </p:nvSpPr>
@@ -36794,7 +38381,7 @@
       </p:sp>
       <p:sp>
         <p:nvSpPr>
-          <p:cNvPr id="15" name="Oval 14"/>
+          <p:cNvPr id="16" name="Oval 15"/>
           <p:cNvSpPr/>
           <p:nvPr/>
         </p:nvSpPr>
@@ -36843,7 +38430,7 @@
       </p:sp>
       <p:sp>
         <p:nvSpPr>
-          <p:cNvPr id="16" name="Rectangle 15"/>
+          <p:cNvPr id="17" name="Rectangle 16"/>
           <p:cNvSpPr/>
           <p:nvPr/>
         </p:nvSpPr>
@@ -36892,7 +38479,7 @@
       </p:sp>
       <p:sp>
         <p:nvSpPr>
-          <p:cNvPr id="17" name="TextBox 16"/>
+          <p:cNvPr id="18" name="TextBox 17"/>
           <p:cNvSpPr txBox="1"/>
           <p:nvPr/>
         </p:nvSpPr>
@@ -36934,7 +38521,7 @@
       </p:sp>
       <p:sp>
         <p:nvSpPr>
-          <p:cNvPr id="18" name="Rectangle 17"/>
+          <p:cNvPr id="19" name="Rectangle 18"/>
           <p:cNvSpPr/>
           <p:nvPr/>
         </p:nvSpPr>
@@ -36983,7 +38570,7 @@
       </p:sp>
       <p:sp>
         <p:nvSpPr>
-          <p:cNvPr id="19" name="Oval 18"/>
+          <p:cNvPr id="20" name="Oval 19"/>
           <p:cNvSpPr/>
           <p:nvPr/>
         </p:nvSpPr>
@@ -37032,7 +38619,7 @@
       </p:sp>
       <p:sp>
         <p:nvSpPr>
-          <p:cNvPr id="20" name="Rectangle 19"/>
+          <p:cNvPr id="21" name="Rectangle 20"/>
           <p:cNvSpPr/>
           <p:nvPr/>
         </p:nvSpPr>
@@ -37081,7 +38668,7 @@
       </p:sp>
       <p:sp>
         <p:nvSpPr>
-          <p:cNvPr id="21" name="TextBox 20"/>
+          <p:cNvPr id="22" name="TextBox 21"/>
           <p:cNvSpPr txBox="1"/>
           <p:nvPr/>
         </p:nvSpPr>
@@ -37123,7 +38710,7 @@
       </p:sp>
       <p:sp>
         <p:nvSpPr>
-          <p:cNvPr id="22" name="Rectangle 21"/>
+          <p:cNvPr id="23" name="Rectangle 22"/>
           <p:cNvSpPr/>
           <p:nvPr/>
         </p:nvSpPr>
@@ -37172,7 +38759,7 @@
       </p:sp>
       <p:sp>
         <p:nvSpPr>
-          <p:cNvPr id="23" name="Oval 22"/>
+          <p:cNvPr id="24" name="Oval 23"/>
           <p:cNvSpPr/>
           <p:nvPr/>
         </p:nvSpPr>
@@ -37221,7 +38808,7 @@
       </p:sp>
       <p:sp>
         <p:nvSpPr>
-          <p:cNvPr id="24" name="Rectangle 23"/>
+          <p:cNvPr id="25" name="Rectangle 24"/>
           <p:cNvSpPr/>
           <p:nvPr/>
         </p:nvSpPr>
@@ -37270,7 +38857,7 @@
       </p:sp>
       <p:sp>
         <p:nvSpPr>
-          <p:cNvPr id="25" name="Rectangle 24"/>
+          <p:cNvPr id="26" name="Rectangle 25"/>
           <p:cNvSpPr/>
           <p:nvPr/>
         </p:nvSpPr>
@@ -37319,7 +38906,7 @@
       </p:sp>
       <p:sp>
         <p:nvSpPr>
-          <p:cNvPr id="26" name="TextBox 25"/>
+          <p:cNvPr id="27" name="TextBox 26"/>
           <p:cNvSpPr txBox="1"/>
           <p:nvPr/>
         </p:nvSpPr>
@@ -37354,14 +38941,14 @@
               <a:rPr>
                 <a:latin typeface="Inter"/>
               </a:rPr>
-              <a:t>Sources: none cited</a:t>
+              <a:t>Sources: S1</a:t>
             </a:r>
           </a:p>
         </p:txBody>
       </p:sp>
       <p:sp>
         <p:nvSpPr>
-          <p:cNvPr id="27" name="TextBox 26"/>
+          <p:cNvPr id="28" name="TextBox 27"/>
           <p:cNvSpPr txBox="1"/>
           <p:nvPr/>
         </p:nvSpPr>
@@ -37396,14 +38983,14 @@
               <a:rPr>
                 <a:latin typeface="Inter"/>
               </a:rPr>
-              <a:t>TEST DATA — fictional portfolio for rendering tests only · Data as of 2026-06-30</a:t>
+              <a:t>Confidential — Investment Committee · Data as of 2026-06-30</a:t>
             </a:r>
           </a:p>
         </p:txBody>
       </p:sp>
       <p:sp>
         <p:nvSpPr>
-          <p:cNvPr id="28" name="TextBox 27"/>
+          <p:cNvPr id="29" name="TextBox 28"/>
           <p:cNvSpPr txBox="1"/>
           <p:nvPr/>
         </p:nvSpPr>
@@ -37519,7 +39106,7 @@
         <p:spPr>
           <a:xfrm>
             <a:off x="640080" y="329184"/>
-            <a:ext cx="9875520" cy="182880"/>
+            <a:ext cx="5303520" cy="182880"/>
           </a:xfrm>
           <a:prstGeom prst="rect">
             <a:avLst/>
@@ -37560,6 +39147,48 @@
         </p:nvSpPr>
         <p:spPr>
           <a:xfrm>
+            <a:off x="5897880" y="310896"/>
+            <a:ext cx="4800600" cy="256032"/>
+          </a:xfrm>
+          <a:prstGeom prst="rect">
+            <a:avLst/>
+          </a:prstGeom>
+          <a:noFill/>
+        </p:spPr>
+        <p:txBody>
+          <a:bodyPr wrap="none" lIns="9144" rIns="9144" tIns="9144" bIns="9144" anchor="t">
+            <a:spAutoFit/>
+          </a:bodyPr>
+          <a:lstStyle/>
+          <a:p>
+            <a:pPr algn="r">
+              <a:spcAft>
+                <a:spcPts val="0"/>
+              </a:spcAft>
+              <a:defRPr sz="680" b="1">
+                <a:solidFill>
+                  <a:srgbClr val="4F6B00"/>
+                </a:solidFill>
+                <a:latin typeface="Inter"/>
+              </a:defRPr>
+            </a:pPr>
+            <a:r>
+              <a:rPr>
+                <a:latin typeface="Inter"/>
+              </a:rPr>
+              <a:t>Illustrative, Gradient Maintained — demo data, not the client's holdings or managers</a:t>
+            </a:r>
+          </a:p>
+        </p:txBody>
+      </p:sp>
+      <p:sp>
+        <p:nvSpPr>
+          <p:cNvPr id="5" name="TextBox 4"/>
+          <p:cNvSpPr txBox="1"/>
+          <p:nvPr/>
+        </p:nvSpPr>
+        <p:spPr>
+          <a:xfrm>
             <a:off x="640080" y="566928"/>
             <a:ext cx="10058400" cy="530352"/>
           </a:xfrm>
@@ -37596,7 +39225,7 @@
       </p:sp>
       <p:sp>
         <p:nvSpPr>
-          <p:cNvPr id="5" name="Rectangle 4"/>
+          <p:cNvPr id="6" name="Rectangle 5"/>
           <p:cNvSpPr/>
           <p:nvPr/>
         </p:nvSpPr>
@@ -37645,7 +39274,7 @@
       </p:sp>
       <p:sp>
         <p:nvSpPr>
-          <p:cNvPr id="6" name="Rectangle 5"/>
+          <p:cNvPr id="7" name="Rectangle 6"/>
           <p:cNvSpPr/>
           <p:nvPr/>
         </p:nvSpPr>
@@ -37694,7 +39323,7 @@
       </p:sp>
       <p:sp>
         <p:nvSpPr>
-          <p:cNvPr id="7" name="TextBox 6"/>
+          <p:cNvPr id="8" name="TextBox 7"/>
           <p:cNvSpPr txBox="1"/>
           <p:nvPr/>
         </p:nvSpPr>
@@ -37736,7 +39365,7 @@
       </p:sp>
       <p:sp>
         <p:nvSpPr>
-          <p:cNvPr id="8" name="TextBox 7"/>
+          <p:cNvPr id="9" name="TextBox 8"/>
           <p:cNvSpPr txBox="1"/>
           <p:nvPr/>
         </p:nvSpPr>
@@ -37778,7 +39407,7 @@
       </p:sp>
       <p:graphicFrame>
         <p:nvGraphicFramePr>
-          <p:cNvPr id="9" name="Chart 8"/>
+          <p:cNvPr id="10" name="Chart 9"/>
           <p:cNvGraphicFramePr>
             <a:graphicFrameLocks noGrp="1"/>
           </p:cNvGraphicFramePr>
@@ -37796,7 +39425,7 @@
       </p:graphicFrame>
       <p:sp>
         <p:nvSpPr>
-          <p:cNvPr id="10" name="Rectangle 9"/>
+          <p:cNvPr id="11" name="Rectangle 10"/>
           <p:cNvSpPr/>
           <p:nvPr/>
         </p:nvSpPr>
@@ -37845,7 +39474,7 @@
       </p:sp>
       <p:sp>
         <p:nvSpPr>
-          <p:cNvPr id="11" name="TextBox 10"/>
+          <p:cNvPr id="12" name="TextBox 11"/>
           <p:cNvSpPr txBox="1"/>
           <p:nvPr/>
         </p:nvSpPr>
@@ -37880,14 +39509,14 @@
               <a:rPr>
                 <a:latin typeface="Inter"/>
               </a:rPr>
-              <a:t>Sources: none cited</a:t>
+              <a:t>Sources: S1</a:t>
             </a:r>
           </a:p>
         </p:txBody>
       </p:sp>
       <p:sp>
         <p:nvSpPr>
-          <p:cNvPr id="12" name="TextBox 11"/>
+          <p:cNvPr id="13" name="TextBox 12"/>
           <p:cNvSpPr txBox="1"/>
           <p:nvPr/>
         </p:nvSpPr>
@@ -37922,14 +39551,14 @@
               <a:rPr>
                 <a:latin typeface="Inter"/>
               </a:rPr>
-              <a:t>TEST DATA — fictional portfolio for rendering tests only · Data as of 2026-06-30</a:t>
+              <a:t>Confidential — Investment Committee · Data as of 2026-06-30</a:t>
             </a:r>
           </a:p>
         </p:txBody>
       </p:sp>
       <p:sp>
         <p:nvSpPr>
-          <p:cNvPr id="13" name="TextBox 12"/>
+          <p:cNvPr id="14" name="TextBox 13"/>
           <p:cNvSpPr txBox="1"/>
           <p:nvPr/>
         </p:nvSpPr>

--- a/plugins/gradient-cio/assets/examples/gradient-portfolio-construction-marketable-alternatives.pptx
+++ b/plugins/gradient-cio/assets/examples/gradient-portfolio-construction-marketable-alternatives.pptx
@@ -36,6 +36,7 @@
     <ns0:sldId id="284" ns1:id="rId35"/>
     <ns0:sldId id="285" ns1:id="rId36"/>
     <ns0:sldId id="286" ns1:id="rId37"/>
+    <ns0:sldId id="287" ns1:id="rId38"/>
   </ns0:sldIdLst>
   <ns0:sldSz cx="12191695" cy="6858000" type="screen16x9"/>
   <ns0:notesSz cx="6858000" cy="9144000"/>
@@ -5158,224 +5159,7 @@
       </p:sp>
       <p:sp>
         <p:nvSpPr>
-          <p:cNvPr id="17" name="Rectangle 16"/>
-          <p:cNvSpPr/>
-          <p:nvPr/>
-        </p:nvSpPr>
-        <p:spPr>
-          <a:xfrm>
-            <a:off x="685800" y="5687568"/>
-            <a:ext cx="3337560" cy="530352"/>
-          </a:xfrm>
-          <a:prstGeom prst="rect">
-            <a:avLst/>
-          </a:prstGeom>
-          <a:solidFill>
-            <a:srgbClr val="F2A93B"/>
-          </a:solidFill>
-          <a:ln>
-            <a:solidFill>
-              <a:srgbClr val="F2A93B"/>
-            </a:solidFill>
-          </a:ln>
-        </p:spPr>
-        <p:style>
-          <a:lnRef idx="1">
-            <a:schemeClr val="accent1"/>
-          </a:lnRef>
-          <a:fillRef idx="3">
-            <a:schemeClr val="accent1"/>
-          </a:fillRef>
-          <a:effectRef idx="2">
-            <a:schemeClr val="accent1"/>
-          </a:effectRef>
-          <a:fontRef idx="minor">
-            <a:schemeClr val="lt1"/>
-          </a:fontRef>
-        </p:style>
-        <p:txBody>
-          <a:bodyPr rtlCol="0" anchor="ctr"/>
-          <a:lstStyle/>
-          <a:p>
-            <a:pPr algn="ctr">
-              <a:defRPr>
-                <a:latin typeface="Inter"/>
-              </a:defRPr>
-            </a:pPr>
-          </a:p>
-        </p:txBody>
-      </p:sp>
-      <p:sp>
-        <p:nvSpPr>
-          <p:cNvPr id="18" name="TextBox 17"/>
-          <p:cNvSpPr txBox="1"/>
-          <p:nvPr/>
-        </p:nvSpPr>
-        <p:spPr>
-          <a:xfrm>
-            <a:off x="822960" y="5760720"/>
-            <a:ext cx="3063240" cy="128016"/>
-          </a:xfrm>
-          <a:prstGeom prst="rect">
-            <a:avLst/>
-          </a:prstGeom>
-          <a:noFill/>
-        </p:spPr>
-        <p:txBody>
-          <a:bodyPr wrap="none" lIns="9144" rIns="9144" tIns="9144" bIns="9144" anchor="t">
-            <a:spAutoFit/>
-          </a:bodyPr>
-          <a:lstStyle/>
-          <a:p>
-            <a:pPr algn="l">
-              <a:spcAft>
-                <a:spcPts val="0"/>
-              </a:spcAft>
-              <a:defRPr sz="620" b="1">
-                <a:solidFill>
-                  <a:srgbClr val="0D1117"/>
-                </a:solidFill>
-                <a:latin typeface="Inter"/>
-              </a:defRPr>
-            </a:pPr>
-            <a:r>
-              <a:rPr>
-                <a:latin typeface="Inter"/>
-              </a:rPr>
-              <a:t>OVERALL VIEW</a:t>
-            </a:r>
-          </a:p>
-        </p:txBody>
-      </p:sp>
-      <p:sp>
-        <p:nvSpPr>
-          <p:cNvPr id="19" name="TextBox 18"/>
-          <p:cNvSpPr txBox="1"/>
-          <p:nvPr/>
-        </p:nvSpPr>
-        <p:spPr>
-          <a:xfrm>
-            <a:off x="822960" y="5916168"/>
-            <a:ext cx="3063240" cy="182880"/>
-          </a:xfrm>
-          <a:prstGeom prst="rect">
-            <a:avLst/>
-          </a:prstGeom>
-          <a:noFill/>
-        </p:spPr>
-        <p:txBody>
-          <a:bodyPr wrap="none" lIns="9144" rIns="9144" tIns="9144" bIns="9144" anchor="t">
-            <a:spAutoFit/>
-          </a:bodyPr>
-          <a:lstStyle/>
-          <a:p>
-            <a:pPr algn="l">
-              <a:spcAft>
-                <a:spcPts val="0"/>
-              </a:spcAft>
-              <a:defRPr sz="900" b="1">
-                <a:solidFill>
-                  <a:srgbClr val="0D1117"/>
-                </a:solidFill>
-                <a:latin typeface="Inter"/>
-              </a:defRPr>
-            </a:pPr>
-            <a:r>
-              <a:rPr>
-                <a:latin typeface="Inter"/>
-              </a:rPr>
-              <a:t>Liquidity terms require confirmation</a:t>
-            </a:r>
-          </a:p>
-        </p:txBody>
-      </p:sp>
-      <p:sp>
-        <p:nvSpPr>
-          <p:cNvPr id="20" name="TextBox 19"/>
-          <p:cNvSpPr txBox="1"/>
-          <p:nvPr/>
-        </p:nvSpPr>
-        <p:spPr>
-          <a:xfrm>
-            <a:off x="4297680" y="5733288"/>
-            <a:ext cx="3108960" cy="164592"/>
-          </a:xfrm>
-          <a:prstGeom prst="rect">
-            <a:avLst/>
-          </a:prstGeom>
-          <a:noFill/>
-        </p:spPr>
-        <p:txBody>
-          <a:bodyPr wrap="none" lIns="9144" rIns="9144" tIns="9144" bIns="9144" anchor="t">
-            <a:spAutoFit/>
-          </a:bodyPr>
-          <a:lstStyle/>
-          <a:p>
-            <a:pPr algn="l">
-              <a:spcAft>
-                <a:spcPts val="0"/>
-              </a:spcAft>
-              <a:defRPr sz="650" b="1">
-                <a:solidFill>
-                  <a:srgbClr val="8A94A1"/>
-                </a:solidFill>
-                <a:latin typeface="Inter"/>
-              </a:defRPr>
-            </a:pPr>
-            <a:r>
-              <a:rPr>
-                <a:latin typeface="Inter"/>
-              </a:rPr>
-              <a:t>SCOPE REVIEWED</a:t>
-            </a:r>
-          </a:p>
-        </p:txBody>
-      </p:sp>
-      <p:sp>
-        <p:nvSpPr>
-          <p:cNvPr id="21" name="TextBox 20"/>
-          <p:cNvSpPr txBox="1"/>
-          <p:nvPr/>
-        </p:nvSpPr>
-        <p:spPr>
-          <a:xfrm>
-            <a:off x="4297680" y="5934456"/>
-            <a:ext cx="3108960" cy="201168"/>
-          </a:xfrm>
-          <a:prstGeom prst="rect">
-            <a:avLst/>
-          </a:prstGeom>
-          <a:noFill/>
-        </p:spPr>
-        <p:txBody>
-          <a:bodyPr wrap="none" lIns="9144" rIns="9144" tIns="9144" bIns="9144" anchor="t">
-            <a:spAutoFit/>
-          </a:bodyPr>
-          <a:lstStyle/>
-          <a:p>
-            <a:pPr algn="l">
-              <a:spcAft>
-                <a:spcPts val="0"/>
-              </a:spcAft>
-              <a:defRPr sz="800" b="1">
-                <a:solidFill>
-                  <a:srgbClr val="FFFFFF"/>
-                </a:solidFill>
-                <a:latin typeface="Inter"/>
-              </a:defRPr>
-            </a:pPr>
-            <a:r>
-              <a:rPr>
-                <a:latin typeface="Inter"/>
-              </a:rPr>
-              <a:t>8 of 9 · Partial</a:t>
-            </a:r>
-          </a:p>
-        </p:txBody>
-      </p:sp>
-      <p:sp>
-        <p:nvSpPr>
-          <p:cNvPr id="22" name="TextBox 21"/>
+          <p:cNvPr id="17" name="TextBox 16"/>
           <p:cNvSpPr txBox="1"/>
           <p:nvPr/>
         </p:nvSpPr>
@@ -5417,7 +5201,7 @@
       </p:sp>
       <p:sp>
         <p:nvSpPr>
-          <p:cNvPr id="23" name="TextBox 22"/>
+          <p:cNvPr id="18" name="TextBox 17"/>
           <p:cNvSpPr txBox="1"/>
           <p:nvPr/>
         </p:nvSpPr>
@@ -5459,7 +5243,7 @@
       </p:sp>
       <p:sp>
         <p:nvSpPr>
-          <p:cNvPr id="24" name="TextBox 23"/>
+          <p:cNvPr id="19" name="TextBox 18"/>
           <p:cNvSpPr txBox="1"/>
           <p:nvPr/>
         </p:nvSpPr>
@@ -5575,7 +5359,7 @@
         <p:spPr>
           <a:xfrm>
             <a:off x="640080" y="329184"/>
-            <a:ext cx="5303520" cy="182880"/>
+            <a:ext cx="9875520" cy="182880"/>
           </a:xfrm>
           <a:prstGeom prst="rect">
             <a:avLst/>
@@ -5616,48 +5400,6 @@
         </p:nvSpPr>
         <p:spPr>
           <a:xfrm>
-            <a:off x="5897880" y="310896"/>
-            <a:ext cx="4800600" cy="256032"/>
-          </a:xfrm>
-          <a:prstGeom prst="rect">
-            <a:avLst/>
-          </a:prstGeom>
-          <a:noFill/>
-        </p:spPr>
-        <p:txBody>
-          <a:bodyPr wrap="none" lIns="9144" rIns="9144" tIns="9144" bIns="9144" anchor="t">
-            <a:spAutoFit/>
-          </a:bodyPr>
-          <a:lstStyle/>
-          <a:p>
-            <a:pPr algn="r">
-              <a:spcAft>
-                <a:spcPts val="0"/>
-              </a:spcAft>
-              <a:defRPr sz="680" b="1">
-                <a:solidFill>
-                  <a:srgbClr val="4F6B00"/>
-                </a:solidFill>
-                <a:latin typeface="Inter"/>
-              </a:defRPr>
-            </a:pPr>
-            <a:r>
-              <a:rPr>
-                <a:latin typeface="Inter"/>
-              </a:rPr>
-              <a:t>Illustrative, Gradient Maintained — demo data, not the client's holdings or managers</a:t>
-            </a:r>
-          </a:p>
-        </p:txBody>
-      </p:sp>
-      <p:sp>
-        <p:nvSpPr>
-          <p:cNvPr id="5" name="TextBox 4"/>
-          <p:cNvSpPr txBox="1"/>
-          <p:nvPr/>
-        </p:nvSpPr>
-        <p:spPr>
-          <a:xfrm>
             <a:off x="640080" y="566928"/>
             <a:ext cx="10058400" cy="530352"/>
           </a:xfrm>
@@ -5694,7 +5436,7 @@
       </p:sp>
       <p:sp>
         <p:nvSpPr>
-          <p:cNvPr id="6" name="Rectangle 5"/>
+          <p:cNvPr id="5" name="Rectangle 4"/>
           <p:cNvSpPr/>
           <p:nvPr/>
         </p:nvSpPr>
@@ -5743,7 +5485,7 @@
       </p:sp>
       <p:sp>
         <p:nvSpPr>
-          <p:cNvPr id="7" name="Rectangle 6"/>
+          <p:cNvPr id="6" name="Rectangle 5"/>
           <p:cNvSpPr/>
           <p:nvPr/>
         </p:nvSpPr>
@@ -5792,7 +5534,7 @@
       </p:sp>
       <p:sp>
         <p:nvSpPr>
-          <p:cNvPr id="8" name="TextBox 7"/>
+          <p:cNvPr id="7" name="TextBox 6"/>
           <p:cNvSpPr txBox="1"/>
           <p:nvPr/>
         </p:nvSpPr>
@@ -5834,7 +5576,7 @@
       </p:sp>
       <p:sp>
         <p:nvSpPr>
-          <p:cNvPr id="9" name="TextBox 8"/>
+          <p:cNvPr id="8" name="TextBox 7"/>
           <p:cNvSpPr txBox="1"/>
           <p:nvPr/>
         </p:nvSpPr>
@@ -5876,7 +5618,7 @@
       </p:sp>
       <p:graphicFrame>
         <p:nvGraphicFramePr>
-          <p:cNvPr id="10" name="Chart 9"/>
+          <p:cNvPr id="9" name="Chart 8"/>
           <p:cNvGraphicFramePr>
             <a:graphicFrameLocks noGrp="1"/>
           </p:cNvGraphicFramePr>
@@ -5894,7 +5636,7 @@
       </p:graphicFrame>
       <p:sp>
         <p:nvSpPr>
-          <p:cNvPr id="11" name="Rectangle 10"/>
+          <p:cNvPr id="10" name="Rectangle 9"/>
           <p:cNvSpPr/>
           <p:nvPr/>
         </p:nvSpPr>
@@ -5943,7 +5685,7 @@
       </p:sp>
       <p:sp>
         <p:nvSpPr>
-          <p:cNvPr id="12" name="TextBox 11"/>
+          <p:cNvPr id="11" name="TextBox 10"/>
           <p:cNvSpPr txBox="1"/>
           <p:nvPr/>
         </p:nvSpPr>
@@ -5985,7 +5727,7 @@
       </p:sp>
       <p:sp>
         <p:nvSpPr>
-          <p:cNvPr id="13" name="TextBox 12"/>
+          <p:cNvPr id="12" name="TextBox 11"/>
           <p:cNvSpPr txBox="1"/>
           <p:nvPr/>
         </p:nvSpPr>
@@ -6027,7 +5769,7 @@
       </p:sp>
       <p:sp>
         <p:nvSpPr>
-          <p:cNvPr id="14" name="TextBox 13"/>
+          <p:cNvPr id="13" name="TextBox 12"/>
           <p:cNvSpPr txBox="1"/>
           <p:nvPr/>
         </p:nvSpPr>
@@ -6143,7 +5885,7 @@
         <p:spPr>
           <a:xfrm>
             <a:off x="640080" y="329184"/>
-            <a:ext cx="5303520" cy="182880"/>
+            <a:ext cx="9875520" cy="182880"/>
           </a:xfrm>
           <a:prstGeom prst="rect">
             <a:avLst/>
@@ -6184,48 +5926,6 @@
         </p:nvSpPr>
         <p:spPr>
           <a:xfrm>
-            <a:off x="5897880" y="310896"/>
-            <a:ext cx="4800600" cy="256032"/>
-          </a:xfrm>
-          <a:prstGeom prst="rect">
-            <a:avLst/>
-          </a:prstGeom>
-          <a:noFill/>
-        </p:spPr>
-        <p:txBody>
-          <a:bodyPr wrap="none" lIns="9144" rIns="9144" tIns="9144" bIns="9144" anchor="t">
-            <a:spAutoFit/>
-          </a:bodyPr>
-          <a:lstStyle/>
-          <a:p>
-            <a:pPr algn="r">
-              <a:spcAft>
-                <a:spcPts val="0"/>
-              </a:spcAft>
-              <a:defRPr sz="680" b="1">
-                <a:solidFill>
-                  <a:srgbClr val="4F6B00"/>
-                </a:solidFill>
-                <a:latin typeface="Inter"/>
-              </a:defRPr>
-            </a:pPr>
-            <a:r>
-              <a:rPr>
-                <a:latin typeface="Inter"/>
-              </a:rPr>
-              <a:t>Illustrative, Gradient Maintained — demo data, not the client's holdings or managers</a:t>
-            </a:r>
-          </a:p>
-        </p:txBody>
-      </p:sp>
-      <p:sp>
-        <p:nvSpPr>
-          <p:cNvPr id="5" name="TextBox 4"/>
-          <p:cNvSpPr txBox="1"/>
-          <p:nvPr/>
-        </p:nvSpPr>
-        <p:spPr>
-          <a:xfrm>
             <a:off x="640080" y="566928"/>
             <a:ext cx="10058400" cy="530352"/>
           </a:xfrm>
@@ -6262,7 +5962,7 @@
       </p:sp>
       <p:sp>
         <p:nvSpPr>
-          <p:cNvPr id="6" name="Rectangle 5"/>
+          <p:cNvPr id="5" name="Rectangle 4"/>
           <p:cNvSpPr/>
           <p:nvPr/>
         </p:nvSpPr>
@@ -6311,7 +6011,7 @@
       </p:sp>
       <p:sp>
         <p:nvSpPr>
-          <p:cNvPr id="7" name="Rectangle 6"/>
+          <p:cNvPr id="6" name="Rectangle 5"/>
           <p:cNvSpPr/>
           <p:nvPr/>
         </p:nvSpPr>
@@ -6360,7 +6060,7 @@
       </p:sp>
       <p:sp>
         <p:nvSpPr>
-          <p:cNvPr id="8" name="TextBox 7"/>
+          <p:cNvPr id="7" name="TextBox 6"/>
           <p:cNvSpPr txBox="1"/>
           <p:nvPr/>
         </p:nvSpPr>
@@ -6402,7 +6102,7 @@
       </p:sp>
       <p:sp>
         <p:nvSpPr>
-          <p:cNvPr id="9" name="TextBox 8"/>
+          <p:cNvPr id="8" name="TextBox 7"/>
           <p:cNvSpPr txBox="1"/>
           <p:nvPr/>
         </p:nvSpPr>
@@ -6444,7 +6144,7 @@
       </p:sp>
       <p:graphicFrame>
         <p:nvGraphicFramePr>
-          <p:cNvPr id="10" name="Table 9"/>
+          <p:cNvPr id="9" name="Table 8"/>
           <p:cNvGraphicFramePr>
             <a:graphicFrameLocks noGrp="1"/>
           </p:cNvGraphicFramePr>
@@ -7294,7 +6994,7 @@
       </p:graphicFrame>
       <p:sp>
         <p:nvSpPr>
-          <p:cNvPr id="11" name="Rectangle 10"/>
+          <p:cNvPr id="10" name="Rectangle 9"/>
           <p:cNvSpPr/>
           <p:nvPr/>
         </p:nvSpPr>
@@ -7343,7 +7043,7 @@
       </p:sp>
       <p:sp>
         <p:nvSpPr>
-          <p:cNvPr id="12" name="Rectangle 11"/>
+          <p:cNvPr id="11" name="Rectangle 10"/>
           <p:cNvSpPr/>
           <p:nvPr/>
         </p:nvSpPr>
@@ -7392,7 +7092,7 @@
       </p:sp>
       <p:sp>
         <p:nvSpPr>
-          <p:cNvPr id="13" name="TextBox 12"/>
+          <p:cNvPr id="12" name="TextBox 11"/>
           <p:cNvSpPr txBox="1"/>
           <p:nvPr/>
         </p:nvSpPr>
@@ -7434,7 +7134,7 @@
       </p:sp>
       <p:sp>
         <p:nvSpPr>
-          <p:cNvPr id="14" name="TextBox 13"/>
+          <p:cNvPr id="13" name="TextBox 12"/>
           <p:cNvSpPr txBox="1"/>
           <p:nvPr/>
         </p:nvSpPr>
@@ -7476,7 +7176,7 @@
       </p:sp>
       <p:sp>
         <p:nvSpPr>
-          <p:cNvPr id="15" name="TextBox 14"/>
+          <p:cNvPr id="14" name="TextBox 13"/>
           <p:cNvSpPr txBox="1"/>
           <p:nvPr/>
         </p:nvSpPr>
@@ -7518,7 +7218,7 @@
       </p:sp>
       <p:sp>
         <p:nvSpPr>
-          <p:cNvPr id="16" name="Rectangle 15"/>
+          <p:cNvPr id="15" name="Rectangle 14"/>
           <p:cNvSpPr/>
           <p:nvPr/>
         </p:nvSpPr>
@@ -7567,7 +7267,7 @@
       </p:sp>
       <p:sp>
         <p:nvSpPr>
-          <p:cNvPr id="17" name="TextBox 16"/>
+          <p:cNvPr id="16" name="TextBox 15"/>
           <p:cNvSpPr txBox="1"/>
           <p:nvPr/>
         </p:nvSpPr>
@@ -7609,7 +7309,7 @@
       </p:sp>
       <p:sp>
         <p:nvSpPr>
-          <p:cNvPr id="18" name="TextBox 17"/>
+          <p:cNvPr id="17" name="TextBox 16"/>
           <p:cNvSpPr txBox="1"/>
           <p:nvPr/>
         </p:nvSpPr>
@@ -7651,7 +7351,7 @@
       </p:sp>
       <p:sp>
         <p:nvSpPr>
-          <p:cNvPr id="19" name="TextBox 18"/>
+          <p:cNvPr id="18" name="TextBox 17"/>
           <p:cNvSpPr txBox="1"/>
           <p:nvPr/>
         </p:nvSpPr>
@@ -7766,48 +7466,6 @@
         </p:nvSpPr>
         <p:spPr>
           <a:xfrm>
-            <a:off x="5897880" y="310896"/>
-            <a:ext cx="4800600" cy="256032"/>
-          </a:xfrm>
-          <a:prstGeom prst="rect">
-            <a:avLst/>
-          </a:prstGeom>
-          <a:noFill/>
-        </p:spPr>
-        <p:txBody>
-          <a:bodyPr wrap="none" lIns="9144" rIns="9144" tIns="9144" bIns="9144" anchor="t">
-            <a:spAutoFit/>
-          </a:bodyPr>
-          <a:lstStyle/>
-          <a:p>
-            <a:pPr algn="r">
-              <a:spcAft>
-                <a:spcPts val="0"/>
-              </a:spcAft>
-              <a:defRPr sz="680" b="1">
-                <a:solidFill>
-                  <a:srgbClr val="4F6B00"/>
-                </a:solidFill>
-                <a:latin typeface="Inter"/>
-              </a:defRPr>
-            </a:pPr>
-            <a:r>
-              <a:rPr>
-                <a:latin typeface="Inter"/>
-              </a:rPr>
-              <a:t>Illustrative, Gradient Maintained — demo data, not the client's holdings or managers</a:t>
-            </a:r>
-          </a:p>
-        </p:txBody>
-      </p:sp>
-      <p:sp>
-        <p:nvSpPr>
-          <p:cNvPr id="4" name="TextBox 3"/>
-          <p:cNvSpPr txBox="1"/>
-          <p:nvPr/>
-        </p:nvSpPr>
-        <p:spPr>
-          <a:xfrm>
             <a:off x="640080" y="566928"/>
             <a:ext cx="10058400" cy="530352"/>
           </a:xfrm>
@@ -7844,7 +7502,7 @@
       </p:sp>
       <p:sp>
         <p:nvSpPr>
-          <p:cNvPr id="5" name="Rectangle 4"/>
+          <p:cNvPr id="4" name="Rectangle 3"/>
           <p:cNvSpPr/>
           <p:nvPr/>
         </p:nvSpPr>
@@ -7893,7 +7551,7 @@
       </p:sp>
       <p:sp>
         <p:nvSpPr>
-          <p:cNvPr id="6" name="Rectangle 5"/>
+          <p:cNvPr id="5" name="Rectangle 4"/>
           <p:cNvSpPr/>
           <p:nvPr/>
         </p:nvSpPr>
@@ -7942,7 +7600,7 @@
       </p:sp>
       <p:sp>
         <p:nvSpPr>
-          <p:cNvPr id="7" name="TextBox 6"/>
+          <p:cNvPr id="6" name="TextBox 5"/>
           <p:cNvSpPr txBox="1"/>
           <p:nvPr/>
         </p:nvSpPr>
@@ -7984,7 +7642,7 @@
       </p:sp>
       <p:sp>
         <p:nvSpPr>
-          <p:cNvPr id="8" name="TextBox 7"/>
+          <p:cNvPr id="7" name="TextBox 6"/>
           <p:cNvSpPr txBox="1"/>
           <p:nvPr/>
         </p:nvSpPr>
@@ -8026,7 +7684,7 @@
       </p:sp>
       <p:graphicFrame>
         <p:nvGraphicFramePr>
-          <p:cNvPr id="9" name="Chart 8"/>
+          <p:cNvPr id="8" name="Chart 7"/>
           <p:cNvGraphicFramePr>
             <a:graphicFrameLocks noGrp="1"/>
           </p:cNvGraphicFramePr>
@@ -8044,7 +7702,7 @@
       </p:graphicFrame>
       <p:sp>
         <p:nvSpPr>
-          <p:cNvPr id="10" name="Rectangle 9"/>
+          <p:cNvPr id="9" name="Rectangle 8"/>
           <p:cNvSpPr/>
           <p:nvPr/>
         </p:nvSpPr>
@@ -8093,7 +7751,7 @@
       </p:sp>
       <p:sp>
         <p:nvSpPr>
-          <p:cNvPr id="11" name="TextBox 10"/>
+          <p:cNvPr id="10" name="TextBox 9"/>
           <p:cNvSpPr txBox="1"/>
           <p:nvPr/>
         </p:nvSpPr>
@@ -8135,7 +7793,7 @@
       </p:sp>
       <p:sp>
         <p:nvSpPr>
-          <p:cNvPr id="12" name="TextBox 11"/>
+          <p:cNvPr id="11" name="TextBox 10"/>
           <p:cNvSpPr txBox="1"/>
           <p:nvPr/>
         </p:nvSpPr>
@@ -8177,7 +7835,7 @@
       </p:sp>
       <p:sp>
         <p:nvSpPr>
-          <p:cNvPr id="13" name="TextBox 12"/>
+          <p:cNvPr id="12" name="TextBox 11"/>
           <p:cNvSpPr txBox="1"/>
           <p:nvPr/>
         </p:nvSpPr>
@@ -8292,48 +7950,6 @@
         </p:nvSpPr>
         <p:spPr>
           <a:xfrm>
-            <a:off x="5897880" y="310896"/>
-            <a:ext cx="4800600" cy="256032"/>
-          </a:xfrm>
-          <a:prstGeom prst="rect">
-            <a:avLst/>
-          </a:prstGeom>
-          <a:noFill/>
-        </p:spPr>
-        <p:txBody>
-          <a:bodyPr wrap="none" lIns="9144" rIns="9144" tIns="9144" bIns="9144" anchor="t">
-            <a:spAutoFit/>
-          </a:bodyPr>
-          <a:lstStyle/>
-          <a:p>
-            <a:pPr algn="r">
-              <a:spcAft>
-                <a:spcPts val="0"/>
-              </a:spcAft>
-              <a:defRPr sz="680" b="1">
-                <a:solidFill>
-                  <a:srgbClr val="4F6B00"/>
-                </a:solidFill>
-                <a:latin typeface="Inter"/>
-              </a:defRPr>
-            </a:pPr>
-            <a:r>
-              <a:rPr>
-                <a:latin typeface="Inter"/>
-              </a:rPr>
-              <a:t>Illustrative, Gradient Maintained — demo data, not the client's holdings or managers</a:t>
-            </a:r>
-          </a:p>
-        </p:txBody>
-      </p:sp>
-      <p:sp>
-        <p:nvSpPr>
-          <p:cNvPr id="4" name="TextBox 3"/>
-          <p:cNvSpPr txBox="1"/>
-          <p:nvPr/>
-        </p:nvSpPr>
-        <p:spPr>
-          <a:xfrm>
             <a:off x="640080" y="566928"/>
             <a:ext cx="10058400" cy="530352"/>
           </a:xfrm>
@@ -8370,7 +7986,7 @@
       </p:sp>
       <p:sp>
         <p:nvSpPr>
-          <p:cNvPr id="5" name="Rectangle 4"/>
+          <p:cNvPr id="4" name="Rectangle 3"/>
           <p:cNvSpPr/>
           <p:nvPr/>
         </p:nvSpPr>
@@ -8419,7 +8035,7 @@
       </p:sp>
       <p:sp>
         <p:nvSpPr>
-          <p:cNvPr id="6" name="Rectangle 5"/>
+          <p:cNvPr id="5" name="Rectangle 4"/>
           <p:cNvSpPr/>
           <p:nvPr/>
         </p:nvSpPr>
@@ -8468,7 +8084,7 @@
       </p:sp>
       <p:sp>
         <p:nvSpPr>
-          <p:cNvPr id="7" name="TextBox 6"/>
+          <p:cNvPr id="6" name="TextBox 5"/>
           <p:cNvSpPr txBox="1"/>
           <p:nvPr/>
         </p:nvSpPr>
@@ -8510,7 +8126,7 @@
       </p:sp>
       <p:sp>
         <p:nvSpPr>
-          <p:cNvPr id="8" name="TextBox 7"/>
+          <p:cNvPr id="7" name="TextBox 6"/>
           <p:cNvSpPr txBox="1"/>
           <p:nvPr/>
         </p:nvSpPr>
@@ -8552,7 +8168,7 @@
       </p:sp>
       <p:graphicFrame>
         <p:nvGraphicFramePr>
-          <p:cNvPr id="9" name="Table 8"/>
+          <p:cNvPr id="8" name="Table 7"/>
           <p:cNvGraphicFramePr>
             <a:graphicFrameLocks noGrp="1"/>
           </p:cNvGraphicFramePr>
@@ -8992,7 +8608,7 @@
       </p:graphicFrame>
       <p:sp>
         <p:nvSpPr>
-          <p:cNvPr id="10" name="TextBox 9"/>
+          <p:cNvPr id="9" name="TextBox 8"/>
           <p:cNvSpPr txBox="1"/>
           <p:nvPr/>
         </p:nvSpPr>
@@ -9034,7 +8650,7 @@
       </p:sp>
       <p:graphicFrame>
         <p:nvGraphicFramePr>
-          <p:cNvPr id="11" name="Table 10"/>
+          <p:cNvPr id="10" name="Table 9"/>
           <p:cNvGraphicFramePr>
             <a:graphicFrameLocks noGrp="1"/>
           </p:cNvGraphicFramePr>
@@ -9476,7 +9092,7 @@
       </p:graphicFrame>
       <p:sp>
         <p:nvSpPr>
-          <p:cNvPr id="12" name="TextBox 11"/>
+          <p:cNvPr id="11" name="TextBox 10"/>
           <p:cNvSpPr txBox="1"/>
           <p:nvPr/>
         </p:nvSpPr>
@@ -9518,7 +9134,7 @@
       </p:sp>
       <p:sp>
         <p:nvSpPr>
-          <p:cNvPr id="13" name="Rectangle 12"/>
+          <p:cNvPr id="12" name="Rectangle 11"/>
           <p:cNvSpPr/>
           <p:nvPr/>
         </p:nvSpPr>
@@ -9567,7 +9183,7 @@
       </p:sp>
       <p:sp>
         <p:nvSpPr>
-          <p:cNvPr id="14" name="TextBox 13"/>
+          <p:cNvPr id="13" name="TextBox 12"/>
           <p:cNvSpPr txBox="1"/>
           <p:nvPr/>
         </p:nvSpPr>
@@ -9609,7 +9225,7 @@
       </p:sp>
       <p:sp>
         <p:nvSpPr>
-          <p:cNvPr id="15" name="TextBox 14"/>
+          <p:cNvPr id="14" name="TextBox 13"/>
           <p:cNvSpPr txBox="1"/>
           <p:nvPr/>
         </p:nvSpPr>
@@ -9651,7 +9267,7 @@
       </p:sp>
       <p:sp>
         <p:nvSpPr>
-          <p:cNvPr id="16" name="TextBox 15"/>
+          <p:cNvPr id="15" name="TextBox 14"/>
           <p:cNvSpPr txBox="1"/>
           <p:nvPr/>
         </p:nvSpPr>
@@ -9766,48 +9382,6 @@
         </p:nvSpPr>
         <p:spPr>
           <a:xfrm>
-            <a:off x="5897880" y="310896"/>
-            <a:ext cx="4800600" cy="256032"/>
-          </a:xfrm>
-          <a:prstGeom prst="rect">
-            <a:avLst/>
-          </a:prstGeom>
-          <a:noFill/>
-        </p:spPr>
-        <p:txBody>
-          <a:bodyPr wrap="none" lIns="9144" rIns="9144" tIns="9144" bIns="9144" anchor="t">
-            <a:spAutoFit/>
-          </a:bodyPr>
-          <a:lstStyle/>
-          <a:p>
-            <a:pPr algn="r">
-              <a:spcAft>
-                <a:spcPts val="0"/>
-              </a:spcAft>
-              <a:defRPr sz="680" b="1">
-                <a:solidFill>
-                  <a:srgbClr val="4F6B00"/>
-                </a:solidFill>
-                <a:latin typeface="Inter"/>
-              </a:defRPr>
-            </a:pPr>
-            <a:r>
-              <a:rPr>
-                <a:latin typeface="Inter"/>
-              </a:rPr>
-              <a:t>Illustrative, Gradient Maintained — demo data, not the client's holdings or managers</a:t>
-            </a:r>
-          </a:p>
-        </p:txBody>
-      </p:sp>
-      <p:sp>
-        <p:nvSpPr>
-          <p:cNvPr id="4" name="TextBox 3"/>
-          <p:cNvSpPr txBox="1"/>
-          <p:nvPr/>
-        </p:nvSpPr>
-        <p:spPr>
-          <a:xfrm>
             <a:off x="640080" y="566928"/>
             <a:ext cx="10058400" cy="530352"/>
           </a:xfrm>
@@ -9844,7 +9418,7 @@
       </p:sp>
       <p:sp>
         <p:nvSpPr>
-          <p:cNvPr id="5" name="Rectangle 4"/>
+          <p:cNvPr id="4" name="Rectangle 3"/>
           <p:cNvSpPr/>
           <p:nvPr/>
         </p:nvSpPr>
@@ -9893,7 +9467,7 @@
       </p:sp>
       <p:sp>
         <p:nvSpPr>
-          <p:cNvPr id="6" name="Rectangle 5"/>
+          <p:cNvPr id="5" name="Rectangle 4"/>
           <p:cNvSpPr/>
           <p:nvPr/>
         </p:nvSpPr>
@@ -9942,7 +9516,7 @@
       </p:sp>
       <p:sp>
         <p:nvSpPr>
-          <p:cNvPr id="7" name="TextBox 6"/>
+          <p:cNvPr id="6" name="TextBox 5"/>
           <p:cNvSpPr txBox="1"/>
           <p:nvPr/>
         </p:nvSpPr>
@@ -9984,7 +9558,7 @@
       </p:sp>
       <p:graphicFrame>
         <p:nvGraphicFramePr>
-          <p:cNvPr id="8" name="Table 7"/>
+          <p:cNvPr id="7" name="Table 6"/>
           <p:cNvGraphicFramePr>
             <a:graphicFrameLocks noGrp="1"/>
           </p:cNvGraphicFramePr>
@@ -10234,7 +9808,7 @@
       </p:graphicFrame>
       <p:sp>
         <p:nvSpPr>
-          <p:cNvPr id="9" name="Rectangle 8"/>
+          <p:cNvPr id="8" name="Rectangle 7"/>
           <p:cNvSpPr/>
           <p:nvPr/>
         </p:nvSpPr>
@@ -10283,7 +9857,7 @@
       </p:sp>
       <p:sp>
         <p:nvSpPr>
-          <p:cNvPr id="10" name="TextBox 9"/>
+          <p:cNvPr id="9" name="TextBox 8"/>
           <p:cNvSpPr txBox="1"/>
           <p:nvPr/>
         </p:nvSpPr>
@@ -10325,7 +9899,7 @@
       </p:sp>
       <p:sp>
         <p:nvSpPr>
-          <p:cNvPr id="11" name="TextBox 10"/>
+          <p:cNvPr id="10" name="TextBox 9"/>
           <p:cNvSpPr txBox="1"/>
           <p:nvPr/>
         </p:nvSpPr>
@@ -10367,7 +9941,7 @@
       </p:sp>
       <p:sp>
         <p:nvSpPr>
-          <p:cNvPr id="12" name="TextBox 11"/>
+          <p:cNvPr id="11" name="TextBox 10"/>
           <p:cNvSpPr txBox="1"/>
           <p:nvPr/>
         </p:nvSpPr>
@@ -10483,7 +10057,7 @@
         <p:spPr>
           <a:xfrm>
             <a:off x="640080" y="329184"/>
-            <a:ext cx="5303520" cy="182880"/>
+            <a:ext cx="9875520" cy="182880"/>
           </a:xfrm>
           <a:prstGeom prst="rect">
             <a:avLst/>
@@ -10524,48 +10098,6 @@
         </p:nvSpPr>
         <p:spPr>
           <a:xfrm>
-            <a:off x="5897880" y="310896"/>
-            <a:ext cx="4800600" cy="256032"/>
-          </a:xfrm>
-          <a:prstGeom prst="rect">
-            <a:avLst/>
-          </a:prstGeom>
-          <a:noFill/>
-        </p:spPr>
-        <p:txBody>
-          <a:bodyPr wrap="none" lIns="9144" rIns="9144" tIns="9144" bIns="9144" anchor="t">
-            <a:spAutoFit/>
-          </a:bodyPr>
-          <a:lstStyle/>
-          <a:p>
-            <a:pPr algn="r">
-              <a:spcAft>
-                <a:spcPts val="0"/>
-              </a:spcAft>
-              <a:defRPr sz="680" b="1">
-                <a:solidFill>
-                  <a:srgbClr val="4F6B00"/>
-                </a:solidFill>
-                <a:latin typeface="Inter"/>
-              </a:defRPr>
-            </a:pPr>
-            <a:r>
-              <a:rPr>
-                <a:latin typeface="Inter"/>
-              </a:rPr>
-              <a:t>Illustrative, Gradient Maintained — demo data, not the client's holdings or managers</a:t>
-            </a:r>
-          </a:p>
-        </p:txBody>
-      </p:sp>
-      <p:sp>
-        <p:nvSpPr>
-          <p:cNvPr id="5" name="TextBox 4"/>
-          <p:cNvSpPr txBox="1"/>
-          <p:nvPr/>
-        </p:nvSpPr>
-        <p:spPr>
-          <a:xfrm>
             <a:off x="640080" y="566928"/>
             <a:ext cx="10058400" cy="530352"/>
           </a:xfrm>
@@ -10602,7 +10134,7 @@
       </p:sp>
       <p:sp>
         <p:nvSpPr>
-          <p:cNvPr id="6" name="Rectangle 5"/>
+          <p:cNvPr id="5" name="Rectangle 4"/>
           <p:cNvSpPr/>
           <p:nvPr/>
         </p:nvSpPr>
@@ -10651,7 +10183,7 @@
       </p:sp>
       <p:sp>
         <p:nvSpPr>
-          <p:cNvPr id="7" name="Rectangle 6"/>
+          <p:cNvPr id="6" name="Rectangle 5"/>
           <p:cNvSpPr/>
           <p:nvPr/>
         </p:nvSpPr>
@@ -10700,7 +10232,7 @@
       </p:sp>
       <p:sp>
         <p:nvSpPr>
-          <p:cNvPr id="8" name="TextBox 7"/>
+          <p:cNvPr id="7" name="TextBox 6"/>
           <p:cNvSpPr txBox="1"/>
           <p:nvPr/>
         </p:nvSpPr>
@@ -10742,7 +10274,7 @@
       </p:sp>
       <p:sp>
         <p:nvSpPr>
-          <p:cNvPr id="9" name="TextBox 8"/>
+          <p:cNvPr id="8" name="TextBox 7"/>
           <p:cNvSpPr txBox="1"/>
           <p:nvPr/>
         </p:nvSpPr>
@@ -10784,7 +10316,7 @@
       </p:sp>
       <p:graphicFrame>
         <p:nvGraphicFramePr>
-          <p:cNvPr id="10" name="Table 9"/>
+          <p:cNvPr id="9" name="Table 8"/>
           <p:cNvGraphicFramePr>
             <a:graphicFrameLocks noGrp="1"/>
           </p:cNvGraphicFramePr>
@@ -11492,7 +11024,7 @@
       </p:graphicFrame>
       <p:sp>
         <p:nvSpPr>
-          <p:cNvPr id="11" name="Rectangle 10"/>
+          <p:cNvPr id="10" name="Rectangle 9"/>
           <p:cNvSpPr/>
           <p:nvPr/>
         </p:nvSpPr>
@@ -11541,7 +11073,7 @@
       </p:sp>
       <p:sp>
         <p:nvSpPr>
-          <p:cNvPr id="12" name="TextBox 11"/>
+          <p:cNvPr id="11" name="TextBox 10"/>
           <p:cNvSpPr txBox="1"/>
           <p:nvPr/>
         </p:nvSpPr>
@@ -11583,7 +11115,7 @@
       </p:sp>
       <p:sp>
         <p:nvSpPr>
-          <p:cNvPr id="13" name="TextBox 12"/>
+          <p:cNvPr id="12" name="TextBox 11"/>
           <p:cNvSpPr txBox="1"/>
           <p:nvPr/>
         </p:nvSpPr>
@@ -11625,7 +11157,7 @@
       </p:sp>
       <p:sp>
         <p:nvSpPr>
-          <p:cNvPr id="14" name="TextBox 13"/>
+          <p:cNvPr id="13" name="TextBox 12"/>
           <p:cNvSpPr txBox="1"/>
           <p:nvPr/>
         </p:nvSpPr>
@@ -11741,7 +11273,7 @@
         <p:spPr>
           <a:xfrm>
             <a:off x="640080" y="329184"/>
-            <a:ext cx="5303520" cy="182880"/>
+            <a:ext cx="9875520" cy="182880"/>
           </a:xfrm>
           <a:prstGeom prst="rect">
             <a:avLst/>
@@ -11782,48 +11314,6 @@
         </p:nvSpPr>
         <p:spPr>
           <a:xfrm>
-            <a:off x="5897880" y="310896"/>
-            <a:ext cx="4800600" cy="256032"/>
-          </a:xfrm>
-          <a:prstGeom prst="rect">
-            <a:avLst/>
-          </a:prstGeom>
-          <a:noFill/>
-        </p:spPr>
-        <p:txBody>
-          <a:bodyPr wrap="none" lIns="9144" rIns="9144" tIns="9144" bIns="9144" anchor="t">
-            <a:spAutoFit/>
-          </a:bodyPr>
-          <a:lstStyle/>
-          <a:p>
-            <a:pPr algn="r">
-              <a:spcAft>
-                <a:spcPts val="0"/>
-              </a:spcAft>
-              <a:defRPr sz="680" b="1">
-                <a:solidFill>
-                  <a:srgbClr val="4F6B00"/>
-                </a:solidFill>
-                <a:latin typeface="Inter"/>
-              </a:defRPr>
-            </a:pPr>
-            <a:r>
-              <a:rPr>
-                <a:latin typeface="Inter"/>
-              </a:rPr>
-              <a:t>Illustrative, Gradient Maintained — demo data, not the client's holdings or managers</a:t>
-            </a:r>
-          </a:p>
-        </p:txBody>
-      </p:sp>
-      <p:sp>
-        <p:nvSpPr>
-          <p:cNvPr id="5" name="TextBox 4"/>
-          <p:cNvSpPr txBox="1"/>
-          <p:nvPr/>
-        </p:nvSpPr>
-        <p:spPr>
-          <a:xfrm>
             <a:off x="640080" y="566928"/>
             <a:ext cx="10058400" cy="530352"/>
           </a:xfrm>
@@ -11860,7 +11350,7 @@
       </p:sp>
       <p:sp>
         <p:nvSpPr>
-          <p:cNvPr id="6" name="Rectangle 5"/>
+          <p:cNvPr id="5" name="Rectangle 4"/>
           <p:cNvSpPr/>
           <p:nvPr/>
         </p:nvSpPr>
@@ -11909,7 +11399,7 @@
       </p:sp>
       <p:sp>
         <p:nvSpPr>
-          <p:cNvPr id="7" name="Rectangle 6"/>
+          <p:cNvPr id="6" name="Rectangle 5"/>
           <p:cNvSpPr/>
           <p:nvPr/>
         </p:nvSpPr>
@@ -11958,7 +11448,7 @@
       </p:sp>
       <p:sp>
         <p:nvSpPr>
-          <p:cNvPr id="8" name="TextBox 7"/>
+          <p:cNvPr id="7" name="TextBox 6"/>
           <p:cNvSpPr txBox="1"/>
           <p:nvPr/>
         </p:nvSpPr>
@@ -12000,7 +11490,7 @@
       </p:sp>
       <p:sp>
         <p:nvSpPr>
-          <p:cNvPr id="9" name="TextBox 8"/>
+          <p:cNvPr id="8" name="TextBox 7"/>
           <p:cNvSpPr txBox="1"/>
           <p:nvPr/>
         </p:nvSpPr>
@@ -12042,7 +11532,7 @@
       </p:sp>
       <p:graphicFrame>
         <p:nvGraphicFramePr>
-          <p:cNvPr id="10" name="Chart 9"/>
+          <p:cNvPr id="9" name="Chart 8"/>
           <p:cNvGraphicFramePr>
             <a:graphicFrameLocks noGrp="1"/>
           </p:cNvGraphicFramePr>
@@ -12060,7 +11550,7 @@
       </p:graphicFrame>
       <p:sp>
         <p:nvSpPr>
-          <p:cNvPr id="11" name="Rectangle 10"/>
+          <p:cNvPr id="10" name="Rectangle 9"/>
           <p:cNvSpPr/>
           <p:nvPr/>
         </p:nvSpPr>
@@ -12109,7 +11599,7 @@
       </p:sp>
       <p:sp>
         <p:nvSpPr>
-          <p:cNvPr id="12" name="TextBox 11"/>
+          <p:cNvPr id="11" name="TextBox 10"/>
           <p:cNvSpPr txBox="1"/>
           <p:nvPr/>
         </p:nvSpPr>
@@ -12151,7 +11641,7 @@
       </p:sp>
       <p:sp>
         <p:nvSpPr>
-          <p:cNvPr id="13" name="TextBox 12"/>
+          <p:cNvPr id="12" name="TextBox 11"/>
           <p:cNvSpPr txBox="1"/>
           <p:nvPr/>
         </p:nvSpPr>
@@ -12193,7 +11683,7 @@
       </p:sp>
       <p:sp>
         <p:nvSpPr>
-          <p:cNvPr id="14" name="TextBox 13"/>
+          <p:cNvPr id="13" name="TextBox 12"/>
           <p:cNvSpPr txBox="1"/>
           <p:nvPr/>
         </p:nvSpPr>
@@ -12309,7 +11799,7 @@
         <p:spPr>
           <a:xfrm>
             <a:off x="640080" y="329184"/>
-            <a:ext cx="5303520" cy="182880"/>
+            <a:ext cx="9875520" cy="182880"/>
           </a:xfrm>
           <a:prstGeom prst="rect">
             <a:avLst/>
@@ -12350,48 +11840,6 @@
         </p:nvSpPr>
         <p:spPr>
           <a:xfrm>
-            <a:off x="5897880" y="310896"/>
-            <a:ext cx="4800600" cy="256032"/>
-          </a:xfrm>
-          <a:prstGeom prst="rect">
-            <a:avLst/>
-          </a:prstGeom>
-          <a:noFill/>
-        </p:spPr>
-        <p:txBody>
-          <a:bodyPr wrap="none" lIns="9144" rIns="9144" tIns="9144" bIns="9144" anchor="t">
-            <a:spAutoFit/>
-          </a:bodyPr>
-          <a:lstStyle/>
-          <a:p>
-            <a:pPr algn="r">
-              <a:spcAft>
-                <a:spcPts val="0"/>
-              </a:spcAft>
-              <a:defRPr sz="680" b="1">
-                <a:solidFill>
-                  <a:srgbClr val="4F6B00"/>
-                </a:solidFill>
-                <a:latin typeface="Inter"/>
-              </a:defRPr>
-            </a:pPr>
-            <a:r>
-              <a:rPr>
-                <a:latin typeface="Inter"/>
-              </a:rPr>
-              <a:t>Illustrative, Gradient Maintained — demo data, not the client's holdings or managers</a:t>
-            </a:r>
-          </a:p>
-        </p:txBody>
-      </p:sp>
-      <p:sp>
-        <p:nvSpPr>
-          <p:cNvPr id="5" name="TextBox 4"/>
-          <p:cNvSpPr txBox="1"/>
-          <p:nvPr/>
-        </p:nvSpPr>
-        <p:spPr>
-          <a:xfrm>
             <a:off x="640080" y="566928"/>
             <a:ext cx="10058400" cy="530352"/>
           </a:xfrm>
@@ -12428,7 +11876,7 @@
       </p:sp>
       <p:sp>
         <p:nvSpPr>
-          <p:cNvPr id="6" name="Rectangle 5"/>
+          <p:cNvPr id="5" name="Rectangle 4"/>
           <p:cNvSpPr/>
           <p:nvPr/>
         </p:nvSpPr>
@@ -12477,7 +11925,7 @@
       </p:sp>
       <p:sp>
         <p:nvSpPr>
-          <p:cNvPr id="7" name="Rectangle 6"/>
+          <p:cNvPr id="6" name="Rectangle 5"/>
           <p:cNvSpPr/>
           <p:nvPr/>
         </p:nvSpPr>
@@ -12526,7 +11974,7 @@
       </p:sp>
       <p:sp>
         <p:nvSpPr>
-          <p:cNvPr id="8" name="TextBox 7"/>
+          <p:cNvPr id="7" name="TextBox 6"/>
           <p:cNvSpPr txBox="1"/>
           <p:nvPr/>
         </p:nvSpPr>
@@ -12568,7 +12016,7 @@
       </p:sp>
       <p:sp>
         <p:nvSpPr>
-          <p:cNvPr id="9" name="TextBox 8"/>
+          <p:cNvPr id="8" name="TextBox 7"/>
           <p:cNvSpPr txBox="1"/>
           <p:nvPr/>
         </p:nvSpPr>
@@ -12610,7 +12058,7 @@
       </p:sp>
       <p:graphicFrame>
         <p:nvGraphicFramePr>
-          <p:cNvPr id="10" name="Table 9"/>
+          <p:cNvPr id="9" name="Table 8"/>
           <p:cNvGraphicFramePr>
             <a:graphicFrameLocks noGrp="1"/>
           </p:cNvGraphicFramePr>
@@ -12869,7 +12317,7 @@
                         <a:rPr>
                           <a:latin typeface="Inter"/>
                         </a:rPr>
-                        <a:t>● Watch</a:t>
+                        <a:t>● Near limit</a:t>
                       </a:r>
                     </a:p>
                   </a:txBody>
@@ -13143,7 +12591,7 @@
                         <a:rPr>
                           <a:latin typeface="Inter"/>
                         </a:rPr>
-                        <a:t>● not assessed</a:t>
+                        <a:t>● Not assessed</a:t>
                       </a:r>
                     </a:p>
                   </a:txBody>
@@ -13187,7 +12635,7 @@
       </p:graphicFrame>
       <p:sp>
         <p:nvSpPr>
-          <p:cNvPr id="11" name="Rectangle 10"/>
+          <p:cNvPr id="10" name="Rectangle 9"/>
           <p:cNvSpPr/>
           <p:nvPr/>
         </p:nvSpPr>
@@ -13236,7 +12684,7 @@
       </p:sp>
       <p:sp>
         <p:nvSpPr>
-          <p:cNvPr id="12" name="Rectangle 11"/>
+          <p:cNvPr id="11" name="Rectangle 10"/>
           <p:cNvSpPr/>
           <p:nvPr/>
         </p:nvSpPr>
@@ -13285,7 +12733,7 @@
       </p:sp>
       <p:sp>
         <p:nvSpPr>
-          <p:cNvPr id="13" name="TextBox 12"/>
+          <p:cNvPr id="12" name="TextBox 11"/>
           <p:cNvSpPr txBox="1"/>
           <p:nvPr/>
         </p:nvSpPr>
@@ -13327,7 +12775,7 @@
       </p:sp>
       <p:sp>
         <p:nvSpPr>
-          <p:cNvPr id="14" name="TextBox 13"/>
+          <p:cNvPr id="13" name="TextBox 12"/>
           <p:cNvSpPr txBox="1"/>
           <p:nvPr/>
         </p:nvSpPr>
@@ -13369,7 +12817,7 @@
       </p:sp>
       <p:sp>
         <p:nvSpPr>
-          <p:cNvPr id="15" name="Rectangle 14"/>
+          <p:cNvPr id="14" name="Rectangle 13"/>
           <p:cNvSpPr/>
           <p:nvPr/>
         </p:nvSpPr>
@@ -13418,7 +12866,7 @@
       </p:sp>
       <p:sp>
         <p:nvSpPr>
-          <p:cNvPr id="16" name="Rectangle 15"/>
+          <p:cNvPr id="15" name="Rectangle 14"/>
           <p:cNvSpPr/>
           <p:nvPr/>
         </p:nvSpPr>
@@ -13467,7 +12915,7 @@
       </p:sp>
       <p:sp>
         <p:nvSpPr>
-          <p:cNvPr id="17" name="TextBox 16"/>
+          <p:cNvPr id="16" name="TextBox 15"/>
           <p:cNvSpPr txBox="1"/>
           <p:nvPr/>
         </p:nvSpPr>
@@ -13509,7 +12957,7 @@
       </p:sp>
       <p:sp>
         <p:nvSpPr>
-          <p:cNvPr id="18" name="TextBox 17"/>
+          <p:cNvPr id="17" name="TextBox 16"/>
           <p:cNvSpPr txBox="1"/>
           <p:nvPr/>
         </p:nvSpPr>
@@ -13551,7 +12999,7 @@
       </p:sp>
       <p:sp>
         <p:nvSpPr>
-          <p:cNvPr id="19" name="Rectangle 18"/>
+          <p:cNvPr id="18" name="Rectangle 17"/>
           <p:cNvSpPr/>
           <p:nvPr/>
         </p:nvSpPr>
@@ -13600,7 +13048,7 @@
       </p:sp>
       <p:sp>
         <p:nvSpPr>
-          <p:cNvPr id="20" name="TextBox 19"/>
+          <p:cNvPr id="19" name="TextBox 18"/>
           <p:cNvSpPr txBox="1"/>
           <p:nvPr/>
         </p:nvSpPr>
@@ -13642,7 +13090,7 @@
       </p:sp>
       <p:sp>
         <p:nvSpPr>
-          <p:cNvPr id="21" name="TextBox 20"/>
+          <p:cNvPr id="20" name="TextBox 19"/>
           <p:cNvSpPr txBox="1"/>
           <p:nvPr/>
         </p:nvSpPr>
@@ -13684,7 +13132,7 @@
       </p:sp>
       <p:sp>
         <p:nvSpPr>
-          <p:cNvPr id="22" name="TextBox 21"/>
+          <p:cNvPr id="21" name="TextBox 20"/>
           <p:cNvSpPr txBox="1"/>
           <p:nvPr/>
         </p:nvSpPr>
@@ -13800,7 +13248,7 @@
         <p:spPr>
           <a:xfrm>
             <a:off x="640080" y="329184"/>
-            <a:ext cx="5303520" cy="182880"/>
+            <a:ext cx="9875520" cy="182880"/>
           </a:xfrm>
           <a:prstGeom prst="rect">
             <a:avLst/>
@@ -13841,48 +13289,6 @@
         </p:nvSpPr>
         <p:spPr>
           <a:xfrm>
-            <a:off x="5897880" y="310896"/>
-            <a:ext cx="4800600" cy="256032"/>
-          </a:xfrm>
-          <a:prstGeom prst="rect">
-            <a:avLst/>
-          </a:prstGeom>
-          <a:noFill/>
-        </p:spPr>
-        <p:txBody>
-          <a:bodyPr wrap="none" lIns="9144" rIns="9144" tIns="9144" bIns="9144" anchor="t">
-            <a:spAutoFit/>
-          </a:bodyPr>
-          <a:lstStyle/>
-          <a:p>
-            <a:pPr algn="r">
-              <a:spcAft>
-                <a:spcPts val="0"/>
-              </a:spcAft>
-              <a:defRPr sz="680" b="1">
-                <a:solidFill>
-                  <a:srgbClr val="4F6B00"/>
-                </a:solidFill>
-                <a:latin typeface="Inter"/>
-              </a:defRPr>
-            </a:pPr>
-            <a:r>
-              <a:rPr>
-                <a:latin typeface="Inter"/>
-              </a:rPr>
-              <a:t>Illustrative, Gradient Maintained — demo data, not the client's holdings or managers</a:t>
-            </a:r>
-          </a:p>
-        </p:txBody>
-      </p:sp>
-      <p:sp>
-        <p:nvSpPr>
-          <p:cNvPr id="5" name="TextBox 4"/>
-          <p:cNvSpPr txBox="1"/>
-          <p:nvPr/>
-        </p:nvSpPr>
-        <p:spPr>
-          <a:xfrm>
             <a:off x="640080" y="566928"/>
             <a:ext cx="10058400" cy="530352"/>
           </a:xfrm>
@@ -13919,7 +13325,7 @@
       </p:sp>
       <p:sp>
         <p:nvSpPr>
-          <p:cNvPr id="6" name="Rectangle 5"/>
+          <p:cNvPr id="5" name="Rectangle 4"/>
           <p:cNvSpPr/>
           <p:nvPr/>
         </p:nvSpPr>
@@ -13968,7 +13374,7 @@
       </p:sp>
       <p:sp>
         <p:nvSpPr>
-          <p:cNvPr id="7" name="Rectangle 6"/>
+          <p:cNvPr id="6" name="Rectangle 5"/>
           <p:cNvSpPr/>
           <p:nvPr/>
         </p:nvSpPr>
@@ -14017,7 +13423,7 @@
       </p:sp>
       <p:sp>
         <p:nvSpPr>
-          <p:cNvPr id="8" name="TextBox 7"/>
+          <p:cNvPr id="7" name="TextBox 6"/>
           <p:cNvSpPr txBox="1"/>
           <p:nvPr/>
         </p:nvSpPr>
@@ -14059,7 +13465,7 @@
       </p:sp>
       <p:sp>
         <p:nvSpPr>
-          <p:cNvPr id="9" name="TextBox 8"/>
+          <p:cNvPr id="8" name="TextBox 7"/>
           <p:cNvSpPr txBox="1"/>
           <p:nvPr/>
         </p:nvSpPr>
@@ -14101,7 +13507,7 @@
       </p:sp>
       <p:graphicFrame>
         <p:nvGraphicFramePr>
-          <p:cNvPr id="10" name="Chart 9"/>
+          <p:cNvPr id="9" name="Chart 8"/>
           <p:cNvGraphicFramePr>
             <a:graphicFrameLocks noGrp="1"/>
           </p:cNvGraphicFramePr>
@@ -14119,7 +13525,7 @@
       </p:graphicFrame>
       <p:sp>
         <p:nvSpPr>
-          <p:cNvPr id="11" name="Rectangle 10"/>
+          <p:cNvPr id="10" name="Rectangle 9"/>
           <p:cNvSpPr/>
           <p:nvPr/>
         </p:nvSpPr>
@@ -14168,7 +13574,7 @@
       </p:sp>
       <p:sp>
         <p:nvSpPr>
-          <p:cNvPr id="12" name="TextBox 11"/>
+          <p:cNvPr id="11" name="TextBox 10"/>
           <p:cNvSpPr txBox="1"/>
           <p:nvPr/>
         </p:nvSpPr>
@@ -14210,7 +13616,7 @@
       </p:sp>
       <p:sp>
         <p:nvSpPr>
-          <p:cNvPr id="13" name="TextBox 12"/>
+          <p:cNvPr id="12" name="TextBox 11"/>
           <p:cNvSpPr txBox="1"/>
           <p:nvPr/>
         </p:nvSpPr>
@@ -14252,7 +13658,7 @@
       </p:sp>
       <p:sp>
         <p:nvSpPr>
-          <p:cNvPr id="14" name="TextBox 13"/>
+          <p:cNvPr id="13" name="TextBox 12"/>
           <p:cNvSpPr txBox="1"/>
           <p:nvPr/>
         </p:nvSpPr>
@@ -14368,7 +13774,7 @@
         <p:spPr>
           <a:xfrm>
             <a:off x="640080" y="329184"/>
-            <a:ext cx="5303520" cy="182880"/>
+            <a:ext cx="9875520" cy="182880"/>
           </a:xfrm>
           <a:prstGeom prst="rect">
             <a:avLst/>
@@ -14409,48 +13815,6 @@
         </p:nvSpPr>
         <p:spPr>
           <a:xfrm>
-            <a:off x="5897880" y="310896"/>
-            <a:ext cx="4800600" cy="256032"/>
-          </a:xfrm>
-          <a:prstGeom prst="rect">
-            <a:avLst/>
-          </a:prstGeom>
-          <a:noFill/>
-        </p:spPr>
-        <p:txBody>
-          <a:bodyPr wrap="none" lIns="9144" rIns="9144" tIns="9144" bIns="9144" anchor="t">
-            <a:spAutoFit/>
-          </a:bodyPr>
-          <a:lstStyle/>
-          <a:p>
-            <a:pPr algn="r">
-              <a:spcAft>
-                <a:spcPts val="0"/>
-              </a:spcAft>
-              <a:defRPr sz="680" b="1">
-                <a:solidFill>
-                  <a:srgbClr val="4F6B00"/>
-                </a:solidFill>
-                <a:latin typeface="Inter"/>
-              </a:defRPr>
-            </a:pPr>
-            <a:r>
-              <a:rPr>
-                <a:latin typeface="Inter"/>
-              </a:rPr>
-              <a:t>Illustrative, Gradient Maintained — demo data, not the client's holdings or managers</a:t>
-            </a:r>
-          </a:p>
-        </p:txBody>
-      </p:sp>
-      <p:sp>
-        <p:nvSpPr>
-          <p:cNvPr id="5" name="TextBox 4"/>
-          <p:cNvSpPr txBox="1"/>
-          <p:nvPr/>
-        </p:nvSpPr>
-        <p:spPr>
-          <a:xfrm>
             <a:off x="640080" y="566928"/>
             <a:ext cx="10058400" cy="530352"/>
           </a:xfrm>
@@ -14487,7 +13851,7 @@
       </p:sp>
       <p:sp>
         <p:nvSpPr>
-          <p:cNvPr id="6" name="Rectangle 5"/>
+          <p:cNvPr id="5" name="Rectangle 4"/>
           <p:cNvSpPr/>
           <p:nvPr/>
         </p:nvSpPr>
@@ -14536,7 +13900,7 @@
       </p:sp>
       <p:sp>
         <p:nvSpPr>
-          <p:cNvPr id="7" name="Rectangle 6"/>
+          <p:cNvPr id="6" name="Rectangle 5"/>
           <p:cNvSpPr/>
           <p:nvPr/>
         </p:nvSpPr>
@@ -14585,7 +13949,7 @@
       </p:sp>
       <p:sp>
         <p:nvSpPr>
-          <p:cNvPr id="8" name="TextBox 7"/>
+          <p:cNvPr id="7" name="TextBox 6"/>
           <p:cNvSpPr txBox="1"/>
           <p:nvPr/>
         </p:nvSpPr>
@@ -14627,7 +13991,7 @@
       </p:sp>
       <p:graphicFrame>
         <p:nvGraphicFramePr>
-          <p:cNvPr id="9" name="Table 8"/>
+          <p:cNvPr id="8" name="Table 7"/>
           <p:cNvGraphicFramePr>
             <a:graphicFrameLocks noGrp="1"/>
           </p:cNvGraphicFramePr>
@@ -14933,7 +14297,7 @@
       </p:graphicFrame>
       <p:sp>
         <p:nvSpPr>
-          <p:cNvPr id="10" name="Rectangle 9"/>
+          <p:cNvPr id="9" name="Rectangle 8"/>
           <p:cNvSpPr/>
           <p:nvPr/>
         </p:nvSpPr>
@@ -14982,7 +14346,7 @@
       </p:sp>
       <p:sp>
         <p:nvSpPr>
-          <p:cNvPr id="11" name="TextBox 10"/>
+          <p:cNvPr id="10" name="TextBox 9"/>
           <p:cNvSpPr txBox="1"/>
           <p:nvPr/>
         </p:nvSpPr>
@@ -15024,7 +14388,7 @@
       </p:sp>
       <p:sp>
         <p:nvSpPr>
-          <p:cNvPr id="12" name="TextBox 11"/>
+          <p:cNvPr id="11" name="TextBox 10"/>
           <p:cNvSpPr txBox="1"/>
           <p:nvPr/>
         </p:nvSpPr>
@@ -15066,7 +14430,7 @@
       </p:sp>
       <p:sp>
         <p:nvSpPr>
-          <p:cNvPr id="13" name="TextBox 12"/>
+          <p:cNvPr id="12" name="TextBox 11"/>
           <p:cNvSpPr txBox="1"/>
           <p:nvPr/>
         </p:nvSpPr>
@@ -15181,48 +14545,6 @@
         </p:nvSpPr>
         <p:spPr>
           <a:xfrm>
-            <a:off x="5897880" y="310896"/>
-            <a:ext cx="4800600" cy="256032"/>
-          </a:xfrm>
-          <a:prstGeom prst="rect">
-            <a:avLst/>
-          </a:prstGeom>
-          <a:noFill/>
-        </p:spPr>
-        <p:txBody>
-          <a:bodyPr wrap="none" lIns="9144" rIns="9144" tIns="9144" bIns="9144" anchor="t">
-            <a:spAutoFit/>
-          </a:bodyPr>
-          <a:lstStyle/>
-          <a:p>
-            <a:pPr algn="r">
-              <a:spcAft>
-                <a:spcPts val="0"/>
-              </a:spcAft>
-              <a:defRPr sz="680" b="1">
-                <a:solidFill>
-                  <a:srgbClr val="4F6B00"/>
-                </a:solidFill>
-                <a:latin typeface="Inter"/>
-              </a:defRPr>
-            </a:pPr>
-            <a:r>
-              <a:rPr>
-                <a:latin typeface="Inter"/>
-              </a:rPr>
-              <a:t>Illustrative, Gradient Maintained — demo data, not the client's holdings or managers</a:t>
-            </a:r>
-          </a:p>
-        </p:txBody>
-      </p:sp>
-      <p:sp>
-        <p:nvSpPr>
-          <p:cNvPr id="4" name="TextBox 3"/>
-          <p:cNvSpPr txBox="1"/>
-          <p:nvPr/>
-        </p:nvSpPr>
-        <p:spPr>
-          <a:xfrm>
             <a:off x="640080" y="566928"/>
             <a:ext cx="10058400" cy="530352"/>
           </a:xfrm>
@@ -15259,7 +14581,7 @@
       </p:sp>
       <p:sp>
         <p:nvSpPr>
-          <p:cNvPr id="5" name="Rectangle 4"/>
+          <p:cNvPr id="4" name="Rectangle 3"/>
           <p:cNvSpPr/>
           <p:nvPr/>
         </p:nvSpPr>
@@ -15308,7 +14630,7 @@
       </p:sp>
       <p:sp>
         <p:nvSpPr>
-          <p:cNvPr id="6" name="Rectangle 5"/>
+          <p:cNvPr id="5" name="Rectangle 4"/>
           <p:cNvSpPr/>
           <p:nvPr/>
         </p:nvSpPr>
@@ -15357,7 +14679,7 @@
       </p:sp>
       <p:sp>
         <p:nvSpPr>
-          <p:cNvPr id="7" name="TextBox 6"/>
+          <p:cNvPr id="6" name="TextBox 5"/>
           <p:cNvSpPr txBox="1"/>
           <p:nvPr/>
         </p:nvSpPr>
@@ -15399,14 +14721,105 @@
       </p:sp>
       <p:sp>
         <p:nvSpPr>
-          <p:cNvPr id="8" name="Rectangle 7"/>
+          <p:cNvPr id="7" name="Rectangle 6"/>
           <p:cNvSpPr/>
           <p:nvPr/>
         </p:nvSpPr>
         <p:spPr>
           <a:xfrm>
-            <a:off x="640080" y="1325880"/>
-            <a:ext cx="10908792" cy="2409409"/>
+            <a:off x="640080" y="1399032"/>
+            <a:ext cx="73152" cy="979880"/>
+          </a:xfrm>
+          <a:prstGeom prst="rect">
+            <a:avLst/>
+          </a:prstGeom>
+          <a:solidFill>
+            <a:srgbClr val="F2A93B"/>
+          </a:solidFill>
+          <a:ln>
+            <a:solidFill>
+              <a:srgbClr val="F2A93B"/>
+            </a:solidFill>
+          </a:ln>
+        </p:spPr>
+        <p:style>
+          <a:lnRef idx="1">
+            <a:schemeClr val="accent1"/>
+          </a:lnRef>
+          <a:fillRef idx="3">
+            <a:schemeClr val="accent1"/>
+          </a:fillRef>
+          <a:effectRef idx="2">
+            <a:schemeClr val="accent1"/>
+          </a:effectRef>
+          <a:fontRef idx="minor">
+            <a:schemeClr val="lt1"/>
+          </a:fontRef>
+        </p:style>
+        <p:txBody>
+          <a:bodyPr rtlCol="0" anchor="ctr"/>
+          <a:lstStyle/>
+          <a:p>
+            <a:pPr algn="ctr">
+              <a:defRPr>
+                <a:latin typeface="Inter"/>
+              </a:defRPr>
+            </a:pPr>
+          </a:p>
+        </p:txBody>
+      </p:sp>
+      <p:sp>
+        <p:nvSpPr>
+          <p:cNvPr id="8" name="TextBox 7"/>
+          <p:cNvSpPr txBox="1"/>
+          <p:nvPr/>
+        </p:nvSpPr>
+        <p:spPr>
+          <a:xfrm>
+            <a:off x="896112" y="1371600"/>
+            <a:ext cx="10588752" cy="653187"/>
+          </a:xfrm>
+          <a:prstGeom prst="rect">
+            <a:avLst/>
+          </a:prstGeom>
+          <a:noFill/>
+        </p:spPr>
+        <p:txBody>
+          <a:bodyPr wrap="none" lIns="9144" rIns="9144" tIns="9144" bIns="9144" anchor="t">
+            <a:spAutoFit/>
+          </a:bodyPr>
+          <a:lstStyle/>
+          <a:p>
+            <a:pPr algn="l">
+              <a:spcAft>
+                <a:spcPts val="0"/>
+              </a:spcAft>
+              <a:defRPr sz="1800" b="1">
+                <a:solidFill>
+                  <a:srgbClr val="0D1117"/>
+                </a:solidFill>
+                <a:latin typeface="Inter"/>
+              </a:defRPr>
+            </a:pPr>
+            <a:r>
+              <a:rPr>
+                <a:latin typeface="Inter"/>
+              </a:rPr>
+              <a:t>Redemption terms need confirmation before funding</a:t>
+            </a:r>
+          </a:p>
+        </p:txBody>
+      </p:sp>
+      <p:sp>
+        <p:nvSpPr>
+          <p:cNvPr id="9" name="Rectangle 8"/>
+          <p:cNvSpPr/>
+          <p:nvPr/>
+        </p:nvSpPr>
+        <p:spPr>
+          <a:xfrm>
+            <a:off x="640080" y="2561792"/>
+            <a:ext cx="10908792" cy="1786735"/>
           </a:xfrm>
           <a:prstGeom prst="rect">
             <a:avLst/>
@@ -15448,14 +14861,14 @@
       </p:sp>
       <p:sp>
         <p:nvSpPr>
-          <p:cNvPr id="9" name="Rectangle 8"/>
+          <p:cNvPr id="10" name="Rectangle 9"/>
           <p:cNvSpPr/>
           <p:nvPr/>
         </p:nvSpPr>
         <p:spPr>
           <a:xfrm>
-            <a:off x="640080" y="1325880"/>
-            <a:ext cx="54864" cy="2409409"/>
+            <a:off x="640080" y="2561792"/>
+            <a:ext cx="54864" cy="1786735"/>
           </a:xfrm>
           <a:prstGeom prst="rect">
             <a:avLst/>
@@ -15497,13 +14910,13 @@
       </p:sp>
       <p:sp>
         <p:nvSpPr>
-          <p:cNvPr id="10" name="TextBox 9"/>
+          <p:cNvPr id="11" name="TextBox 10"/>
           <p:cNvSpPr txBox="1"/>
           <p:nvPr/>
         </p:nvSpPr>
         <p:spPr>
           <a:xfrm>
-            <a:off x="804671" y="1435607"/>
+            <a:off x="804671" y="2671520"/>
             <a:ext cx="10616184" cy="228600"/>
           </a:xfrm>
           <a:prstGeom prst="rect">
@@ -15539,14 +14952,14 @@
       </p:sp>
       <p:sp>
         <p:nvSpPr>
-          <p:cNvPr id="11" name="TextBox 10"/>
+          <p:cNvPr id="12" name="TextBox 11"/>
           <p:cNvSpPr txBox="1"/>
           <p:nvPr/>
         </p:nvSpPr>
         <p:spPr>
           <a:xfrm>
-            <a:off x="804671" y="1719072"/>
-            <a:ext cx="10616184" cy="1924777"/>
+            <a:off x="804671" y="2954984"/>
+            <a:ext cx="10616184" cy="1302103"/>
           </a:xfrm>
           <a:prstGeom prst="rect">
             <a:avLst/>
@@ -15581,14 +14994,14 @@
       </p:sp>
       <p:sp>
         <p:nvSpPr>
-          <p:cNvPr id="12" name="Rectangle 11"/>
+          <p:cNvPr id="13" name="Rectangle 12"/>
           <p:cNvSpPr/>
           <p:nvPr/>
         </p:nvSpPr>
         <p:spPr>
           <a:xfrm>
-            <a:off x="640080" y="3845017"/>
-            <a:ext cx="2644902" cy="2372902"/>
+            <a:off x="640080" y="4458256"/>
+            <a:ext cx="2644902" cy="1759663"/>
           </a:xfrm>
           <a:prstGeom prst="rect">
             <a:avLst/>
@@ -15630,13 +15043,13 @@
       </p:sp>
       <p:sp>
         <p:nvSpPr>
-          <p:cNvPr id="13" name="Rectangle 12"/>
+          <p:cNvPr id="14" name="Rectangle 13"/>
           <p:cNvSpPr/>
           <p:nvPr/>
         </p:nvSpPr>
         <p:spPr>
           <a:xfrm>
-            <a:off x="640080" y="3845017"/>
+            <a:off x="640080" y="4458256"/>
             <a:ext cx="2644902" cy="45720"/>
           </a:xfrm>
           <a:prstGeom prst="rect">
@@ -15679,13 +15092,13 @@
       </p:sp>
       <p:sp>
         <p:nvSpPr>
-          <p:cNvPr id="14" name="TextBox 13"/>
+          <p:cNvPr id="15" name="TextBox 14"/>
           <p:cNvSpPr txBox="1"/>
           <p:nvPr/>
         </p:nvSpPr>
         <p:spPr>
           <a:xfrm>
-            <a:off x="749808" y="3973033"/>
+            <a:off x="749808" y="4586272"/>
             <a:ext cx="2425446" cy="201168"/>
           </a:xfrm>
           <a:prstGeom prst="rect">
@@ -15721,13 +15134,13 @@
       </p:sp>
       <p:sp>
         <p:nvSpPr>
-          <p:cNvPr id="15" name="TextBox 14"/>
+          <p:cNvPr id="16" name="TextBox 15"/>
           <p:cNvSpPr txBox="1"/>
           <p:nvPr/>
         </p:nvSpPr>
         <p:spPr>
           <a:xfrm>
-            <a:off x="749808" y="4229065"/>
+            <a:off x="749808" y="4842304"/>
             <a:ext cx="2425446" cy="475488"/>
           </a:xfrm>
           <a:prstGeom prst="rect">
@@ -15763,13 +15176,13 @@
       </p:sp>
       <p:sp>
         <p:nvSpPr>
-          <p:cNvPr id="16" name="TextBox 15"/>
+          <p:cNvPr id="17" name="TextBox 16"/>
           <p:cNvSpPr txBox="1"/>
           <p:nvPr/>
         </p:nvSpPr>
         <p:spPr>
           <a:xfrm>
-            <a:off x="749808" y="5888736"/>
+            <a:off x="749808" y="5888735"/>
             <a:ext cx="2425446" cy="228600"/>
           </a:xfrm>
           <a:prstGeom prst="rect">
@@ -15805,14 +15218,14 @@
       </p:sp>
       <p:sp>
         <p:nvSpPr>
-          <p:cNvPr id="17" name="Rectangle 16"/>
+          <p:cNvPr id="18" name="Rectangle 17"/>
           <p:cNvSpPr/>
           <p:nvPr/>
         </p:nvSpPr>
         <p:spPr>
           <a:xfrm>
-            <a:off x="3394710" y="3845017"/>
-            <a:ext cx="2644902" cy="2372902"/>
+            <a:off x="3394710" y="4458256"/>
+            <a:ext cx="2644902" cy="1759663"/>
           </a:xfrm>
           <a:prstGeom prst="rect">
             <a:avLst/>
@@ -15854,13 +15267,13 @@
       </p:sp>
       <p:sp>
         <p:nvSpPr>
-          <p:cNvPr id="18" name="Rectangle 17"/>
+          <p:cNvPr id="19" name="Rectangle 18"/>
           <p:cNvSpPr/>
           <p:nvPr/>
         </p:nvSpPr>
         <p:spPr>
           <a:xfrm>
-            <a:off x="3394710" y="3845017"/>
+            <a:off x="3394710" y="4458256"/>
             <a:ext cx="2644902" cy="45720"/>
           </a:xfrm>
           <a:prstGeom prst="rect">
@@ -15903,13 +15316,13 @@
       </p:sp>
       <p:sp>
         <p:nvSpPr>
-          <p:cNvPr id="19" name="TextBox 18"/>
+          <p:cNvPr id="20" name="TextBox 19"/>
           <p:cNvSpPr txBox="1"/>
           <p:nvPr/>
         </p:nvSpPr>
         <p:spPr>
           <a:xfrm>
-            <a:off x="3504438" y="3973033"/>
+            <a:off x="3504438" y="4586272"/>
             <a:ext cx="2425446" cy="201168"/>
           </a:xfrm>
           <a:prstGeom prst="rect">
@@ -15945,13 +15358,13 @@
       </p:sp>
       <p:sp>
         <p:nvSpPr>
-          <p:cNvPr id="20" name="TextBox 19"/>
+          <p:cNvPr id="21" name="TextBox 20"/>
           <p:cNvSpPr txBox="1"/>
           <p:nvPr/>
         </p:nvSpPr>
         <p:spPr>
           <a:xfrm>
-            <a:off x="3504438" y="4229065"/>
+            <a:off x="3504438" y="4842304"/>
             <a:ext cx="2425446" cy="475488"/>
           </a:xfrm>
           <a:prstGeom prst="rect">
@@ -15987,13 +15400,13 @@
       </p:sp>
       <p:sp>
         <p:nvSpPr>
-          <p:cNvPr id="21" name="TextBox 20"/>
+          <p:cNvPr id="22" name="TextBox 21"/>
           <p:cNvSpPr txBox="1"/>
           <p:nvPr/>
         </p:nvSpPr>
         <p:spPr>
           <a:xfrm>
-            <a:off x="3504438" y="5888736"/>
+            <a:off x="3504438" y="5888735"/>
             <a:ext cx="2425446" cy="228600"/>
           </a:xfrm>
           <a:prstGeom prst="rect">
@@ -16029,14 +15442,14 @@
       </p:sp>
       <p:sp>
         <p:nvSpPr>
-          <p:cNvPr id="22" name="Rectangle 21"/>
+          <p:cNvPr id="23" name="Rectangle 22"/>
           <p:cNvSpPr/>
           <p:nvPr/>
         </p:nvSpPr>
         <p:spPr>
           <a:xfrm>
-            <a:off x="6149340" y="3845017"/>
-            <a:ext cx="2644902" cy="2372902"/>
+            <a:off x="6149340" y="4458256"/>
+            <a:ext cx="2644902" cy="1759663"/>
           </a:xfrm>
           <a:prstGeom prst="rect">
             <a:avLst/>
@@ -16078,13 +15491,13 @@
       </p:sp>
       <p:sp>
         <p:nvSpPr>
-          <p:cNvPr id="23" name="Rectangle 22"/>
+          <p:cNvPr id="24" name="Rectangle 23"/>
           <p:cNvSpPr/>
           <p:nvPr/>
         </p:nvSpPr>
         <p:spPr>
           <a:xfrm>
-            <a:off x="6149340" y="3845017"/>
+            <a:off x="6149340" y="4458256"/>
             <a:ext cx="2644902" cy="45720"/>
           </a:xfrm>
           <a:prstGeom prst="rect">
@@ -16127,13 +15540,13 @@
       </p:sp>
       <p:sp>
         <p:nvSpPr>
-          <p:cNvPr id="24" name="TextBox 23"/>
+          <p:cNvPr id="25" name="TextBox 24"/>
           <p:cNvSpPr txBox="1"/>
           <p:nvPr/>
         </p:nvSpPr>
         <p:spPr>
           <a:xfrm>
-            <a:off x="6259068" y="3973033"/>
+            <a:off x="6259068" y="4586272"/>
             <a:ext cx="2425446" cy="201168"/>
           </a:xfrm>
           <a:prstGeom prst="rect">
@@ -16169,13 +15582,13 @@
       </p:sp>
       <p:sp>
         <p:nvSpPr>
-          <p:cNvPr id="25" name="TextBox 24"/>
+          <p:cNvPr id="26" name="TextBox 25"/>
           <p:cNvSpPr txBox="1"/>
           <p:nvPr/>
         </p:nvSpPr>
         <p:spPr>
           <a:xfrm>
-            <a:off x="6259068" y="4229065"/>
+            <a:off x="6259068" y="4842304"/>
             <a:ext cx="2425446" cy="475488"/>
           </a:xfrm>
           <a:prstGeom prst="rect">
@@ -16211,13 +15624,13 @@
       </p:sp>
       <p:sp>
         <p:nvSpPr>
-          <p:cNvPr id="26" name="TextBox 25"/>
+          <p:cNvPr id="27" name="TextBox 26"/>
           <p:cNvSpPr txBox="1"/>
           <p:nvPr/>
         </p:nvSpPr>
         <p:spPr>
           <a:xfrm>
-            <a:off x="6259068" y="5888736"/>
+            <a:off x="6259068" y="5888735"/>
             <a:ext cx="2425446" cy="228600"/>
           </a:xfrm>
           <a:prstGeom prst="rect">
@@ -16253,14 +15666,14 @@
       </p:sp>
       <p:sp>
         <p:nvSpPr>
-          <p:cNvPr id="27" name="Rectangle 26"/>
+          <p:cNvPr id="28" name="Rectangle 27"/>
           <p:cNvSpPr/>
           <p:nvPr/>
         </p:nvSpPr>
         <p:spPr>
           <a:xfrm>
-            <a:off x="8903970" y="3845017"/>
-            <a:ext cx="2644902" cy="2372902"/>
+            <a:off x="8903970" y="4458256"/>
+            <a:ext cx="2644902" cy="1759663"/>
           </a:xfrm>
           <a:prstGeom prst="rect">
             <a:avLst/>
@@ -16302,13 +15715,13 @@
       </p:sp>
       <p:sp>
         <p:nvSpPr>
-          <p:cNvPr id="28" name="Rectangle 27"/>
+          <p:cNvPr id="29" name="Rectangle 28"/>
           <p:cNvSpPr/>
           <p:nvPr/>
         </p:nvSpPr>
         <p:spPr>
           <a:xfrm>
-            <a:off x="8903970" y="3845017"/>
+            <a:off x="8903970" y="4458256"/>
             <a:ext cx="2644902" cy="45720"/>
           </a:xfrm>
           <a:prstGeom prst="rect">
@@ -16351,13 +15764,13 @@
       </p:sp>
       <p:sp>
         <p:nvSpPr>
-          <p:cNvPr id="29" name="TextBox 28"/>
+          <p:cNvPr id="30" name="TextBox 29"/>
           <p:cNvSpPr txBox="1"/>
           <p:nvPr/>
         </p:nvSpPr>
         <p:spPr>
           <a:xfrm>
-            <a:off x="9013698" y="3973033"/>
+            <a:off x="9013698" y="4586272"/>
             <a:ext cx="2425446" cy="201168"/>
           </a:xfrm>
           <a:prstGeom prst="rect">
@@ -16393,13 +15806,13 @@
       </p:sp>
       <p:sp>
         <p:nvSpPr>
-          <p:cNvPr id="30" name="TextBox 29"/>
+          <p:cNvPr id="31" name="TextBox 30"/>
           <p:cNvSpPr txBox="1"/>
           <p:nvPr/>
         </p:nvSpPr>
         <p:spPr>
           <a:xfrm>
-            <a:off x="9013698" y="4229065"/>
+            <a:off x="9013698" y="4842304"/>
             <a:ext cx="2425446" cy="475488"/>
           </a:xfrm>
           <a:prstGeom prst="rect">
@@ -16435,13 +15848,13 @@
       </p:sp>
       <p:sp>
         <p:nvSpPr>
-          <p:cNvPr id="31" name="TextBox 30"/>
+          <p:cNvPr id="32" name="TextBox 31"/>
           <p:cNvSpPr txBox="1"/>
           <p:nvPr/>
         </p:nvSpPr>
         <p:spPr>
           <a:xfrm>
-            <a:off x="9013698" y="5888736"/>
+            <a:off x="9013698" y="5888735"/>
             <a:ext cx="2425446" cy="228600"/>
           </a:xfrm>
           <a:prstGeom prst="rect">
@@ -16477,7 +15890,7 @@
       </p:sp>
       <p:sp>
         <p:nvSpPr>
-          <p:cNvPr id="32" name="Rectangle 31"/>
+          <p:cNvPr id="33" name="Rectangle 32"/>
           <p:cNvSpPr/>
           <p:nvPr/>
         </p:nvSpPr>
@@ -16526,7 +15939,7 @@
       </p:sp>
       <p:sp>
         <p:nvSpPr>
-          <p:cNvPr id="33" name="TextBox 32"/>
+          <p:cNvPr id="34" name="TextBox 33"/>
           <p:cNvSpPr txBox="1"/>
           <p:nvPr/>
         </p:nvSpPr>
@@ -16568,7 +15981,7 @@
       </p:sp>
       <p:sp>
         <p:nvSpPr>
-          <p:cNvPr id="34" name="TextBox 33"/>
+          <p:cNvPr id="35" name="TextBox 34"/>
           <p:cNvSpPr txBox="1"/>
           <p:nvPr/>
         </p:nvSpPr>
@@ -16610,7 +16023,7 @@
       </p:sp>
       <p:sp>
         <p:nvSpPr>
-          <p:cNvPr id="35" name="TextBox 34"/>
+          <p:cNvPr id="36" name="TextBox 35"/>
           <p:cNvSpPr txBox="1"/>
           <p:nvPr/>
         </p:nvSpPr>
@@ -16726,7 +16139,7 @@
         <p:spPr>
           <a:xfrm>
             <a:off x="640080" y="329184"/>
-            <a:ext cx="5303520" cy="182880"/>
+            <a:ext cx="9875520" cy="182880"/>
           </a:xfrm>
           <a:prstGeom prst="rect">
             <a:avLst/>
@@ -16767,48 +16180,6 @@
         </p:nvSpPr>
         <p:spPr>
           <a:xfrm>
-            <a:off x="5897880" y="310896"/>
-            <a:ext cx="4800600" cy="256032"/>
-          </a:xfrm>
-          <a:prstGeom prst="rect">
-            <a:avLst/>
-          </a:prstGeom>
-          <a:noFill/>
-        </p:spPr>
-        <p:txBody>
-          <a:bodyPr wrap="none" lIns="9144" rIns="9144" tIns="9144" bIns="9144" anchor="t">
-            <a:spAutoFit/>
-          </a:bodyPr>
-          <a:lstStyle/>
-          <a:p>
-            <a:pPr algn="r">
-              <a:spcAft>
-                <a:spcPts val="0"/>
-              </a:spcAft>
-              <a:defRPr sz="680" b="1">
-                <a:solidFill>
-                  <a:srgbClr val="4F6B00"/>
-                </a:solidFill>
-                <a:latin typeface="Inter"/>
-              </a:defRPr>
-            </a:pPr>
-            <a:r>
-              <a:rPr>
-                <a:latin typeface="Inter"/>
-              </a:rPr>
-              <a:t>Illustrative, Gradient Maintained — demo data, not the client's holdings or managers</a:t>
-            </a:r>
-          </a:p>
-        </p:txBody>
-      </p:sp>
-      <p:sp>
-        <p:nvSpPr>
-          <p:cNvPr id="5" name="TextBox 4"/>
-          <p:cNvSpPr txBox="1"/>
-          <p:nvPr/>
-        </p:nvSpPr>
-        <p:spPr>
-          <a:xfrm>
             <a:off x="640080" y="566928"/>
             <a:ext cx="10058400" cy="530352"/>
           </a:xfrm>
@@ -16845,7 +16216,7 @@
       </p:sp>
       <p:sp>
         <p:nvSpPr>
-          <p:cNvPr id="6" name="Rectangle 5"/>
+          <p:cNvPr id="5" name="Rectangle 4"/>
           <p:cNvSpPr/>
           <p:nvPr/>
         </p:nvSpPr>
@@ -16894,7 +16265,7 @@
       </p:sp>
       <p:sp>
         <p:nvSpPr>
-          <p:cNvPr id="7" name="Rectangle 6"/>
+          <p:cNvPr id="6" name="Rectangle 5"/>
           <p:cNvSpPr/>
           <p:nvPr/>
         </p:nvSpPr>
@@ -16943,7 +16314,7 @@
       </p:sp>
       <p:sp>
         <p:nvSpPr>
-          <p:cNvPr id="8" name="TextBox 7"/>
+          <p:cNvPr id="7" name="TextBox 6"/>
           <p:cNvSpPr txBox="1"/>
           <p:nvPr/>
         </p:nvSpPr>
@@ -16985,7 +16356,7 @@
       </p:sp>
       <p:sp>
         <p:nvSpPr>
-          <p:cNvPr id="9" name="TextBox 8"/>
+          <p:cNvPr id="8" name="TextBox 7"/>
           <p:cNvSpPr txBox="1"/>
           <p:nvPr/>
         </p:nvSpPr>
@@ -17027,7 +16398,7 @@
       </p:sp>
       <p:graphicFrame>
         <p:nvGraphicFramePr>
-          <p:cNvPr id="10" name="Table 9"/>
+          <p:cNvPr id="9" name="Table 8"/>
           <p:cNvGraphicFramePr>
             <a:graphicFrameLocks noGrp="1"/>
           </p:cNvGraphicFramePr>
@@ -17303,7 +16674,7 @@
       </p:graphicFrame>
       <p:sp>
         <p:nvSpPr>
-          <p:cNvPr id="11" name="Rectangle 10"/>
+          <p:cNvPr id="10" name="Rectangle 9"/>
           <p:cNvSpPr/>
           <p:nvPr/>
         </p:nvSpPr>
@@ -17352,7 +16723,7 @@
       </p:sp>
       <p:sp>
         <p:nvSpPr>
-          <p:cNvPr id="12" name="TextBox 11"/>
+          <p:cNvPr id="11" name="TextBox 10"/>
           <p:cNvSpPr txBox="1"/>
           <p:nvPr/>
         </p:nvSpPr>
@@ -17394,7 +16765,7 @@
       </p:sp>
       <p:sp>
         <p:nvSpPr>
-          <p:cNvPr id="13" name="TextBox 12"/>
+          <p:cNvPr id="12" name="TextBox 11"/>
           <p:cNvSpPr txBox="1"/>
           <p:nvPr/>
         </p:nvSpPr>
@@ -17436,7 +16807,7 @@
       </p:sp>
       <p:sp>
         <p:nvSpPr>
-          <p:cNvPr id="14" name="TextBox 13"/>
+          <p:cNvPr id="13" name="TextBox 12"/>
           <p:cNvSpPr txBox="1"/>
           <p:nvPr/>
         </p:nvSpPr>
@@ -17552,7 +16923,7 @@
         <p:spPr>
           <a:xfrm>
             <a:off x="640080" y="329184"/>
-            <a:ext cx="5303520" cy="182880"/>
+            <a:ext cx="9875520" cy="182880"/>
           </a:xfrm>
           <a:prstGeom prst="rect">
             <a:avLst/>
@@ -17593,48 +16964,6 @@
         </p:nvSpPr>
         <p:spPr>
           <a:xfrm>
-            <a:off x="5897880" y="310896"/>
-            <a:ext cx="4800600" cy="256032"/>
-          </a:xfrm>
-          <a:prstGeom prst="rect">
-            <a:avLst/>
-          </a:prstGeom>
-          <a:noFill/>
-        </p:spPr>
-        <p:txBody>
-          <a:bodyPr wrap="none" lIns="9144" rIns="9144" tIns="9144" bIns="9144" anchor="t">
-            <a:spAutoFit/>
-          </a:bodyPr>
-          <a:lstStyle/>
-          <a:p>
-            <a:pPr algn="r">
-              <a:spcAft>
-                <a:spcPts val="0"/>
-              </a:spcAft>
-              <a:defRPr sz="680" b="1">
-                <a:solidFill>
-                  <a:srgbClr val="4F6B00"/>
-                </a:solidFill>
-                <a:latin typeface="Inter"/>
-              </a:defRPr>
-            </a:pPr>
-            <a:r>
-              <a:rPr>
-                <a:latin typeface="Inter"/>
-              </a:rPr>
-              <a:t>Illustrative, Gradient Maintained — demo data, not the client's holdings or managers</a:t>
-            </a:r>
-          </a:p>
-        </p:txBody>
-      </p:sp>
-      <p:sp>
-        <p:nvSpPr>
-          <p:cNvPr id="5" name="TextBox 4"/>
-          <p:cNvSpPr txBox="1"/>
-          <p:nvPr/>
-        </p:nvSpPr>
-        <p:spPr>
-          <a:xfrm>
             <a:off x="640080" y="566928"/>
             <a:ext cx="10058400" cy="530352"/>
           </a:xfrm>
@@ -17671,7 +17000,7 @@
       </p:sp>
       <p:sp>
         <p:nvSpPr>
-          <p:cNvPr id="6" name="Rectangle 5"/>
+          <p:cNvPr id="5" name="Rectangle 4"/>
           <p:cNvSpPr/>
           <p:nvPr/>
         </p:nvSpPr>
@@ -17720,7 +17049,7 @@
       </p:sp>
       <p:sp>
         <p:nvSpPr>
-          <p:cNvPr id="7" name="Rectangle 6"/>
+          <p:cNvPr id="6" name="Rectangle 5"/>
           <p:cNvSpPr/>
           <p:nvPr/>
         </p:nvSpPr>
@@ -17769,7 +17098,7 @@
       </p:sp>
       <p:sp>
         <p:nvSpPr>
-          <p:cNvPr id="8" name="TextBox 7"/>
+          <p:cNvPr id="7" name="TextBox 6"/>
           <p:cNvSpPr txBox="1"/>
           <p:nvPr/>
         </p:nvSpPr>
@@ -17811,7 +17140,7 @@
       </p:sp>
       <p:sp>
         <p:nvSpPr>
-          <p:cNvPr id="9" name="Rectangle 8"/>
+          <p:cNvPr id="8" name="Rectangle 7"/>
           <p:cNvSpPr/>
           <p:nvPr/>
         </p:nvSpPr>
@@ -17860,7 +17189,7 @@
       </p:sp>
       <p:sp>
         <p:nvSpPr>
-          <p:cNvPr id="10" name="Rectangle 9"/>
+          <p:cNvPr id="9" name="Rectangle 8"/>
           <p:cNvSpPr/>
           <p:nvPr/>
         </p:nvSpPr>
@@ -17909,7 +17238,7 @@
       </p:sp>
       <p:sp>
         <p:nvSpPr>
-          <p:cNvPr id="11" name="TextBox 10"/>
+          <p:cNvPr id="10" name="TextBox 9"/>
           <p:cNvSpPr txBox="1"/>
           <p:nvPr/>
         </p:nvSpPr>
@@ -17951,7 +17280,7 @@
       </p:sp>
       <p:sp>
         <p:nvSpPr>
-          <p:cNvPr id="12" name="TextBox 11"/>
+          <p:cNvPr id="11" name="TextBox 10"/>
           <p:cNvSpPr txBox="1"/>
           <p:nvPr/>
         </p:nvSpPr>
@@ -17993,7 +17322,7 @@
       </p:sp>
       <p:sp>
         <p:nvSpPr>
-          <p:cNvPr id="13" name="TextBox 12"/>
+          <p:cNvPr id="12" name="TextBox 11"/>
           <p:cNvSpPr txBox="1"/>
           <p:nvPr/>
         </p:nvSpPr>
@@ -18035,7 +17364,7 @@
       </p:sp>
       <p:sp>
         <p:nvSpPr>
-          <p:cNvPr id="14" name="Rectangle 13"/>
+          <p:cNvPr id="13" name="Rectangle 12"/>
           <p:cNvSpPr/>
           <p:nvPr/>
         </p:nvSpPr>
@@ -18084,7 +17413,7 @@
       </p:sp>
       <p:sp>
         <p:nvSpPr>
-          <p:cNvPr id="15" name="TextBox 14"/>
+          <p:cNvPr id="14" name="TextBox 13"/>
           <p:cNvSpPr txBox="1"/>
           <p:nvPr/>
         </p:nvSpPr>
@@ -18126,7 +17455,7 @@
       </p:sp>
       <p:sp>
         <p:nvSpPr>
-          <p:cNvPr id="16" name="TextBox 15"/>
+          <p:cNvPr id="15" name="TextBox 14"/>
           <p:cNvSpPr txBox="1"/>
           <p:nvPr/>
         </p:nvSpPr>
@@ -18168,7 +17497,7 @@
       </p:sp>
       <p:sp>
         <p:nvSpPr>
-          <p:cNvPr id="17" name="TextBox 16"/>
+          <p:cNvPr id="16" name="TextBox 15"/>
           <p:cNvSpPr txBox="1"/>
           <p:nvPr/>
         </p:nvSpPr>
@@ -18283,48 +17612,6 @@
         </p:nvSpPr>
         <p:spPr>
           <a:xfrm>
-            <a:off x="5897880" y="310896"/>
-            <a:ext cx="4800600" cy="256032"/>
-          </a:xfrm>
-          <a:prstGeom prst="rect">
-            <a:avLst/>
-          </a:prstGeom>
-          <a:noFill/>
-        </p:spPr>
-        <p:txBody>
-          <a:bodyPr wrap="none" lIns="9144" rIns="9144" tIns="9144" bIns="9144" anchor="t">
-            <a:spAutoFit/>
-          </a:bodyPr>
-          <a:lstStyle/>
-          <a:p>
-            <a:pPr algn="r">
-              <a:spcAft>
-                <a:spcPts val="0"/>
-              </a:spcAft>
-              <a:defRPr sz="680" b="1">
-                <a:solidFill>
-                  <a:srgbClr val="4F6B00"/>
-                </a:solidFill>
-                <a:latin typeface="Inter"/>
-              </a:defRPr>
-            </a:pPr>
-            <a:r>
-              <a:rPr>
-                <a:latin typeface="Inter"/>
-              </a:rPr>
-              <a:t>Illustrative, Gradient Maintained — demo data, not the client's holdings or managers</a:t>
-            </a:r>
-          </a:p>
-        </p:txBody>
-      </p:sp>
-      <p:sp>
-        <p:nvSpPr>
-          <p:cNvPr id="4" name="TextBox 3"/>
-          <p:cNvSpPr txBox="1"/>
-          <p:nvPr/>
-        </p:nvSpPr>
-        <p:spPr>
-          <a:xfrm>
             <a:off x="640080" y="566928"/>
             <a:ext cx="10058400" cy="530352"/>
           </a:xfrm>
@@ -18361,7 +17648,7 @@
       </p:sp>
       <p:sp>
         <p:nvSpPr>
-          <p:cNvPr id="5" name="Rectangle 4"/>
+          <p:cNvPr id="4" name="Rectangle 3"/>
           <p:cNvSpPr/>
           <p:nvPr/>
         </p:nvSpPr>
@@ -18410,7 +17697,7 @@
       </p:sp>
       <p:sp>
         <p:nvSpPr>
-          <p:cNvPr id="6" name="Rectangle 5"/>
+          <p:cNvPr id="5" name="Rectangle 4"/>
           <p:cNvSpPr/>
           <p:nvPr/>
         </p:nvSpPr>
@@ -18459,7 +17746,7 @@
       </p:sp>
       <p:sp>
         <p:nvSpPr>
-          <p:cNvPr id="7" name="TextBox 6"/>
+          <p:cNvPr id="6" name="TextBox 5"/>
           <p:cNvSpPr txBox="1"/>
           <p:nvPr/>
         </p:nvSpPr>
@@ -18501,7 +17788,7 @@
       </p:sp>
       <p:sp>
         <p:nvSpPr>
-          <p:cNvPr id="8" name="TextBox 7"/>
+          <p:cNvPr id="7" name="TextBox 6"/>
           <p:cNvSpPr txBox="1"/>
           <p:nvPr/>
         </p:nvSpPr>
@@ -18543,7 +17830,7 @@
       </p:sp>
       <p:graphicFrame>
         <p:nvGraphicFramePr>
-          <p:cNvPr id="9" name="Chart 8"/>
+          <p:cNvPr id="8" name="Chart 7"/>
           <p:cNvGraphicFramePr>
             <a:graphicFrameLocks noGrp="1"/>
           </p:cNvGraphicFramePr>
@@ -18561,7 +17848,7 @@
       </p:graphicFrame>
       <p:sp>
         <p:nvSpPr>
-          <p:cNvPr id="10" name="Rectangle 9"/>
+          <p:cNvPr id="9" name="Rectangle 8"/>
           <p:cNvSpPr/>
           <p:nvPr/>
         </p:nvSpPr>
@@ -18610,7 +17897,7 @@
       </p:sp>
       <p:sp>
         <p:nvSpPr>
-          <p:cNvPr id="11" name="TextBox 10"/>
+          <p:cNvPr id="10" name="TextBox 9"/>
           <p:cNvSpPr txBox="1"/>
           <p:nvPr/>
         </p:nvSpPr>
@@ -18652,7 +17939,7 @@
       </p:sp>
       <p:sp>
         <p:nvSpPr>
-          <p:cNvPr id="12" name="TextBox 11"/>
+          <p:cNvPr id="11" name="TextBox 10"/>
           <p:cNvSpPr txBox="1"/>
           <p:nvPr/>
         </p:nvSpPr>
@@ -18694,7 +17981,7 @@
       </p:sp>
       <p:sp>
         <p:nvSpPr>
-          <p:cNvPr id="13" name="TextBox 12"/>
+          <p:cNvPr id="12" name="TextBox 11"/>
           <p:cNvSpPr txBox="1"/>
           <p:nvPr/>
         </p:nvSpPr>
@@ -18809,48 +18096,6 @@
         </p:nvSpPr>
         <p:spPr>
           <a:xfrm>
-            <a:off x="5897880" y="310896"/>
-            <a:ext cx="4800600" cy="256032"/>
-          </a:xfrm>
-          <a:prstGeom prst="rect">
-            <a:avLst/>
-          </a:prstGeom>
-          <a:noFill/>
-        </p:spPr>
-        <p:txBody>
-          <a:bodyPr wrap="none" lIns="9144" rIns="9144" tIns="9144" bIns="9144" anchor="t">
-            <a:spAutoFit/>
-          </a:bodyPr>
-          <a:lstStyle/>
-          <a:p>
-            <a:pPr algn="r">
-              <a:spcAft>
-                <a:spcPts val="0"/>
-              </a:spcAft>
-              <a:defRPr sz="680" b="1">
-                <a:solidFill>
-                  <a:srgbClr val="4F6B00"/>
-                </a:solidFill>
-                <a:latin typeface="Inter"/>
-              </a:defRPr>
-            </a:pPr>
-            <a:r>
-              <a:rPr>
-                <a:latin typeface="Inter"/>
-              </a:rPr>
-              <a:t>Illustrative, Gradient Maintained — demo data, not the client's holdings or managers</a:t>
-            </a:r>
-          </a:p>
-        </p:txBody>
-      </p:sp>
-      <p:sp>
-        <p:nvSpPr>
-          <p:cNvPr id="4" name="TextBox 3"/>
-          <p:cNvSpPr txBox="1"/>
-          <p:nvPr/>
-        </p:nvSpPr>
-        <p:spPr>
-          <a:xfrm>
             <a:off x="640080" y="566928"/>
             <a:ext cx="10058400" cy="530352"/>
           </a:xfrm>
@@ -18887,7 +18132,7 @@
       </p:sp>
       <p:sp>
         <p:nvSpPr>
-          <p:cNvPr id="5" name="Rectangle 4"/>
+          <p:cNvPr id="4" name="Rectangle 3"/>
           <p:cNvSpPr/>
           <p:nvPr/>
         </p:nvSpPr>
@@ -18936,7 +18181,7 @@
       </p:sp>
       <p:sp>
         <p:nvSpPr>
-          <p:cNvPr id="6" name="Rectangle 5"/>
+          <p:cNvPr id="5" name="Rectangle 4"/>
           <p:cNvSpPr/>
           <p:nvPr/>
         </p:nvSpPr>
@@ -18985,7 +18230,7 @@
       </p:sp>
       <p:sp>
         <p:nvSpPr>
-          <p:cNvPr id="7" name="TextBox 6"/>
+          <p:cNvPr id="6" name="TextBox 5"/>
           <p:cNvSpPr txBox="1"/>
           <p:nvPr/>
         </p:nvSpPr>
@@ -19027,7 +18272,7 @@
       </p:sp>
       <p:sp>
         <p:nvSpPr>
-          <p:cNvPr id="8" name="TextBox 7"/>
+          <p:cNvPr id="7" name="TextBox 6"/>
           <p:cNvSpPr txBox="1"/>
           <p:nvPr/>
         </p:nvSpPr>
@@ -19069,7 +18314,7 @@
       </p:sp>
       <p:graphicFrame>
         <p:nvGraphicFramePr>
-          <p:cNvPr id="9" name="Table 8"/>
+          <p:cNvPr id="8" name="Table 7"/>
           <p:cNvGraphicFramePr>
             <a:graphicFrameLocks noGrp="1"/>
           </p:cNvGraphicFramePr>
@@ -19509,7 +18754,7 @@
       </p:graphicFrame>
       <p:sp>
         <p:nvSpPr>
-          <p:cNvPr id="10" name="TextBox 9"/>
+          <p:cNvPr id="9" name="TextBox 8"/>
           <p:cNvSpPr txBox="1"/>
           <p:nvPr/>
         </p:nvSpPr>
@@ -19551,7 +18796,7 @@
       </p:sp>
       <p:graphicFrame>
         <p:nvGraphicFramePr>
-          <p:cNvPr id="11" name="Table 10"/>
+          <p:cNvPr id="10" name="Table 9"/>
           <p:cNvGraphicFramePr>
             <a:graphicFrameLocks noGrp="1"/>
           </p:cNvGraphicFramePr>
@@ -20265,7 +19510,7 @@
       </p:graphicFrame>
       <p:sp>
         <p:nvSpPr>
-          <p:cNvPr id="12" name="TextBox 11"/>
+          <p:cNvPr id="11" name="TextBox 10"/>
           <p:cNvSpPr txBox="1"/>
           <p:nvPr/>
         </p:nvSpPr>
@@ -20307,7 +19552,7 @@
       </p:sp>
       <p:sp>
         <p:nvSpPr>
-          <p:cNvPr id="13" name="Rectangle 12"/>
+          <p:cNvPr id="12" name="Rectangle 11"/>
           <p:cNvSpPr/>
           <p:nvPr/>
         </p:nvSpPr>
@@ -20356,7 +19601,7 @@
       </p:sp>
       <p:sp>
         <p:nvSpPr>
-          <p:cNvPr id="14" name="TextBox 13"/>
+          <p:cNvPr id="13" name="TextBox 12"/>
           <p:cNvSpPr txBox="1"/>
           <p:nvPr/>
         </p:nvSpPr>
@@ -20398,7 +19643,7 @@
       </p:sp>
       <p:sp>
         <p:nvSpPr>
-          <p:cNvPr id="15" name="TextBox 14"/>
+          <p:cNvPr id="14" name="TextBox 13"/>
           <p:cNvSpPr txBox="1"/>
           <p:nvPr/>
         </p:nvSpPr>
@@ -20440,7 +19685,7 @@
       </p:sp>
       <p:sp>
         <p:nvSpPr>
-          <p:cNvPr id="16" name="TextBox 15"/>
+          <p:cNvPr id="15" name="TextBox 14"/>
           <p:cNvSpPr txBox="1"/>
           <p:nvPr/>
         </p:nvSpPr>
@@ -20555,48 +19800,6 @@
         </p:nvSpPr>
         <p:spPr>
           <a:xfrm>
-            <a:off x="5897880" y="310896"/>
-            <a:ext cx="4800600" cy="256032"/>
-          </a:xfrm>
-          <a:prstGeom prst="rect">
-            <a:avLst/>
-          </a:prstGeom>
-          <a:noFill/>
-        </p:spPr>
-        <p:txBody>
-          <a:bodyPr wrap="none" lIns="9144" rIns="9144" tIns="9144" bIns="9144" anchor="t">
-            <a:spAutoFit/>
-          </a:bodyPr>
-          <a:lstStyle/>
-          <a:p>
-            <a:pPr algn="r">
-              <a:spcAft>
-                <a:spcPts val="0"/>
-              </a:spcAft>
-              <a:defRPr sz="680" b="1">
-                <a:solidFill>
-                  <a:srgbClr val="4F6B00"/>
-                </a:solidFill>
-                <a:latin typeface="Inter"/>
-              </a:defRPr>
-            </a:pPr>
-            <a:r>
-              <a:rPr>
-                <a:latin typeface="Inter"/>
-              </a:rPr>
-              <a:t>Illustrative, Gradient Maintained — demo data, not the client's holdings or managers</a:t>
-            </a:r>
-          </a:p>
-        </p:txBody>
-      </p:sp>
-      <p:sp>
-        <p:nvSpPr>
-          <p:cNvPr id="4" name="TextBox 3"/>
-          <p:cNvSpPr txBox="1"/>
-          <p:nvPr/>
-        </p:nvSpPr>
-        <p:spPr>
-          <a:xfrm>
             <a:off x="640080" y="566928"/>
             <a:ext cx="10058400" cy="530352"/>
           </a:xfrm>
@@ -20633,7 +19836,7 @@
       </p:sp>
       <p:sp>
         <p:nvSpPr>
-          <p:cNvPr id="5" name="Rectangle 4"/>
+          <p:cNvPr id="4" name="Rectangle 3"/>
           <p:cNvSpPr/>
           <p:nvPr/>
         </p:nvSpPr>
@@ -20682,7 +19885,7 @@
       </p:sp>
       <p:sp>
         <p:nvSpPr>
-          <p:cNvPr id="6" name="Rectangle 5"/>
+          <p:cNvPr id="5" name="Rectangle 4"/>
           <p:cNvSpPr/>
           <p:nvPr/>
         </p:nvSpPr>
@@ -20731,7 +19934,7 @@
       </p:sp>
       <p:sp>
         <p:nvSpPr>
-          <p:cNvPr id="7" name="TextBox 6"/>
+          <p:cNvPr id="6" name="TextBox 5"/>
           <p:cNvSpPr txBox="1"/>
           <p:nvPr/>
         </p:nvSpPr>
@@ -20773,7 +19976,7 @@
       </p:sp>
       <p:sp>
         <p:nvSpPr>
-          <p:cNvPr id="8" name="TextBox 7"/>
+          <p:cNvPr id="7" name="TextBox 6"/>
           <p:cNvSpPr txBox="1"/>
           <p:nvPr/>
         </p:nvSpPr>
@@ -20815,7 +20018,7 @@
       </p:sp>
       <p:graphicFrame>
         <p:nvGraphicFramePr>
-          <p:cNvPr id="9" name="Table 8"/>
+          <p:cNvPr id="8" name="Table 7"/>
           <p:cNvGraphicFramePr>
             <a:graphicFrameLocks noGrp="1"/>
           </p:cNvGraphicFramePr>
@@ -21501,7 +20704,7 @@
       </p:graphicFrame>
       <p:sp>
         <p:nvSpPr>
-          <p:cNvPr id="10" name="Rectangle 9"/>
+          <p:cNvPr id="9" name="Rectangle 8"/>
           <p:cNvSpPr/>
           <p:nvPr/>
         </p:nvSpPr>
@@ -21550,7 +20753,7 @@
       </p:sp>
       <p:sp>
         <p:nvSpPr>
-          <p:cNvPr id="11" name="Rectangle 10"/>
+          <p:cNvPr id="10" name="Rectangle 9"/>
           <p:cNvSpPr/>
           <p:nvPr/>
         </p:nvSpPr>
@@ -21599,7 +20802,7 @@
       </p:sp>
       <p:sp>
         <p:nvSpPr>
-          <p:cNvPr id="12" name="TextBox 11"/>
+          <p:cNvPr id="11" name="TextBox 10"/>
           <p:cNvSpPr txBox="1"/>
           <p:nvPr/>
         </p:nvSpPr>
@@ -21641,7 +20844,7 @@
       </p:sp>
       <p:sp>
         <p:nvSpPr>
-          <p:cNvPr id="13" name="TextBox 12"/>
+          <p:cNvPr id="12" name="TextBox 11"/>
           <p:cNvSpPr txBox="1"/>
           <p:nvPr/>
         </p:nvSpPr>
@@ -21683,7 +20886,7 @@
       </p:sp>
       <p:sp>
         <p:nvSpPr>
-          <p:cNvPr id="14" name="Rectangle 13"/>
+          <p:cNvPr id="13" name="Rectangle 12"/>
           <p:cNvSpPr/>
           <p:nvPr/>
         </p:nvSpPr>
@@ -21732,7 +20935,7 @@
       </p:sp>
       <p:sp>
         <p:nvSpPr>
-          <p:cNvPr id="15" name="TextBox 14"/>
+          <p:cNvPr id="14" name="TextBox 13"/>
           <p:cNvSpPr txBox="1"/>
           <p:nvPr/>
         </p:nvSpPr>
@@ -21774,7 +20977,7 @@
       </p:sp>
       <p:sp>
         <p:nvSpPr>
-          <p:cNvPr id="16" name="TextBox 15"/>
+          <p:cNvPr id="15" name="TextBox 14"/>
           <p:cNvSpPr txBox="1"/>
           <p:nvPr/>
         </p:nvSpPr>
@@ -21816,7 +21019,7 @@
       </p:sp>
       <p:sp>
         <p:nvSpPr>
-          <p:cNvPr id="17" name="TextBox 16"/>
+          <p:cNvPr id="16" name="TextBox 15"/>
           <p:cNvSpPr txBox="1"/>
           <p:nvPr/>
         </p:nvSpPr>
@@ -21931,48 +21134,6 @@
         </p:nvSpPr>
         <p:spPr>
           <a:xfrm>
-            <a:off x="5897880" y="310896"/>
-            <a:ext cx="4800600" cy="256032"/>
-          </a:xfrm>
-          <a:prstGeom prst="rect">
-            <a:avLst/>
-          </a:prstGeom>
-          <a:noFill/>
-        </p:spPr>
-        <p:txBody>
-          <a:bodyPr wrap="none" lIns="9144" rIns="9144" tIns="9144" bIns="9144" anchor="t">
-            <a:spAutoFit/>
-          </a:bodyPr>
-          <a:lstStyle/>
-          <a:p>
-            <a:pPr algn="r">
-              <a:spcAft>
-                <a:spcPts val="0"/>
-              </a:spcAft>
-              <a:defRPr sz="680" b="1">
-                <a:solidFill>
-                  <a:srgbClr val="4F6B00"/>
-                </a:solidFill>
-                <a:latin typeface="Inter"/>
-              </a:defRPr>
-            </a:pPr>
-            <a:r>
-              <a:rPr>
-                <a:latin typeface="Inter"/>
-              </a:rPr>
-              <a:t>Illustrative, Gradient Maintained — demo data, not the client's holdings or managers</a:t>
-            </a:r>
-          </a:p>
-        </p:txBody>
-      </p:sp>
-      <p:sp>
-        <p:nvSpPr>
-          <p:cNvPr id="4" name="TextBox 3"/>
-          <p:cNvSpPr txBox="1"/>
-          <p:nvPr/>
-        </p:nvSpPr>
-        <p:spPr>
-          <a:xfrm>
             <a:off x="640080" y="566928"/>
             <a:ext cx="10058400" cy="530352"/>
           </a:xfrm>
@@ -22009,7 +21170,7 @@
       </p:sp>
       <p:sp>
         <p:nvSpPr>
-          <p:cNvPr id="5" name="Rectangle 4"/>
+          <p:cNvPr id="4" name="Rectangle 3"/>
           <p:cNvSpPr/>
           <p:nvPr/>
         </p:nvSpPr>
@@ -22058,7 +21219,7 @@
       </p:sp>
       <p:sp>
         <p:nvSpPr>
-          <p:cNvPr id="6" name="Rectangle 5"/>
+          <p:cNvPr id="5" name="Rectangle 4"/>
           <p:cNvSpPr/>
           <p:nvPr/>
         </p:nvSpPr>
@@ -22107,7 +21268,7 @@
       </p:sp>
       <p:sp>
         <p:nvSpPr>
-          <p:cNvPr id="7" name="TextBox 6"/>
+          <p:cNvPr id="6" name="TextBox 5"/>
           <p:cNvSpPr txBox="1"/>
           <p:nvPr/>
         </p:nvSpPr>
@@ -22149,7 +21310,7 @@
       </p:sp>
       <p:sp>
         <p:nvSpPr>
-          <p:cNvPr id="8" name="TextBox 7"/>
+          <p:cNvPr id="7" name="TextBox 6"/>
           <p:cNvSpPr txBox="1"/>
           <p:nvPr/>
         </p:nvSpPr>
@@ -22191,7 +21352,7 @@
       </p:sp>
       <p:graphicFrame>
         <p:nvGraphicFramePr>
-          <p:cNvPr id="9" name="Chart 8"/>
+          <p:cNvPr id="8" name="Chart 7"/>
           <p:cNvGraphicFramePr>
             <a:graphicFrameLocks noGrp="1"/>
           </p:cNvGraphicFramePr>
@@ -22209,7 +21370,7 @@
       </p:graphicFrame>
       <p:sp>
         <p:nvSpPr>
-          <p:cNvPr id="10" name="Rectangle 9"/>
+          <p:cNvPr id="9" name="Rectangle 8"/>
           <p:cNvSpPr/>
           <p:nvPr/>
         </p:nvSpPr>
@@ -22258,7 +21419,7 @@
       </p:sp>
       <p:sp>
         <p:nvSpPr>
-          <p:cNvPr id="11" name="TextBox 10"/>
+          <p:cNvPr id="10" name="TextBox 9"/>
           <p:cNvSpPr txBox="1"/>
           <p:nvPr/>
         </p:nvSpPr>
@@ -22300,7 +21461,7 @@
       </p:sp>
       <p:sp>
         <p:nvSpPr>
-          <p:cNvPr id="12" name="TextBox 11"/>
+          <p:cNvPr id="11" name="TextBox 10"/>
           <p:cNvSpPr txBox="1"/>
           <p:nvPr/>
         </p:nvSpPr>
@@ -22342,7 +21503,7 @@
       </p:sp>
       <p:sp>
         <p:nvSpPr>
-          <p:cNvPr id="13" name="TextBox 12"/>
+          <p:cNvPr id="12" name="TextBox 11"/>
           <p:cNvSpPr txBox="1"/>
           <p:nvPr/>
         </p:nvSpPr>
@@ -22457,48 +21618,6 @@
         </p:nvSpPr>
         <p:spPr>
           <a:xfrm>
-            <a:off x="5897880" y="310896"/>
-            <a:ext cx="4800600" cy="256032"/>
-          </a:xfrm>
-          <a:prstGeom prst="rect">
-            <a:avLst/>
-          </a:prstGeom>
-          <a:noFill/>
-        </p:spPr>
-        <p:txBody>
-          <a:bodyPr wrap="none" lIns="9144" rIns="9144" tIns="9144" bIns="9144" anchor="t">
-            <a:spAutoFit/>
-          </a:bodyPr>
-          <a:lstStyle/>
-          <a:p>
-            <a:pPr algn="r">
-              <a:spcAft>
-                <a:spcPts val="0"/>
-              </a:spcAft>
-              <a:defRPr sz="680" b="1">
-                <a:solidFill>
-                  <a:srgbClr val="4F6B00"/>
-                </a:solidFill>
-                <a:latin typeface="Inter"/>
-              </a:defRPr>
-            </a:pPr>
-            <a:r>
-              <a:rPr>
-                <a:latin typeface="Inter"/>
-              </a:rPr>
-              <a:t>Illustrative, Gradient Maintained — demo data, not the client's holdings or managers</a:t>
-            </a:r>
-          </a:p>
-        </p:txBody>
-      </p:sp>
-      <p:sp>
-        <p:nvSpPr>
-          <p:cNvPr id="4" name="TextBox 3"/>
-          <p:cNvSpPr txBox="1"/>
-          <p:nvPr/>
-        </p:nvSpPr>
-        <p:spPr>
-          <a:xfrm>
             <a:off x="640080" y="566928"/>
             <a:ext cx="10058400" cy="530352"/>
           </a:xfrm>
@@ -22535,7 +21654,7 @@
       </p:sp>
       <p:sp>
         <p:nvSpPr>
-          <p:cNvPr id="5" name="Rectangle 4"/>
+          <p:cNvPr id="4" name="Rectangle 3"/>
           <p:cNvSpPr/>
           <p:nvPr/>
         </p:nvSpPr>
@@ -22584,7 +21703,7 @@
       </p:sp>
       <p:sp>
         <p:nvSpPr>
-          <p:cNvPr id="6" name="Rectangle 5"/>
+          <p:cNvPr id="5" name="Rectangle 4"/>
           <p:cNvSpPr/>
           <p:nvPr/>
         </p:nvSpPr>
@@ -22633,7 +21752,7 @@
       </p:sp>
       <p:sp>
         <p:nvSpPr>
-          <p:cNvPr id="7" name="TextBox 6"/>
+          <p:cNvPr id="6" name="TextBox 5"/>
           <p:cNvSpPr txBox="1"/>
           <p:nvPr/>
         </p:nvSpPr>
@@ -22675,7 +21794,7 @@
       </p:sp>
       <p:sp>
         <p:nvSpPr>
-          <p:cNvPr id="8" name="TextBox 7"/>
+          <p:cNvPr id="7" name="TextBox 6"/>
           <p:cNvSpPr txBox="1"/>
           <p:nvPr/>
         </p:nvSpPr>
@@ -22717,7 +21836,7 @@
       </p:sp>
       <p:graphicFrame>
         <p:nvGraphicFramePr>
-          <p:cNvPr id="9" name="Table 8"/>
+          <p:cNvPr id="8" name="Table 7"/>
           <p:cNvGraphicFramePr>
             <a:graphicFrameLocks noGrp="1"/>
           </p:cNvGraphicFramePr>
@@ -23157,7 +22276,7 @@
       </p:graphicFrame>
       <p:sp>
         <p:nvSpPr>
-          <p:cNvPr id="10" name="Rectangle 9"/>
+          <p:cNvPr id="9" name="Rectangle 8"/>
           <p:cNvSpPr/>
           <p:nvPr/>
         </p:nvSpPr>
@@ -23206,7 +22325,7 @@
       </p:sp>
       <p:sp>
         <p:nvSpPr>
-          <p:cNvPr id="11" name="Rectangle 10"/>
+          <p:cNvPr id="10" name="Rectangle 9"/>
           <p:cNvSpPr/>
           <p:nvPr/>
         </p:nvSpPr>
@@ -23255,7 +22374,7 @@
       </p:sp>
       <p:sp>
         <p:nvSpPr>
-          <p:cNvPr id="12" name="TextBox 11"/>
+          <p:cNvPr id="11" name="TextBox 10"/>
           <p:cNvSpPr txBox="1"/>
           <p:nvPr/>
         </p:nvSpPr>
@@ -23297,7 +22416,7 @@
       </p:sp>
       <p:sp>
         <p:nvSpPr>
-          <p:cNvPr id="13" name="TextBox 12"/>
+          <p:cNvPr id="12" name="TextBox 11"/>
           <p:cNvSpPr txBox="1"/>
           <p:nvPr/>
         </p:nvSpPr>
@@ -23339,7 +22458,7 @@
       </p:sp>
       <p:sp>
         <p:nvSpPr>
-          <p:cNvPr id="14" name="Rectangle 13"/>
+          <p:cNvPr id="13" name="Rectangle 12"/>
           <p:cNvSpPr/>
           <p:nvPr/>
         </p:nvSpPr>
@@ -23388,7 +22507,7 @@
       </p:sp>
       <p:sp>
         <p:nvSpPr>
-          <p:cNvPr id="15" name="TextBox 14"/>
+          <p:cNvPr id="14" name="TextBox 13"/>
           <p:cNvSpPr txBox="1"/>
           <p:nvPr/>
         </p:nvSpPr>
@@ -23430,7 +22549,7 @@
       </p:sp>
       <p:sp>
         <p:nvSpPr>
-          <p:cNvPr id="16" name="TextBox 15"/>
+          <p:cNvPr id="15" name="TextBox 14"/>
           <p:cNvSpPr txBox="1"/>
           <p:nvPr/>
         </p:nvSpPr>
@@ -23472,7 +22591,7 @@
       </p:sp>
       <p:sp>
         <p:nvSpPr>
-          <p:cNvPr id="17" name="TextBox 16"/>
+          <p:cNvPr id="16" name="TextBox 15"/>
           <p:cNvSpPr txBox="1"/>
           <p:nvPr/>
         </p:nvSpPr>
@@ -23587,48 +22706,6 @@
         </p:nvSpPr>
         <p:spPr>
           <a:xfrm>
-            <a:off x="5897880" y="310896"/>
-            <a:ext cx="4800600" cy="256032"/>
-          </a:xfrm>
-          <a:prstGeom prst="rect">
-            <a:avLst/>
-          </a:prstGeom>
-          <a:noFill/>
-        </p:spPr>
-        <p:txBody>
-          <a:bodyPr wrap="none" lIns="9144" rIns="9144" tIns="9144" bIns="9144" anchor="t">
-            <a:spAutoFit/>
-          </a:bodyPr>
-          <a:lstStyle/>
-          <a:p>
-            <a:pPr algn="r">
-              <a:spcAft>
-                <a:spcPts val="0"/>
-              </a:spcAft>
-              <a:defRPr sz="680" b="1">
-                <a:solidFill>
-                  <a:srgbClr val="4F6B00"/>
-                </a:solidFill>
-                <a:latin typeface="Inter"/>
-              </a:defRPr>
-            </a:pPr>
-            <a:r>
-              <a:rPr>
-                <a:latin typeface="Inter"/>
-              </a:rPr>
-              <a:t>Illustrative, Gradient Maintained — demo data, not the client's holdings or managers</a:t>
-            </a:r>
-          </a:p>
-        </p:txBody>
-      </p:sp>
-      <p:sp>
-        <p:nvSpPr>
-          <p:cNvPr id="4" name="TextBox 3"/>
-          <p:cNvSpPr txBox="1"/>
-          <p:nvPr/>
-        </p:nvSpPr>
-        <p:spPr>
-          <a:xfrm>
             <a:off x="640080" y="566928"/>
             <a:ext cx="10058400" cy="530352"/>
           </a:xfrm>
@@ -23665,7 +22742,7 @@
       </p:sp>
       <p:sp>
         <p:nvSpPr>
-          <p:cNvPr id="5" name="Rectangle 4"/>
+          <p:cNvPr id="4" name="Rectangle 3"/>
           <p:cNvSpPr/>
           <p:nvPr/>
         </p:nvSpPr>
@@ -23714,7 +22791,7 @@
       </p:sp>
       <p:sp>
         <p:nvSpPr>
-          <p:cNvPr id="6" name="Rectangle 5"/>
+          <p:cNvPr id="5" name="Rectangle 4"/>
           <p:cNvSpPr/>
           <p:nvPr/>
         </p:nvSpPr>
@@ -23763,7 +22840,7 @@
       </p:sp>
       <p:sp>
         <p:nvSpPr>
-          <p:cNvPr id="7" name="TextBox 6"/>
+          <p:cNvPr id="6" name="TextBox 5"/>
           <p:cNvSpPr txBox="1"/>
           <p:nvPr/>
         </p:nvSpPr>
@@ -23805,7 +22882,7 @@
       </p:sp>
       <p:sp>
         <p:nvSpPr>
-          <p:cNvPr id="8" name="TextBox 7"/>
+          <p:cNvPr id="7" name="TextBox 6"/>
           <p:cNvSpPr txBox="1"/>
           <p:nvPr/>
         </p:nvSpPr>
@@ -23847,7 +22924,7 @@
       </p:sp>
       <p:graphicFrame>
         <p:nvGraphicFramePr>
-          <p:cNvPr id="9" name="Table 8"/>
+          <p:cNvPr id="8" name="Table 7"/>
           <p:cNvGraphicFramePr>
             <a:graphicFrameLocks noGrp="1"/>
           </p:cNvGraphicFramePr>
@@ -24533,7 +23610,7 @@
       </p:graphicFrame>
       <p:sp>
         <p:nvSpPr>
-          <p:cNvPr id="10" name="TextBox 9"/>
+          <p:cNvPr id="9" name="TextBox 8"/>
           <p:cNvSpPr txBox="1"/>
           <p:nvPr/>
         </p:nvSpPr>
@@ -24575,7 +23652,7 @@
       </p:sp>
       <p:graphicFrame>
         <p:nvGraphicFramePr>
-          <p:cNvPr id="11" name="Table 10"/>
+          <p:cNvPr id="10" name="Table 9"/>
           <p:cNvGraphicFramePr>
             <a:graphicFrameLocks noGrp="1"/>
           </p:cNvGraphicFramePr>
@@ -24933,7 +24010,7 @@
       </p:graphicFrame>
       <p:sp>
         <p:nvSpPr>
-          <p:cNvPr id="12" name="Rectangle 11"/>
+          <p:cNvPr id="11" name="Rectangle 10"/>
           <p:cNvSpPr/>
           <p:nvPr/>
         </p:nvSpPr>
@@ -24982,7 +24059,7 @@
       </p:sp>
       <p:sp>
         <p:nvSpPr>
-          <p:cNvPr id="13" name="TextBox 12"/>
+          <p:cNvPr id="12" name="TextBox 11"/>
           <p:cNvSpPr txBox="1"/>
           <p:nvPr/>
         </p:nvSpPr>
@@ -25024,7 +24101,7 @@
       </p:sp>
       <p:sp>
         <p:nvSpPr>
-          <p:cNvPr id="14" name="TextBox 13"/>
+          <p:cNvPr id="13" name="TextBox 12"/>
           <p:cNvSpPr txBox="1"/>
           <p:nvPr/>
         </p:nvSpPr>
@@ -25066,7 +24143,7 @@
       </p:sp>
       <p:sp>
         <p:nvSpPr>
-          <p:cNvPr id="15" name="TextBox 14"/>
+          <p:cNvPr id="14" name="TextBox 13"/>
           <p:cNvSpPr txBox="1"/>
           <p:nvPr/>
         </p:nvSpPr>
@@ -25181,48 +24258,6 @@
         </p:nvSpPr>
         <p:spPr>
           <a:xfrm>
-            <a:off x="5897880" y="310896"/>
-            <a:ext cx="4800600" cy="256032"/>
-          </a:xfrm>
-          <a:prstGeom prst="rect">
-            <a:avLst/>
-          </a:prstGeom>
-          <a:noFill/>
-        </p:spPr>
-        <p:txBody>
-          <a:bodyPr wrap="none" lIns="9144" rIns="9144" tIns="9144" bIns="9144" anchor="t">
-            <a:spAutoFit/>
-          </a:bodyPr>
-          <a:lstStyle/>
-          <a:p>
-            <a:pPr algn="r">
-              <a:spcAft>
-                <a:spcPts val="0"/>
-              </a:spcAft>
-              <a:defRPr sz="680" b="1">
-                <a:solidFill>
-                  <a:srgbClr val="4F6B00"/>
-                </a:solidFill>
-                <a:latin typeface="Inter"/>
-              </a:defRPr>
-            </a:pPr>
-            <a:r>
-              <a:rPr>
-                <a:latin typeface="Inter"/>
-              </a:rPr>
-              <a:t>Illustrative, Gradient Maintained — demo data, not the client's holdings or managers</a:t>
-            </a:r>
-          </a:p>
-        </p:txBody>
-      </p:sp>
-      <p:sp>
-        <p:nvSpPr>
-          <p:cNvPr id="4" name="TextBox 3"/>
-          <p:cNvSpPr txBox="1"/>
-          <p:nvPr/>
-        </p:nvSpPr>
-        <p:spPr>
-          <a:xfrm>
             <a:off x="640080" y="566928"/>
             <a:ext cx="10058400" cy="530352"/>
           </a:xfrm>
@@ -25259,7 +24294,7 @@
       </p:sp>
       <p:sp>
         <p:nvSpPr>
-          <p:cNvPr id="5" name="Rectangle 4"/>
+          <p:cNvPr id="4" name="Rectangle 3"/>
           <p:cNvSpPr/>
           <p:nvPr/>
         </p:nvSpPr>
@@ -25308,7 +24343,7 @@
       </p:sp>
       <p:sp>
         <p:nvSpPr>
-          <p:cNvPr id="6" name="Rectangle 5"/>
+          <p:cNvPr id="5" name="Rectangle 4"/>
           <p:cNvSpPr/>
           <p:nvPr/>
         </p:nvSpPr>
@@ -25357,7 +24392,7 @@
       </p:sp>
       <p:sp>
         <p:nvSpPr>
-          <p:cNvPr id="7" name="TextBox 6"/>
+          <p:cNvPr id="6" name="TextBox 5"/>
           <p:cNvSpPr txBox="1"/>
           <p:nvPr/>
         </p:nvSpPr>
@@ -25399,7 +24434,7 @@
       </p:sp>
       <p:sp>
         <p:nvSpPr>
-          <p:cNvPr id="8" name="TextBox 7"/>
+          <p:cNvPr id="7" name="TextBox 6"/>
           <p:cNvSpPr txBox="1"/>
           <p:nvPr/>
         </p:nvSpPr>
@@ -25441,7 +24476,7 @@
       </p:sp>
       <p:graphicFrame>
         <p:nvGraphicFramePr>
-          <p:cNvPr id="9" name="Table 8"/>
+          <p:cNvPr id="8" name="Table 7"/>
           <p:cNvGraphicFramePr>
             <a:graphicFrameLocks noGrp="1"/>
           </p:cNvGraphicFramePr>
@@ -26018,7 +25053,7 @@
       </p:graphicFrame>
       <p:sp>
         <p:nvSpPr>
-          <p:cNvPr id="10" name="TextBox 9"/>
+          <p:cNvPr id="9" name="TextBox 8"/>
           <p:cNvSpPr txBox="1"/>
           <p:nvPr/>
         </p:nvSpPr>
@@ -26060,7 +25095,7 @@
       </p:sp>
       <p:graphicFrame>
         <p:nvGraphicFramePr>
-          <p:cNvPr id="11" name="Table 10"/>
+          <p:cNvPr id="10" name="Table 9"/>
           <p:cNvGraphicFramePr>
             <a:graphicFrameLocks noGrp="1"/>
           </p:cNvGraphicFramePr>
@@ -26637,7 +25672,7 @@
       </p:graphicFrame>
       <p:sp>
         <p:nvSpPr>
-          <p:cNvPr id="12" name="Rectangle 11"/>
+          <p:cNvPr id="11" name="Rectangle 10"/>
           <p:cNvSpPr/>
           <p:nvPr/>
         </p:nvSpPr>
@@ -26686,7 +25721,7 @@
       </p:sp>
       <p:sp>
         <p:nvSpPr>
-          <p:cNvPr id="13" name="TextBox 12"/>
+          <p:cNvPr id="12" name="TextBox 11"/>
           <p:cNvSpPr txBox="1"/>
           <p:nvPr/>
         </p:nvSpPr>
@@ -26728,7 +25763,7 @@
       </p:sp>
       <p:sp>
         <p:nvSpPr>
-          <p:cNvPr id="14" name="TextBox 13"/>
+          <p:cNvPr id="13" name="TextBox 12"/>
           <p:cNvSpPr txBox="1"/>
           <p:nvPr/>
         </p:nvSpPr>
@@ -26770,7 +25805,7 @@
       </p:sp>
       <p:sp>
         <p:nvSpPr>
-          <p:cNvPr id="15" name="TextBox 14"/>
+          <p:cNvPr id="14" name="TextBox 13"/>
           <p:cNvSpPr txBox="1"/>
           <p:nvPr/>
         </p:nvSpPr>
@@ -26885,48 +25920,6 @@
         </p:nvSpPr>
         <p:spPr>
           <a:xfrm>
-            <a:off x="5897880" y="310896"/>
-            <a:ext cx="4800600" cy="256032"/>
-          </a:xfrm>
-          <a:prstGeom prst="rect">
-            <a:avLst/>
-          </a:prstGeom>
-          <a:noFill/>
-        </p:spPr>
-        <p:txBody>
-          <a:bodyPr wrap="none" lIns="9144" rIns="9144" tIns="9144" bIns="9144" anchor="t">
-            <a:spAutoFit/>
-          </a:bodyPr>
-          <a:lstStyle/>
-          <a:p>
-            <a:pPr algn="r">
-              <a:spcAft>
-                <a:spcPts val="0"/>
-              </a:spcAft>
-              <a:defRPr sz="680" b="1">
-                <a:solidFill>
-                  <a:srgbClr val="4F6B00"/>
-                </a:solidFill>
-                <a:latin typeface="Inter"/>
-              </a:defRPr>
-            </a:pPr>
-            <a:r>
-              <a:rPr>
-                <a:latin typeface="Inter"/>
-              </a:rPr>
-              <a:t>Illustrative, Gradient Maintained — demo data, not the client's holdings or managers</a:t>
-            </a:r>
-          </a:p>
-        </p:txBody>
-      </p:sp>
-      <p:sp>
-        <p:nvSpPr>
-          <p:cNvPr id="4" name="TextBox 3"/>
-          <p:cNvSpPr txBox="1"/>
-          <p:nvPr/>
-        </p:nvSpPr>
-        <p:spPr>
-          <a:xfrm>
             <a:off x="640080" y="566928"/>
             <a:ext cx="10058400" cy="530352"/>
           </a:xfrm>
@@ -26963,7 +25956,7 @@
       </p:sp>
       <p:sp>
         <p:nvSpPr>
-          <p:cNvPr id="5" name="Rectangle 4"/>
+          <p:cNvPr id="4" name="Rectangle 3"/>
           <p:cNvSpPr/>
           <p:nvPr/>
         </p:nvSpPr>
@@ -27012,7 +26005,7 @@
       </p:sp>
       <p:sp>
         <p:nvSpPr>
-          <p:cNvPr id="6" name="Rectangle 5"/>
+          <p:cNvPr id="5" name="Rectangle 4"/>
           <p:cNvSpPr/>
           <p:nvPr/>
         </p:nvSpPr>
@@ -27061,7 +26054,7 @@
       </p:sp>
       <p:sp>
         <p:nvSpPr>
-          <p:cNvPr id="7" name="TextBox 6"/>
+          <p:cNvPr id="6" name="TextBox 5"/>
           <p:cNvSpPr txBox="1"/>
           <p:nvPr/>
         </p:nvSpPr>
@@ -27103,7 +26096,7 @@
       </p:sp>
       <p:graphicFrame>
         <p:nvGraphicFramePr>
-          <p:cNvPr id="8" name="Table 7"/>
+          <p:cNvPr id="7" name="Table 6"/>
           <p:cNvGraphicFramePr>
             <a:graphicFrameLocks noGrp="1"/>
           </p:cNvGraphicFramePr>
@@ -27252,7 +26245,7 @@
                         <a:rPr>
                           <a:latin typeface="Inter"/>
                         </a:rPr>
-                        <a:t>● available</a:t>
+                        <a:t>● Available</a:t>
                       </a:r>
                     </a:p>
                   </a:txBody>
@@ -27335,7 +26328,7 @@
                         <a:rPr>
                           <a:latin typeface="Inter"/>
                         </a:rPr>
-                        <a:t>● available</a:t>
+                        <a:t>● Available</a:t>
                       </a:r>
                     </a:p>
                   </a:txBody>
@@ -27418,7 +26411,7 @@
                         <a:rPr>
                           <a:latin typeface="Inter"/>
                         </a:rPr>
-                        <a:t>● available</a:t>
+                        <a:t>● Available</a:t>
                       </a:r>
                     </a:p>
                   </a:txBody>
@@ -27501,7 +26494,7 @@
                         <a:rPr>
                           <a:latin typeface="Inter"/>
                         </a:rPr>
-                        <a:t>● degraded</a:t>
+                        <a:t>● Incomplete</a:t>
                       </a:r>
                     </a:p>
                   </a:txBody>
@@ -27584,7 +26577,7 @@
                         <a:rPr>
                           <a:latin typeface="Inter"/>
                         </a:rPr>
-                        <a:t>● available</a:t>
+                        <a:t>● Available</a:t>
                       </a:r>
                     </a:p>
                   </a:txBody>
@@ -27667,7 +26660,7 @@
                         <a:rPr>
                           <a:latin typeface="Inter"/>
                         </a:rPr>
-                        <a:t>● degraded</a:t>
+                        <a:t>● Incomplete</a:t>
                       </a:r>
                     </a:p>
                   </a:txBody>
@@ -27750,7 +26743,7 @@
                         <a:rPr>
                           <a:latin typeface="Inter"/>
                         </a:rPr>
-                        <a:t>● unavailable</a:t>
+                        <a:t>● Not available</a:t>
                       </a:r>
                     </a:p>
                   </a:txBody>
@@ -27833,7 +26826,7 @@
                         <a:rPr>
                           <a:latin typeface="Inter"/>
                         </a:rPr>
-                        <a:t>● not licensed</a:t>
+                        <a:t>● Not licensed</a:t>
                       </a:r>
                     </a:p>
                   </a:txBody>
@@ -27860,7 +26853,7 @@
                         <a:rPr>
                           <a:latin typeface="Inter"/>
                         </a:rPr>
-                        <a:t>Not licensed ? Peer allocation context was skipped because peerIntelligence is not available for this organization. This construction report uses portfolio evidence only. [S1]</a:t>
+                        <a:t>Peer allocation context was skipped because peer allocation intelligence is not licensed for this organization. This construction report uses portfolio evidence only. [S1]</a:t>
                       </a:r>
                     </a:p>
                   </a:txBody>
@@ -27877,7 +26870,7 @@
       </p:graphicFrame>
       <p:sp>
         <p:nvSpPr>
-          <p:cNvPr id="9" name="Rectangle 8"/>
+          <p:cNvPr id="8" name="Rectangle 7"/>
           <p:cNvSpPr/>
           <p:nvPr/>
         </p:nvSpPr>
@@ -27926,7 +26919,7 @@
       </p:sp>
       <p:sp>
         <p:nvSpPr>
-          <p:cNvPr id="10" name="TextBox 9"/>
+          <p:cNvPr id="9" name="TextBox 8"/>
           <p:cNvSpPr txBox="1"/>
           <p:nvPr/>
         </p:nvSpPr>
@@ -27968,7 +26961,7 @@
       </p:sp>
       <p:sp>
         <p:nvSpPr>
-          <p:cNvPr id="11" name="TextBox 10"/>
+          <p:cNvPr id="10" name="TextBox 9"/>
           <p:cNvSpPr txBox="1"/>
           <p:nvPr/>
         </p:nvSpPr>
@@ -28010,7 +27003,7 @@
       </p:sp>
       <p:sp>
         <p:nvSpPr>
-          <p:cNvPr id="12" name="TextBox 11"/>
+          <p:cNvPr id="11" name="TextBox 10"/>
           <p:cNvSpPr txBox="1"/>
           <p:nvPr/>
         </p:nvSpPr>
@@ -28125,48 +27118,6 @@
         </p:nvSpPr>
         <p:spPr>
           <a:xfrm>
-            <a:off x="5897880" y="310896"/>
-            <a:ext cx="4800600" cy="256032"/>
-          </a:xfrm>
-          <a:prstGeom prst="rect">
-            <a:avLst/>
-          </a:prstGeom>
-          <a:noFill/>
-        </p:spPr>
-        <p:txBody>
-          <a:bodyPr wrap="none" lIns="9144" rIns="9144" tIns="9144" bIns="9144" anchor="t">
-            <a:spAutoFit/>
-          </a:bodyPr>
-          <a:lstStyle/>
-          <a:p>
-            <a:pPr algn="r">
-              <a:spcAft>
-                <a:spcPts val="0"/>
-              </a:spcAft>
-              <a:defRPr sz="680" b="1">
-                <a:solidFill>
-                  <a:srgbClr val="4F6B00"/>
-                </a:solidFill>
-                <a:latin typeface="Inter"/>
-              </a:defRPr>
-            </a:pPr>
-            <a:r>
-              <a:rPr>
-                <a:latin typeface="Inter"/>
-              </a:rPr>
-              <a:t>Illustrative, Gradient Maintained — demo data, not the client's holdings or managers</a:t>
-            </a:r>
-          </a:p>
-        </p:txBody>
-      </p:sp>
-      <p:sp>
-        <p:nvSpPr>
-          <p:cNvPr id="4" name="TextBox 3"/>
-          <p:cNvSpPr txBox="1"/>
-          <p:nvPr/>
-        </p:nvSpPr>
-        <p:spPr>
-          <a:xfrm>
             <a:off x="640080" y="566928"/>
             <a:ext cx="10058400" cy="530352"/>
           </a:xfrm>
@@ -28203,7 +27154,7 @@
       </p:sp>
       <p:sp>
         <p:nvSpPr>
-          <p:cNvPr id="5" name="Rectangle 4"/>
+          <p:cNvPr id="4" name="Rectangle 3"/>
           <p:cNvSpPr/>
           <p:nvPr/>
         </p:nvSpPr>
@@ -28252,7 +27203,7 @@
       </p:sp>
       <p:sp>
         <p:nvSpPr>
-          <p:cNvPr id="6" name="Rectangle 5"/>
+          <p:cNvPr id="5" name="Rectangle 4"/>
           <p:cNvSpPr/>
           <p:nvPr/>
         </p:nvSpPr>
@@ -28301,7 +27252,7 @@
       </p:sp>
       <p:sp>
         <p:nvSpPr>
-          <p:cNvPr id="7" name="TextBox 6"/>
+          <p:cNvPr id="6" name="TextBox 5"/>
           <p:cNvSpPr txBox="1"/>
           <p:nvPr/>
         </p:nvSpPr>
@@ -28343,14 +27294,14 @@
       </p:sp>
       <p:sp>
         <p:nvSpPr>
-          <p:cNvPr id="8" name="Rectangle 7"/>
+          <p:cNvPr id="7" name="Rectangle 6"/>
           <p:cNvSpPr/>
           <p:nvPr/>
         </p:nvSpPr>
         <p:spPr>
           <a:xfrm>
             <a:off x="640080" y="1325880"/>
-            <a:ext cx="10908792" cy="939368"/>
+            <a:ext cx="10908792" cy="977592"/>
           </a:xfrm>
           <a:prstGeom prst="rect">
             <a:avLst/>
@@ -28392,14 +27343,14 @@
       </p:sp>
       <p:sp>
         <p:nvSpPr>
-          <p:cNvPr id="9" name="Rectangle 8"/>
+          <p:cNvPr id="8" name="Rectangle 7"/>
           <p:cNvSpPr/>
           <p:nvPr/>
         </p:nvSpPr>
         <p:spPr>
           <a:xfrm>
             <a:off x="640080" y="1325880"/>
-            <a:ext cx="54864" cy="939368"/>
+            <a:ext cx="54864" cy="977592"/>
           </a:xfrm>
           <a:prstGeom prst="rect">
             <a:avLst/>
@@ -28441,7 +27392,7 @@
       </p:sp>
       <p:sp>
         <p:nvSpPr>
-          <p:cNvPr id="10" name="TextBox 9"/>
+          <p:cNvPr id="9" name="TextBox 8"/>
           <p:cNvSpPr txBox="1"/>
           <p:nvPr/>
         </p:nvSpPr>
@@ -28483,14 +27434,14 @@
       </p:sp>
       <p:sp>
         <p:nvSpPr>
-          <p:cNvPr id="11" name="TextBox 10"/>
+          <p:cNvPr id="10" name="TextBox 9"/>
           <p:cNvSpPr txBox="1"/>
           <p:nvPr/>
         </p:nvSpPr>
         <p:spPr>
           <a:xfrm>
             <a:off x="804671" y="1719072"/>
-            <a:ext cx="10616184" cy="454736"/>
+            <a:ext cx="10616184" cy="492960"/>
           </a:xfrm>
           <a:prstGeom prst="rect">
             <a:avLst/>
@@ -28525,13 +27476,13 @@
       </p:sp>
       <p:sp>
         <p:nvSpPr>
-          <p:cNvPr id="12" name="TextBox 11"/>
+          <p:cNvPr id="11" name="TextBox 10"/>
           <p:cNvSpPr txBox="1"/>
           <p:nvPr/>
         </p:nvSpPr>
         <p:spPr>
           <a:xfrm>
-            <a:off x="640080" y="2374976"/>
+            <a:off x="640080" y="2413200"/>
             <a:ext cx="10908792" cy="201168"/>
           </a:xfrm>
           <a:prstGeom prst="rect">
@@ -28567,15 +27518,15 @@
       </p:sp>
       <p:graphicFrame>
         <p:nvGraphicFramePr>
-          <p:cNvPr id="13" name="Table 12"/>
+          <p:cNvPr id="12" name="Table 11"/>
           <p:cNvGraphicFramePr>
             <a:graphicFrameLocks noGrp="1"/>
           </p:cNvGraphicFramePr>
           <p:nvPr/>
         </p:nvGraphicFramePr>
         <p:xfrm>
-          <a:off x="640080" y="2649296"/>
-          <a:ext cx="10908792" cy="1211921"/>
+          <a:off x="640080" y="2687520"/>
+          <a:ext cx="10908792" cy="1272398"/>
         </p:xfrm>
         <a:graphic>
           <a:graphicData uri="http://schemas.openxmlformats.org/drawingml/2006/table">
@@ -28589,7 +27540,7 @@
                 <a:gridCol w="2965704"/>
                 <a:gridCol w="2965704"/>
               </a:tblGrid>
-              <a:tr h="302980">
+              <a:tr h="318099">
                 <a:tc>
                   <a:txBody>
                     <a:bodyPr/>
@@ -28699,7 +27650,7 @@
                   </a:tcPr>
                 </a:tc>
               </a:tr>
-              <a:tr h="302980">
+              <a:tr h="318099">
                 <a:tc>
                   <a:txBody>
                     <a:bodyPr/>
@@ -28809,7 +27760,7 @@
                   </a:tcPr>
                 </a:tc>
               </a:tr>
-              <a:tr h="302980">
+              <a:tr h="318099">
                 <a:tc>
                   <a:txBody>
                     <a:bodyPr/>
@@ -28919,7 +27870,7 @@
                   </a:tcPr>
                 </a:tc>
               </a:tr>
-              <a:tr h="302981">
+              <a:tr h="318101">
                 <a:tc>
                   <a:txBody>
                     <a:bodyPr/>
@@ -29035,14 +27986,14 @@
       </p:graphicFrame>
       <p:sp>
         <p:nvSpPr>
-          <p:cNvPr id="14" name="Rectangle 13"/>
+          <p:cNvPr id="13" name="Rectangle 12"/>
           <p:cNvSpPr/>
           <p:nvPr/>
         </p:nvSpPr>
         <p:spPr>
           <a:xfrm>
-            <a:off x="640080" y="3970946"/>
-            <a:ext cx="10908792" cy="757320"/>
+            <a:off x="640080" y="4069646"/>
+            <a:ext cx="10908792" cy="788136"/>
           </a:xfrm>
           <a:prstGeom prst="rect">
             <a:avLst/>
@@ -29084,14 +28035,14 @@
       </p:sp>
       <p:sp>
         <p:nvSpPr>
-          <p:cNvPr id="15" name="Rectangle 14"/>
+          <p:cNvPr id="14" name="Rectangle 13"/>
           <p:cNvSpPr/>
           <p:nvPr/>
         </p:nvSpPr>
         <p:spPr>
           <a:xfrm>
-            <a:off x="640080" y="3970946"/>
-            <a:ext cx="54864" cy="757320"/>
+            <a:off x="640080" y="4069646"/>
+            <a:ext cx="54864" cy="788136"/>
           </a:xfrm>
           <a:prstGeom prst="rect">
             <a:avLst/>
@@ -29133,13 +28084,13 @@
       </p:sp>
       <p:sp>
         <p:nvSpPr>
-          <p:cNvPr id="16" name="TextBox 15"/>
+          <p:cNvPr id="15" name="TextBox 14"/>
           <p:cNvSpPr txBox="1"/>
           <p:nvPr/>
         </p:nvSpPr>
         <p:spPr>
           <a:xfrm>
-            <a:off x="804671" y="4080674"/>
+            <a:off x="804671" y="4179374"/>
             <a:ext cx="10616184" cy="228600"/>
           </a:xfrm>
           <a:prstGeom prst="rect">
@@ -29175,14 +28126,14 @@
       </p:sp>
       <p:sp>
         <p:nvSpPr>
-          <p:cNvPr id="17" name="TextBox 16"/>
+          <p:cNvPr id="16" name="TextBox 15"/>
           <p:cNvSpPr txBox="1"/>
           <p:nvPr/>
         </p:nvSpPr>
         <p:spPr>
           <a:xfrm>
-            <a:off x="804671" y="4364138"/>
-            <a:ext cx="10616184" cy="272688"/>
+            <a:off x="804671" y="4462838"/>
+            <a:ext cx="10616184" cy="303504"/>
           </a:xfrm>
           <a:prstGeom prst="rect">
             <a:avLst/>
@@ -29217,14 +28168,14 @@
       </p:sp>
       <p:sp>
         <p:nvSpPr>
-          <p:cNvPr id="18" name="Rectangle 17"/>
+          <p:cNvPr id="17" name="Rectangle 16"/>
           <p:cNvSpPr/>
           <p:nvPr/>
         </p:nvSpPr>
         <p:spPr>
           <a:xfrm>
-            <a:off x="640080" y="4837994"/>
-            <a:ext cx="10908792" cy="1379925"/>
+            <a:off x="640080" y="4967511"/>
+            <a:ext cx="10908792" cy="1250408"/>
           </a:xfrm>
           <a:prstGeom prst="rect">
             <a:avLst/>
@@ -29266,14 +28217,14 @@
       </p:sp>
       <p:sp>
         <p:nvSpPr>
-          <p:cNvPr id="19" name="Rectangle 18"/>
+          <p:cNvPr id="18" name="Rectangle 17"/>
           <p:cNvSpPr/>
           <p:nvPr/>
         </p:nvSpPr>
         <p:spPr>
           <a:xfrm>
-            <a:off x="640080" y="4837994"/>
-            <a:ext cx="54864" cy="1379925"/>
+            <a:off x="640080" y="4967511"/>
+            <a:ext cx="54864" cy="1250408"/>
           </a:xfrm>
           <a:prstGeom prst="rect">
             <a:avLst/>
@@ -29315,13 +28266,13 @@
       </p:sp>
       <p:sp>
         <p:nvSpPr>
-          <p:cNvPr id="20" name="TextBox 19"/>
+          <p:cNvPr id="19" name="TextBox 18"/>
           <p:cNvSpPr txBox="1"/>
           <p:nvPr/>
         </p:nvSpPr>
         <p:spPr>
           <a:xfrm>
-            <a:off x="804671" y="4947722"/>
+            <a:off x="804671" y="5077239"/>
             <a:ext cx="10616184" cy="228600"/>
           </a:xfrm>
           <a:prstGeom prst="rect">
@@ -29350,21 +28301,21 @@
               <a:rPr>
                 <a:latin typeface="Inter"/>
               </a:rPr>
-              <a:t>Key judgment — headline signal</a:t>
+              <a:t>Key judgment — Redemption terms</a:t>
             </a:r>
           </a:p>
         </p:txBody>
       </p:sp>
       <p:sp>
         <p:nvSpPr>
-          <p:cNvPr id="21" name="TextBox 20"/>
+          <p:cNvPr id="20" name="TextBox 19"/>
           <p:cNvSpPr txBox="1"/>
           <p:nvPr/>
         </p:nvSpPr>
         <p:spPr>
           <a:xfrm>
-            <a:off x="804671" y="5231186"/>
-            <a:ext cx="10616184" cy="895293"/>
+            <a:off x="804671" y="5360703"/>
+            <a:ext cx="10616184" cy="765776"/>
           </a:xfrm>
           <a:prstGeom prst="rect">
             <a:avLst/>
@@ -29392,14 +28343,14 @@
               <a:rPr>
                 <a:latin typeface="Inter"/>
               </a:rPr>
-              <a:t>Observation: The sample report carries a liquidity-terms signal above the clear monitoring threshold [S1]. Why it matters: This signal focuses oversight on the report's most decision-relevant condition. Uncertainty: Evidence coverage may exclude newer or more detailed observations. What would change the view: A governed refresh showing a different signal or breached threshold.</a:t>
+              <a:t>Observation: Notice periods, gates and side-pocket terms are unconfirmed for the affected funds [S1]. Why it matters: Funding before confirmation could lock capital beyond policy limits. Uncertainty: Terms come from manager documents still in review. What would change the view: Confirmed terms inside the policy liquidity window.</a:t>
             </a:r>
           </a:p>
         </p:txBody>
       </p:sp>
       <p:sp>
         <p:nvSpPr>
-          <p:cNvPr id="22" name="Rectangle 21"/>
+          <p:cNvPr id="21" name="Rectangle 20"/>
           <p:cNvSpPr/>
           <p:nvPr/>
         </p:nvSpPr>
@@ -29448,7 +28399,7 @@
       </p:sp>
       <p:sp>
         <p:nvSpPr>
-          <p:cNvPr id="23" name="TextBox 22"/>
+          <p:cNvPr id="22" name="TextBox 21"/>
           <p:cNvSpPr txBox="1"/>
           <p:nvPr/>
         </p:nvSpPr>
@@ -29490,7 +28441,7 @@
       </p:sp>
       <p:sp>
         <p:nvSpPr>
-          <p:cNvPr id="24" name="TextBox 23"/>
+          <p:cNvPr id="23" name="TextBox 22"/>
           <p:cNvSpPr txBox="1"/>
           <p:nvPr/>
         </p:nvSpPr>
@@ -29532,7 +28483,7 @@
       </p:sp>
       <p:sp>
         <p:nvSpPr>
-          <p:cNvPr id="25" name="TextBox 24"/>
+          <p:cNvPr id="24" name="TextBox 23"/>
           <p:cNvSpPr txBox="1"/>
           <p:nvPr/>
         </p:nvSpPr>
@@ -29647,48 +28598,6 @@
         </p:nvSpPr>
         <p:spPr>
           <a:xfrm>
-            <a:off x="5897880" y="310896"/>
-            <a:ext cx="4800600" cy="256032"/>
-          </a:xfrm>
-          <a:prstGeom prst="rect">
-            <a:avLst/>
-          </a:prstGeom>
-          <a:noFill/>
-        </p:spPr>
-        <p:txBody>
-          <a:bodyPr wrap="none" lIns="9144" rIns="9144" tIns="9144" bIns="9144" anchor="t">
-            <a:spAutoFit/>
-          </a:bodyPr>
-          <a:lstStyle/>
-          <a:p>
-            <a:pPr algn="r">
-              <a:spcAft>
-                <a:spcPts val="0"/>
-              </a:spcAft>
-              <a:defRPr sz="680" b="1">
-                <a:solidFill>
-                  <a:srgbClr val="4F6B00"/>
-                </a:solidFill>
-                <a:latin typeface="Inter"/>
-              </a:defRPr>
-            </a:pPr>
-            <a:r>
-              <a:rPr>
-                <a:latin typeface="Inter"/>
-              </a:rPr>
-              <a:t>Illustrative, Gradient Maintained — demo data, not the client's holdings or managers</a:t>
-            </a:r>
-          </a:p>
-        </p:txBody>
-      </p:sp>
-      <p:sp>
-        <p:nvSpPr>
-          <p:cNvPr id="4" name="TextBox 3"/>
-          <p:cNvSpPr txBox="1"/>
-          <p:nvPr/>
-        </p:nvSpPr>
-        <p:spPr>
-          <a:xfrm>
             <a:off x="640080" y="566928"/>
             <a:ext cx="10058400" cy="530352"/>
           </a:xfrm>
@@ -29725,7 +28634,7 @@
       </p:sp>
       <p:sp>
         <p:nvSpPr>
-          <p:cNvPr id="5" name="Rectangle 4"/>
+          <p:cNvPr id="4" name="Rectangle 3"/>
           <p:cNvSpPr/>
           <p:nvPr/>
         </p:nvSpPr>
@@ -29774,7 +28683,7 @@
       </p:sp>
       <p:sp>
         <p:nvSpPr>
-          <p:cNvPr id="6" name="Rectangle 5"/>
+          <p:cNvPr id="5" name="Rectangle 4"/>
           <p:cNvSpPr/>
           <p:nvPr/>
         </p:nvSpPr>
@@ -29823,7 +28732,7 @@
       </p:sp>
       <p:sp>
         <p:nvSpPr>
-          <p:cNvPr id="7" name="TextBox 6"/>
+          <p:cNvPr id="6" name="TextBox 5"/>
           <p:cNvSpPr txBox="1"/>
           <p:nvPr/>
         </p:nvSpPr>
@@ -29865,7 +28774,7 @@
       </p:sp>
       <p:graphicFrame>
         <p:nvGraphicFramePr>
-          <p:cNvPr id="8" name="Table 7"/>
+          <p:cNvPr id="7" name="Table 6"/>
           <p:cNvGraphicFramePr>
             <a:graphicFrameLocks noGrp="1"/>
           </p:cNvGraphicFramePr>
@@ -29883,14 +28792,10 @@
               </a:tblPr>
               <a:tblGrid>
                 <a:gridCol w="2011680"/>
-                <a:gridCol w="1112139"/>
-                <a:gridCol w="1112139"/>
-                <a:gridCol w="1112139"/>
-                <a:gridCol w="1112139"/>
-                <a:gridCol w="1112139"/>
-                <a:gridCol w="1112139"/>
-                <a:gridCol w="1112139"/>
-                <a:gridCol w="1112139"/>
+                <a:gridCol w="2224278"/>
+                <a:gridCol w="2224278"/>
+                <a:gridCol w="2224278"/>
+                <a:gridCol w="2224278"/>
               </a:tblGrid>
               <a:tr h="521208">
                 <a:tc>
@@ -29964,7 +28869,7 @@
                         <a:rPr>
                           <a:latin typeface="Inter"/>
                         </a:rPr>
-                        <a:t>Basis</a:t>
+                        <a:t>Source</a:t>
                       </a:r>
                     </a:p>
                   </a:txBody>
@@ -29991,7 +28896,7 @@
                         <a:rPr>
                           <a:latin typeface="Inter"/>
                         </a:rPr>
-                        <a:t>Tool / view</a:t>
+                        <a:t>As of</a:t>
                       </a:r>
                     </a:p>
                   </a:txBody>
@@ -30018,115 +28923,7 @@
                         <a:rPr>
                           <a:latin typeface="Inter"/>
                         </a:rPr>
-                        <a:t>Key parameters</a:t>
-                      </a:r>
-                    </a:p>
-                  </a:txBody>
-                  <a:tcPr marL="54864" marR="54864" marT="27432" marB="27432" anchor="ctr">
-                    <a:solidFill>
-                      <a:srgbClr val="0D1117"/>
-                    </a:solidFill>
-                  </a:tcPr>
-                </a:tc>
-                <a:tc>
-                  <a:txBody>
-                    <a:bodyPr/>
-                    <a:lstStyle/>
-                    <a:p>
-                      <a:pPr>
-                        <a:defRPr sz="750" b="1">
-                          <a:solidFill>
-                            <a:srgbClr val="FFFFFF"/>
-                          </a:solidFill>
-                          <a:latin typeface="Inter"/>
-                        </a:defRPr>
-                      </a:pPr>
-                      <a:r>
-                        <a:rPr>
-                          <a:latin typeface="Inter"/>
-                        </a:rPr>
-                        <a:t>As of</a:t>
-                      </a:r>
-                    </a:p>
-                  </a:txBody>
-                  <a:tcPr marL="54864" marR="54864" marT="27432" marB="27432" anchor="ctr">
-                    <a:solidFill>
-                      <a:srgbClr val="0D1117"/>
-                    </a:solidFill>
-                  </a:tcPr>
-                </a:tc>
-                <a:tc>
-                  <a:txBody>
-                    <a:bodyPr/>
-                    <a:lstStyle/>
-                    <a:p>
-                      <a:pPr>
-                        <a:defRPr sz="750" b="1">
-                          <a:solidFill>
-                            <a:srgbClr val="FFFFFF"/>
-                          </a:solidFill>
-                          <a:latin typeface="Inter"/>
-                        </a:defRPr>
-                      </a:pPr>
-                      <a:r>
-                        <a:rPr>
-                          <a:latin typeface="Inter"/>
-                        </a:rPr>
-                        <a:t>Data scope</a:t>
-                      </a:r>
-                    </a:p>
-                  </a:txBody>
-                  <a:tcPr marL="54864" marR="54864" marT="27432" marB="27432" anchor="ctr">
-                    <a:solidFill>
-                      <a:srgbClr val="0D1117"/>
-                    </a:solidFill>
-                  </a:tcPr>
-                </a:tc>
-                <a:tc>
-                  <a:txBody>
-                    <a:bodyPr/>
-                    <a:lstStyle/>
-                    <a:p>
-                      <a:pPr>
-                        <a:defRPr sz="750" b="1">
-                          <a:solidFill>
-                            <a:srgbClr val="FFFFFF"/>
-                          </a:solidFill>
-                          <a:latin typeface="Inter"/>
-                        </a:defRPr>
-                      </a:pPr>
-                      <a:r>
-                        <a:rPr>
-                          <a:latin typeface="Inter"/>
-                        </a:rPr>
-                        <a:t>Validation</a:t>
-                      </a:r>
-                    </a:p>
-                  </a:txBody>
-                  <a:tcPr marL="54864" marR="54864" marT="27432" marB="27432" anchor="ctr">
-                    <a:solidFill>
-                      <a:srgbClr val="0D1117"/>
-                    </a:solidFill>
-                  </a:tcPr>
-                </a:tc>
-                <a:tc>
-                  <a:txBody>
-                    <a:bodyPr/>
-                    <a:lstStyle/>
-                    <a:p>
-                      <a:pPr>
-                        <a:defRPr sz="750" b="1">
-                          <a:solidFill>
-                            <a:srgbClr val="FFFFFF"/>
-                          </a:solidFill>
-                          <a:latin typeface="Inter"/>
-                        </a:defRPr>
-                      </a:pPr>
-                      <a:r>
-                        <a:rPr>
-                          <a:latin typeface="Inter"/>
-                        </a:rPr>
-                        <a:t>Digest</a:t>
+                        <a:t>Check</a:t>
                       </a:r>
                     </a:p>
                   </a:txBody>
@@ -30144,7 +28941,7 @@
                     <a:lstStyle/>
                     <a:p>
                       <a:pPr>
-                        <a:defRPr sz="650" b="1">
+                        <a:defRPr sz="720" b="1">
                           <a:solidFill>
                             <a:srgbClr val="0D1117"/>
                           </a:solidFill>
@@ -30171,7 +28968,7 @@
                     <a:lstStyle/>
                     <a:p>
                       <a:pPr>
-                        <a:defRPr sz="650" b="0">
+                        <a:defRPr sz="720" b="0">
                           <a:solidFill>
                             <a:srgbClr val="0D1117"/>
                           </a:solidFill>
@@ -30198,7 +28995,7 @@
                     <a:lstStyle/>
                     <a:p>
                       <a:pPr>
-                        <a:defRPr sz="650" b="0">
+                        <a:defRPr sz="720" b="0">
                           <a:solidFill>
                             <a:srgbClr val="0D1117"/>
                           </a:solidFill>
@@ -30209,7 +29006,7 @@
                         <a:rPr>
                           <a:latin typeface="Inter"/>
                         </a:rPr>
-                        <a:t>gradient_tool</a:t>
+                        <a:t>list_organizations; get_gradient_capabilities</a:t>
                       </a:r>
                     </a:p>
                   </a:txBody>
@@ -30225,7 +29022,7 @@
                     <a:lstStyle/>
                     <a:p>
                       <a:pPr>
-                        <a:defRPr sz="650" b="0">
+                        <a:defRPr sz="720" b="0">
                           <a:solidFill>
                             <a:srgbClr val="0D1117"/>
                           </a:solidFill>
@@ -30236,7 +29033,7 @@
                         <a:rPr>
                           <a:latin typeface="Inter"/>
                         </a:rPr>
-                        <a:t>list_organizations; get_gradient_capabilities</a:t>
+                        <a:t>2026-06-30</a:t>
                       </a:r>
                     </a:p>
                   </a:txBody>
@@ -30252,132 +29049,24 @@
                     <a:lstStyle/>
                     <a:p>
                       <a:pPr>
-                        <a:defRPr sz="650" b="0">
-                          <a:solidFill>
-                            <a:srgbClr val="0D1117"/>
-                          </a:solidFill>
-                          <a:latin typeface="Inter"/>
-                        </a:defRPr>
-                      </a:pPr>
-                      <a:r>
-                        <a:rPr>
-                          <a:latin typeface="Inter"/>
-                        </a:rPr>
-                        <a:t>organization=test</a:t>
-                      </a:r>
-                    </a:p>
-                  </a:txBody>
-                  <a:tcPr marL="54864" marR="54864" marT="27432" marB="27432" anchor="ctr">
-                    <a:solidFill>
-                      <a:srgbClr val="FFFFFF"/>
-                    </a:solidFill>
-                  </a:tcPr>
-                </a:tc>
-                <a:tc>
-                  <a:txBody>
-                    <a:bodyPr/>
-                    <a:lstStyle/>
-                    <a:p>
-                      <a:pPr>
-                        <a:defRPr sz="650" b="0">
-                          <a:solidFill>
-                            <a:srgbClr val="0D1117"/>
-                          </a:solidFill>
-                          <a:latin typeface="Inter"/>
-                        </a:defRPr>
-                      </a:pPr>
-                      <a:r>
-                        <a:rPr>
-                          <a:latin typeface="Inter"/>
-                        </a:rPr>
-                        <a:t>2026-06-30</a:t>
-                      </a:r>
-                    </a:p>
-                  </a:txBody>
-                  <a:tcPr marL="54864" marR="54864" marT="27432" marB="27432" anchor="ctr">
-                    <a:solidFill>
-                      <a:srgbClr val="FFFFFF"/>
-                    </a:solidFill>
-                  </a:tcPr>
-                </a:tc>
-                <a:tc>
-                  <a:txBody>
-                    <a:bodyPr/>
-                    <a:lstStyle/>
-                    <a:p>
-                      <a:pPr>
-                        <a:defRPr sz="650" b="0">
-                          <a:solidFill>
-                            <a:srgbClr val="0D1117"/>
-                          </a:solidFill>
-                          <a:latin typeface="Inter"/>
-                        </a:defRPr>
-                      </a:pPr>
-                      <a:r>
-                        <a:rPr>
-                          <a:latin typeface="Inter"/>
-                        </a:rPr>
-                        <a:t>Illustrative sample data</a:t>
-                      </a:r>
-                    </a:p>
-                  </a:txBody>
-                  <a:tcPr marL="54864" marR="54864" marT="27432" marB="27432" anchor="ctr">
-                    <a:solidFill>
-                      <a:srgbClr val="FFFFFF"/>
-                    </a:solidFill>
-                  </a:tcPr>
-                </a:tc>
-                <a:tc>
-                  <a:txBody>
-                    <a:bodyPr/>
-                    <a:lstStyle/>
-                    <a:p>
-                      <a:pPr>
-                        <a:defRPr sz="650" b="0">
-                          <a:solidFill>
-                            <a:srgbClr val="0D1117"/>
-                          </a:solidFill>
-                          <a:latin typeface="Inter"/>
-                        </a:defRPr>
-                      </a:pPr>
-                      <a:r>
-                        <a:rPr>
-                          <a:latin typeface="Inter"/>
-                        </a:rPr>
-                        <a:t>passed</a:t>
-                      </a:r>
-                    </a:p>
-                  </a:txBody>
-                  <a:tcPr marL="54864" marR="54864" marT="27432" marB="27432" anchor="ctr">
-                    <a:solidFill>
-                      <a:srgbClr val="FFFFFF"/>
-                    </a:solidFill>
-                  </a:tcPr>
-                </a:tc>
-                <a:tc>
-                  <a:txBody>
-                    <a:bodyPr/>
-                    <a:lstStyle/>
-                    <a:p>
-                      <a:pPr>
-                        <a:defRPr sz="650" b="0">
-                          <a:solidFill>
-                            <a:srgbClr val="0D1117"/>
-                          </a:solidFill>
-                          <a:latin typeface="Inter"/>
-                        </a:defRPr>
-                      </a:pPr>
-                      <a:r>
-                        <a:rPr>
-                          <a:latin typeface="Inter"/>
-                        </a:rPr>
-                        <a:t>sha256:aaaaaaaaaaaaaaaaaaaaaaaaaaaaaaaaaaaaaaaaaaaaaaaaaaaaaaaaaaaaaaaa</a:t>
-                      </a:r>
-                    </a:p>
-                  </a:txBody>
-                  <a:tcPr marL="54864" marR="54864" marT="27432" marB="27432" anchor="ctr">
-                    <a:solidFill>
-                      <a:srgbClr val="FFFFFF"/>
+                        <a:defRPr sz="720" b="1">
+                          <a:solidFill>
+                            <a:srgbClr val="C6F432"/>
+                          </a:solidFill>
+                          <a:latin typeface="Inter"/>
+                        </a:defRPr>
+                      </a:pPr>
+                      <a:r>
+                        <a:rPr>
+                          <a:latin typeface="Inter"/>
+                        </a:rPr>
+                        <a:t>● Passed</a:t>
+                      </a:r>
+                    </a:p>
+                  </a:txBody>
+                  <a:tcPr marL="54864" marR="54864" marT="27432" marB="27432" anchor="ctr">
+                    <a:solidFill>
+                      <a:srgbClr val="F5F7F9"/>
                     </a:solidFill>
                   </a:tcPr>
                 </a:tc>
@@ -30389,7 +29078,7 @@
                     <a:lstStyle/>
                     <a:p>
                       <a:pPr>
-                        <a:defRPr sz="650" b="1">
+                        <a:defRPr sz="720" b="1">
                           <a:solidFill>
                             <a:srgbClr val="0D1117"/>
                           </a:solidFill>
@@ -30416,7 +29105,7 @@
                     <a:lstStyle/>
                     <a:p>
                       <a:pPr>
-                        <a:defRPr sz="650" b="0">
+                        <a:defRPr sz="720" b="0">
                           <a:solidFill>
                             <a:srgbClr val="0D1117"/>
                           </a:solidFill>
@@ -30443,7 +29132,7 @@
                     <a:lstStyle/>
                     <a:p>
                       <a:pPr>
-                        <a:defRPr sz="650" b="0">
+                        <a:defRPr sz="720" b="0">
                           <a:solidFill>
                             <a:srgbClr val="0D1117"/>
                           </a:solidFill>
@@ -30454,7 +29143,7 @@
                         <a:rPr>
                           <a:latin typeface="Inter"/>
                         </a:rPr>
-                        <a:t>gradient_tool</a:t>
+                        <a:t>list_portfolios; get_portfolio_structure</a:t>
                       </a:r>
                     </a:p>
                   </a:txBody>
@@ -30470,7 +29159,7 @@
                     <a:lstStyle/>
                     <a:p>
                       <a:pPr>
-                        <a:defRPr sz="650" b="0">
+                        <a:defRPr sz="720" b="0">
                           <a:solidFill>
                             <a:srgbClr val="0D1117"/>
                           </a:solidFill>
@@ -30481,7 +29170,7 @@
                         <a:rPr>
                           <a:latin typeface="Inter"/>
                         </a:rPr>
-                        <a:t>list_portfolios; get_portfolio_structure</a:t>
+                        <a:t>2026-06-30</a:t>
                       </a:r>
                     </a:p>
                   </a:txBody>
@@ -30497,126 +29186,18 @@
                     <a:lstStyle/>
                     <a:p>
                       <a:pPr>
-                        <a:defRPr sz="650" b="0">
-                          <a:solidFill>
-                            <a:srgbClr val="0D1117"/>
-                          </a:solidFill>
-                          <a:latin typeface="Inter"/>
-                        </a:defRPr>
-                      </a:pPr>
-                      <a:r>
-                        <a:rPr>
-                          <a:latin typeface="Inter"/>
-                        </a:rPr>
-                        <a:t>allocation_tree</a:t>
-                      </a:r>
-                    </a:p>
-                  </a:txBody>
-                  <a:tcPr marL="54864" marR="54864" marT="27432" marB="27432" anchor="ctr">
-                    <a:solidFill>
-                      <a:srgbClr val="F5F7F9"/>
-                    </a:solidFill>
-                  </a:tcPr>
-                </a:tc>
-                <a:tc>
-                  <a:txBody>
-                    <a:bodyPr/>
-                    <a:lstStyle/>
-                    <a:p>
-                      <a:pPr>
-                        <a:defRPr sz="650" b="0">
-                          <a:solidFill>
-                            <a:srgbClr val="0D1117"/>
-                          </a:solidFill>
-                          <a:latin typeface="Inter"/>
-                        </a:defRPr>
-                      </a:pPr>
-                      <a:r>
-                        <a:rPr>
-                          <a:latin typeface="Inter"/>
-                        </a:rPr>
-                        <a:t>2026-06-30</a:t>
-                      </a:r>
-                    </a:p>
-                  </a:txBody>
-                  <a:tcPr marL="54864" marR="54864" marT="27432" marB="27432" anchor="ctr">
-                    <a:solidFill>
-                      <a:srgbClr val="F5F7F9"/>
-                    </a:solidFill>
-                  </a:tcPr>
-                </a:tc>
-                <a:tc>
-                  <a:txBody>
-                    <a:bodyPr/>
-                    <a:lstStyle/>
-                    <a:p>
-                      <a:pPr>
-                        <a:defRPr sz="650" b="0">
-                          <a:solidFill>
-                            <a:srgbClr val="0D1117"/>
-                          </a:solidFill>
-                          <a:latin typeface="Inter"/>
-                        </a:defRPr>
-                      </a:pPr>
-                      <a:r>
-                        <a:rPr>
-                          <a:latin typeface="Inter"/>
-                        </a:rPr>
-                        <a:t>Illustrative sample data</a:t>
-                      </a:r>
-                    </a:p>
-                  </a:txBody>
-                  <a:tcPr marL="54864" marR="54864" marT="27432" marB="27432" anchor="ctr">
-                    <a:solidFill>
-                      <a:srgbClr val="F5F7F9"/>
-                    </a:solidFill>
-                  </a:tcPr>
-                </a:tc>
-                <a:tc>
-                  <a:txBody>
-                    <a:bodyPr/>
-                    <a:lstStyle/>
-                    <a:p>
-                      <a:pPr>
-                        <a:defRPr sz="650" b="0">
-                          <a:solidFill>
-                            <a:srgbClr val="0D1117"/>
-                          </a:solidFill>
-                          <a:latin typeface="Inter"/>
-                        </a:defRPr>
-                      </a:pPr>
-                      <a:r>
-                        <a:rPr>
-                          <a:latin typeface="Inter"/>
-                        </a:rPr>
-                        <a:t>passed</a:t>
-                      </a:r>
-                    </a:p>
-                  </a:txBody>
-                  <a:tcPr marL="54864" marR="54864" marT="27432" marB="27432" anchor="ctr">
-                    <a:solidFill>
-                      <a:srgbClr val="F5F7F9"/>
-                    </a:solidFill>
-                  </a:tcPr>
-                </a:tc>
-                <a:tc>
-                  <a:txBody>
-                    <a:bodyPr/>
-                    <a:lstStyle/>
-                    <a:p>
-                      <a:pPr>
-                        <a:defRPr sz="650" b="0">
-                          <a:solidFill>
-                            <a:srgbClr val="0D1117"/>
-                          </a:solidFill>
-                          <a:latin typeface="Inter"/>
-                        </a:defRPr>
-                      </a:pPr>
-                      <a:r>
-                        <a:rPr>
-                          <a:latin typeface="Inter"/>
-                        </a:rPr>
-                        <a:t>sha256:aaaaaaaaaaaaaaaaaaaaaaaaaaaaaaaaaaaaaaaaaaaaaaaaaaaaaaaaaaaaaaaa</a:t>
+                        <a:defRPr sz="720" b="1">
+                          <a:solidFill>
+                            <a:srgbClr val="C6F432"/>
+                          </a:solidFill>
+                          <a:latin typeface="Inter"/>
+                        </a:defRPr>
+                      </a:pPr>
+                      <a:r>
+                        <a:rPr>
+                          <a:latin typeface="Inter"/>
+                        </a:rPr>
+                        <a:t>● Passed</a:t>
                       </a:r>
                     </a:p>
                   </a:txBody>
@@ -30634,7 +29215,7 @@
                     <a:lstStyle/>
                     <a:p>
                       <a:pPr>
-                        <a:defRPr sz="650" b="1">
+                        <a:defRPr sz="720" b="1">
                           <a:solidFill>
                             <a:srgbClr val="0D1117"/>
                           </a:solidFill>
@@ -30661,7 +29242,7 @@
                     <a:lstStyle/>
                     <a:p>
                       <a:pPr>
-                        <a:defRPr sz="650" b="0">
+                        <a:defRPr sz="720" b="0">
                           <a:solidFill>
                             <a:srgbClr val="0D1117"/>
                           </a:solidFill>
@@ -30688,7 +29269,7 @@
                     <a:lstStyle/>
                     <a:p>
                       <a:pPr>
-                        <a:defRPr sz="650" b="0">
+                        <a:defRPr sz="720" b="0">
                           <a:solidFill>
                             <a:srgbClr val="0D1117"/>
                           </a:solidFill>
@@ -30699,7 +29280,7 @@
                         <a:rPr>
                           <a:latin typeface="Inter"/>
                         </a:rPr>
-                        <a:t>gradient_tool</a:t>
+                        <a:t>check_portfolio_policy</a:t>
                       </a:r>
                     </a:p>
                   </a:txBody>
@@ -30715,7 +29296,7 @@
                     <a:lstStyle/>
                     <a:p>
                       <a:pPr>
-                        <a:defRPr sz="650" b="0">
+                        <a:defRPr sz="720" b="0">
                           <a:solidFill>
                             <a:srgbClr val="0D1117"/>
                           </a:solidFill>
@@ -30726,7 +29307,7 @@
                         <a:rPr>
                           <a:latin typeface="Inter"/>
                         </a:rPr>
-                        <a:t>check_portfolio_policy</a:t>
+                        <a:t>2026-06-30</a:t>
                       </a:r>
                     </a:p>
                   </a:txBody>
@@ -30742,132 +29323,24 @@
                     <a:lstStyle/>
                     <a:p>
                       <a:pPr>
-                        <a:defRPr sz="650" b="0">
-                          <a:solidFill>
-                            <a:srgbClr val="0D1117"/>
-                          </a:solidFill>
-                          <a:latin typeface="Inter"/>
-                        </a:defRPr>
-                      </a:pPr>
-                      <a:r>
-                        <a:rPr>
-                          <a:latin typeface="Inter"/>
-                        </a:rPr>
-                        <a:t>portfolio=test</a:t>
-                      </a:r>
-                    </a:p>
-                  </a:txBody>
-                  <a:tcPr marL="54864" marR="54864" marT="27432" marB="27432" anchor="ctr">
-                    <a:solidFill>
-                      <a:srgbClr val="FFFFFF"/>
-                    </a:solidFill>
-                  </a:tcPr>
-                </a:tc>
-                <a:tc>
-                  <a:txBody>
-                    <a:bodyPr/>
-                    <a:lstStyle/>
-                    <a:p>
-                      <a:pPr>
-                        <a:defRPr sz="650" b="0">
-                          <a:solidFill>
-                            <a:srgbClr val="0D1117"/>
-                          </a:solidFill>
-                          <a:latin typeface="Inter"/>
-                        </a:defRPr>
-                      </a:pPr>
-                      <a:r>
-                        <a:rPr>
-                          <a:latin typeface="Inter"/>
-                        </a:rPr>
-                        <a:t>2026-06-30</a:t>
-                      </a:r>
-                    </a:p>
-                  </a:txBody>
-                  <a:tcPr marL="54864" marR="54864" marT="27432" marB="27432" anchor="ctr">
-                    <a:solidFill>
-                      <a:srgbClr val="FFFFFF"/>
-                    </a:solidFill>
-                  </a:tcPr>
-                </a:tc>
-                <a:tc>
-                  <a:txBody>
-                    <a:bodyPr/>
-                    <a:lstStyle/>
-                    <a:p>
-                      <a:pPr>
-                        <a:defRPr sz="650" b="0">
-                          <a:solidFill>
-                            <a:srgbClr val="0D1117"/>
-                          </a:solidFill>
-                          <a:latin typeface="Inter"/>
-                        </a:defRPr>
-                      </a:pPr>
-                      <a:r>
-                        <a:rPr>
-                          <a:latin typeface="Inter"/>
-                        </a:rPr>
-                        <a:t>Illustrative sample data</a:t>
-                      </a:r>
-                    </a:p>
-                  </a:txBody>
-                  <a:tcPr marL="54864" marR="54864" marT="27432" marB="27432" anchor="ctr">
-                    <a:solidFill>
-                      <a:srgbClr val="FFFFFF"/>
-                    </a:solidFill>
-                  </a:tcPr>
-                </a:tc>
-                <a:tc>
-                  <a:txBody>
-                    <a:bodyPr/>
-                    <a:lstStyle/>
-                    <a:p>
-                      <a:pPr>
-                        <a:defRPr sz="650" b="0">
-                          <a:solidFill>
-                            <a:srgbClr val="0D1117"/>
-                          </a:solidFill>
-                          <a:latin typeface="Inter"/>
-                        </a:defRPr>
-                      </a:pPr>
-                      <a:r>
-                        <a:rPr>
-                          <a:latin typeface="Inter"/>
-                        </a:rPr>
-                        <a:t>passed</a:t>
-                      </a:r>
-                    </a:p>
-                  </a:txBody>
-                  <a:tcPr marL="54864" marR="54864" marT="27432" marB="27432" anchor="ctr">
-                    <a:solidFill>
-                      <a:srgbClr val="FFFFFF"/>
-                    </a:solidFill>
-                  </a:tcPr>
-                </a:tc>
-                <a:tc>
-                  <a:txBody>
-                    <a:bodyPr/>
-                    <a:lstStyle/>
-                    <a:p>
-                      <a:pPr>
-                        <a:defRPr sz="650" b="0">
-                          <a:solidFill>
-                            <a:srgbClr val="0D1117"/>
-                          </a:solidFill>
-                          <a:latin typeface="Inter"/>
-                        </a:defRPr>
-                      </a:pPr>
-                      <a:r>
-                        <a:rPr>
-                          <a:latin typeface="Inter"/>
-                        </a:rPr>
-                        <a:t>sha256:aaaaaaaaaaaaaaaaaaaaaaaaaaaaaaaaaaaaaaaaaaaaaaaaaaaaaaaaaaaaaaaa</a:t>
-                      </a:r>
-                    </a:p>
-                  </a:txBody>
-                  <a:tcPr marL="54864" marR="54864" marT="27432" marB="27432" anchor="ctr">
-                    <a:solidFill>
-                      <a:srgbClr val="FFFFFF"/>
+                        <a:defRPr sz="720" b="1">
+                          <a:solidFill>
+                            <a:srgbClr val="C6F432"/>
+                          </a:solidFill>
+                          <a:latin typeface="Inter"/>
+                        </a:defRPr>
+                      </a:pPr>
+                      <a:r>
+                        <a:rPr>
+                          <a:latin typeface="Inter"/>
+                        </a:rPr>
+                        <a:t>● Passed</a:t>
+                      </a:r>
+                    </a:p>
+                  </a:txBody>
+                  <a:tcPr marL="54864" marR="54864" marT="27432" marB="27432" anchor="ctr">
+                    <a:solidFill>
+                      <a:srgbClr val="F5F7F9"/>
                     </a:solidFill>
                   </a:tcPr>
                 </a:tc>
@@ -30879,7 +29352,7 @@
                     <a:lstStyle/>
                     <a:p>
                       <a:pPr>
-                        <a:defRPr sz="650" b="1">
+                        <a:defRPr sz="720" b="1">
                           <a:solidFill>
                             <a:srgbClr val="0D1117"/>
                           </a:solidFill>
@@ -30906,7 +29379,7 @@
                     <a:lstStyle/>
                     <a:p>
                       <a:pPr>
-                        <a:defRPr sz="650" b="0">
+                        <a:defRPr sz="720" b="0">
                           <a:solidFill>
                             <a:srgbClr val="0D1117"/>
                           </a:solidFill>
@@ -30933,7 +29406,7 @@
                     <a:lstStyle/>
                     <a:p>
                       <a:pPr>
-                        <a:defRPr sz="650" b="0">
+                        <a:defRPr sz="720" b="0">
                           <a:solidFill>
                             <a:srgbClr val="0D1117"/>
                           </a:solidFill>
@@ -30944,7 +29417,7 @@
                         <a:rPr>
                           <a:latin typeface="Inter"/>
                         </a:rPr>
-                        <a:t>gradient_tool</a:t>
+                        <a:t>get_portfolio_exposure</a:t>
                       </a:r>
                     </a:p>
                   </a:txBody>
@@ -30960,7 +29433,7 @@
                     <a:lstStyle/>
                     <a:p>
                       <a:pPr>
-                        <a:defRPr sz="650" b="0">
+                        <a:defRPr sz="720" b="0">
                           <a:solidFill>
                             <a:srgbClr val="0D1117"/>
                           </a:solidFill>
@@ -30971,7 +29444,7 @@
                         <a:rPr>
                           <a:latin typeface="Inter"/>
                         </a:rPr>
-                        <a:t>get_portfolio_exposure</a:t>
+                        <a:t>2026-06-30</a:t>
                       </a:r>
                     </a:p>
                   </a:txBody>
@@ -30987,126 +29460,18 @@
                     <a:lstStyle/>
                     <a:p>
                       <a:pPr>
-                        <a:defRPr sz="650" b="0">
-                          <a:solidFill>
-                            <a:srgbClr val="0D1117"/>
-                          </a:solidFill>
-                          <a:latin typeface="Inter"/>
-                        </a:defRPr>
-                      </a:pPr>
-                      <a:r>
-                        <a:rPr>
-                          <a:latin typeface="Inter"/>
-                        </a:rPr>
-                        <a:t>all pages</a:t>
-                      </a:r>
-                    </a:p>
-                  </a:txBody>
-                  <a:tcPr marL="54864" marR="54864" marT="27432" marB="27432" anchor="ctr">
-                    <a:solidFill>
-                      <a:srgbClr val="F5F7F9"/>
-                    </a:solidFill>
-                  </a:tcPr>
-                </a:tc>
-                <a:tc>
-                  <a:txBody>
-                    <a:bodyPr/>
-                    <a:lstStyle/>
-                    <a:p>
-                      <a:pPr>
-                        <a:defRPr sz="650" b="0">
-                          <a:solidFill>
-                            <a:srgbClr val="0D1117"/>
-                          </a:solidFill>
-                          <a:latin typeface="Inter"/>
-                        </a:defRPr>
-                      </a:pPr>
-                      <a:r>
-                        <a:rPr>
-                          <a:latin typeface="Inter"/>
-                        </a:rPr>
-                        <a:t>2026-06-30</a:t>
-                      </a:r>
-                    </a:p>
-                  </a:txBody>
-                  <a:tcPr marL="54864" marR="54864" marT="27432" marB="27432" anchor="ctr">
-                    <a:solidFill>
-                      <a:srgbClr val="F5F7F9"/>
-                    </a:solidFill>
-                  </a:tcPr>
-                </a:tc>
-                <a:tc>
-                  <a:txBody>
-                    <a:bodyPr/>
-                    <a:lstStyle/>
-                    <a:p>
-                      <a:pPr>
-                        <a:defRPr sz="650" b="0">
-                          <a:solidFill>
-                            <a:srgbClr val="0D1117"/>
-                          </a:solidFill>
-                          <a:latin typeface="Inter"/>
-                        </a:defRPr>
-                      </a:pPr>
-                      <a:r>
-                        <a:rPr>
-                          <a:latin typeface="Inter"/>
-                        </a:rPr>
-                        <a:t>Illustrative sample data</a:t>
-                      </a:r>
-                    </a:p>
-                  </a:txBody>
-                  <a:tcPr marL="54864" marR="54864" marT="27432" marB="27432" anchor="ctr">
-                    <a:solidFill>
-                      <a:srgbClr val="F5F7F9"/>
-                    </a:solidFill>
-                  </a:tcPr>
-                </a:tc>
-                <a:tc>
-                  <a:txBody>
-                    <a:bodyPr/>
-                    <a:lstStyle/>
-                    <a:p>
-                      <a:pPr>
-                        <a:defRPr sz="650" b="0">
-                          <a:solidFill>
-                            <a:srgbClr val="0D1117"/>
-                          </a:solidFill>
-                          <a:latin typeface="Inter"/>
-                        </a:defRPr>
-                      </a:pPr>
-                      <a:r>
-                        <a:rPr>
-                          <a:latin typeface="Inter"/>
-                        </a:rPr>
-                        <a:t>passed</a:t>
-                      </a:r>
-                    </a:p>
-                  </a:txBody>
-                  <a:tcPr marL="54864" marR="54864" marT="27432" marB="27432" anchor="ctr">
-                    <a:solidFill>
-                      <a:srgbClr val="F5F7F9"/>
-                    </a:solidFill>
-                  </a:tcPr>
-                </a:tc>
-                <a:tc>
-                  <a:txBody>
-                    <a:bodyPr/>
-                    <a:lstStyle/>
-                    <a:p>
-                      <a:pPr>
-                        <a:defRPr sz="650" b="0">
-                          <a:solidFill>
-                            <a:srgbClr val="0D1117"/>
-                          </a:solidFill>
-                          <a:latin typeface="Inter"/>
-                        </a:defRPr>
-                      </a:pPr>
-                      <a:r>
-                        <a:rPr>
-                          <a:latin typeface="Inter"/>
-                        </a:rPr>
-                        <a:t>sha256:aaaaaaaaaaaaaaaaaaaaaaaaaaaaaaaaaaaaaaaaaaaaaaaaaaaaaaaaaaaaaaaa</a:t>
+                        <a:defRPr sz="720" b="1">
+                          <a:solidFill>
+                            <a:srgbClr val="C6F432"/>
+                          </a:solidFill>
+                          <a:latin typeface="Inter"/>
+                        </a:defRPr>
+                      </a:pPr>
+                      <a:r>
+                        <a:rPr>
+                          <a:latin typeface="Inter"/>
+                        </a:rPr>
+                        <a:t>● Passed</a:t>
                       </a:r>
                     </a:p>
                   </a:txBody>
@@ -31124,7 +29489,7 @@
                     <a:lstStyle/>
                     <a:p>
                       <a:pPr>
-                        <a:defRPr sz="650" b="1">
+                        <a:defRPr sz="720" b="1">
                           <a:solidFill>
                             <a:srgbClr val="0D1117"/>
                           </a:solidFill>
@@ -31151,7 +29516,7 @@
                     <a:lstStyle/>
                     <a:p>
                       <a:pPr>
-                        <a:defRPr sz="650" b="0">
+                        <a:defRPr sz="720" b="0">
                           <a:solidFill>
                             <a:srgbClr val="0D1117"/>
                           </a:solidFill>
@@ -31178,7 +29543,7 @@
                     <a:lstStyle/>
                     <a:p>
                       <a:pPr>
-                        <a:defRPr sz="650" b="0">
+                        <a:defRPr sz="720" b="0">
                           <a:solidFill>
                             <a:srgbClr val="0D1117"/>
                           </a:solidFill>
@@ -31189,7 +29554,7 @@
                         <a:rPr>
                           <a:latin typeface="Inter"/>
                         </a:rPr>
-                        <a:t>gradient_tool</a:t>
+                        <a:t>get_portfolio_historical_returns; get_portfolio_attribution</a:t>
                       </a:r>
                     </a:p>
                   </a:txBody>
@@ -31205,7 +29570,7 @@
                     <a:lstStyle/>
                     <a:p>
                       <a:pPr>
-                        <a:defRPr sz="650" b="0">
+                        <a:defRPr sz="720" b="0">
                           <a:solidFill>
                             <a:srgbClr val="0D1117"/>
                           </a:solidFill>
@@ -31216,7 +29581,7 @@
                         <a:rPr>
                           <a:latin typeface="Inter"/>
                         </a:rPr>
-                        <a:t>get_portfolio_historical_returns; get_portfolio_attribution</a:t>
+                        <a:t>2026-06-30</a:t>
                       </a:r>
                     </a:p>
                   </a:txBody>
@@ -31232,132 +29597,24 @@
                     <a:lstStyle/>
                     <a:p>
                       <a:pPr>
-                        <a:defRPr sz="650" b="0">
-                          <a:solidFill>
-                            <a:srgbClr val="0D1117"/>
-                          </a:solidFill>
-                          <a:latin typeface="Inter"/>
-                        </a:defRPr>
-                      </a:pPr>
-                      <a:r>
-                        <a:rPr>
-                          <a:latin typeface="Inter"/>
-                        </a:rPr>
-                        <a:t>all sections</a:t>
-                      </a:r>
-                    </a:p>
-                  </a:txBody>
-                  <a:tcPr marL="54864" marR="54864" marT="27432" marB="27432" anchor="ctr">
-                    <a:solidFill>
-                      <a:srgbClr val="FFFFFF"/>
-                    </a:solidFill>
-                  </a:tcPr>
-                </a:tc>
-                <a:tc>
-                  <a:txBody>
-                    <a:bodyPr/>
-                    <a:lstStyle/>
-                    <a:p>
-                      <a:pPr>
-                        <a:defRPr sz="650" b="0">
-                          <a:solidFill>
-                            <a:srgbClr val="0D1117"/>
-                          </a:solidFill>
-                          <a:latin typeface="Inter"/>
-                        </a:defRPr>
-                      </a:pPr>
-                      <a:r>
-                        <a:rPr>
-                          <a:latin typeface="Inter"/>
-                        </a:rPr>
-                        <a:t>2026-06-30</a:t>
-                      </a:r>
-                    </a:p>
-                  </a:txBody>
-                  <a:tcPr marL="54864" marR="54864" marT="27432" marB="27432" anchor="ctr">
-                    <a:solidFill>
-                      <a:srgbClr val="FFFFFF"/>
-                    </a:solidFill>
-                  </a:tcPr>
-                </a:tc>
-                <a:tc>
-                  <a:txBody>
-                    <a:bodyPr/>
-                    <a:lstStyle/>
-                    <a:p>
-                      <a:pPr>
-                        <a:defRPr sz="650" b="0">
-                          <a:solidFill>
-                            <a:srgbClr val="0D1117"/>
-                          </a:solidFill>
-                          <a:latin typeface="Inter"/>
-                        </a:defRPr>
-                      </a:pPr>
-                      <a:r>
-                        <a:rPr>
-                          <a:latin typeface="Inter"/>
-                        </a:rPr>
-                        <a:t>Illustrative sample data</a:t>
-                      </a:r>
-                    </a:p>
-                  </a:txBody>
-                  <a:tcPr marL="54864" marR="54864" marT="27432" marB="27432" anchor="ctr">
-                    <a:solidFill>
-                      <a:srgbClr val="FFFFFF"/>
-                    </a:solidFill>
-                  </a:tcPr>
-                </a:tc>
-                <a:tc>
-                  <a:txBody>
-                    <a:bodyPr/>
-                    <a:lstStyle/>
-                    <a:p>
-                      <a:pPr>
-                        <a:defRPr sz="650" b="0">
-                          <a:solidFill>
-                            <a:srgbClr val="0D1117"/>
-                          </a:solidFill>
-                          <a:latin typeface="Inter"/>
-                        </a:defRPr>
-                      </a:pPr>
-                      <a:r>
-                        <a:rPr>
-                          <a:latin typeface="Inter"/>
-                        </a:rPr>
-                        <a:t>degraded</a:t>
-                      </a:r>
-                    </a:p>
-                  </a:txBody>
-                  <a:tcPr marL="54864" marR="54864" marT="27432" marB="27432" anchor="ctr">
-                    <a:solidFill>
-                      <a:srgbClr val="FFFFFF"/>
-                    </a:solidFill>
-                  </a:tcPr>
-                </a:tc>
-                <a:tc>
-                  <a:txBody>
-                    <a:bodyPr/>
-                    <a:lstStyle/>
-                    <a:p>
-                      <a:pPr>
-                        <a:defRPr sz="650" b="0">
-                          <a:solidFill>
-                            <a:srgbClr val="0D1117"/>
-                          </a:solidFill>
-                          <a:latin typeface="Inter"/>
-                        </a:defRPr>
-                      </a:pPr>
-                      <a:r>
-                        <a:rPr>
-                          <a:latin typeface="Inter"/>
-                        </a:rPr>
-                        <a:t>sha256:aaaaaaaaaaaaaaaaaaaaaaaaaaaaaaaaaaaaaaaaaaaaaaaaaaaaaaaaaaaaaaaa</a:t>
-                      </a:r>
-                    </a:p>
-                  </a:txBody>
-                  <a:tcPr marL="54864" marR="54864" marT="27432" marB="27432" anchor="ctr">
-                    <a:solidFill>
-                      <a:srgbClr val="FFFFFF"/>
+                        <a:defRPr sz="720" b="1">
+                          <a:solidFill>
+                            <a:srgbClr val="F2A93B"/>
+                          </a:solidFill>
+                          <a:latin typeface="Inter"/>
+                        </a:defRPr>
+                      </a:pPr>
+                      <a:r>
+                        <a:rPr>
+                          <a:latin typeface="Inter"/>
+                        </a:rPr>
+                        <a:t>● Incomplete</a:t>
+                      </a:r>
+                    </a:p>
+                  </a:txBody>
+                  <a:tcPr marL="54864" marR="54864" marT="27432" marB="27432" anchor="ctr">
+                    <a:solidFill>
+                      <a:srgbClr val="F5F7F9"/>
                     </a:solidFill>
                   </a:tcPr>
                 </a:tc>
@@ -31369,7 +29626,7 @@
                     <a:lstStyle/>
                     <a:p>
                       <a:pPr>
-                        <a:defRPr sz="650" b="1">
+                        <a:defRPr sz="720" b="1">
                           <a:solidFill>
                             <a:srgbClr val="0D1117"/>
                           </a:solidFill>
@@ -31396,7 +29653,7 @@
                     <a:lstStyle/>
                     <a:p>
                       <a:pPr>
-                        <a:defRPr sz="650" b="0">
+                        <a:defRPr sz="720" b="0">
                           <a:solidFill>
                             <a:srgbClr val="0D1117"/>
                           </a:solidFill>
@@ -31423,7 +29680,7 @@
                     <a:lstStyle/>
                     <a:p>
                       <a:pPr>
-                        <a:defRPr sz="650" b="0">
+                        <a:defRPr sz="720" b="0">
                           <a:solidFill>
                             <a:srgbClr val="0D1117"/>
                           </a:solidFill>
@@ -31434,7 +29691,7 @@
                         <a:rPr>
                           <a:latin typeface="Inter"/>
                         </a:rPr>
-                        <a:t>gradient_tool</a:t>
+                        <a:t>get_capital_market_assumptions</a:t>
                       </a:r>
                     </a:p>
                   </a:txBody>
@@ -31450,7 +29707,7 @@
                     <a:lstStyle/>
                     <a:p>
                       <a:pPr>
-                        <a:defRPr sz="650" b="0">
+                        <a:defRPr sz="720" b="0">
                           <a:solidFill>
                             <a:srgbClr val="0D1117"/>
                           </a:solidFill>
@@ -31461,7 +29718,7 @@
                         <a:rPr>
                           <a:latin typeface="Inter"/>
                         </a:rPr>
-                        <a:t>get_capital_market_assumptions</a:t>
+                        <a:t>2026-06-15</a:t>
                       </a:r>
                     </a:p>
                   </a:txBody>
@@ -31477,126 +29734,18 @@
                     <a:lstStyle/>
                     <a:p>
                       <a:pPr>
-                        <a:defRPr sz="650" b="0">
-                          <a:solidFill>
-                            <a:srgbClr val="0D1117"/>
-                          </a:solidFill>
-                          <a:latin typeface="Inter"/>
-                        </a:defRPr>
-                      </a:pPr>
-                      <a:r>
-                        <a:rPr>
-                          <a:latin typeface="Inter"/>
-                        </a:rPr>
-                        <a:t>baseline</a:t>
-                      </a:r>
-                    </a:p>
-                  </a:txBody>
-                  <a:tcPr marL="54864" marR="54864" marT="27432" marB="27432" anchor="ctr">
-                    <a:solidFill>
-                      <a:srgbClr val="F5F7F9"/>
-                    </a:solidFill>
-                  </a:tcPr>
-                </a:tc>
-                <a:tc>
-                  <a:txBody>
-                    <a:bodyPr/>
-                    <a:lstStyle/>
-                    <a:p>
-                      <a:pPr>
-                        <a:defRPr sz="650" b="0">
-                          <a:solidFill>
-                            <a:srgbClr val="0D1117"/>
-                          </a:solidFill>
-                          <a:latin typeface="Inter"/>
-                        </a:defRPr>
-                      </a:pPr>
-                      <a:r>
-                        <a:rPr>
-                          <a:latin typeface="Inter"/>
-                        </a:rPr>
-                        <a:t>2026-06-15</a:t>
-                      </a:r>
-                    </a:p>
-                  </a:txBody>
-                  <a:tcPr marL="54864" marR="54864" marT="27432" marB="27432" anchor="ctr">
-                    <a:solidFill>
-                      <a:srgbClr val="F5F7F9"/>
-                    </a:solidFill>
-                  </a:tcPr>
-                </a:tc>
-                <a:tc>
-                  <a:txBody>
-                    <a:bodyPr/>
-                    <a:lstStyle/>
-                    <a:p>
-                      <a:pPr>
-                        <a:defRPr sz="650" b="0">
-                          <a:solidFill>
-                            <a:srgbClr val="0D1117"/>
-                          </a:solidFill>
-                          <a:latin typeface="Inter"/>
-                        </a:defRPr>
-                      </a:pPr>
-                      <a:r>
-                        <a:rPr>
-                          <a:latin typeface="Inter"/>
-                        </a:rPr>
-                        <a:t>Illustrative sample data</a:t>
-                      </a:r>
-                    </a:p>
-                  </a:txBody>
-                  <a:tcPr marL="54864" marR="54864" marT="27432" marB="27432" anchor="ctr">
-                    <a:solidFill>
-                      <a:srgbClr val="F5F7F9"/>
-                    </a:solidFill>
-                  </a:tcPr>
-                </a:tc>
-                <a:tc>
-                  <a:txBody>
-                    <a:bodyPr/>
-                    <a:lstStyle/>
-                    <a:p>
-                      <a:pPr>
-                        <a:defRPr sz="650" b="0">
-                          <a:solidFill>
-                            <a:srgbClr val="0D1117"/>
-                          </a:solidFill>
-                          <a:latin typeface="Inter"/>
-                        </a:defRPr>
-                      </a:pPr>
-                      <a:r>
-                        <a:rPr>
-                          <a:latin typeface="Inter"/>
-                        </a:rPr>
-                        <a:t>passed</a:t>
-                      </a:r>
-                    </a:p>
-                  </a:txBody>
-                  <a:tcPr marL="54864" marR="54864" marT="27432" marB="27432" anchor="ctr">
-                    <a:solidFill>
-                      <a:srgbClr val="F5F7F9"/>
-                    </a:solidFill>
-                  </a:tcPr>
-                </a:tc>
-                <a:tc>
-                  <a:txBody>
-                    <a:bodyPr/>
-                    <a:lstStyle/>
-                    <a:p>
-                      <a:pPr>
-                        <a:defRPr sz="650" b="0">
-                          <a:solidFill>
-                            <a:srgbClr val="0D1117"/>
-                          </a:solidFill>
-                          <a:latin typeface="Inter"/>
-                        </a:defRPr>
-                      </a:pPr>
-                      <a:r>
-                        <a:rPr>
-                          <a:latin typeface="Inter"/>
-                        </a:rPr>
-                        <a:t>sha256:aaaaaaaaaaaaaaaaaaaaaaaaaaaaaaaaaaaaaaaaaaaaaaaaaaaaaaaaaaaaaaaa</a:t>
+                        <a:defRPr sz="720" b="1">
+                          <a:solidFill>
+                            <a:srgbClr val="C6F432"/>
+                          </a:solidFill>
+                          <a:latin typeface="Inter"/>
+                        </a:defRPr>
+                      </a:pPr>
+                      <a:r>
+                        <a:rPr>
+                          <a:latin typeface="Inter"/>
+                        </a:rPr>
+                        <a:t>● Passed</a:t>
                       </a:r>
                     </a:p>
                   </a:txBody>
@@ -31614,7 +29763,7 @@
                     <a:lstStyle/>
                     <a:p>
                       <a:pPr>
-                        <a:defRPr sz="650" b="1">
+                        <a:defRPr sz="720" b="1">
                           <a:solidFill>
                             <a:srgbClr val="0D1117"/>
                           </a:solidFill>
@@ -31641,7 +29790,7 @@
                     <a:lstStyle/>
                     <a:p>
                       <a:pPr>
-                        <a:defRPr sz="650" b="0">
+                        <a:defRPr sz="720" b="0">
                           <a:solidFill>
                             <a:srgbClr val="0D1117"/>
                           </a:solidFill>
@@ -31668,7 +29817,7 @@
                     <a:lstStyle/>
                     <a:p>
                       <a:pPr>
-                        <a:defRPr sz="650" b="0">
+                        <a:defRPr sz="720" b="0">
                           <a:solidFill>
                             <a:srgbClr val="0D1117"/>
                           </a:solidFill>
@@ -31679,7 +29828,7 @@
                         <a:rPr>
                           <a:latin typeface="Inter"/>
                         </a:rPr>
-                        <a:t>gradient_tool</a:t>
+                        <a:t>get_portfolio_exposure</a:t>
                       </a:r>
                     </a:p>
                   </a:txBody>
@@ -31695,7 +29844,7 @@
                     <a:lstStyle/>
                     <a:p>
                       <a:pPr>
-                        <a:defRPr sz="650" b="0">
+                        <a:defRPr sz="720" b="0">
                           <a:solidFill>
                             <a:srgbClr val="0D1117"/>
                           </a:solidFill>
@@ -31706,7 +29855,7 @@
                         <a:rPr>
                           <a:latin typeface="Inter"/>
                         </a:rPr>
-                        <a:t>get_cross_domain_research</a:t>
+                        <a:t>2026-06-30</a:t>
                       </a:r>
                     </a:p>
                   </a:txBody>
@@ -31722,132 +29871,24 @@
                     <a:lstStyle/>
                     <a:p>
                       <a:pPr>
-                        <a:defRPr sz="650" b="0">
-                          <a:solidFill>
-                            <a:srgbClr val="0D1117"/>
-                          </a:solidFill>
-                          <a:latin typeface="Inter"/>
-                        </a:defRPr>
-                      </a:pPr>
-                      <a:r>
-                        <a:rPr>
-                          <a:latin typeface="Inter"/>
-                        </a:rPr>
-                        <a:t>illustrative</a:t>
-                      </a:r>
-                    </a:p>
-                  </a:txBody>
-                  <a:tcPr marL="54864" marR="54864" marT="27432" marB="27432" anchor="ctr">
-                    <a:solidFill>
-                      <a:srgbClr val="FFFFFF"/>
-                    </a:solidFill>
-                  </a:tcPr>
-                </a:tc>
-                <a:tc>
-                  <a:txBody>
-                    <a:bodyPr/>
-                    <a:lstStyle/>
-                    <a:p>
-                      <a:pPr>
-                        <a:defRPr sz="650" b="0">
-                          <a:solidFill>
-                            <a:srgbClr val="0D1117"/>
-                          </a:solidFill>
-                          <a:latin typeface="Inter"/>
-                        </a:defRPr>
-                      </a:pPr>
-                      <a:r>
-                        <a:rPr>
-                          <a:latin typeface="Inter"/>
-                        </a:rPr>
-                        <a:t>2026-06-30</a:t>
-                      </a:r>
-                    </a:p>
-                  </a:txBody>
-                  <a:tcPr marL="54864" marR="54864" marT="27432" marB="27432" anchor="ctr">
-                    <a:solidFill>
-                      <a:srgbClr val="FFFFFF"/>
-                    </a:solidFill>
-                  </a:tcPr>
-                </a:tc>
-                <a:tc>
-                  <a:txBody>
-                    <a:bodyPr/>
-                    <a:lstStyle/>
-                    <a:p>
-                      <a:pPr>
-                        <a:defRPr sz="650" b="0">
-                          <a:solidFill>
-                            <a:srgbClr val="0D1117"/>
-                          </a:solidFill>
-                          <a:latin typeface="Inter"/>
-                        </a:defRPr>
-                      </a:pPr>
-                      <a:r>
-                        <a:rPr>
-                          <a:latin typeface="Inter"/>
-                        </a:rPr>
-                        <a:t>Illustrative sample data</a:t>
-                      </a:r>
-                    </a:p>
-                  </a:txBody>
-                  <a:tcPr marL="54864" marR="54864" marT="27432" marB="27432" anchor="ctr">
-                    <a:solidFill>
-                      <a:srgbClr val="FFFFFF"/>
-                    </a:solidFill>
-                  </a:tcPr>
-                </a:tc>
-                <a:tc>
-                  <a:txBody>
-                    <a:bodyPr/>
-                    <a:lstStyle/>
-                    <a:p>
-                      <a:pPr>
-                        <a:defRPr sz="650" b="0">
-                          <a:solidFill>
-                            <a:srgbClr val="0D1117"/>
-                          </a:solidFill>
-                          <a:latin typeface="Inter"/>
-                        </a:defRPr>
-                      </a:pPr>
-                      <a:r>
-                        <a:rPr>
-                          <a:latin typeface="Inter"/>
-                        </a:rPr>
-                        <a:t>degraded</a:t>
-                      </a:r>
-                    </a:p>
-                  </a:txBody>
-                  <a:tcPr marL="54864" marR="54864" marT="27432" marB="27432" anchor="ctr">
-                    <a:solidFill>
-                      <a:srgbClr val="FFFFFF"/>
-                    </a:solidFill>
-                  </a:tcPr>
-                </a:tc>
-                <a:tc>
-                  <a:txBody>
-                    <a:bodyPr/>
-                    <a:lstStyle/>
-                    <a:p>
-                      <a:pPr>
-                        <a:defRPr sz="650" b="0">
-                          <a:solidFill>
-                            <a:srgbClr val="0D1117"/>
-                          </a:solidFill>
-                          <a:latin typeface="Inter"/>
-                        </a:defRPr>
-                      </a:pPr>
-                      <a:r>
-                        <a:rPr>
-                          <a:latin typeface="Inter"/>
-                        </a:rPr>
-                        <a:t>sha256:aaaaaaaaaaaaaaaaaaaaaaaaaaaaaaaaaaaaaaaaaaaaaaaaaaaaaaaaaaaaaaaa</a:t>
-                      </a:r>
-                    </a:p>
-                  </a:txBody>
-                  <a:tcPr marL="54864" marR="54864" marT="27432" marB="27432" anchor="ctr">
-                    <a:solidFill>
-                      <a:srgbClr val="FFFFFF"/>
+                        <a:defRPr sz="720" b="1">
+                          <a:solidFill>
+                            <a:srgbClr val="F2A93B"/>
+                          </a:solidFill>
+                          <a:latin typeface="Inter"/>
+                        </a:defRPr>
+                      </a:pPr>
+                      <a:r>
+                        <a:rPr>
+                          <a:latin typeface="Inter"/>
+                        </a:rPr>
+                        <a:t>● Incomplete</a:t>
+                      </a:r>
+                    </a:p>
+                  </a:txBody>
+                  <a:tcPr marL="54864" marR="54864" marT="27432" marB="27432" anchor="ctr">
+                    <a:solidFill>
+                      <a:srgbClr val="F5F7F9"/>
                     </a:solidFill>
                   </a:tcPr>
                 </a:tc>
@@ -31859,7 +29900,7 @@
                     <a:lstStyle/>
                     <a:p>
                       <a:pPr>
-                        <a:defRPr sz="650" b="1">
+                        <a:defRPr sz="720" b="1">
                           <a:solidFill>
                             <a:srgbClr val="0D1117"/>
                           </a:solidFill>
@@ -31886,7 +29927,7 @@
                     <a:lstStyle/>
                     <a:p>
                       <a:pPr>
-                        <a:defRPr sz="650" b="0">
+                        <a:defRPr sz="720" b="0">
                           <a:solidFill>
                             <a:srgbClr val="0D1117"/>
                           </a:solidFill>
@@ -31913,7 +29954,7 @@
                     <a:lstStyle/>
                     <a:p>
                       <a:pPr>
-                        <a:defRPr sz="650" b="0">
+                        <a:defRPr sz="720" b="0">
                           <a:solidFill>
                             <a:srgbClr val="0D1117"/>
                           </a:solidFill>
@@ -31924,7 +29965,7 @@
                         <a:rPr>
                           <a:latin typeface="Inter"/>
                         </a:rPr>
-                        <a:t>gradient_tool</a:t>
+                        <a:t>get_gradient_capabilities</a:t>
                       </a:r>
                     </a:p>
                   </a:txBody>
@@ -31940,7 +29981,7 @@
                     <a:lstStyle/>
                     <a:p>
                       <a:pPr>
-                        <a:defRPr sz="650" b="0">
+                        <a:defRPr sz="720" b="0">
                           <a:solidFill>
                             <a:srgbClr val="0D1117"/>
                           </a:solidFill>
@@ -31951,7 +29992,7 @@
                         <a:rPr>
                           <a:latin typeface="Inter"/>
                         </a:rPr>
-                        <a:t>get_gradient_capabilities</a:t>
+                        <a:t>2026-06-30</a:t>
                       </a:r>
                     </a:p>
                   </a:txBody>
@@ -31967,126 +30008,18 @@
                     <a:lstStyle/>
                     <a:p>
                       <a:pPr>
-                        <a:defRPr sz="650" b="0">
-                          <a:solidFill>
-                            <a:srgbClr val="0D1117"/>
-                          </a:solidFill>
-                          <a:latin typeface="Inter"/>
-                        </a:defRPr>
-                      </a:pPr>
-                      <a:r>
-                        <a:rPr>
-                          <a:latin typeface="Inter"/>
-                        </a:rPr>
-                        <a:t>illustrative</a:t>
-                      </a:r>
-                    </a:p>
-                  </a:txBody>
-                  <a:tcPr marL="54864" marR="54864" marT="27432" marB="27432" anchor="ctr">
-                    <a:solidFill>
-                      <a:srgbClr val="F5F7F9"/>
-                    </a:solidFill>
-                  </a:tcPr>
-                </a:tc>
-                <a:tc>
-                  <a:txBody>
-                    <a:bodyPr/>
-                    <a:lstStyle/>
-                    <a:p>
-                      <a:pPr>
-                        <a:defRPr sz="650" b="0">
-                          <a:solidFill>
-                            <a:srgbClr val="0D1117"/>
-                          </a:solidFill>
-                          <a:latin typeface="Inter"/>
-                        </a:defRPr>
-                      </a:pPr>
-                      <a:r>
-                        <a:rPr>
-                          <a:latin typeface="Inter"/>
-                        </a:rPr>
-                        <a:t>2026-06-30</a:t>
-                      </a:r>
-                    </a:p>
-                  </a:txBody>
-                  <a:tcPr marL="54864" marR="54864" marT="27432" marB="27432" anchor="ctr">
-                    <a:solidFill>
-                      <a:srgbClr val="F5F7F9"/>
-                    </a:solidFill>
-                  </a:tcPr>
-                </a:tc>
-                <a:tc>
-                  <a:txBody>
-                    <a:bodyPr/>
-                    <a:lstStyle/>
-                    <a:p>
-                      <a:pPr>
-                        <a:defRPr sz="650" b="0">
-                          <a:solidFill>
-                            <a:srgbClr val="0D1117"/>
-                          </a:solidFill>
-                          <a:latin typeface="Inter"/>
-                        </a:defRPr>
-                      </a:pPr>
-                      <a:r>
-                        <a:rPr>
-                          <a:latin typeface="Inter"/>
-                        </a:rPr>
-                        <a:t>Illustrative sample data</a:t>
-                      </a:r>
-                    </a:p>
-                  </a:txBody>
-                  <a:tcPr marL="54864" marR="54864" marT="27432" marB="27432" anchor="ctr">
-                    <a:solidFill>
-                      <a:srgbClr val="F5F7F9"/>
-                    </a:solidFill>
-                  </a:tcPr>
-                </a:tc>
-                <a:tc>
-                  <a:txBody>
-                    <a:bodyPr/>
-                    <a:lstStyle/>
-                    <a:p>
-                      <a:pPr>
-                        <a:defRPr sz="650" b="0">
-                          <a:solidFill>
-                            <a:srgbClr val="0D1117"/>
-                          </a:solidFill>
-                          <a:latin typeface="Inter"/>
-                        </a:defRPr>
-                      </a:pPr>
-                      <a:r>
-                        <a:rPr>
-                          <a:latin typeface="Inter"/>
-                        </a:rPr>
-                        <a:t>advisory</a:t>
-                      </a:r>
-                    </a:p>
-                  </a:txBody>
-                  <a:tcPr marL="54864" marR="54864" marT="27432" marB="27432" anchor="ctr">
-                    <a:solidFill>
-                      <a:srgbClr val="F5F7F9"/>
-                    </a:solidFill>
-                  </a:tcPr>
-                </a:tc>
-                <a:tc>
-                  <a:txBody>
-                    <a:bodyPr/>
-                    <a:lstStyle/>
-                    <a:p>
-                      <a:pPr>
-                        <a:defRPr sz="650" b="0">
-                          <a:solidFill>
-                            <a:srgbClr val="0D1117"/>
-                          </a:solidFill>
-                          <a:latin typeface="Inter"/>
-                        </a:defRPr>
-                      </a:pPr>
-                      <a:r>
-                        <a:rPr>
-                          <a:latin typeface="Inter"/>
-                        </a:rPr>
-                        <a:t>sha256:aaaaaaaaaaaaaaaaaaaaaaaaaaaaaaaaaaaaaaaaaaaaaaaaaaaaaaaaaaaaaaaa</a:t>
+                        <a:defRPr sz="720" b="1">
+                          <a:solidFill>
+                            <a:srgbClr val="F2A93B"/>
+                          </a:solidFill>
+                          <a:latin typeface="Inter"/>
+                        </a:defRPr>
+                      </a:pPr>
+                      <a:r>
+                        <a:rPr>
+                          <a:latin typeface="Inter"/>
+                        </a:rPr>
+                        <a:t>● Advisory</a:t>
                       </a:r>
                     </a:p>
                   </a:txBody>
@@ -32103,7 +30036,7 @@
       </p:graphicFrame>
       <p:sp>
         <p:nvSpPr>
-          <p:cNvPr id="9" name="TextBox 8"/>
+          <p:cNvPr id="8" name="TextBox 7"/>
           <p:cNvSpPr txBox="1"/>
           <p:nvPr/>
         </p:nvSpPr>
@@ -32145,7 +30078,7 @@
       </p:sp>
       <p:sp>
         <p:nvSpPr>
-          <p:cNvPr id="10" name="Rectangle 9"/>
+          <p:cNvPr id="9" name="Rectangle 8"/>
           <p:cNvSpPr/>
           <p:nvPr/>
         </p:nvSpPr>
@@ -32194,7 +30127,7 @@
       </p:sp>
       <p:sp>
         <p:nvSpPr>
-          <p:cNvPr id="11" name="TextBox 10"/>
+          <p:cNvPr id="10" name="TextBox 9"/>
           <p:cNvSpPr txBox="1"/>
           <p:nvPr/>
         </p:nvSpPr>
@@ -32236,7 +30169,7 @@
       </p:sp>
       <p:sp>
         <p:nvSpPr>
-          <p:cNvPr id="12" name="TextBox 11"/>
+          <p:cNvPr id="11" name="TextBox 10"/>
           <p:cNvSpPr txBox="1"/>
           <p:nvPr/>
         </p:nvSpPr>
@@ -32278,7 +30211,7 @@
       </p:sp>
       <p:sp>
         <p:nvSpPr>
-          <p:cNvPr id="13" name="TextBox 12"/>
+          <p:cNvPr id="12" name="TextBox 11"/>
           <p:cNvSpPr txBox="1"/>
           <p:nvPr/>
         </p:nvSpPr>
@@ -32393,48 +30326,6 @@
         </p:nvSpPr>
         <p:spPr>
           <a:xfrm>
-            <a:off x="5897880" y="310896"/>
-            <a:ext cx="4800600" cy="256032"/>
-          </a:xfrm>
-          <a:prstGeom prst="rect">
-            <a:avLst/>
-          </a:prstGeom>
-          <a:noFill/>
-        </p:spPr>
-        <p:txBody>
-          <a:bodyPr wrap="none" lIns="9144" rIns="9144" tIns="9144" bIns="9144" anchor="t">
-            <a:spAutoFit/>
-          </a:bodyPr>
-          <a:lstStyle/>
-          <a:p>
-            <a:pPr algn="r">
-              <a:spcAft>
-                <a:spcPts val="0"/>
-              </a:spcAft>
-              <a:defRPr sz="680" b="1">
-                <a:solidFill>
-                  <a:srgbClr val="4F6B00"/>
-                </a:solidFill>
-                <a:latin typeface="Inter"/>
-              </a:defRPr>
-            </a:pPr>
-            <a:r>
-              <a:rPr>
-                <a:latin typeface="Inter"/>
-              </a:rPr>
-              <a:t>Illustrative, Gradient Maintained — demo data, not the client's holdings or managers</a:t>
-            </a:r>
-          </a:p>
-        </p:txBody>
-      </p:sp>
-      <p:sp>
-        <p:nvSpPr>
-          <p:cNvPr id="4" name="TextBox 3"/>
-          <p:cNvSpPr txBox="1"/>
-          <p:nvPr/>
-        </p:nvSpPr>
-        <p:spPr>
-          <a:xfrm>
             <a:off x="640080" y="566928"/>
             <a:ext cx="10058400" cy="530352"/>
           </a:xfrm>
@@ -32464,14 +30355,14 @@
               <a:rPr>
                 <a:latin typeface="Inter"/>
               </a:rPr>
-              <a:t>Appendix — Server Metric Methods and Disclosures</a:t>
+              <a:t>Appendix — Sources and methods — continued</a:t>
             </a:r>
           </a:p>
         </p:txBody>
       </p:sp>
       <p:sp>
         <p:nvSpPr>
-          <p:cNvPr id="5" name="Rectangle 4"/>
+          <p:cNvPr id="4" name="Rectangle 3"/>
           <p:cNvSpPr/>
           <p:nvPr/>
         </p:nvSpPr>
@@ -32520,7 +30411,7 @@
       </p:sp>
       <p:sp>
         <p:nvSpPr>
-          <p:cNvPr id="6" name="Rectangle 5"/>
+          <p:cNvPr id="5" name="Rectangle 4"/>
           <p:cNvSpPr/>
           <p:nvPr/>
         </p:nvSpPr>
@@ -32569,7 +30460,7 @@
       </p:sp>
       <p:sp>
         <p:nvSpPr>
-          <p:cNvPr id="7" name="TextBox 6"/>
+          <p:cNvPr id="6" name="TextBox 5"/>
           <p:cNvSpPr txBox="1"/>
           <p:nvPr/>
         </p:nvSpPr>
@@ -32604,14 +30495,14 @@
               <a:rPr>
                 <a:latin typeface="Inter"/>
               </a:rPr>
-              <a:t>B</a:t>
+              <a:t>A</a:t>
             </a:r>
           </a:p>
         </p:txBody>
       </p:sp>
       <p:sp>
         <p:nvSpPr>
-          <p:cNvPr id="8" name="TextBox 7"/>
+          <p:cNvPr id="7" name="TextBox 6"/>
           <p:cNvSpPr txBox="1"/>
           <p:nvPr/>
         </p:nvSpPr>
@@ -32646,6 +30537,1288 @@
               <a:rPr>
                 <a:latin typeface="Inter"/>
               </a:rPr>
+              <a:t>SOURCE AUDIT TRAIL</a:t>
+            </a:r>
+          </a:p>
+        </p:txBody>
+      </p:sp>
+      <p:graphicFrame>
+        <p:nvGraphicFramePr>
+          <p:cNvPr id="8" name="Table 7"/>
+          <p:cNvGraphicFramePr>
+            <a:graphicFrameLocks noGrp="1"/>
+          </p:cNvGraphicFramePr>
+          <p:nvPr/>
+        </p:nvGraphicFramePr>
+        <p:xfrm>
+          <a:off x="640080" y="1600200"/>
+          <a:ext cx="10908792" cy="4416552"/>
+        </p:xfrm>
+        <a:graphic>
+          <a:graphicData uri="http://schemas.openxmlformats.org/drawingml/2006/table">
+            <a:tbl>
+              <a:tblPr firstRow="1" bandRow="1">
+                <a:tableStyleId>{5C22544A-7EE6-4342-B048-85BDC9FD1C3A}</a:tableStyleId>
+              </a:tblPr>
+              <a:tblGrid>
+                <a:gridCol w="2011680"/>
+                <a:gridCol w="4448556"/>
+                <a:gridCol w="4448556"/>
+              </a:tblGrid>
+              <a:tr h="490728">
+                <a:tc>
+                  <a:txBody>
+                    <a:bodyPr/>
+                    <a:lstStyle/>
+                    <a:p>
+                      <a:pPr>
+                        <a:defRPr sz="750" b="1">
+                          <a:solidFill>
+                            <a:srgbClr val="FFFFFF"/>
+                          </a:solidFill>
+                          <a:latin typeface="Inter"/>
+                        </a:defRPr>
+                      </a:pPr>
+                      <a:r>
+                        <a:rPr>
+                          <a:latin typeface="Inter"/>
+                        </a:rPr>
+                        <a:t>Tag</a:t>
+                      </a:r>
+                    </a:p>
+                  </a:txBody>
+                  <a:tcPr marL="54864" marR="54864" marT="27432" marB="27432" anchor="ctr">
+                    <a:solidFill>
+                      <a:srgbClr val="0D1117"/>
+                    </a:solidFill>
+                  </a:tcPr>
+                </a:tc>
+                <a:tc>
+                  <a:txBody>
+                    <a:bodyPr/>
+                    <a:lstStyle/>
+                    <a:p>
+                      <a:pPr>
+                        <a:defRPr sz="750" b="1">
+                          <a:solidFill>
+                            <a:srgbClr val="FFFFFF"/>
+                          </a:solidFill>
+                          <a:latin typeface="Inter"/>
+                        </a:defRPr>
+                      </a:pPr>
+                      <a:r>
+                        <a:rPr>
+                          <a:latin typeface="Inter"/>
+                        </a:rPr>
+                        <a:t>Key parameters</a:t>
+                      </a:r>
+                    </a:p>
+                  </a:txBody>
+                  <a:tcPr marL="54864" marR="54864" marT="27432" marB="27432" anchor="ctr">
+                    <a:solidFill>
+                      <a:srgbClr val="0D1117"/>
+                    </a:solidFill>
+                  </a:tcPr>
+                </a:tc>
+                <a:tc>
+                  <a:txBody>
+                    <a:bodyPr/>
+                    <a:lstStyle/>
+                    <a:p>
+                      <a:pPr>
+                        <a:defRPr sz="750" b="1">
+                          <a:solidFill>
+                            <a:srgbClr val="FFFFFF"/>
+                          </a:solidFill>
+                          <a:latin typeface="Inter"/>
+                        </a:defRPr>
+                      </a:pPr>
+                      <a:r>
+                        <a:rPr>
+                          <a:latin typeface="Inter"/>
+                        </a:rPr>
+                        <a:t>Digest</a:t>
+                      </a:r>
+                    </a:p>
+                  </a:txBody>
+                  <a:tcPr marL="54864" marR="54864" marT="27432" marB="27432" anchor="ctr">
+                    <a:solidFill>
+                      <a:srgbClr val="0D1117"/>
+                    </a:solidFill>
+                  </a:tcPr>
+                </a:tc>
+              </a:tr>
+              <a:tr h="490728">
+                <a:tc>
+                  <a:txBody>
+                    <a:bodyPr/>
+                    <a:lstStyle/>
+                    <a:p>
+                      <a:pPr>
+                        <a:defRPr sz="800" b="1">
+                          <a:solidFill>
+                            <a:srgbClr val="0D1117"/>
+                          </a:solidFill>
+                          <a:latin typeface="Inter"/>
+                        </a:defRPr>
+                      </a:pPr>
+                      <a:r>
+                        <a:rPr>
+                          <a:latin typeface="Inter"/>
+                        </a:rPr>
+                        <a:t>S1</a:t>
+                      </a:r>
+                    </a:p>
+                  </a:txBody>
+                  <a:tcPr marL="54864" marR="54864" marT="27432" marB="27432" anchor="ctr">
+                    <a:solidFill>
+                      <a:srgbClr val="FFFFFF"/>
+                    </a:solidFill>
+                  </a:tcPr>
+                </a:tc>
+                <a:tc>
+                  <a:txBody>
+                    <a:bodyPr/>
+                    <a:lstStyle/>
+                    <a:p>
+                      <a:pPr>
+                        <a:defRPr sz="800" b="0">
+                          <a:solidFill>
+                            <a:srgbClr val="0D1117"/>
+                          </a:solidFill>
+                          <a:latin typeface="Inter"/>
+                        </a:defRPr>
+                      </a:pPr>
+                      <a:r>
+                        <a:rPr>
+                          <a:latin typeface="Inter"/>
+                        </a:rPr>
+                        <a:t>organization=test</a:t>
+                      </a:r>
+                    </a:p>
+                  </a:txBody>
+                  <a:tcPr marL="54864" marR="54864" marT="27432" marB="27432" anchor="ctr">
+                    <a:solidFill>
+                      <a:srgbClr val="FFFFFF"/>
+                    </a:solidFill>
+                  </a:tcPr>
+                </a:tc>
+                <a:tc>
+                  <a:txBody>
+                    <a:bodyPr/>
+                    <a:lstStyle/>
+                    <a:p>
+                      <a:pPr>
+                        <a:defRPr sz="800" b="0">
+                          <a:solidFill>
+                            <a:srgbClr val="0D1117"/>
+                          </a:solidFill>
+                          <a:latin typeface="Inter"/>
+                        </a:defRPr>
+                      </a:pPr>
+                      <a:r>
+                        <a:rPr>
+                          <a:latin typeface="Inter"/>
+                        </a:rPr>
+                        <a:t>sha256:aaaaaaaaaaaaaaaaaaaaaaaaaaaaaaaaaaaaaaaaaaaaaaaaaaaaaaaaaaaaaaaa</a:t>
+                      </a:r>
+                    </a:p>
+                  </a:txBody>
+                  <a:tcPr marL="54864" marR="54864" marT="27432" marB="27432" anchor="ctr">
+                    <a:solidFill>
+                      <a:srgbClr val="FFFFFF"/>
+                    </a:solidFill>
+                  </a:tcPr>
+                </a:tc>
+              </a:tr>
+              <a:tr h="490728">
+                <a:tc>
+                  <a:txBody>
+                    <a:bodyPr/>
+                    <a:lstStyle/>
+                    <a:p>
+                      <a:pPr>
+                        <a:defRPr sz="800" b="1">
+                          <a:solidFill>
+                            <a:srgbClr val="0D1117"/>
+                          </a:solidFill>
+                          <a:latin typeface="Inter"/>
+                        </a:defRPr>
+                      </a:pPr>
+                      <a:r>
+                        <a:rPr>
+                          <a:latin typeface="Inter"/>
+                        </a:rPr>
+                        <a:t>S2</a:t>
+                      </a:r>
+                    </a:p>
+                  </a:txBody>
+                  <a:tcPr marL="54864" marR="54864" marT="27432" marB="27432" anchor="ctr">
+                    <a:solidFill>
+                      <a:srgbClr val="F5F7F9"/>
+                    </a:solidFill>
+                  </a:tcPr>
+                </a:tc>
+                <a:tc>
+                  <a:txBody>
+                    <a:bodyPr/>
+                    <a:lstStyle/>
+                    <a:p>
+                      <a:pPr>
+                        <a:defRPr sz="800" b="0">
+                          <a:solidFill>
+                            <a:srgbClr val="0D1117"/>
+                          </a:solidFill>
+                          <a:latin typeface="Inter"/>
+                        </a:defRPr>
+                      </a:pPr>
+                      <a:r>
+                        <a:rPr>
+                          <a:latin typeface="Inter"/>
+                        </a:rPr>
+                        <a:t>allocation_tree</a:t>
+                      </a:r>
+                    </a:p>
+                  </a:txBody>
+                  <a:tcPr marL="54864" marR="54864" marT="27432" marB="27432" anchor="ctr">
+                    <a:solidFill>
+                      <a:srgbClr val="F5F7F9"/>
+                    </a:solidFill>
+                  </a:tcPr>
+                </a:tc>
+                <a:tc>
+                  <a:txBody>
+                    <a:bodyPr/>
+                    <a:lstStyle/>
+                    <a:p>
+                      <a:pPr>
+                        <a:defRPr sz="800" b="0">
+                          <a:solidFill>
+                            <a:srgbClr val="0D1117"/>
+                          </a:solidFill>
+                          <a:latin typeface="Inter"/>
+                        </a:defRPr>
+                      </a:pPr>
+                      <a:r>
+                        <a:rPr>
+                          <a:latin typeface="Inter"/>
+                        </a:rPr>
+                        <a:t>sha256:aaaaaaaaaaaaaaaaaaaaaaaaaaaaaaaaaaaaaaaaaaaaaaaaaaaaaaaaaaaaaaaa</a:t>
+                      </a:r>
+                    </a:p>
+                  </a:txBody>
+                  <a:tcPr marL="54864" marR="54864" marT="27432" marB="27432" anchor="ctr">
+                    <a:solidFill>
+                      <a:srgbClr val="F5F7F9"/>
+                    </a:solidFill>
+                  </a:tcPr>
+                </a:tc>
+              </a:tr>
+              <a:tr h="490728">
+                <a:tc>
+                  <a:txBody>
+                    <a:bodyPr/>
+                    <a:lstStyle/>
+                    <a:p>
+                      <a:pPr>
+                        <a:defRPr sz="800" b="1">
+                          <a:solidFill>
+                            <a:srgbClr val="0D1117"/>
+                          </a:solidFill>
+                          <a:latin typeface="Inter"/>
+                        </a:defRPr>
+                      </a:pPr>
+                      <a:r>
+                        <a:rPr>
+                          <a:latin typeface="Inter"/>
+                        </a:rPr>
+                        <a:t>S3</a:t>
+                      </a:r>
+                    </a:p>
+                  </a:txBody>
+                  <a:tcPr marL="54864" marR="54864" marT="27432" marB="27432" anchor="ctr">
+                    <a:solidFill>
+                      <a:srgbClr val="FFFFFF"/>
+                    </a:solidFill>
+                  </a:tcPr>
+                </a:tc>
+                <a:tc>
+                  <a:txBody>
+                    <a:bodyPr/>
+                    <a:lstStyle/>
+                    <a:p>
+                      <a:pPr>
+                        <a:defRPr sz="800" b="0">
+                          <a:solidFill>
+                            <a:srgbClr val="0D1117"/>
+                          </a:solidFill>
+                          <a:latin typeface="Inter"/>
+                        </a:defRPr>
+                      </a:pPr>
+                      <a:r>
+                        <a:rPr>
+                          <a:latin typeface="Inter"/>
+                        </a:rPr>
+                        <a:t>portfolio=test</a:t>
+                      </a:r>
+                    </a:p>
+                  </a:txBody>
+                  <a:tcPr marL="54864" marR="54864" marT="27432" marB="27432" anchor="ctr">
+                    <a:solidFill>
+                      <a:srgbClr val="FFFFFF"/>
+                    </a:solidFill>
+                  </a:tcPr>
+                </a:tc>
+                <a:tc>
+                  <a:txBody>
+                    <a:bodyPr/>
+                    <a:lstStyle/>
+                    <a:p>
+                      <a:pPr>
+                        <a:defRPr sz="800" b="0">
+                          <a:solidFill>
+                            <a:srgbClr val="0D1117"/>
+                          </a:solidFill>
+                          <a:latin typeface="Inter"/>
+                        </a:defRPr>
+                      </a:pPr>
+                      <a:r>
+                        <a:rPr>
+                          <a:latin typeface="Inter"/>
+                        </a:rPr>
+                        <a:t>sha256:aaaaaaaaaaaaaaaaaaaaaaaaaaaaaaaaaaaaaaaaaaaaaaaaaaaaaaaaaaaaaaaa</a:t>
+                      </a:r>
+                    </a:p>
+                  </a:txBody>
+                  <a:tcPr marL="54864" marR="54864" marT="27432" marB="27432" anchor="ctr">
+                    <a:solidFill>
+                      <a:srgbClr val="FFFFFF"/>
+                    </a:solidFill>
+                  </a:tcPr>
+                </a:tc>
+              </a:tr>
+              <a:tr h="490728">
+                <a:tc>
+                  <a:txBody>
+                    <a:bodyPr/>
+                    <a:lstStyle/>
+                    <a:p>
+                      <a:pPr>
+                        <a:defRPr sz="800" b="1">
+                          <a:solidFill>
+                            <a:srgbClr val="0D1117"/>
+                          </a:solidFill>
+                          <a:latin typeface="Inter"/>
+                        </a:defRPr>
+                      </a:pPr>
+                      <a:r>
+                        <a:rPr>
+                          <a:latin typeface="Inter"/>
+                        </a:rPr>
+                        <a:t>S4</a:t>
+                      </a:r>
+                    </a:p>
+                  </a:txBody>
+                  <a:tcPr marL="54864" marR="54864" marT="27432" marB="27432" anchor="ctr">
+                    <a:solidFill>
+                      <a:srgbClr val="F5F7F9"/>
+                    </a:solidFill>
+                  </a:tcPr>
+                </a:tc>
+                <a:tc>
+                  <a:txBody>
+                    <a:bodyPr/>
+                    <a:lstStyle/>
+                    <a:p>
+                      <a:pPr>
+                        <a:defRPr sz="800" b="0">
+                          <a:solidFill>
+                            <a:srgbClr val="0D1117"/>
+                          </a:solidFill>
+                          <a:latin typeface="Inter"/>
+                        </a:defRPr>
+                      </a:pPr>
+                      <a:r>
+                        <a:rPr>
+                          <a:latin typeface="Inter"/>
+                        </a:rPr>
+                        <a:t>all pages</a:t>
+                      </a:r>
+                    </a:p>
+                  </a:txBody>
+                  <a:tcPr marL="54864" marR="54864" marT="27432" marB="27432" anchor="ctr">
+                    <a:solidFill>
+                      <a:srgbClr val="F5F7F9"/>
+                    </a:solidFill>
+                  </a:tcPr>
+                </a:tc>
+                <a:tc>
+                  <a:txBody>
+                    <a:bodyPr/>
+                    <a:lstStyle/>
+                    <a:p>
+                      <a:pPr>
+                        <a:defRPr sz="800" b="0">
+                          <a:solidFill>
+                            <a:srgbClr val="0D1117"/>
+                          </a:solidFill>
+                          <a:latin typeface="Inter"/>
+                        </a:defRPr>
+                      </a:pPr>
+                      <a:r>
+                        <a:rPr>
+                          <a:latin typeface="Inter"/>
+                        </a:rPr>
+                        <a:t>sha256:aaaaaaaaaaaaaaaaaaaaaaaaaaaaaaaaaaaaaaaaaaaaaaaaaaaaaaaaaaaaaaaa</a:t>
+                      </a:r>
+                    </a:p>
+                  </a:txBody>
+                  <a:tcPr marL="54864" marR="54864" marT="27432" marB="27432" anchor="ctr">
+                    <a:solidFill>
+                      <a:srgbClr val="F5F7F9"/>
+                    </a:solidFill>
+                  </a:tcPr>
+                </a:tc>
+              </a:tr>
+              <a:tr h="490728">
+                <a:tc>
+                  <a:txBody>
+                    <a:bodyPr/>
+                    <a:lstStyle/>
+                    <a:p>
+                      <a:pPr>
+                        <a:defRPr sz="800" b="1">
+                          <a:solidFill>
+                            <a:srgbClr val="0D1117"/>
+                          </a:solidFill>
+                          <a:latin typeface="Inter"/>
+                        </a:defRPr>
+                      </a:pPr>
+                      <a:r>
+                        <a:rPr>
+                          <a:latin typeface="Inter"/>
+                        </a:rPr>
+                        <a:t>S5</a:t>
+                      </a:r>
+                    </a:p>
+                  </a:txBody>
+                  <a:tcPr marL="54864" marR="54864" marT="27432" marB="27432" anchor="ctr">
+                    <a:solidFill>
+                      <a:srgbClr val="FFFFFF"/>
+                    </a:solidFill>
+                  </a:tcPr>
+                </a:tc>
+                <a:tc>
+                  <a:txBody>
+                    <a:bodyPr/>
+                    <a:lstStyle/>
+                    <a:p>
+                      <a:pPr>
+                        <a:defRPr sz="800" b="0">
+                          <a:solidFill>
+                            <a:srgbClr val="0D1117"/>
+                          </a:solidFill>
+                          <a:latin typeface="Inter"/>
+                        </a:defRPr>
+                      </a:pPr>
+                      <a:r>
+                        <a:rPr>
+                          <a:latin typeface="Inter"/>
+                        </a:rPr>
+                        <a:t>all sections</a:t>
+                      </a:r>
+                    </a:p>
+                  </a:txBody>
+                  <a:tcPr marL="54864" marR="54864" marT="27432" marB="27432" anchor="ctr">
+                    <a:solidFill>
+                      <a:srgbClr val="FFFFFF"/>
+                    </a:solidFill>
+                  </a:tcPr>
+                </a:tc>
+                <a:tc>
+                  <a:txBody>
+                    <a:bodyPr/>
+                    <a:lstStyle/>
+                    <a:p>
+                      <a:pPr>
+                        <a:defRPr sz="800" b="0">
+                          <a:solidFill>
+                            <a:srgbClr val="0D1117"/>
+                          </a:solidFill>
+                          <a:latin typeface="Inter"/>
+                        </a:defRPr>
+                      </a:pPr>
+                      <a:r>
+                        <a:rPr>
+                          <a:latin typeface="Inter"/>
+                        </a:rPr>
+                        <a:t>sha256:aaaaaaaaaaaaaaaaaaaaaaaaaaaaaaaaaaaaaaaaaaaaaaaaaaaaaaaaaaaaaaaa</a:t>
+                      </a:r>
+                    </a:p>
+                  </a:txBody>
+                  <a:tcPr marL="54864" marR="54864" marT="27432" marB="27432" anchor="ctr">
+                    <a:solidFill>
+                      <a:srgbClr val="FFFFFF"/>
+                    </a:solidFill>
+                  </a:tcPr>
+                </a:tc>
+              </a:tr>
+              <a:tr h="490728">
+                <a:tc>
+                  <a:txBody>
+                    <a:bodyPr/>
+                    <a:lstStyle/>
+                    <a:p>
+                      <a:pPr>
+                        <a:defRPr sz="800" b="1">
+                          <a:solidFill>
+                            <a:srgbClr val="0D1117"/>
+                          </a:solidFill>
+                          <a:latin typeface="Inter"/>
+                        </a:defRPr>
+                      </a:pPr>
+                      <a:r>
+                        <a:rPr>
+                          <a:latin typeface="Inter"/>
+                        </a:rPr>
+                        <a:t>S6</a:t>
+                      </a:r>
+                    </a:p>
+                  </a:txBody>
+                  <a:tcPr marL="54864" marR="54864" marT="27432" marB="27432" anchor="ctr">
+                    <a:solidFill>
+                      <a:srgbClr val="F5F7F9"/>
+                    </a:solidFill>
+                  </a:tcPr>
+                </a:tc>
+                <a:tc>
+                  <a:txBody>
+                    <a:bodyPr/>
+                    <a:lstStyle/>
+                    <a:p>
+                      <a:pPr>
+                        <a:defRPr sz="800" b="0">
+                          <a:solidFill>
+                            <a:srgbClr val="0D1117"/>
+                          </a:solidFill>
+                          <a:latin typeface="Inter"/>
+                        </a:defRPr>
+                      </a:pPr>
+                      <a:r>
+                        <a:rPr>
+                          <a:latin typeface="Inter"/>
+                        </a:rPr>
+                        <a:t>baseline</a:t>
+                      </a:r>
+                    </a:p>
+                  </a:txBody>
+                  <a:tcPr marL="54864" marR="54864" marT="27432" marB="27432" anchor="ctr">
+                    <a:solidFill>
+                      <a:srgbClr val="F5F7F9"/>
+                    </a:solidFill>
+                  </a:tcPr>
+                </a:tc>
+                <a:tc>
+                  <a:txBody>
+                    <a:bodyPr/>
+                    <a:lstStyle/>
+                    <a:p>
+                      <a:pPr>
+                        <a:defRPr sz="800" b="0">
+                          <a:solidFill>
+                            <a:srgbClr val="0D1117"/>
+                          </a:solidFill>
+                          <a:latin typeface="Inter"/>
+                        </a:defRPr>
+                      </a:pPr>
+                      <a:r>
+                        <a:rPr>
+                          <a:latin typeface="Inter"/>
+                        </a:rPr>
+                        <a:t>sha256:aaaaaaaaaaaaaaaaaaaaaaaaaaaaaaaaaaaaaaaaaaaaaaaaaaaaaaaaaaaaaaaa</a:t>
+                      </a:r>
+                    </a:p>
+                  </a:txBody>
+                  <a:tcPr marL="54864" marR="54864" marT="27432" marB="27432" anchor="ctr">
+                    <a:solidFill>
+                      <a:srgbClr val="F5F7F9"/>
+                    </a:solidFill>
+                  </a:tcPr>
+                </a:tc>
+              </a:tr>
+              <a:tr h="490728">
+                <a:tc>
+                  <a:txBody>
+                    <a:bodyPr/>
+                    <a:lstStyle/>
+                    <a:p>
+                      <a:pPr>
+                        <a:defRPr sz="800" b="1">
+                          <a:solidFill>
+                            <a:srgbClr val="0D1117"/>
+                          </a:solidFill>
+                          <a:latin typeface="Inter"/>
+                        </a:defRPr>
+                      </a:pPr>
+                      <a:r>
+                        <a:rPr>
+                          <a:latin typeface="Inter"/>
+                        </a:rPr>
+                        <a:t>S7</a:t>
+                      </a:r>
+                    </a:p>
+                  </a:txBody>
+                  <a:tcPr marL="54864" marR="54864" marT="27432" marB="27432" anchor="ctr">
+                    <a:solidFill>
+                      <a:srgbClr val="FFFFFF"/>
+                    </a:solidFill>
+                  </a:tcPr>
+                </a:tc>
+                <a:tc>
+                  <a:txBody>
+                    <a:bodyPr/>
+                    <a:lstStyle/>
+                    <a:p>
+                      <a:pPr>
+                        <a:defRPr sz="800" b="0">
+                          <a:solidFill>
+                            <a:srgbClr val="0D1117"/>
+                          </a:solidFill>
+                          <a:latin typeface="Inter"/>
+                        </a:defRPr>
+                      </a:pPr>
+                      <a:r>
+                        <a:rPr>
+                          <a:latin typeface="Inter"/>
+                        </a:rPr>
+                        <a:t>illustrative</a:t>
+                      </a:r>
+                    </a:p>
+                  </a:txBody>
+                  <a:tcPr marL="54864" marR="54864" marT="27432" marB="27432" anchor="ctr">
+                    <a:solidFill>
+                      <a:srgbClr val="FFFFFF"/>
+                    </a:solidFill>
+                  </a:tcPr>
+                </a:tc>
+                <a:tc>
+                  <a:txBody>
+                    <a:bodyPr/>
+                    <a:lstStyle/>
+                    <a:p>
+                      <a:pPr>
+                        <a:defRPr sz="800" b="0">
+                          <a:solidFill>
+                            <a:srgbClr val="0D1117"/>
+                          </a:solidFill>
+                          <a:latin typeface="Inter"/>
+                        </a:defRPr>
+                      </a:pPr>
+                      <a:r>
+                        <a:rPr>
+                          <a:latin typeface="Inter"/>
+                        </a:rPr>
+                        <a:t>sha256:aaaaaaaaaaaaaaaaaaaaaaaaaaaaaaaaaaaaaaaaaaaaaaaaaaaaaaaaaaaaaaaa</a:t>
+                      </a:r>
+                    </a:p>
+                  </a:txBody>
+                  <a:tcPr marL="54864" marR="54864" marT="27432" marB="27432" anchor="ctr">
+                    <a:solidFill>
+                      <a:srgbClr val="FFFFFF"/>
+                    </a:solidFill>
+                  </a:tcPr>
+                </a:tc>
+              </a:tr>
+              <a:tr h="490728">
+                <a:tc>
+                  <a:txBody>
+                    <a:bodyPr/>
+                    <a:lstStyle/>
+                    <a:p>
+                      <a:pPr>
+                        <a:defRPr sz="800" b="1">
+                          <a:solidFill>
+                            <a:srgbClr val="0D1117"/>
+                          </a:solidFill>
+                          <a:latin typeface="Inter"/>
+                        </a:defRPr>
+                      </a:pPr>
+                      <a:r>
+                        <a:rPr>
+                          <a:latin typeface="Inter"/>
+                        </a:rPr>
+                        <a:t>S8</a:t>
+                      </a:r>
+                    </a:p>
+                  </a:txBody>
+                  <a:tcPr marL="54864" marR="54864" marT="27432" marB="27432" anchor="ctr">
+                    <a:solidFill>
+                      <a:srgbClr val="F5F7F9"/>
+                    </a:solidFill>
+                  </a:tcPr>
+                </a:tc>
+                <a:tc>
+                  <a:txBody>
+                    <a:bodyPr/>
+                    <a:lstStyle/>
+                    <a:p>
+                      <a:pPr>
+                        <a:defRPr sz="800" b="0">
+                          <a:solidFill>
+                            <a:srgbClr val="0D1117"/>
+                          </a:solidFill>
+                          <a:latin typeface="Inter"/>
+                        </a:defRPr>
+                      </a:pPr>
+                      <a:r>
+                        <a:rPr>
+                          <a:latin typeface="Inter"/>
+                        </a:rPr>
+                        <a:t>illustrative</a:t>
+                      </a:r>
+                    </a:p>
+                  </a:txBody>
+                  <a:tcPr marL="54864" marR="54864" marT="27432" marB="27432" anchor="ctr">
+                    <a:solidFill>
+                      <a:srgbClr val="F5F7F9"/>
+                    </a:solidFill>
+                  </a:tcPr>
+                </a:tc>
+                <a:tc>
+                  <a:txBody>
+                    <a:bodyPr/>
+                    <a:lstStyle/>
+                    <a:p>
+                      <a:pPr>
+                        <a:defRPr sz="800" b="0">
+                          <a:solidFill>
+                            <a:srgbClr val="0D1117"/>
+                          </a:solidFill>
+                          <a:latin typeface="Inter"/>
+                        </a:defRPr>
+                      </a:pPr>
+                      <a:r>
+                        <a:rPr>
+                          <a:latin typeface="Inter"/>
+                        </a:rPr>
+                        <a:t>sha256:aaaaaaaaaaaaaaaaaaaaaaaaaaaaaaaaaaaaaaaaaaaaaaaaaaaaaaaaaaaaaaaa</a:t>
+                      </a:r>
+                    </a:p>
+                  </a:txBody>
+                  <a:tcPr marL="54864" marR="54864" marT="27432" marB="27432" anchor="ctr">
+                    <a:solidFill>
+                      <a:srgbClr val="F5F7F9"/>
+                    </a:solidFill>
+                  </a:tcPr>
+                </a:tc>
+              </a:tr>
+            </a:tbl>
+          </a:graphicData>
+        </a:graphic>
+      </p:graphicFrame>
+      <p:sp>
+        <p:nvSpPr>
+          <p:cNvPr id="9" name="TextBox 8"/>
+          <p:cNvSpPr txBox="1"/>
+          <p:nvPr/>
+        </p:nvSpPr>
+        <p:spPr>
+          <a:xfrm>
+            <a:off x="640080" y="6035040"/>
+            <a:ext cx="10908792" cy="164592"/>
+          </a:xfrm>
+          <a:prstGeom prst="rect">
+            <a:avLst/>
+          </a:prstGeom>
+          <a:noFill/>
+        </p:spPr>
+        <p:txBody>
+          <a:bodyPr wrap="none" lIns="9144" rIns="9144" tIns="9144" bIns="9144" anchor="t">
+            <a:spAutoFit/>
+          </a:bodyPr>
+          <a:lstStyle/>
+          <a:p>
+            <a:pPr algn="l">
+              <a:spcAft>
+                <a:spcPts val="0"/>
+              </a:spcAft>
+              <a:defRPr sz="680" b="0">
+                <a:solidFill>
+                  <a:srgbClr val="8A94A1"/>
+                </a:solidFill>
+                <a:latin typeface="Inter"/>
+              </a:defRPr>
+            </a:pPr>
+            <a:r>
+              <a:rPr>
+                <a:latin typeface="Inter"/>
+              </a:rPr>
+              <a:t>Data scope for every source: Illustrative sample data. Each digest is the SHA-256 fingerprint of the exact data the report used.</a:t>
+            </a:r>
+          </a:p>
+        </p:txBody>
+      </p:sp>
+      <p:sp>
+        <p:nvSpPr>
+          <p:cNvPr id="10" name="Rectangle 9"/>
+          <p:cNvSpPr/>
+          <p:nvPr/>
+        </p:nvSpPr>
+        <p:spPr>
+          <a:xfrm>
+            <a:off x="640080" y="6446520"/>
+            <a:ext cx="10908792" cy="9144"/>
+          </a:xfrm>
+          <a:prstGeom prst="rect">
+            <a:avLst/>
+          </a:prstGeom>
+          <a:solidFill>
+            <a:srgbClr val="E3E7EC"/>
+          </a:solidFill>
+          <a:ln>
+            <a:solidFill>
+              <a:srgbClr val="E3E7EC"/>
+            </a:solidFill>
+          </a:ln>
+        </p:spPr>
+        <p:style>
+          <a:lnRef idx="1">
+            <a:schemeClr val="accent1"/>
+          </a:lnRef>
+          <a:fillRef idx="3">
+            <a:schemeClr val="accent1"/>
+          </a:fillRef>
+          <a:effectRef idx="2">
+            <a:schemeClr val="accent1"/>
+          </a:effectRef>
+          <a:fontRef idx="minor">
+            <a:schemeClr val="lt1"/>
+          </a:fontRef>
+        </p:style>
+        <p:txBody>
+          <a:bodyPr rtlCol="0" anchor="ctr"/>
+          <a:lstStyle/>
+          <a:p>
+            <a:pPr algn="ctr">
+              <a:defRPr>
+                <a:latin typeface="Inter"/>
+              </a:defRPr>
+            </a:pPr>
+          </a:p>
+        </p:txBody>
+      </p:sp>
+      <p:sp>
+        <p:nvSpPr>
+          <p:cNvPr id="11" name="TextBox 10"/>
+          <p:cNvSpPr txBox="1"/>
+          <p:nvPr/>
+        </p:nvSpPr>
+        <p:spPr>
+          <a:xfrm>
+            <a:off x="640080" y="6501384"/>
+            <a:ext cx="4297680" cy="146304"/>
+          </a:xfrm>
+          <a:prstGeom prst="rect">
+            <a:avLst/>
+          </a:prstGeom>
+          <a:noFill/>
+        </p:spPr>
+        <p:txBody>
+          <a:bodyPr wrap="none" lIns="9144" rIns="9144" tIns="9144" bIns="9144" anchor="t">
+            <a:spAutoFit/>
+          </a:bodyPr>
+          <a:lstStyle/>
+          <a:p>
+            <a:pPr algn="l">
+              <a:spcAft>
+                <a:spcPts val="0"/>
+              </a:spcAft>
+              <a:defRPr sz="650" b="0">
+                <a:solidFill>
+                  <a:srgbClr val="8A94A1"/>
+                </a:solidFill>
+                <a:latin typeface="Inter"/>
+              </a:defRPr>
+            </a:pPr>
+            <a:r>
+              <a:rPr>
+                <a:latin typeface="Inter"/>
+              </a:rPr>
+              <a:t>Sources: S1 · S2 · S3 · S4 · S5 · S6 · S7 · S8</a:t>
+            </a:r>
+          </a:p>
+        </p:txBody>
+      </p:sp>
+      <p:sp>
+        <p:nvSpPr>
+          <p:cNvPr id="12" name="TextBox 11"/>
+          <p:cNvSpPr txBox="1"/>
+          <p:nvPr/>
+        </p:nvSpPr>
+        <p:spPr>
+          <a:xfrm>
+            <a:off x="4480560" y="6501384"/>
+            <a:ext cx="5303520" cy="146304"/>
+          </a:xfrm>
+          <a:prstGeom prst="rect">
+            <a:avLst/>
+          </a:prstGeom>
+          <a:noFill/>
+        </p:spPr>
+        <p:txBody>
+          <a:bodyPr wrap="none" lIns="9144" rIns="9144" tIns="9144" bIns="9144" anchor="t">
+            <a:spAutoFit/>
+          </a:bodyPr>
+          <a:lstStyle/>
+          <a:p>
+            <a:pPr algn="ctr">
+              <a:spcAft>
+                <a:spcPts val="0"/>
+              </a:spcAft>
+              <a:defRPr sz="650" b="0">
+                <a:solidFill>
+                  <a:srgbClr val="8A94A1"/>
+                </a:solidFill>
+                <a:latin typeface="Inter"/>
+              </a:defRPr>
+            </a:pPr>
+            <a:r>
+              <a:rPr>
+                <a:latin typeface="Inter"/>
+              </a:rPr>
+              <a:t>Confidential — Investment Committee · Data as of 2026-06-30</a:t>
+            </a:r>
+          </a:p>
+        </p:txBody>
+      </p:sp>
+      <p:sp>
+        <p:nvSpPr>
+          <p:cNvPr id="13" name="TextBox 12"/>
+          <p:cNvSpPr txBox="1"/>
+          <p:nvPr/>
+        </p:nvSpPr>
+        <p:spPr>
+          <a:xfrm>
+            <a:off x="10287000" y="6501384"/>
+            <a:ext cx="1261872" cy="146304"/>
+          </a:xfrm>
+          <a:prstGeom prst="rect">
+            <a:avLst/>
+          </a:prstGeom>
+          <a:noFill/>
+        </p:spPr>
+        <p:txBody>
+          <a:bodyPr wrap="none" lIns="9144" rIns="9144" tIns="9144" bIns="9144" anchor="t">
+            <a:spAutoFit/>
+          </a:bodyPr>
+          <a:lstStyle/>
+          <a:p>
+            <a:pPr algn="r">
+              <a:spcAft>
+                <a:spcPts val="0"/>
+              </a:spcAft>
+              <a:defRPr sz="650" b="0">
+                <a:solidFill>
+                  <a:srgbClr val="8A94A1"/>
+                </a:solidFill>
+                <a:latin typeface="Inter"/>
+              </a:defRPr>
+            </a:pPr>
+            <a:r>
+              <a:rPr>
+                <a:latin typeface="Inter"/>
+              </a:rPr>
+              <a:t>31</a:t>
+            </a:r>
+          </a:p>
+        </p:txBody>
+      </p:sp>
+    </p:spTree>
+  </p:cSld>
+  <p:clrMapOvr>
+    <a:masterClrMapping/>
+  </p:clrMapOvr>
+</p:sld>
+</file>
+
+<file path=ppt/slides/slide32.xml><?xml version="1.0" encoding="utf-8"?>
+<p:sld xmlns:a="http://schemas.openxmlformats.org/drawingml/2006/main" xmlns:p="http://schemas.openxmlformats.org/presentationml/2006/main" xmlns:r="http://schemas.openxmlformats.org/officeDocument/2006/relationships">
+  <p:cSld>
+    <p:spTree>
+      <p:nvGrpSpPr>
+        <p:cNvPr id="1" name=""/>
+        <p:cNvGrpSpPr/>
+        <p:nvPr/>
+      </p:nvGrpSpPr>
+      <p:grpSpPr/>
+      <p:sp>
+        <p:nvSpPr>
+          <p:cNvPr id="2" name="Rectangle 1"/>
+          <p:cNvSpPr/>
+          <p:nvPr/>
+        </p:nvSpPr>
+        <p:spPr>
+          <a:xfrm>
+            <a:off x="0" y="0"/>
+            <a:ext cx="12191695" cy="6858000"/>
+          </a:xfrm>
+          <a:prstGeom prst="rect">
+            <a:avLst/>
+          </a:prstGeom>
+          <a:solidFill>
+            <a:srgbClr val="FFFFFF"/>
+          </a:solidFill>
+          <a:ln>
+            <a:solidFill>
+              <a:srgbClr val="FFFFFF"/>
+            </a:solidFill>
+          </a:ln>
+        </p:spPr>
+        <p:style>
+          <a:lnRef idx="1">
+            <a:schemeClr val="accent1"/>
+          </a:lnRef>
+          <a:fillRef idx="3">
+            <a:schemeClr val="accent1"/>
+          </a:fillRef>
+          <a:effectRef idx="2">
+            <a:schemeClr val="accent1"/>
+          </a:effectRef>
+          <a:fontRef idx="minor">
+            <a:schemeClr val="lt1"/>
+          </a:fontRef>
+        </p:style>
+        <p:txBody>
+          <a:bodyPr rtlCol="0" anchor="ctr"/>
+          <a:lstStyle/>
+          <a:p>
+            <a:pPr algn="ctr">
+              <a:defRPr>
+                <a:latin typeface="Inter"/>
+              </a:defRPr>
+            </a:pPr>
+          </a:p>
+        </p:txBody>
+      </p:sp>
+      <p:sp>
+        <p:nvSpPr>
+          <p:cNvPr id="3" name="TextBox 2"/>
+          <p:cNvSpPr txBox="1"/>
+          <p:nvPr/>
+        </p:nvSpPr>
+        <p:spPr>
+          <a:xfrm>
+            <a:off x="640080" y="566928"/>
+            <a:ext cx="10058400" cy="530352"/>
+          </a:xfrm>
+          <a:prstGeom prst="rect">
+            <a:avLst/>
+          </a:prstGeom>
+          <a:noFill/>
+        </p:spPr>
+        <p:txBody>
+          <a:bodyPr wrap="none" lIns="9144" rIns="9144" tIns="9144" bIns="9144" anchor="t">
+            <a:spAutoFit/>
+          </a:bodyPr>
+          <a:lstStyle/>
+          <a:p>
+            <a:pPr algn="l">
+              <a:spcAft>
+                <a:spcPts val="0"/>
+              </a:spcAft>
+              <a:defRPr sz="2300" b="1">
+                <a:solidFill>
+                  <a:srgbClr val="0D1117"/>
+                </a:solidFill>
+                <a:latin typeface="Inter"/>
+              </a:defRPr>
+            </a:pPr>
+            <a:r>
+              <a:rPr>
+                <a:latin typeface="Inter"/>
+              </a:rPr>
+              <a:t>Appendix — Server Metric Methods and Disclosures</a:t>
+            </a:r>
+          </a:p>
+        </p:txBody>
+      </p:sp>
+      <p:sp>
+        <p:nvSpPr>
+          <p:cNvPr id="4" name="Rectangle 3"/>
+          <p:cNvSpPr/>
+          <p:nvPr/>
+        </p:nvSpPr>
+        <p:spPr>
+          <a:xfrm>
+            <a:off x="640080" y="1115568"/>
+            <a:ext cx="10908792" cy="18288"/>
+          </a:xfrm>
+          <a:prstGeom prst="rect">
+            <a:avLst/>
+          </a:prstGeom>
+          <a:solidFill>
+            <a:srgbClr val="0D1117"/>
+          </a:solidFill>
+          <a:ln>
+            <a:solidFill>
+              <a:srgbClr val="0D1117"/>
+            </a:solidFill>
+          </a:ln>
+        </p:spPr>
+        <p:style>
+          <a:lnRef idx="1">
+            <a:schemeClr val="accent1"/>
+          </a:lnRef>
+          <a:fillRef idx="3">
+            <a:schemeClr val="accent1"/>
+          </a:fillRef>
+          <a:effectRef idx="2">
+            <a:schemeClr val="accent1"/>
+          </a:effectRef>
+          <a:fontRef idx="minor">
+            <a:schemeClr val="lt1"/>
+          </a:fontRef>
+        </p:style>
+        <p:txBody>
+          <a:bodyPr rtlCol="0" anchor="ctr"/>
+          <a:lstStyle/>
+          <a:p>
+            <a:pPr algn="ctr">
+              <a:defRPr>
+                <a:latin typeface="Inter"/>
+              </a:defRPr>
+            </a:pPr>
+          </a:p>
+        </p:txBody>
+      </p:sp>
+      <p:sp>
+        <p:nvSpPr>
+          <p:cNvPr id="5" name="Rectangle 4"/>
+          <p:cNvSpPr/>
+          <p:nvPr/>
+        </p:nvSpPr>
+        <p:spPr>
+          <a:xfrm>
+            <a:off x="11018520" y="502920"/>
+            <a:ext cx="530352" cy="393192"/>
+          </a:xfrm>
+          <a:prstGeom prst="rect">
+            <a:avLst/>
+          </a:prstGeom>
+          <a:solidFill>
+            <a:srgbClr val="9AA5B1"/>
+          </a:solidFill>
+          <a:ln>
+            <a:solidFill>
+              <a:srgbClr val="9AA5B1"/>
+            </a:solidFill>
+          </a:ln>
+        </p:spPr>
+        <p:style>
+          <a:lnRef idx="1">
+            <a:schemeClr val="accent1"/>
+          </a:lnRef>
+          <a:fillRef idx="3">
+            <a:schemeClr val="accent1"/>
+          </a:fillRef>
+          <a:effectRef idx="2">
+            <a:schemeClr val="accent1"/>
+          </a:effectRef>
+          <a:fontRef idx="minor">
+            <a:schemeClr val="lt1"/>
+          </a:fontRef>
+        </p:style>
+        <p:txBody>
+          <a:bodyPr rtlCol="0" anchor="ctr"/>
+          <a:lstStyle/>
+          <a:p>
+            <a:pPr algn="ctr">
+              <a:defRPr>
+                <a:latin typeface="Inter"/>
+              </a:defRPr>
+            </a:pPr>
+          </a:p>
+        </p:txBody>
+      </p:sp>
+      <p:sp>
+        <p:nvSpPr>
+          <p:cNvPr id="6" name="TextBox 5"/>
+          <p:cNvSpPr txBox="1"/>
+          <p:nvPr/>
+        </p:nvSpPr>
+        <p:spPr>
+          <a:xfrm>
+            <a:off x="11045952" y="557784"/>
+            <a:ext cx="475488" cy="182880"/>
+          </a:xfrm>
+          <a:prstGeom prst="rect">
+            <a:avLst/>
+          </a:prstGeom>
+          <a:noFill/>
+        </p:spPr>
+        <p:txBody>
+          <a:bodyPr wrap="none" lIns="9144" rIns="9144" tIns="9144" bIns="9144" anchor="t">
+            <a:spAutoFit/>
+          </a:bodyPr>
+          <a:lstStyle/>
+          <a:p>
+            <a:pPr algn="ctr">
+              <a:spcAft>
+                <a:spcPts val="0"/>
+              </a:spcAft>
+              <a:defRPr sz="1000" b="1">
+                <a:solidFill>
+                  <a:srgbClr val="0D1117"/>
+                </a:solidFill>
+                <a:latin typeface="Inter"/>
+              </a:defRPr>
+            </a:pPr>
+            <a:r>
+              <a:rPr>
+                <a:latin typeface="Inter"/>
+              </a:rPr>
+              <a:t>B</a:t>
+            </a:r>
+          </a:p>
+        </p:txBody>
+      </p:sp>
+      <p:sp>
+        <p:nvSpPr>
+          <p:cNvPr id="7" name="TextBox 6"/>
+          <p:cNvSpPr txBox="1"/>
+          <p:nvPr/>
+        </p:nvSpPr>
+        <p:spPr>
+          <a:xfrm>
+            <a:off x="640080" y="1325880"/>
+            <a:ext cx="10908792" cy="201168"/>
+          </a:xfrm>
+          <a:prstGeom prst="rect">
+            <a:avLst/>
+          </a:prstGeom>
+          <a:noFill/>
+        </p:spPr>
+        <p:txBody>
+          <a:bodyPr wrap="none" lIns="9144" rIns="9144" tIns="9144" bIns="9144" anchor="t">
+            <a:spAutoFit/>
+          </a:bodyPr>
+          <a:lstStyle/>
+          <a:p>
+            <a:pPr algn="l">
+              <a:spcAft>
+                <a:spcPts val="0"/>
+              </a:spcAft>
+              <a:defRPr sz="720" b="1">
+                <a:solidFill>
+                  <a:srgbClr val="4A5563"/>
+                </a:solidFill>
+                <a:latin typeface="Inter"/>
+              </a:defRPr>
+            </a:pPr>
+            <a:r>
+              <a:rPr>
+                <a:latin typeface="Inter"/>
+              </a:rPr>
               <a:t>SERVER METRIC METHODS</a:t>
             </a:r>
           </a:p>
@@ -32653,7 +31826,7 @@
       </p:sp>
       <p:graphicFrame>
         <p:nvGraphicFramePr>
-          <p:cNvPr id="9" name="Table 8"/>
+          <p:cNvPr id="8" name="Table 7"/>
           <p:cNvGraphicFramePr>
             <a:graphicFrameLocks noGrp="1"/>
           </p:cNvGraphicFramePr>
@@ -33230,7 +32403,7 @@
       </p:graphicFrame>
       <p:sp>
         <p:nvSpPr>
-          <p:cNvPr id="10" name="TextBox 9"/>
+          <p:cNvPr id="9" name="TextBox 8"/>
           <p:cNvSpPr txBox="1"/>
           <p:nvPr/>
         </p:nvSpPr>
@@ -33348,7 +32521,7 @@
       </p:sp>
       <p:sp>
         <p:nvSpPr>
-          <p:cNvPr id="11" name="Rectangle 10"/>
+          <p:cNvPr id="10" name="Rectangle 9"/>
           <p:cNvSpPr/>
           <p:nvPr/>
         </p:nvSpPr>
@@ -33397,7 +32570,7 @@
       </p:sp>
       <p:sp>
         <p:nvSpPr>
-          <p:cNvPr id="12" name="TextBox 11"/>
+          <p:cNvPr id="11" name="TextBox 10"/>
           <p:cNvSpPr txBox="1"/>
           <p:nvPr/>
         </p:nvSpPr>
@@ -33439,7 +32612,7 @@
       </p:sp>
       <p:sp>
         <p:nvSpPr>
-          <p:cNvPr id="13" name="TextBox 12"/>
+          <p:cNvPr id="12" name="TextBox 11"/>
           <p:cNvSpPr txBox="1"/>
           <p:nvPr/>
         </p:nvSpPr>
@@ -33481,7 +32654,7 @@
       </p:sp>
       <p:sp>
         <p:nvSpPr>
-          <p:cNvPr id="14" name="TextBox 13"/>
+          <p:cNvPr id="13" name="TextBox 12"/>
           <p:cNvSpPr txBox="1"/>
           <p:nvPr/>
         </p:nvSpPr>
@@ -33516,7 +32689,7 @@
               <a:rPr>
                 <a:latin typeface="Inter"/>
               </a:rPr>
-              <a:t>31</a:t>
+              <a:t>32</a:t>
             </a:r>
           </a:p>
         </p:txBody>
@@ -33596,48 +32769,6 @@
         </p:nvSpPr>
         <p:spPr>
           <a:xfrm>
-            <a:off x="5897880" y="310896"/>
-            <a:ext cx="4800600" cy="256032"/>
-          </a:xfrm>
-          <a:prstGeom prst="rect">
-            <a:avLst/>
-          </a:prstGeom>
-          <a:noFill/>
-        </p:spPr>
-        <p:txBody>
-          <a:bodyPr wrap="none" lIns="9144" rIns="9144" tIns="9144" bIns="9144" anchor="t">
-            <a:spAutoFit/>
-          </a:bodyPr>
-          <a:lstStyle/>
-          <a:p>
-            <a:pPr algn="r">
-              <a:spcAft>
-                <a:spcPts val="0"/>
-              </a:spcAft>
-              <a:defRPr sz="680" b="1">
-                <a:solidFill>
-                  <a:srgbClr val="4F6B00"/>
-                </a:solidFill>
-                <a:latin typeface="Inter"/>
-              </a:defRPr>
-            </a:pPr>
-            <a:r>
-              <a:rPr>
-                <a:latin typeface="Inter"/>
-              </a:rPr>
-              <a:t>Illustrative, Gradient Maintained — demo data, not the client's holdings or managers</a:t>
-            </a:r>
-          </a:p>
-        </p:txBody>
-      </p:sp>
-      <p:sp>
-        <p:nvSpPr>
-          <p:cNvPr id="4" name="TextBox 3"/>
-          <p:cNvSpPr txBox="1"/>
-          <p:nvPr/>
-        </p:nvSpPr>
-        <p:spPr>
-          <a:xfrm>
             <a:off x="640080" y="566928"/>
             <a:ext cx="10058400" cy="530352"/>
           </a:xfrm>
@@ -33674,7 +32805,7 @@
       </p:sp>
       <p:sp>
         <p:nvSpPr>
-          <p:cNvPr id="5" name="Rectangle 4"/>
+          <p:cNvPr id="4" name="Rectangle 3"/>
           <p:cNvSpPr/>
           <p:nvPr/>
         </p:nvSpPr>
@@ -33723,7 +32854,7 @@
       </p:sp>
       <p:sp>
         <p:nvSpPr>
-          <p:cNvPr id="6" name="Rectangle 5"/>
+          <p:cNvPr id="5" name="Rectangle 4"/>
           <p:cNvSpPr/>
           <p:nvPr/>
         </p:nvSpPr>
@@ -33772,7 +32903,7 @@
       </p:sp>
       <p:sp>
         <p:nvSpPr>
-          <p:cNvPr id="7" name="TextBox 6"/>
+          <p:cNvPr id="6" name="TextBox 5"/>
           <p:cNvSpPr txBox="1"/>
           <p:nvPr/>
         </p:nvSpPr>
@@ -33814,14 +32945,14 @@
       </p:sp>
       <p:sp>
         <p:nvSpPr>
-          <p:cNvPr id="8" name="Rectangle 7"/>
+          <p:cNvPr id="7" name="Rectangle 6"/>
           <p:cNvSpPr/>
           <p:nvPr/>
         </p:nvSpPr>
         <p:spPr>
           <a:xfrm>
             <a:off x="640080" y="1325880"/>
-            <a:ext cx="10908792" cy="2415807"/>
+            <a:ext cx="10908792" cy="2337095"/>
           </a:xfrm>
           <a:prstGeom prst="rect">
             <a:avLst/>
@@ -33863,14 +32994,14 @@
       </p:sp>
       <p:sp>
         <p:nvSpPr>
-          <p:cNvPr id="9" name="Rectangle 8"/>
+          <p:cNvPr id="8" name="Rectangle 7"/>
           <p:cNvSpPr/>
           <p:nvPr/>
         </p:nvSpPr>
         <p:spPr>
           <a:xfrm>
             <a:off x="640080" y="1325880"/>
-            <a:ext cx="54864" cy="2415807"/>
+            <a:ext cx="54864" cy="2337095"/>
           </a:xfrm>
           <a:prstGeom prst="rect">
             <a:avLst/>
@@ -33912,7 +33043,7 @@
       </p:sp>
       <p:sp>
         <p:nvSpPr>
-          <p:cNvPr id="10" name="TextBox 9"/>
+          <p:cNvPr id="9" name="TextBox 8"/>
           <p:cNvSpPr txBox="1"/>
           <p:nvPr/>
         </p:nvSpPr>
@@ -33947,21 +33078,21 @@
               <a:rPr>
                 <a:latin typeface="Inter"/>
               </a:rPr>
-              <a:t>Key judgment — primary measure</a:t>
+              <a:t>Key judgment — Sleeve size</a:t>
             </a:r>
           </a:p>
         </p:txBody>
       </p:sp>
       <p:sp>
         <p:nvSpPr>
-          <p:cNvPr id="11" name="TextBox 10"/>
+          <p:cNvPr id="10" name="TextBox 9"/>
           <p:cNvSpPr txBox="1"/>
           <p:nvPr/>
         </p:nvSpPr>
         <p:spPr>
           <a:xfrm>
             <a:off x="804671" y="1719072"/>
-            <a:ext cx="10616184" cy="1931175"/>
+            <a:ext cx="10616184" cy="1852463"/>
           </a:xfrm>
           <a:prstGeom prst="rect">
             <a:avLst/>
@@ -33989,21 +33120,21 @@
               <a:rPr>
                 <a:latin typeface="Inter"/>
               </a:rPr>
-              <a:t>Observation: Marketable-alternatives weight is 12.0% in the review evidence [S2]. Why it matters: This measure establishes the baseline for comparing later governed results. Uncertainty: The source basis may omit newer observations outside the reviewed evidence. What would change the view: A refreshed source report showing a change above 1%.</a:t>
+              <a:t>Observation: Marketable alternatives are 12.0% of total NAV [S2]. Why it matters: The 2.0pp strategy shift stays within this allocation. Uncertainty: Hedge fund values are reported with a lag. What would change the view: A revised valuation that moves the weight outside its range.</a:t>
             </a:r>
           </a:p>
         </p:txBody>
       </p:sp>
       <p:sp>
         <p:nvSpPr>
-          <p:cNvPr id="12" name="Rectangle 11"/>
+          <p:cNvPr id="11" name="Rectangle 10"/>
           <p:cNvSpPr/>
           <p:nvPr/>
         </p:nvSpPr>
         <p:spPr>
           <a:xfrm>
-            <a:off x="640080" y="3851415"/>
-            <a:ext cx="10908792" cy="2366504"/>
+            <a:off x="640080" y="3772703"/>
+            <a:ext cx="10908792" cy="2445216"/>
           </a:xfrm>
           <a:prstGeom prst="rect">
             <a:avLst/>
@@ -34045,14 +33176,14 @@
       </p:sp>
       <p:sp>
         <p:nvSpPr>
-          <p:cNvPr id="13" name="Rectangle 12"/>
+          <p:cNvPr id="12" name="Rectangle 11"/>
           <p:cNvSpPr/>
           <p:nvPr/>
         </p:nvSpPr>
         <p:spPr>
           <a:xfrm>
-            <a:off x="640080" y="3851415"/>
-            <a:ext cx="54864" cy="2366504"/>
+            <a:off x="640080" y="3772703"/>
+            <a:ext cx="54864" cy="2445216"/>
           </a:xfrm>
           <a:prstGeom prst="rect">
             <a:avLst/>
@@ -34094,13 +33225,13 @@
       </p:sp>
       <p:sp>
         <p:nvSpPr>
-          <p:cNvPr id="14" name="TextBox 13"/>
+          <p:cNvPr id="13" name="TextBox 12"/>
           <p:cNvSpPr txBox="1"/>
           <p:nvPr/>
         </p:nvSpPr>
         <p:spPr>
           <a:xfrm>
-            <a:off x="804671" y="3961143"/>
+            <a:off x="804671" y="3882431"/>
             <a:ext cx="10616184" cy="228600"/>
           </a:xfrm>
           <a:prstGeom prst="rect">
@@ -34129,21 +33260,21 @@
               <a:rPr>
                 <a:latin typeface="Inter"/>
               </a:rPr>
-              <a:t>Key judgment — monitoring priority</a:t>
+              <a:t>Key judgment — Liquidity</a:t>
             </a:r>
           </a:p>
         </p:txBody>
       </p:sp>
       <p:sp>
         <p:nvSpPr>
-          <p:cNvPr id="15" name="TextBox 14"/>
+          <p:cNvPr id="14" name="TextBox 13"/>
           <p:cNvSpPr txBox="1"/>
           <p:nvPr/>
         </p:nvSpPr>
         <p:spPr>
           <a:xfrm>
-            <a:off x="804671" y="4244607"/>
-            <a:ext cx="10616184" cy="1881872"/>
+            <a:off x="804671" y="4165895"/>
+            <a:ext cx="10616184" cy="1960584"/>
           </a:xfrm>
           <a:prstGeom prst="rect">
             <a:avLst/>
@@ -34171,14 +33302,14 @@
               <a:rPr>
                 <a:latin typeface="Inter"/>
               </a:rPr>
-              <a:t>Observation: Liquid share is 8.0% in the review evidence [S3]. Why it matters: This result determines which item receives priority in the next monitoring cycle. Uncertainty: Supporting coverage may omit later filings or corroborating detail. What would change the view: A new filing or report that resolves the item or changes it by 1%.</a:t>
+              <a:t>Observation: Only 8.0% of the sleeve is liquid within the policy window [S3]. Why it matters: Redemption terms, not returns, constrain how fast the shift can happen. Uncertainty: Gates can be applied at the manager's discretion. What would change the view: A manager applying or lifting a gate.</a:t>
             </a:r>
           </a:p>
         </p:txBody>
       </p:sp>
       <p:sp>
         <p:nvSpPr>
-          <p:cNvPr id="16" name="Rectangle 15"/>
+          <p:cNvPr id="15" name="Rectangle 14"/>
           <p:cNvSpPr/>
           <p:nvPr/>
         </p:nvSpPr>
@@ -34227,7 +33358,7 @@
       </p:sp>
       <p:sp>
         <p:nvSpPr>
-          <p:cNvPr id="17" name="TextBox 16"/>
+          <p:cNvPr id="16" name="TextBox 15"/>
           <p:cNvSpPr txBox="1"/>
           <p:nvPr/>
         </p:nvSpPr>
@@ -34269,7 +33400,7 @@
       </p:sp>
       <p:sp>
         <p:nvSpPr>
-          <p:cNvPr id="18" name="TextBox 17"/>
+          <p:cNvPr id="17" name="TextBox 16"/>
           <p:cNvSpPr txBox="1"/>
           <p:nvPr/>
         </p:nvSpPr>
@@ -34311,7 +33442,7 @@
       </p:sp>
       <p:sp>
         <p:nvSpPr>
-          <p:cNvPr id="19" name="TextBox 18"/>
+          <p:cNvPr id="18" name="TextBox 17"/>
           <p:cNvSpPr txBox="1"/>
           <p:nvPr/>
         </p:nvSpPr>
@@ -34426,48 +33557,6 @@
         </p:nvSpPr>
         <p:spPr>
           <a:xfrm>
-            <a:off x="5897880" y="310896"/>
-            <a:ext cx="4800600" cy="256032"/>
-          </a:xfrm>
-          <a:prstGeom prst="rect">
-            <a:avLst/>
-          </a:prstGeom>
-          <a:noFill/>
-        </p:spPr>
-        <p:txBody>
-          <a:bodyPr wrap="none" lIns="9144" rIns="9144" tIns="9144" bIns="9144" anchor="t">
-            <a:spAutoFit/>
-          </a:bodyPr>
-          <a:lstStyle/>
-          <a:p>
-            <a:pPr algn="r">
-              <a:spcAft>
-                <a:spcPts val="0"/>
-              </a:spcAft>
-              <a:defRPr sz="680" b="1">
-                <a:solidFill>
-                  <a:srgbClr val="4F6B00"/>
-                </a:solidFill>
-                <a:latin typeface="Inter"/>
-              </a:defRPr>
-            </a:pPr>
-            <a:r>
-              <a:rPr>
-                <a:latin typeface="Inter"/>
-              </a:rPr>
-              <a:t>Illustrative, Gradient Maintained — demo data, not the client's holdings or managers</a:t>
-            </a:r>
-          </a:p>
-        </p:txBody>
-      </p:sp>
-      <p:sp>
-        <p:nvSpPr>
-          <p:cNvPr id="4" name="TextBox 3"/>
-          <p:cNvSpPr txBox="1"/>
-          <p:nvPr/>
-        </p:nvSpPr>
-        <p:spPr>
-          <a:xfrm>
             <a:off x="640080" y="566928"/>
             <a:ext cx="10058400" cy="530352"/>
           </a:xfrm>
@@ -34504,7 +33593,7 @@
       </p:sp>
       <p:sp>
         <p:nvSpPr>
-          <p:cNvPr id="5" name="Rectangle 4"/>
+          <p:cNvPr id="4" name="Rectangle 3"/>
           <p:cNvSpPr/>
           <p:nvPr/>
         </p:nvSpPr>
@@ -34553,7 +33642,7 @@
       </p:sp>
       <p:sp>
         <p:nvSpPr>
-          <p:cNvPr id="6" name="Rectangle 5"/>
+          <p:cNvPr id="5" name="Rectangle 4"/>
           <p:cNvSpPr/>
           <p:nvPr/>
         </p:nvSpPr>
@@ -34602,7 +33691,7 @@
       </p:sp>
       <p:sp>
         <p:nvSpPr>
-          <p:cNvPr id="7" name="TextBox 6"/>
+          <p:cNvPr id="6" name="TextBox 5"/>
           <p:cNvSpPr txBox="1"/>
           <p:nvPr/>
         </p:nvSpPr>
@@ -34644,7 +33733,7 @@
       </p:sp>
       <p:graphicFrame>
         <p:nvGraphicFramePr>
-          <p:cNvPr id="8" name="Table 7"/>
+          <p:cNvPr id="7" name="Table 6"/>
           <p:cNvGraphicFramePr>
             <a:graphicFrameLocks noGrp="1"/>
           </p:cNvGraphicFramePr>
@@ -35006,7 +34095,7 @@
       </p:graphicFrame>
       <p:sp>
         <p:nvSpPr>
-          <p:cNvPr id="9" name="TextBox 8"/>
+          <p:cNvPr id="8" name="TextBox 7"/>
           <p:cNvSpPr txBox="1"/>
           <p:nvPr/>
         </p:nvSpPr>
@@ -35048,7 +34137,7 @@
       </p:sp>
       <p:graphicFrame>
         <p:nvGraphicFramePr>
-          <p:cNvPr id="10" name="Table 9"/>
+          <p:cNvPr id="9" name="Table 8"/>
           <p:cNvGraphicFramePr>
             <a:graphicFrameLocks noGrp="1"/>
           </p:cNvGraphicFramePr>
@@ -35444,7 +34533,7 @@
                         <a:rPr>
                           <a:latin typeface="Inter"/>
                         </a:rPr>
-                        <a:t>● Watch</a:t>
+                        <a:t>● Near limit</a:t>
                       </a:r>
                     </a:p>
                   </a:txBody>
@@ -35625,7 +34714,7 @@
       </p:graphicFrame>
       <p:sp>
         <p:nvSpPr>
-          <p:cNvPr id="11" name="Rectangle 10"/>
+          <p:cNvPr id="10" name="Rectangle 9"/>
           <p:cNvSpPr/>
           <p:nvPr/>
         </p:nvSpPr>
@@ -35674,7 +34763,7 @@
       </p:sp>
       <p:sp>
         <p:nvSpPr>
-          <p:cNvPr id="12" name="TextBox 11"/>
+          <p:cNvPr id="11" name="TextBox 10"/>
           <p:cNvSpPr txBox="1"/>
           <p:nvPr/>
         </p:nvSpPr>
@@ -35716,7 +34805,7 @@
       </p:sp>
       <p:sp>
         <p:nvSpPr>
-          <p:cNvPr id="13" name="TextBox 12"/>
+          <p:cNvPr id="12" name="TextBox 11"/>
           <p:cNvSpPr txBox="1"/>
           <p:nvPr/>
         </p:nvSpPr>
@@ -35758,7 +34847,7 @@
       </p:sp>
       <p:sp>
         <p:nvSpPr>
-          <p:cNvPr id="14" name="TextBox 13"/>
+          <p:cNvPr id="13" name="TextBox 12"/>
           <p:cNvSpPr txBox="1"/>
           <p:nvPr/>
         </p:nvSpPr>
@@ -35873,48 +34962,6 @@
         </p:nvSpPr>
         <p:spPr>
           <a:xfrm>
-            <a:off x="5897880" y="310896"/>
-            <a:ext cx="4800600" cy="256032"/>
-          </a:xfrm>
-          <a:prstGeom prst="rect">
-            <a:avLst/>
-          </a:prstGeom>
-          <a:noFill/>
-        </p:spPr>
-        <p:txBody>
-          <a:bodyPr wrap="none" lIns="9144" rIns="9144" tIns="9144" bIns="9144" anchor="t">
-            <a:spAutoFit/>
-          </a:bodyPr>
-          <a:lstStyle/>
-          <a:p>
-            <a:pPr algn="r">
-              <a:spcAft>
-                <a:spcPts val="0"/>
-              </a:spcAft>
-              <a:defRPr sz="680" b="1">
-                <a:solidFill>
-                  <a:srgbClr val="4F6B00"/>
-                </a:solidFill>
-                <a:latin typeface="Inter"/>
-              </a:defRPr>
-            </a:pPr>
-            <a:r>
-              <a:rPr>
-                <a:latin typeface="Inter"/>
-              </a:rPr>
-              <a:t>Illustrative, Gradient Maintained — demo data, not the client's holdings or managers</a:t>
-            </a:r>
-          </a:p>
-        </p:txBody>
-      </p:sp>
-      <p:sp>
-        <p:nvSpPr>
-          <p:cNvPr id="4" name="TextBox 3"/>
-          <p:cNvSpPr txBox="1"/>
-          <p:nvPr/>
-        </p:nvSpPr>
-        <p:spPr>
-          <a:xfrm>
             <a:off x="640080" y="566928"/>
             <a:ext cx="10058400" cy="530352"/>
           </a:xfrm>
@@ -35951,7 +34998,7 @@
       </p:sp>
       <p:sp>
         <p:nvSpPr>
-          <p:cNvPr id="5" name="Rectangle 4"/>
+          <p:cNvPr id="4" name="Rectangle 3"/>
           <p:cNvSpPr/>
           <p:nvPr/>
         </p:nvSpPr>
@@ -36000,7 +35047,7 @@
       </p:sp>
       <p:sp>
         <p:nvSpPr>
-          <p:cNvPr id="6" name="Rectangle 5"/>
+          <p:cNvPr id="5" name="Rectangle 4"/>
           <p:cNvSpPr/>
           <p:nvPr/>
         </p:nvSpPr>
@@ -36049,7 +35096,7 @@
       </p:sp>
       <p:sp>
         <p:nvSpPr>
-          <p:cNvPr id="7" name="TextBox 6"/>
+          <p:cNvPr id="6" name="TextBox 5"/>
           <p:cNvSpPr txBox="1"/>
           <p:nvPr/>
         </p:nvSpPr>
@@ -36091,7 +35138,7 @@
       </p:sp>
       <p:sp>
         <p:nvSpPr>
-          <p:cNvPr id="8" name="TextBox 7"/>
+          <p:cNvPr id="7" name="TextBox 6"/>
           <p:cNvSpPr txBox="1"/>
           <p:nvPr/>
         </p:nvSpPr>
@@ -36133,7 +35180,7 @@
       </p:sp>
       <p:graphicFrame>
         <p:nvGraphicFramePr>
-          <p:cNvPr id="9" name="Chart 8"/>
+          <p:cNvPr id="8" name="Chart 7"/>
           <p:cNvGraphicFramePr>
             <a:graphicFrameLocks noGrp="1"/>
           </p:cNvGraphicFramePr>
@@ -36151,7 +35198,7 @@
       </p:graphicFrame>
       <p:sp>
         <p:nvSpPr>
-          <p:cNvPr id="10" name="Rectangle 9"/>
+          <p:cNvPr id="9" name="Rectangle 8"/>
           <p:cNvSpPr/>
           <p:nvPr/>
         </p:nvSpPr>
@@ -36200,7 +35247,7 @@
       </p:sp>
       <p:sp>
         <p:nvSpPr>
-          <p:cNvPr id="11" name="TextBox 10"/>
+          <p:cNvPr id="10" name="TextBox 9"/>
           <p:cNvSpPr txBox="1"/>
           <p:nvPr/>
         </p:nvSpPr>
@@ -36242,7 +35289,7 @@
       </p:sp>
       <p:sp>
         <p:nvSpPr>
-          <p:cNvPr id="12" name="TextBox 11"/>
+          <p:cNvPr id="11" name="TextBox 10"/>
           <p:cNvSpPr txBox="1"/>
           <p:nvPr/>
         </p:nvSpPr>
@@ -36284,7 +35331,7 @@
       </p:sp>
       <p:sp>
         <p:nvSpPr>
-          <p:cNvPr id="13" name="TextBox 12"/>
+          <p:cNvPr id="12" name="TextBox 11"/>
           <p:cNvSpPr txBox="1"/>
           <p:nvPr/>
         </p:nvSpPr>
@@ -36399,48 +35446,6 @@
         </p:nvSpPr>
         <p:spPr>
           <a:xfrm>
-            <a:off x="5897880" y="310896"/>
-            <a:ext cx="4800600" cy="256032"/>
-          </a:xfrm>
-          <a:prstGeom prst="rect">
-            <a:avLst/>
-          </a:prstGeom>
-          <a:noFill/>
-        </p:spPr>
-        <p:txBody>
-          <a:bodyPr wrap="none" lIns="9144" rIns="9144" tIns="9144" bIns="9144" anchor="t">
-            <a:spAutoFit/>
-          </a:bodyPr>
-          <a:lstStyle/>
-          <a:p>
-            <a:pPr algn="r">
-              <a:spcAft>
-                <a:spcPts val="0"/>
-              </a:spcAft>
-              <a:defRPr sz="680" b="1">
-                <a:solidFill>
-                  <a:srgbClr val="4F6B00"/>
-                </a:solidFill>
-                <a:latin typeface="Inter"/>
-              </a:defRPr>
-            </a:pPr>
-            <a:r>
-              <a:rPr>
-                <a:latin typeface="Inter"/>
-              </a:rPr>
-              <a:t>Illustrative, Gradient Maintained — demo data, not the client's holdings or managers</a:t>
-            </a:r>
-          </a:p>
-        </p:txBody>
-      </p:sp>
-      <p:sp>
-        <p:nvSpPr>
-          <p:cNvPr id="4" name="TextBox 3"/>
-          <p:cNvSpPr txBox="1"/>
-          <p:nvPr/>
-        </p:nvSpPr>
-        <p:spPr>
-          <a:xfrm>
             <a:off x="640080" y="566928"/>
             <a:ext cx="10058400" cy="530352"/>
           </a:xfrm>
@@ -36477,7 +35482,7 @@
       </p:sp>
       <p:sp>
         <p:nvSpPr>
-          <p:cNvPr id="5" name="Rectangle 4"/>
+          <p:cNvPr id="4" name="Rectangle 3"/>
           <p:cNvSpPr/>
           <p:nvPr/>
         </p:nvSpPr>
@@ -36526,7 +35531,7 @@
       </p:sp>
       <p:sp>
         <p:nvSpPr>
-          <p:cNvPr id="6" name="Rectangle 5"/>
+          <p:cNvPr id="5" name="Rectangle 4"/>
           <p:cNvSpPr/>
           <p:nvPr/>
         </p:nvSpPr>
@@ -36575,7 +35580,7 @@
       </p:sp>
       <p:sp>
         <p:nvSpPr>
-          <p:cNvPr id="7" name="TextBox 6"/>
+          <p:cNvPr id="6" name="TextBox 5"/>
           <p:cNvSpPr txBox="1"/>
           <p:nvPr/>
         </p:nvSpPr>
@@ -36617,7 +35622,7 @@
       </p:sp>
       <p:sp>
         <p:nvSpPr>
-          <p:cNvPr id="8" name="TextBox 7"/>
+          <p:cNvPr id="7" name="TextBox 6"/>
           <p:cNvSpPr txBox="1"/>
           <p:nvPr/>
         </p:nvSpPr>
@@ -36659,7 +35664,7 @@
       </p:sp>
       <p:graphicFrame>
         <p:nvGraphicFramePr>
-          <p:cNvPr id="9" name="Table 8"/>
+          <p:cNvPr id="8" name="Table 7"/>
           <p:cNvGraphicFramePr>
             <a:graphicFrameLocks noGrp="1"/>
           </p:cNvGraphicFramePr>
@@ -37509,7 +36514,7 @@
       </p:graphicFrame>
       <p:sp>
         <p:nvSpPr>
-          <p:cNvPr id="10" name="TextBox 9"/>
+          <p:cNvPr id="9" name="TextBox 8"/>
           <p:cNvSpPr txBox="1"/>
           <p:nvPr/>
         </p:nvSpPr>
@@ -37551,7 +36556,7 @@
       </p:sp>
       <p:sp>
         <p:nvSpPr>
-          <p:cNvPr id="11" name="Rectangle 10"/>
+          <p:cNvPr id="10" name="Rectangle 9"/>
           <p:cNvSpPr/>
           <p:nvPr/>
         </p:nvSpPr>
@@ -37600,7 +36605,7 @@
       </p:sp>
       <p:sp>
         <p:nvSpPr>
-          <p:cNvPr id="12" name="TextBox 11"/>
+          <p:cNvPr id="11" name="TextBox 10"/>
           <p:cNvSpPr txBox="1"/>
           <p:nvPr/>
         </p:nvSpPr>
@@ -37642,7 +36647,7 @@
       </p:sp>
       <p:sp>
         <p:nvSpPr>
-          <p:cNvPr id="13" name="TextBox 12"/>
+          <p:cNvPr id="12" name="TextBox 11"/>
           <p:cNvSpPr txBox="1"/>
           <p:nvPr/>
         </p:nvSpPr>
@@ -37684,7 +36689,7 @@
       </p:sp>
       <p:sp>
         <p:nvSpPr>
-          <p:cNvPr id="14" name="TextBox 13"/>
+          <p:cNvPr id="13" name="TextBox 12"/>
           <p:cNvSpPr txBox="1"/>
           <p:nvPr/>
         </p:nvSpPr>
@@ -37800,7 +36805,7 @@
         <p:spPr>
           <a:xfrm>
             <a:off x="640080" y="329184"/>
-            <a:ext cx="5303520" cy="182880"/>
+            <a:ext cx="9875520" cy="182880"/>
           </a:xfrm>
           <a:prstGeom prst="rect">
             <a:avLst/>
@@ -37841,48 +36846,6 @@
         </p:nvSpPr>
         <p:spPr>
           <a:xfrm>
-            <a:off x="5897880" y="310896"/>
-            <a:ext cx="4800600" cy="256032"/>
-          </a:xfrm>
-          <a:prstGeom prst="rect">
-            <a:avLst/>
-          </a:prstGeom>
-          <a:noFill/>
-        </p:spPr>
-        <p:txBody>
-          <a:bodyPr wrap="none" lIns="9144" rIns="9144" tIns="9144" bIns="9144" anchor="t">
-            <a:spAutoFit/>
-          </a:bodyPr>
-          <a:lstStyle/>
-          <a:p>
-            <a:pPr algn="r">
-              <a:spcAft>
-                <a:spcPts val="0"/>
-              </a:spcAft>
-              <a:defRPr sz="680" b="1">
-                <a:solidFill>
-                  <a:srgbClr val="4F6B00"/>
-                </a:solidFill>
-                <a:latin typeface="Inter"/>
-              </a:defRPr>
-            </a:pPr>
-            <a:r>
-              <a:rPr>
-                <a:latin typeface="Inter"/>
-              </a:rPr>
-              <a:t>Illustrative, Gradient Maintained — demo data, not the client's holdings or managers</a:t>
-            </a:r>
-          </a:p>
-        </p:txBody>
-      </p:sp>
-      <p:sp>
-        <p:nvSpPr>
-          <p:cNvPr id="5" name="TextBox 4"/>
-          <p:cNvSpPr txBox="1"/>
-          <p:nvPr/>
-        </p:nvSpPr>
-        <p:spPr>
-          <a:xfrm>
             <a:off x="640080" y="566928"/>
             <a:ext cx="10058400" cy="530352"/>
           </a:xfrm>
@@ -37919,7 +36882,7 @@
       </p:sp>
       <p:sp>
         <p:nvSpPr>
-          <p:cNvPr id="6" name="Rectangle 5"/>
+          <p:cNvPr id="5" name="Rectangle 4"/>
           <p:cNvSpPr/>
           <p:nvPr/>
         </p:nvSpPr>
@@ -37968,7 +36931,7 @@
       </p:sp>
       <p:sp>
         <p:nvSpPr>
-          <p:cNvPr id="7" name="Rectangle 6"/>
+          <p:cNvPr id="6" name="Rectangle 5"/>
           <p:cNvSpPr/>
           <p:nvPr/>
         </p:nvSpPr>
@@ -38017,7 +36980,7 @@
       </p:sp>
       <p:sp>
         <p:nvSpPr>
-          <p:cNvPr id="8" name="TextBox 7"/>
+          <p:cNvPr id="7" name="TextBox 6"/>
           <p:cNvSpPr txBox="1"/>
           <p:nvPr/>
         </p:nvSpPr>
@@ -38059,7 +37022,7 @@
       </p:sp>
       <p:sp>
         <p:nvSpPr>
-          <p:cNvPr id="9" name="TextBox 8"/>
+          <p:cNvPr id="8" name="TextBox 7"/>
           <p:cNvSpPr txBox="1"/>
           <p:nvPr/>
         </p:nvSpPr>
@@ -38101,7 +37064,7 @@
       </p:sp>
       <p:sp>
         <p:nvSpPr>
-          <p:cNvPr id="10" name="TextBox 9"/>
+          <p:cNvPr id="9" name="TextBox 8"/>
           <p:cNvSpPr txBox="1"/>
           <p:nvPr/>
         </p:nvSpPr>
@@ -38143,7 +37106,7 @@
       </p:sp>
       <p:sp>
         <p:nvSpPr>
-          <p:cNvPr id="11" name="Rectangle 10"/>
+          <p:cNvPr id="10" name="Rectangle 9"/>
           <p:cNvSpPr/>
           <p:nvPr/>
         </p:nvSpPr>
@@ -38192,7 +37155,7 @@
       </p:sp>
       <p:sp>
         <p:nvSpPr>
-          <p:cNvPr id="12" name="Oval 11"/>
+          <p:cNvPr id="11" name="Oval 10"/>
           <p:cNvSpPr/>
           <p:nvPr/>
         </p:nvSpPr>
@@ -38241,7 +37204,7 @@
       </p:sp>
       <p:sp>
         <p:nvSpPr>
-          <p:cNvPr id="13" name="Rectangle 12"/>
+          <p:cNvPr id="12" name="Rectangle 11"/>
           <p:cNvSpPr/>
           <p:nvPr/>
         </p:nvSpPr>
@@ -38290,7 +37253,7 @@
       </p:sp>
       <p:sp>
         <p:nvSpPr>
-          <p:cNvPr id="14" name="TextBox 13"/>
+          <p:cNvPr id="13" name="TextBox 12"/>
           <p:cNvSpPr txBox="1"/>
           <p:nvPr/>
         </p:nvSpPr>
@@ -38332,7 +37295,7 @@
       </p:sp>
       <p:sp>
         <p:nvSpPr>
-          <p:cNvPr id="15" name="Rectangle 14"/>
+          <p:cNvPr id="14" name="Rectangle 13"/>
           <p:cNvSpPr/>
           <p:nvPr/>
         </p:nvSpPr>
@@ -38381,7 +37344,7 @@
       </p:sp>
       <p:sp>
         <p:nvSpPr>
-          <p:cNvPr id="16" name="Oval 15"/>
+          <p:cNvPr id="15" name="Oval 14"/>
           <p:cNvSpPr/>
           <p:nvPr/>
         </p:nvSpPr>
@@ -38430,7 +37393,7 @@
       </p:sp>
       <p:sp>
         <p:nvSpPr>
-          <p:cNvPr id="17" name="Rectangle 16"/>
+          <p:cNvPr id="16" name="Rectangle 15"/>
           <p:cNvSpPr/>
           <p:nvPr/>
         </p:nvSpPr>
@@ -38479,7 +37442,7 @@
       </p:sp>
       <p:sp>
         <p:nvSpPr>
-          <p:cNvPr id="18" name="TextBox 17"/>
+          <p:cNvPr id="17" name="TextBox 16"/>
           <p:cNvSpPr txBox="1"/>
           <p:nvPr/>
         </p:nvSpPr>
@@ -38521,7 +37484,7 @@
       </p:sp>
       <p:sp>
         <p:nvSpPr>
-          <p:cNvPr id="19" name="Rectangle 18"/>
+          <p:cNvPr id="18" name="Rectangle 17"/>
           <p:cNvSpPr/>
           <p:nvPr/>
         </p:nvSpPr>
@@ -38570,7 +37533,7 @@
       </p:sp>
       <p:sp>
         <p:nvSpPr>
-          <p:cNvPr id="20" name="Oval 19"/>
+          <p:cNvPr id="19" name="Oval 18"/>
           <p:cNvSpPr/>
           <p:nvPr/>
         </p:nvSpPr>
@@ -38619,7 +37582,7 @@
       </p:sp>
       <p:sp>
         <p:nvSpPr>
-          <p:cNvPr id="21" name="Rectangle 20"/>
+          <p:cNvPr id="20" name="Rectangle 19"/>
           <p:cNvSpPr/>
           <p:nvPr/>
         </p:nvSpPr>
@@ -38668,7 +37631,7 @@
       </p:sp>
       <p:sp>
         <p:nvSpPr>
-          <p:cNvPr id="22" name="TextBox 21"/>
+          <p:cNvPr id="21" name="TextBox 20"/>
           <p:cNvSpPr txBox="1"/>
           <p:nvPr/>
         </p:nvSpPr>
@@ -38710,7 +37673,7 @@
       </p:sp>
       <p:sp>
         <p:nvSpPr>
-          <p:cNvPr id="23" name="Rectangle 22"/>
+          <p:cNvPr id="22" name="Rectangle 21"/>
           <p:cNvSpPr/>
           <p:nvPr/>
         </p:nvSpPr>
@@ -38759,7 +37722,7 @@
       </p:sp>
       <p:sp>
         <p:nvSpPr>
-          <p:cNvPr id="24" name="Oval 23"/>
+          <p:cNvPr id="23" name="Oval 22"/>
           <p:cNvSpPr/>
           <p:nvPr/>
         </p:nvSpPr>
@@ -38808,7 +37771,7 @@
       </p:sp>
       <p:sp>
         <p:nvSpPr>
-          <p:cNvPr id="25" name="Rectangle 24"/>
+          <p:cNvPr id="24" name="Rectangle 23"/>
           <p:cNvSpPr/>
           <p:nvPr/>
         </p:nvSpPr>
@@ -38857,7 +37820,7 @@
       </p:sp>
       <p:sp>
         <p:nvSpPr>
-          <p:cNvPr id="26" name="Rectangle 25"/>
+          <p:cNvPr id="25" name="Rectangle 24"/>
           <p:cNvSpPr/>
           <p:nvPr/>
         </p:nvSpPr>
@@ -38906,7 +37869,7 @@
       </p:sp>
       <p:sp>
         <p:nvSpPr>
-          <p:cNvPr id="27" name="TextBox 26"/>
+          <p:cNvPr id="26" name="TextBox 25"/>
           <p:cNvSpPr txBox="1"/>
           <p:nvPr/>
         </p:nvSpPr>
@@ -38948,7 +37911,7 @@
       </p:sp>
       <p:sp>
         <p:nvSpPr>
-          <p:cNvPr id="28" name="TextBox 27"/>
+          <p:cNvPr id="27" name="TextBox 26"/>
           <p:cNvSpPr txBox="1"/>
           <p:nvPr/>
         </p:nvSpPr>
@@ -38990,7 +37953,7 @@
       </p:sp>
       <p:sp>
         <p:nvSpPr>
-          <p:cNvPr id="29" name="TextBox 28"/>
+          <p:cNvPr id="28" name="TextBox 27"/>
           <p:cNvSpPr txBox="1"/>
           <p:nvPr/>
         </p:nvSpPr>
@@ -39106,7 +38069,7 @@
         <p:spPr>
           <a:xfrm>
             <a:off x="640080" y="329184"/>
-            <a:ext cx="5303520" cy="182880"/>
+            <a:ext cx="9875520" cy="182880"/>
           </a:xfrm>
           <a:prstGeom prst="rect">
             <a:avLst/>
@@ -39147,48 +38110,6 @@
         </p:nvSpPr>
         <p:spPr>
           <a:xfrm>
-            <a:off x="5897880" y="310896"/>
-            <a:ext cx="4800600" cy="256032"/>
-          </a:xfrm>
-          <a:prstGeom prst="rect">
-            <a:avLst/>
-          </a:prstGeom>
-          <a:noFill/>
-        </p:spPr>
-        <p:txBody>
-          <a:bodyPr wrap="none" lIns="9144" rIns="9144" tIns="9144" bIns="9144" anchor="t">
-            <a:spAutoFit/>
-          </a:bodyPr>
-          <a:lstStyle/>
-          <a:p>
-            <a:pPr algn="r">
-              <a:spcAft>
-                <a:spcPts val="0"/>
-              </a:spcAft>
-              <a:defRPr sz="680" b="1">
-                <a:solidFill>
-                  <a:srgbClr val="4F6B00"/>
-                </a:solidFill>
-                <a:latin typeface="Inter"/>
-              </a:defRPr>
-            </a:pPr>
-            <a:r>
-              <a:rPr>
-                <a:latin typeface="Inter"/>
-              </a:rPr>
-              <a:t>Illustrative, Gradient Maintained — demo data, not the client's holdings or managers</a:t>
-            </a:r>
-          </a:p>
-        </p:txBody>
-      </p:sp>
-      <p:sp>
-        <p:nvSpPr>
-          <p:cNvPr id="5" name="TextBox 4"/>
-          <p:cNvSpPr txBox="1"/>
-          <p:nvPr/>
-        </p:nvSpPr>
-        <p:spPr>
-          <a:xfrm>
             <a:off x="640080" y="566928"/>
             <a:ext cx="10058400" cy="530352"/>
           </a:xfrm>
@@ -39225,7 +38146,7 @@
       </p:sp>
       <p:sp>
         <p:nvSpPr>
-          <p:cNvPr id="6" name="Rectangle 5"/>
+          <p:cNvPr id="5" name="Rectangle 4"/>
           <p:cNvSpPr/>
           <p:nvPr/>
         </p:nvSpPr>
@@ -39274,7 +38195,7 @@
       </p:sp>
       <p:sp>
         <p:nvSpPr>
-          <p:cNvPr id="7" name="Rectangle 6"/>
+          <p:cNvPr id="6" name="Rectangle 5"/>
           <p:cNvSpPr/>
           <p:nvPr/>
         </p:nvSpPr>
@@ -39323,7 +38244,7 @@
       </p:sp>
       <p:sp>
         <p:nvSpPr>
-          <p:cNvPr id="8" name="TextBox 7"/>
+          <p:cNvPr id="7" name="TextBox 6"/>
           <p:cNvSpPr txBox="1"/>
           <p:nvPr/>
         </p:nvSpPr>
@@ -39365,7 +38286,7 @@
       </p:sp>
       <p:sp>
         <p:nvSpPr>
-          <p:cNvPr id="9" name="TextBox 8"/>
+          <p:cNvPr id="8" name="TextBox 7"/>
           <p:cNvSpPr txBox="1"/>
           <p:nvPr/>
         </p:nvSpPr>
@@ -39407,7 +38328,7 @@
       </p:sp>
       <p:graphicFrame>
         <p:nvGraphicFramePr>
-          <p:cNvPr id="10" name="Chart 9"/>
+          <p:cNvPr id="9" name="Chart 8"/>
           <p:cNvGraphicFramePr>
             <a:graphicFrameLocks noGrp="1"/>
           </p:cNvGraphicFramePr>
@@ -39425,7 +38346,7 @@
       </p:graphicFrame>
       <p:sp>
         <p:nvSpPr>
-          <p:cNvPr id="11" name="Rectangle 10"/>
+          <p:cNvPr id="10" name="Rectangle 9"/>
           <p:cNvSpPr/>
           <p:nvPr/>
         </p:nvSpPr>
@@ -39474,7 +38395,7 @@
       </p:sp>
       <p:sp>
         <p:nvSpPr>
-          <p:cNvPr id="12" name="TextBox 11"/>
+          <p:cNvPr id="11" name="TextBox 10"/>
           <p:cNvSpPr txBox="1"/>
           <p:nvPr/>
         </p:nvSpPr>
@@ -39516,7 +38437,7 @@
       </p:sp>
       <p:sp>
         <p:nvSpPr>
-          <p:cNvPr id="13" name="TextBox 12"/>
+          <p:cNvPr id="12" name="TextBox 11"/>
           <p:cNvSpPr txBox="1"/>
           <p:nvPr/>
         </p:nvSpPr>
@@ -39558,7 +38479,7 @@
       </p:sp>
       <p:sp>
         <p:nvSpPr>
-          <p:cNvPr id="14" name="TextBox 13"/>
+          <p:cNvPr id="13" name="TextBox 12"/>
           <p:cNvSpPr txBox="1"/>
           <p:nvPr/>
         </p:nvSpPr>

--- a/plugins/gradient-cio/assets/examples/gradient-portfolio-construction-marketable-alternatives.pptx
+++ b/plugins/gradient-cio/assets/examples/gradient-portfolio-construction-marketable-alternatives.pptx
@@ -31706,7 +31706,7 @@
                         <a:rPr>
                           <a:latin typeface="Inter"/>
                         </a:rPr>
-                        <a:t>get_cross_domain_research</a:t>
+                        <a:t>get_portfolio_exposure</a:t>
                       </a:r>
                     </a:p>
                   </a:txBody>
